--- a/HorizonU_Uniform_UniStock_SCM_Presentasi_Technospark.pptx
+++ b/HorizonU_Uniform_UniStock_SCM_Presentasi_Technospark.pptx
@@ -509,12 +509,12 @@
           <a:lstStyle/>
           <a:p>
             <a:r>
-              <a:t>NASKAH PRESENTASI SLIDE 1 (Target: 01:10 Menit):</a:t>
-            </a:r>
-          </a:p>
-          <a:p>
-            <a:r>
-              <a:t>"Selamat pagi/siang Yang Terhormat Bapak/Ibu Dosen Penguji dan Dewan Juri Technospark. Kami dari Tim Nirwana, beranggotakan Fhazar, Ferry, Hildan, Fadel, Daffa, dan Acep. Hari ini kami mempresentasikan analisis dan solusi sistem informasi rantai pasok terpadu bertajuk: HorizonU Uniform, dengan engine sistem bernama UniStock.</a:t>
+              <a:t>NASKAH BACA PRESENTER SLIDE 1 (Target Waktu: 01:10 Menit):</a:t>
+            </a:r>
+          </a:p>
+          <a:p>
+            <a:r>
+              <a:t>"Selamat pagi/siang Yang Terhormat Bapak/Ibu Dosen Penguji dan Dewan Juri Technospark. Kami dari Tim Nirwana, yang beranggotakan Fhazar, Ferry, Hildan, Fadel, Daffa, dan Acep. Hari ini kami mempresentasikan analisis dan solusi sistem informasi rantai pasok terpadu bertajuk: HorizonU Uniform, dengan engine sistem bernama UniStock.</a:t>
             </a:r>
           </a:p>
           <a:p/>
@@ -526,7 +526,7 @@
           <a:p/>
           <a:p>
             <a:r>
-              <a:t>Sebelum UniStock dibangun, pengelolaan dilakukan manual memakai spreadsheet Excel induk sebesar 4.5 Megabytes dengan belasan lembar kerja yang sering sekali mengalami lag dan crash. Di lapangan terjadi antrean panjang hingga 20 menit per mahasiswa, ketidakcocokan ukuran pakaian yang memicu penumpukan dead-stock, serta kerentanan klaim ganda. Mari kita lihat bagaimana rantai pasok ini bekerja."</a:t>
+              <a:t>Sebelum UniStock dibangun, pengelolaan dilakukan manual memakai spreadsheet Excel induk sebesar 4.5 Megabytes dengan belasan lembar kerja yang sering sekali mengalami lag dan crash. Di lapangan terjadi antrean panjang hingga 20 menit per mahasiswa, ketidakcocokan ukuran pakaian yang memicu penumpukan dead-stock, serta kerentanan klaim ganda. Mari kita lihat bagaimana rantai pasok ini bekerja." </a:t>
             </a:r>
           </a:p>
         </p:txBody>
@@ -596,7 +596,7 @@
           <a:lstStyle/>
           <a:p>
             <a:r>
-              <a:t>NASKAH PRESENTASI SLIDE 2 (Target: 01:15 Menit):</a:t>
+              <a:t>NASKAH BACA PRESENTER SLIDE 2 (Target Waktu: 01:15 Menit):</a:t>
             </a:r>
           </a:p>
           <a:p>
@@ -628,7 +628,7 @@
           <a:p/>
           <a:p>
             <a:r>
-              <a:t>Prinsip dasar yang kami tanamkan adalah: 'Data Mengunci Fisik'. Artinya, seragam fisik di meja loket pantang keluar sebelum sistem memindai QR Code mahasiswa dan memastikan hak kuota serta status pembayarannya sah."</a:t>
+              <a:t>Prinsip dasar yang kami tanamkan adalah: 'Data Mengunci Fisik'. Artinya, seragam fisik di meja loket pantang keluar sebelum sistem memindai QR Code mahasiswa dan memastikan hak kuota serta status pembayarannya sah." </a:t>
             </a:r>
           </a:p>
         </p:txBody>
@@ -698,7 +698,7 @@
           <a:lstStyle/>
           <a:p>
             <a:r>
-              <a:t>NASKAH PRESENTASI SLIDE 3 (Target: 01:30 Menit):</a:t>
+              <a:t>NASKAH BACA PRESENTER SLIDE 3 (Target Waktu: 01:30 Menit):</a:t>
             </a:r>
           </a:p>
           <a:p>
@@ -727,7 +727,7 @@
           <a:p/>
           <a:p>
             <a:r>
-              <a:t>Masalah Keempat: Penyusutan stok tanpa jejak audit karena pencampuran barang antar-pembelian tanpa kaidah FIFO, sehingga nilai HPP dan laba kotor tidak dapat dihitung akurat."</a:t>
+              <a:t>Masalah Keempat: Penyusutan stok tanpa jejak audit karena pencampuran barang antar-pembelian tanpa kaidah FIFO, sehingga nilai HPP dan laba kotor tidak dapat dihitung akurat." </a:t>
             </a:r>
           </a:p>
         </p:txBody>
@@ -797,7 +797,7 @@
           <a:lstStyle/>
           <a:p>
             <a:r>
-              <a:t>NASKAH PRESENTASI SLIDE 4 (Target: 01:15 Menit):</a:t>
+              <a:t>NASKAH BACA PRESENTER SLIDE 4 (Target Waktu: 01:15 Menit):</a:t>
             </a:r>
           </a:p>
           <a:p>
@@ -829,7 +829,7 @@
           <a:p/>
           <a:p>
             <a:r>
-              <a:t>Kesimpulannya, terjadi silo data dan keterlambatan informasi akut yang melumpuhkan efisiensi."</a:t>
+              <a:t>Kesimpulannya, terjadi silo data dan keterlambatan informasi akut yang melumpuhkan efisiensi." </a:t>
             </a:r>
           </a:p>
         </p:txBody>
@@ -899,7 +899,7 @@
           <a:lstStyle/>
           <a:p>
             <a:r>
-              <a:t>NASKAH PRESENTASI SLIDE 5 (Target: 01:30 Menit):</a:t>
+              <a:t>NASKAH BACA PRESENTER SLIDE 5 (Target Waktu: 01:30 Menit):</a:t>
             </a:r>
           </a:p>
           <a:p>
@@ -928,7 +928,7 @@
           <a:p/>
           <a:p>
             <a:r>
-              <a:t>4. WMS &amp; FIFO Inventory Costing Engine: Mengatur pemotongan mutasi dari batch pembelian tertua secara FIFO, rekonsiliasi stock opname fisik, serta perhitungan valuasi HPP dan margin laba secara presisi."</a:t>
+              <a:t>4. WMS &amp; FIFO Inventory Costing Engine: Mengatur pemotongan mutasi dari batch pembelian tertua secara FIFO, rekonsiliasi stock opname fisik, serta perhitungan valuasi HPP dan margin laba secara presisi." </a:t>
             </a:r>
           </a:p>
         </p:txBody>
@@ -998,7 +998,7 @@
           <a:lstStyle/>
           <a:p>
             <a:r>
-              <a:t>NASKAH PRESENTASI SLIDE 6 (Target: 01:25 Menit):</a:t>
+              <a:t>NASKAH BACA PRESENTER SLIDE 6 (Target Waktu: 01:25 Menit):</a:t>
             </a:r>
           </a:p>
           <a:p>
@@ -1033,7 +1033,7 @@
           <a:p/>
           <a:p>
             <a:r>
-              <a:t>Data sisa stok dan tren ukuran dari Fase 4 ini secara otomatis menjadi acuan belanja pengadaan Fase 1 pada semester berikutnya, menutup siklus rantai pasok secara sempurna."</a:t>
+              <a:t>Data sisa stok dan tren ukuran dari Fase 4 ini secara otomatis menjadi acuan belanja pengadaan Fase 1 pada semester berikutnya, menutup siklus rantai pasok secara sempurna." </a:t>
             </a:r>
           </a:p>
         </p:txBody>
@@ -1103,7 +1103,7 @@
           <a:lstStyle/>
           <a:p>
             <a:r>
-              <a:t>NASKAH PRESENTASI SLIDE 7 (Target: 01:15 Menit):</a:t>
+              <a:t>NASKAH BACA PRESENTER SLIDE 7 (Target Waktu: 01:15 Menit):</a:t>
             </a:r>
           </a:p>
           <a:p>
@@ -1135,7 +1135,7 @@
           </a:p>
           <a:p>
             <a:r>
-              <a:t>Ketiga, jika koneksi internet kampus fluktuatif, database diproteksi oleh pessimistic row locking agar tidak terjadi pengurangan stok ganda."</a:t>
+              <a:t>Ketiga, jika koneksi internet kampus fluktuatif, database diproteksi oleh pessimistic row locking agar tidak terjadi pengurangan stok ganda." </a:t>
             </a:r>
           </a:p>
         </p:txBody>
@@ -1205,7 +1205,7 @@
           <a:lstStyle/>
           <a:p>
             <a:r>
-              <a:t>NASKAH PRESENTASI SLIDE 8 (Target: 00:55 Menit):</a:t>
+              <a:t>NASKAH BACA PRESENTER SLIDE 8 (Target Waktu: 00:55 Menit):</a:t>
             </a:r>
           </a:p>
           <a:p>
@@ -1238,7 +1238,7 @@
           <a:p/>
           <a:p>
             <a:r>
-              <a:t>Sekian presentasi dari Tim Nirwana. Kami siap menerima pertanyaan dari Dewan Juri. Terima kasih."</a:t>
+              <a:t>Sekian presentasi dari Tim Nirwana. Kami siap menerima pertanyaan dari Dewan Juri. Terima kasih." </a:t>
             </a:r>
           </a:p>
         </p:txBody>
@@ -4240,7 +4240,7 @@
     <p:bg>
       <p:bgPr>
         <a:solidFill>
-          <a:srgbClr val="580B13"/>
+          <a:srgbClr val="FFFFFF"/>
         </a:solidFill>
         <a:effectLst/>
       </p:bgPr>
@@ -4254,189 +4254,20 @@
       <p:grpSpPr/>
       <p:sp>
         <p:nvSpPr>
-          <p:cNvPr id="2" name="Rounded Rectangle 1"/>
+          <p:cNvPr id="2" name="Rectangle 1"/>
           <p:cNvSpPr/>
           <p:nvPr/>
         </p:nvSpPr>
         <p:spPr>
           <a:xfrm>
-            <a:off x="548640" y="320040"/>
-            <a:ext cx="3291840" cy="320040"/>
-          </a:xfrm>
-          <a:prstGeom prst="roundRect">
-            <a:avLst/>
-          </a:prstGeom>
-          <a:solidFill>
-            <a:srgbClr val="FFD166"/>
-          </a:solidFill>
-          <a:ln>
-            <a:solidFill>
-              <a:srgbClr val="FFD166"/>
-            </a:solidFill>
-          </a:ln>
-        </p:spPr>
-        <p:style>
-          <a:lnRef idx="1">
-            <a:schemeClr val="accent1"/>
-          </a:lnRef>
-          <a:fillRef idx="3">
-            <a:schemeClr val="accent1"/>
-          </a:fillRef>
-          <a:effectRef idx="2">
-            <a:schemeClr val="accent1"/>
-          </a:effectRef>
-          <a:fontRef idx="minor">
-            <a:schemeClr val="lt1"/>
-          </a:fontRef>
-        </p:style>
-        <p:txBody>
-          <a:bodyPr rtlCol="0" anchor="ctr" wrap="square"/>
-          <a:lstStyle/>
-          <a:p>
-            <a:pPr algn="ctr">
-              <a:defRPr sz="1000" b="1">
-                <a:solidFill>
-                  <a:srgbClr val="580B13"/>
-                </a:solidFill>
-              </a:defRPr>
-            </a:pPr>
-            <a:r>
-              <a:t>SLIDE 1 • CASE INTRODUCTION</a:t>
-            </a:r>
-          </a:p>
-        </p:txBody>
-      </p:sp>
-      <p:sp>
-        <p:nvSpPr>
-          <p:cNvPr id="3" name="TextBox 2"/>
-          <p:cNvSpPr txBox="1"/>
-          <p:nvPr/>
-        </p:nvSpPr>
-        <p:spPr>
-          <a:xfrm>
-            <a:off x="548640" y="685800"/>
-            <a:ext cx="11064240" cy="438912"/>
-          </a:xfrm>
-          <a:prstGeom prst="rect">
-            <a:avLst/>
-          </a:prstGeom>
-          <a:noFill/>
-        </p:spPr>
-        <p:txBody>
-          <a:bodyPr wrap="square">
-            <a:spAutoFit/>
-          </a:bodyPr>
-          <a:lstStyle/>
-          <a:p>
-            <a:pPr>
-              <a:defRPr sz="1900" b="1">
-                <a:solidFill>
-                  <a:srgbClr val="FFFFFF"/>
-                </a:solidFill>
-              </a:defRPr>
-            </a:pPr>
-            <a:r>
-              <a:t>HORIZONU UNIFORM (UNISTOCK SCM) — TRANSFORMASI LOGISTIK KAMPUS</a:t>
-            </a:r>
-          </a:p>
-        </p:txBody>
-      </p:sp>
-      <p:sp>
-        <p:nvSpPr>
-          <p:cNvPr id="4" name="TextBox 3"/>
-          <p:cNvSpPr txBox="1"/>
-          <p:nvPr/>
-        </p:nvSpPr>
-        <p:spPr>
-          <a:xfrm>
-            <a:off x="548640" y="1115568"/>
-            <a:ext cx="11064240" cy="347472"/>
-          </a:xfrm>
-          <a:prstGeom prst="rect">
-            <a:avLst/>
-          </a:prstGeom>
-          <a:noFill/>
-        </p:spPr>
-        <p:txBody>
-          <a:bodyPr wrap="square">
-            <a:spAutoFit/>
-          </a:bodyPr>
-          <a:lstStyle/>
-          <a:p>
-            <a:pPr>
-              <a:defRPr sz="1150">
-                <a:solidFill>
-                  <a:srgbClr val="FFD166"/>
-                </a:solidFill>
-              </a:defRPr>
-            </a:pPr>
-            <a:r>
-              <a:t>Sistem Persediaan dan Distribusi Seragam Terpusat Berbasis Closed-Loop SCM pada Departemen Keuangan Universitas Horizon Indonesia</a:t>
-            </a:r>
-          </a:p>
-        </p:txBody>
-      </p:sp>
-      <p:sp>
-        <p:nvSpPr>
-          <p:cNvPr id="5" name="Rectangle 4"/>
-          <p:cNvSpPr/>
-          <p:nvPr/>
-        </p:nvSpPr>
-        <p:spPr>
-          <a:xfrm>
-            <a:off x="548640" y="1554480"/>
-            <a:ext cx="3474720" cy="4023360"/>
+            <a:off x="731520" y="365760"/>
+            <a:ext cx="73152" cy="777240"/>
           </a:xfrm>
           <a:prstGeom prst="rect">
             <a:avLst/>
           </a:prstGeom>
           <a:solidFill>
-            <a:srgbClr val="FFFFFF"/>
-          </a:solidFill>
-          <a:ln w="19050">
-            <a:solidFill>
-              <a:srgbClr val="6B0F1A"/>
-            </a:solidFill>
-          </a:ln>
-        </p:spPr>
-        <p:style>
-          <a:lnRef idx="1">
-            <a:schemeClr val="accent1"/>
-          </a:lnRef>
-          <a:fillRef idx="3">
-            <a:schemeClr val="accent1"/>
-          </a:fillRef>
-          <a:effectRef idx="2">
-            <a:schemeClr val="accent1"/>
-          </a:effectRef>
-          <a:fontRef idx="minor">
-            <a:schemeClr val="lt1"/>
-          </a:fontRef>
-        </p:style>
-        <p:txBody>
-          <a:bodyPr rtlCol="0" anchor="ctr"/>
-          <a:lstStyle/>
-          <a:p>
-            <a:pPr algn="ctr"/>
-          </a:p>
-        </p:txBody>
-      </p:sp>
-      <p:sp>
-        <p:nvSpPr>
-          <p:cNvPr id="6" name="Rectangle 5"/>
-          <p:cNvSpPr/>
-          <p:nvPr/>
-        </p:nvSpPr>
-        <p:spPr>
-          <a:xfrm>
-            <a:off x="548640" y="1554480"/>
-            <a:ext cx="3474720" cy="347472"/>
-          </a:xfrm>
-          <a:prstGeom prst="rect">
-            <a:avLst/>
-          </a:prstGeom>
-          <a:solidFill>
-            <a:srgbClr val="580B13"/>
+            <a:srgbClr val="980517"/>
           </a:solidFill>
           <a:ln>
             <a:noFill/>
@@ -4460,29 +4291,20 @@
           <a:bodyPr rtlCol="0" anchor="ctr"/>
           <a:lstStyle/>
           <a:p>
-            <a:pPr algn="ctr">
-              <a:defRPr sz="950" b="1">
-                <a:solidFill>
-                  <a:srgbClr val="FFD166"/>
-                </a:solidFill>
-              </a:defRPr>
-            </a:pPr>
-            <a:r>
-              <a:t>01 • PROFIL BISNIS &amp; INDUSTRI</a:t>
-            </a:r>
-          </a:p>
-        </p:txBody>
-      </p:sp>
-      <p:sp>
-        <p:nvSpPr>
-          <p:cNvPr id="7" name="TextBox 6"/>
+            <a:pPr algn="ctr"/>
+          </a:p>
+        </p:txBody>
+      </p:sp>
+      <p:sp>
+        <p:nvSpPr>
+          <p:cNvPr id="3" name="TextBox 2"/>
           <p:cNvSpPr txBox="1"/>
           <p:nvPr/>
         </p:nvSpPr>
         <p:spPr>
           <a:xfrm>
-            <a:off x="658368" y="1938528"/>
-            <a:ext cx="3255263" cy="3566160"/>
+            <a:off x="914400" y="320040"/>
+            <a:ext cx="10515600" cy="256032"/>
           </a:xfrm>
           <a:prstGeom prst="rect">
             <a:avLst/>
@@ -4496,96 +4318,107 @@
           <a:lstStyle/>
           <a:p>
             <a:pPr>
-              <a:defRPr sz="1250" b="1">
-                <a:solidFill>
-                  <a:srgbClr val="580B13"/>
-                </a:solidFill>
-              </a:defRPr>
-            </a:pPr>
-            <a:r>
-              <a:t>Logistik Pendidikan Kampus</a:t>
-            </a:r>
-          </a:p>
-          <a:p>
-            <a:pPr>
-              <a:defRPr sz="1050">
-                <a:solidFill>
-                  <a:srgbClr val="1E293B"/>
-                </a:solidFill>
-              </a:defRPr>
-            </a:pPr>
-            <a:r>
-              <a:t>Departemen Keuangan Universitas Horizon Indonesia mengelola pengadaan dan distribusi seragam, sepatu lab, dan medical kits mahasiswa baru.</a:t>
-            </a:r>
-            <a:br/>
-            <a:br/>
-            <a:r>
-              <a:t>Model bisnis: Direct Closed-Loop Campus Supply Chain.</a:t>
-            </a:r>
-          </a:p>
-        </p:txBody>
-      </p:sp>
-      <p:sp>
-        <p:nvSpPr>
-          <p:cNvPr id="8" name="Rectangle 7"/>
+              <a:defRPr sz="1000" b="1">
+                <a:solidFill>
+                  <a:srgbClr val="980517"/>
+                </a:solidFill>
+                <a:latin typeface="Arial"/>
+              </a:defRPr>
+            </a:pPr>
+            <a:r>
+              <a:t>SLIDE 1 • CASE INTRODUCTION   |   RUBRIK: SUPPLY CHAIN UNDERSTANDING (15%)</a:t>
+            </a:r>
+          </a:p>
+        </p:txBody>
+      </p:sp>
+      <p:sp>
+        <p:nvSpPr>
+          <p:cNvPr id="4" name="TextBox 3"/>
+          <p:cNvSpPr txBox="1"/>
+          <p:nvPr/>
+        </p:nvSpPr>
+        <p:spPr>
+          <a:xfrm>
+            <a:off x="914400" y="548640"/>
+            <a:ext cx="10515600" cy="411480"/>
+          </a:xfrm>
+          <a:prstGeom prst="rect">
+            <a:avLst/>
+          </a:prstGeom>
+          <a:noFill/>
+        </p:spPr>
+        <p:txBody>
+          <a:bodyPr wrap="square">
+            <a:spAutoFit/>
+          </a:bodyPr>
+          <a:lstStyle/>
+          <a:p>
+            <a:pPr>
+              <a:defRPr sz="2000" b="1">
+                <a:solidFill>
+                  <a:srgbClr val="0F172A"/>
+                </a:solidFill>
+                <a:latin typeface="Arial"/>
+              </a:defRPr>
+            </a:pPr>
+            <a:r>
+              <a:t>HORIZONU UNIFORM (UNISTOCK SCM) — TRANSFORMASI LOGISTIK KAMPUS</a:t>
+            </a:r>
+          </a:p>
+        </p:txBody>
+      </p:sp>
+      <p:sp>
+        <p:nvSpPr>
+          <p:cNvPr id="5" name="TextBox 4"/>
+          <p:cNvSpPr txBox="1"/>
+          <p:nvPr/>
+        </p:nvSpPr>
+        <p:spPr>
+          <a:xfrm>
+            <a:off x="914400" y="960120"/>
+            <a:ext cx="10515600" cy="274320"/>
+          </a:xfrm>
+          <a:prstGeom prst="rect">
+            <a:avLst/>
+          </a:prstGeom>
+          <a:noFill/>
+        </p:spPr>
+        <p:txBody>
+          <a:bodyPr wrap="square">
+            <a:spAutoFit/>
+          </a:bodyPr>
+          <a:lstStyle/>
+          <a:p>
+            <a:pPr>
+              <a:defRPr sz="1150">
+                <a:solidFill>
+                  <a:srgbClr val="475569"/>
+                </a:solidFill>
+                <a:latin typeface="Calibri"/>
+              </a:defRPr>
+            </a:pPr>
+            <a:r>
+              <a:t>Sistem Persediaan &amp; Distribusi Seragam Terpadu Berbasis Closed-Loop SCM pada Departemen Keuangan Universitas Horizon Indonesia</a:t>
+            </a:r>
+          </a:p>
+        </p:txBody>
+      </p:sp>
+      <p:sp>
+        <p:nvSpPr>
+          <p:cNvPr id="6" name="Rectangle 5"/>
           <p:cNvSpPr/>
           <p:nvPr/>
         </p:nvSpPr>
         <p:spPr>
           <a:xfrm>
-            <a:off x="4343400" y="1554480"/>
-            <a:ext cx="3474720" cy="4023360"/>
+            <a:off x="731520" y="1261872"/>
+            <a:ext cx="10728655" cy="13716"/>
           </a:xfrm>
           <a:prstGeom prst="rect">
             <a:avLst/>
           </a:prstGeom>
           <a:solidFill>
-            <a:srgbClr val="FFFFFF"/>
-          </a:solidFill>
-          <a:ln w="19050">
-            <a:solidFill>
-              <a:srgbClr val="6B0F1A"/>
-            </a:solidFill>
-          </a:ln>
-        </p:spPr>
-        <p:style>
-          <a:lnRef idx="1">
-            <a:schemeClr val="accent1"/>
-          </a:lnRef>
-          <a:fillRef idx="3">
-            <a:schemeClr val="accent1"/>
-          </a:fillRef>
-          <a:effectRef idx="2">
-            <a:schemeClr val="accent1"/>
-          </a:effectRef>
-          <a:fontRef idx="minor">
-            <a:schemeClr val="lt1"/>
-          </a:fontRef>
-        </p:style>
-        <p:txBody>
-          <a:bodyPr rtlCol="0" anchor="ctr"/>
-          <a:lstStyle/>
-          <a:p>
-            <a:pPr algn="ctr"/>
-          </a:p>
-        </p:txBody>
-      </p:sp>
-      <p:sp>
-        <p:nvSpPr>
-          <p:cNvPr id="9" name="Rectangle 8"/>
-          <p:cNvSpPr/>
-          <p:nvPr/>
-        </p:nvSpPr>
-        <p:spPr>
-          <a:xfrm>
-            <a:off x="4343400" y="1554480"/>
-            <a:ext cx="3474720" cy="347472"/>
-          </a:xfrm>
-          <a:prstGeom prst="rect">
-            <a:avLst/>
-          </a:prstGeom>
-          <a:solidFill>
-            <a:srgbClr val="580B13"/>
+            <a:srgbClr val="E2E8F0"/>
           </a:solidFill>
           <a:ln>
             <a:noFill/>
@@ -4609,91 +4442,30 @@
           <a:bodyPr rtlCol="0" anchor="ctr"/>
           <a:lstStyle/>
           <a:p>
-            <a:pPr algn="ctr">
-              <a:defRPr sz="950" b="1">
-                <a:solidFill>
-                  <a:srgbClr val="FFD166"/>
-                </a:solidFill>
-              </a:defRPr>
-            </a:pPr>
-            <a:r>
-              <a:t>02 • MASALAH UTAMA AS-IS</a:t>
-            </a:r>
-          </a:p>
-        </p:txBody>
-      </p:sp>
-      <p:sp>
-        <p:nvSpPr>
-          <p:cNvPr id="10" name="TextBox 9"/>
-          <p:cNvSpPr txBox="1"/>
+            <a:pPr algn="ctr"/>
+          </a:p>
+        </p:txBody>
+      </p:sp>
+      <p:sp>
+        <p:nvSpPr>
+          <p:cNvPr id="7" name="Rounded Rectangle 6"/>
+          <p:cNvSpPr/>
           <p:nvPr/>
         </p:nvSpPr>
         <p:spPr>
           <a:xfrm>
-            <a:off x="4453128" y="1938528"/>
-            <a:ext cx="3255263" cy="3566160"/>
+            <a:off x="731520" y="1417320"/>
+            <a:ext cx="3429000" cy="4297680"/>
           </a:xfrm>
-          <a:prstGeom prst="rect">
-            <a:avLst/>
-          </a:prstGeom>
-          <a:noFill/>
-        </p:spPr>
-        <p:txBody>
-          <a:bodyPr wrap="square">
-            <a:spAutoFit/>
-          </a:bodyPr>
-          <a:lstStyle/>
-          <a:p>
-            <a:pPr>
-              <a:defRPr sz="1250" b="1">
-                <a:solidFill>
-                  <a:srgbClr val="580B13"/>
-                </a:solidFill>
-              </a:defRPr>
-            </a:pPr>
-            <a:r>
-              <a:t>Spreadsheet Crash &amp; Antrean</a:t>
-            </a:r>
-          </a:p>
-          <a:p>
-            <a:pPr>
-              <a:defRPr sz="1050">
-                <a:solidFill>
-                  <a:srgbClr val="1E293B"/>
-                </a:solidFill>
-              </a:defRPr>
-            </a:pPr>
-            <a:r>
-              <a:t>File Excel induk 4.5 MB sering lag/crash saat ribuan mahasiswa mendaftar.</a:t>
-            </a:r>
-            <a:br/>
-            <a:br/>
-            <a:r>
-              <a:t>Terjadi antrean 15-20 menit/orang, size mismatch memicu dead-stock, dan rawan klaim ganda di loket.</a:t>
-            </a:r>
-          </a:p>
-        </p:txBody>
-      </p:sp>
-      <p:sp>
-        <p:nvSpPr>
-          <p:cNvPr id="11" name="Rectangle 10"/>
-          <p:cNvSpPr/>
-          <p:nvPr/>
-        </p:nvSpPr>
-        <p:spPr>
-          <a:xfrm>
-            <a:off x="8138160" y="1554480"/>
-            <a:ext cx="3474720" cy="4023360"/>
-          </a:xfrm>
-          <a:prstGeom prst="rect">
+          <a:prstGeom prst="roundRect">
             <a:avLst/>
           </a:prstGeom>
           <a:solidFill>
-            <a:srgbClr val="FFFFFF"/>
+            <a:srgbClr val="F8FAFC"/>
           </a:solidFill>
-          <a:ln w="19050">
+          <a:ln w="12700">
             <a:solidFill>
-              <a:srgbClr val="6B0F1A"/>
+              <a:srgbClr val="E2E8F0"/>
             </a:solidFill>
           </a:ln>
         </p:spPr>
@@ -4712,32 +4484,124 @@
           </a:fontRef>
         </p:style>
         <p:txBody>
-          <a:bodyPr rtlCol="0" anchor="ctr"/>
-          <a:lstStyle/>
-          <a:p>
-            <a:pPr algn="ctr"/>
-          </a:p>
-        </p:txBody>
-      </p:sp>
-      <p:sp>
-        <p:nvSpPr>
-          <p:cNvPr id="12" name="Rectangle 11"/>
+          <a:bodyPr rtlCol="0" anchor="t" wrap="square" lIns="182880" rIns="182880" tIns="164592" bIns="137160"/>
+          <a:lstStyle/>
+          <a:p>
+            <a:pPr algn="ctr">
+              <a:defRPr sz="950" b="1">
+                <a:solidFill>
+                  <a:srgbClr val="980517"/>
+                </a:solidFill>
+                <a:latin typeface="Arial"/>
+              </a:defRPr>
+            </a:pPr>
+            <a:r>
+              <a:t>01 • PROFIL BISNIS &amp; INDUSTRI</a:t>
+            </a:r>
+          </a:p>
+          <a:p>
+            <a:pPr>
+              <a:spcAft>
+                <a:spcPts val="600"/>
+              </a:spcAft>
+              <a:defRPr sz="1300" b="1">
+                <a:solidFill>
+                  <a:srgbClr val="0F172A"/>
+                </a:solidFill>
+                <a:latin typeface="Arial"/>
+              </a:defRPr>
+            </a:pPr>
+            <a:r>
+              <a:t>Logistik Perlengkapan Kampus</a:t>
+            </a:r>
+          </a:p>
+          <a:p>
+            <a:pPr>
+              <a:spcAft>
+                <a:spcPts val="400"/>
+              </a:spcAft>
+              <a:defRPr sz="1050">
+                <a:solidFill>
+                  <a:srgbClr val="0F172A"/>
+                </a:solidFill>
+                <a:latin typeface="Calibri"/>
+              </a:defRPr>
+            </a:pPr>
+            <a:r>
+              <a:t>•  Departemen Keuangan Universitas Horizon Indonesia mengelola pengadaan, akuntansi, dan pembagian paket seragam bagi ribuan mahasiswa baru.</a:t>
+            </a:r>
+          </a:p>
+          <a:p>
+            <a:pPr>
+              <a:spcAft>
+                <a:spcPts val="400"/>
+              </a:spcAft>
+              <a:defRPr sz="1050">
+                <a:solidFill>
+                  <a:srgbClr val="0F172A"/>
+                </a:solidFill>
+                <a:latin typeface="Calibri"/>
+              </a:defRPr>
+            </a:pPr>
+            <a:r>
+              <a:t>•  Komoditas: Jas Almamater, Kemeja Putih, Celana/Rok Bahan, Sepatu Lab &amp; Dinas, serta Medical Kit keperawatan/kebidanan.</a:t>
+            </a:r>
+          </a:p>
+          <a:p>
+            <a:pPr>
+              <a:spcAft>
+                <a:spcPts val="400"/>
+              </a:spcAft>
+              <a:defRPr sz="1050">
+                <a:solidFill>
+                  <a:srgbClr val="0F172A"/>
+                </a:solidFill>
+                <a:latin typeface="Calibri"/>
+              </a:defRPr>
+            </a:pPr>
+            <a:r>
+              <a:t>•  Karakteristik Operasional: Lonjakan penerimaan barang dari vendor garmen di awal tahun akademik.</a:t>
+            </a:r>
+          </a:p>
+          <a:p>
+            <a:pPr>
+              <a:spcBef>
+                <a:spcPts val="400"/>
+              </a:spcBef>
+              <a:defRPr sz="1000" b="1">
+                <a:solidFill>
+                  <a:srgbClr val="980517"/>
+                </a:solidFill>
+                <a:latin typeface="Calibri"/>
+              </a:defRPr>
+            </a:pPr>
+            <a:r>
+              <a:t>➔  Model Bisnis: Direct Closed-Loop Campus SCM</a:t>
+            </a:r>
+          </a:p>
+        </p:txBody>
+      </p:sp>
+      <p:sp>
+        <p:nvSpPr>
+          <p:cNvPr id="8" name="Rounded Rectangle 7"/>
           <p:cNvSpPr/>
           <p:nvPr/>
         </p:nvSpPr>
         <p:spPr>
           <a:xfrm>
-            <a:off x="8138160" y="1554480"/>
-            <a:ext cx="3474720" cy="347472"/>
+            <a:off x="4370832" y="1417320"/>
+            <a:ext cx="3429000" cy="4297680"/>
           </a:xfrm>
-          <a:prstGeom prst="rect">
+          <a:prstGeom prst="roundRect">
             <a:avLst/>
           </a:prstGeom>
           <a:solidFill>
-            <a:srgbClr val="580B13"/>
+            <a:srgbClr val="FEF2F2"/>
           </a:solidFill>
-          <a:ln>
-            <a:noFill/>
+          <a:ln w="19050">
+            <a:solidFill>
+              <a:srgbClr val="980517"/>
+            </a:solidFill>
           </a:ln>
         </p:spPr>
         <p:style>
@@ -4755,114 +4619,123 @@
           </a:fontRef>
         </p:style>
         <p:txBody>
-          <a:bodyPr rtlCol="0" anchor="ctr"/>
+          <a:bodyPr rtlCol="0" anchor="t" wrap="square" lIns="182880" rIns="182880" tIns="164592" bIns="137160"/>
           <a:lstStyle/>
           <a:p>
             <a:pPr algn="ctr">
               <a:defRPr sz="950" b="1">
                 <a:solidFill>
-                  <a:srgbClr val="FFD166"/>
-                </a:solidFill>
-              </a:defRPr>
-            </a:pPr>
-            <a:r>
-              <a:t>03 • NAMA PRESENTER (NIRWANA)</a:t>
-            </a:r>
-          </a:p>
-        </p:txBody>
-      </p:sp>
-      <p:sp>
-        <p:nvSpPr>
-          <p:cNvPr id="13" name="TextBox 12"/>
-          <p:cNvSpPr txBox="1"/>
+                  <a:srgbClr val="980517"/>
+                </a:solidFill>
+                <a:latin typeface="Arial"/>
+              </a:defRPr>
+            </a:pPr>
+            <a:r>
+              <a:t>02 • MASALAH UTAMA AS-IS</a:t>
+            </a:r>
+          </a:p>
+          <a:p>
+            <a:pPr>
+              <a:spcAft>
+                <a:spcPts val="600"/>
+              </a:spcAft>
+              <a:defRPr sz="1300" b="1">
+                <a:solidFill>
+                  <a:srgbClr val="0F172A"/>
+                </a:solidFill>
+                <a:latin typeface="Arial"/>
+              </a:defRPr>
+            </a:pPr>
+            <a:r>
+              <a:t>Kendala Spreadsheet &amp; Loket</a:t>
+            </a:r>
+          </a:p>
+          <a:p>
+            <a:pPr>
+              <a:spcAft>
+                <a:spcPts val="400"/>
+              </a:spcAft>
+              <a:defRPr sz="1050">
+                <a:solidFill>
+                  <a:srgbClr val="0F172A"/>
+                </a:solidFill>
+                <a:latin typeface="Calibri"/>
+              </a:defRPr>
+            </a:pPr>
+            <a:r>
+              <a:t>•  Spreadsheet Excel Induk raksasa (~4.5 MB, 19 lembar kerja) sering mengalami lag, tidak merespons, atau crash saat data membesar.</a:t>
+            </a:r>
+          </a:p>
+          <a:p>
+            <a:pPr>
+              <a:spcAft>
+                <a:spcPts val="400"/>
+              </a:spcAft>
+              <a:defRPr sz="1050">
+                <a:solidFill>
+                  <a:srgbClr val="0F172A"/>
+                </a:solidFill>
+                <a:latin typeface="Calibri"/>
+              </a:defRPr>
+            </a:pPr>
+            <a:r>
+              <a:t>•  Antrean pembagian di posko kampus sangat panjang (mencapai 15–20 menit per mahasiswa) akibat verifikasi berkas manual.</a:t>
+            </a:r>
+          </a:p>
+          <a:p>
+            <a:pPr>
+              <a:spcAft>
+                <a:spcPts val="400"/>
+              </a:spcAft>
+              <a:defRPr sz="1050">
+                <a:solidFill>
+                  <a:srgbClr val="0F172A"/>
+                </a:solidFill>
+                <a:latin typeface="Calibri"/>
+              </a:defRPr>
+            </a:pPr>
+            <a:r>
+              <a:t>•  Pemesanan seragam ke pabrik hanya berdasar tebakan historis tanpa profiling ukuran awal, memicu penumpukan dead-stock di gudang.</a:t>
+            </a:r>
+          </a:p>
+          <a:p>
+            <a:pPr>
+              <a:spcBef>
+                <a:spcPts val="400"/>
+              </a:spcBef>
+              <a:defRPr sz="1000" b="1">
+                <a:solidFill>
+                  <a:srgbClr val="980517"/>
+                </a:solidFill>
+                <a:latin typeface="Calibri"/>
+              </a:defRPr>
+            </a:pPr>
+            <a:r>
+              <a:t>➔  Dampak Finansial: Modal Mengendap &amp; Risiko Klaim Ganda</a:t>
+            </a:r>
+          </a:p>
+        </p:txBody>
+      </p:sp>
+      <p:sp>
+        <p:nvSpPr>
+          <p:cNvPr id="9" name="Rounded Rectangle 8"/>
+          <p:cNvSpPr/>
           <p:nvPr/>
         </p:nvSpPr>
         <p:spPr>
           <a:xfrm>
-            <a:off x="8247888" y="1938528"/>
-            <a:ext cx="3255263" cy="3566160"/>
+            <a:off x="8010144" y="1417320"/>
+            <a:ext cx="3429000" cy="4297680"/>
           </a:xfrm>
-          <a:prstGeom prst="rect">
-            <a:avLst/>
-          </a:prstGeom>
-          <a:noFill/>
-        </p:spPr>
-        <p:txBody>
-          <a:bodyPr wrap="square">
-            <a:spAutoFit/>
-          </a:bodyPr>
-          <a:lstStyle/>
-          <a:p>
-            <a:pPr>
-              <a:defRPr sz="1250" b="1">
-                <a:solidFill>
-                  <a:srgbClr val="580B13"/>
-                </a:solidFill>
-              </a:defRPr>
-            </a:pPr>
-            <a:r>
-              <a:t>Tim Analis &amp; Pengembang</a:t>
-            </a:r>
-          </a:p>
-          <a:p>
-            <a:pPr>
-              <a:defRPr sz="1050">
-                <a:solidFill>
-                  <a:srgbClr val="1E293B"/>
-                </a:solidFill>
-              </a:defRPr>
-            </a:pPr>
-            <a:r>
-              <a:t>• Fhazar Raffiful Aqyla (Project Manager)</a:t>
-            </a:r>
-            <a:br/>
-            <a:r>
-              <a:t>• Ferry Noer Hendriawan (Frontend)</a:t>
-            </a:r>
-            <a:br/>
-            <a:r>
-              <a:t>• Hildan Anugrah Tamadi Putra (Backend)</a:t>
-            </a:r>
-            <a:br/>
-            <a:r>
-              <a:t>• Fadel Rahmadhan (QA)</a:t>
-            </a:r>
-            <a:br/>
-            <a:r>
-              <a:t>• Daffa Nazriel Zaidan (UI/UX)</a:t>
-            </a:r>
-            <a:br/>
-            <a:r>
-              <a:t>• Acep Ugan Saputra (System Analyst)</a:t>
-            </a:r>
-            <a:br/>
-            <a:br/>
-            <a:r>
-              <a:t>Live URL: unistok.nirwana.biz.id</a:t>
-            </a:r>
-          </a:p>
-        </p:txBody>
-      </p:sp>
-      <p:sp>
-        <p:nvSpPr>
-          <p:cNvPr id="14" name="Rectangle 13"/>
-          <p:cNvSpPr/>
-          <p:nvPr/>
-        </p:nvSpPr>
-        <p:spPr>
-          <a:xfrm>
-            <a:off x="548640" y="5806440"/>
-            <a:ext cx="11064240" cy="685800"/>
-          </a:xfrm>
-          <a:prstGeom prst="rect">
+          <a:prstGeom prst="roundRect">
             <a:avLst/>
           </a:prstGeom>
           <a:solidFill>
-            <a:srgbClr val="580B13"/>
+            <a:srgbClr val="F8FAFC"/>
           </a:solidFill>
-          <a:ln w="19050">
+          <a:ln w="12700">
             <a:solidFill>
-              <a:srgbClr val="FFD166"/>
+              <a:srgbClr val="E2E8F0"/>
             </a:solidFill>
           </a:ln>
         </p:spPr>
@@ -4881,18 +4754,211 @@
           </a:fontRef>
         </p:style>
         <p:txBody>
-          <a:bodyPr rtlCol="0" anchor="ctr" wrap="square"/>
+          <a:bodyPr rtlCol="0" anchor="t" wrap="square" lIns="182880" rIns="182880" tIns="164592" bIns="137160"/>
           <a:lstStyle/>
           <a:p>
             <a:pPr algn="ctr">
-              <a:defRPr sz="1100" b="1">
-                <a:solidFill>
-                  <a:srgbClr val="FFFFFF"/>
-                </a:solidFill>
-              </a:defRPr>
-            </a:pPr>
-            <a:r>
-              <a:t>Misi Solusi UniStock: Menyatukan Hulu (Pabrik Vendor), Gudang Kampus, Keuangan, hingga Hilir (Mahasiswa) dalam satu arsitektur terintegrasi.</a:t>
+              <a:defRPr sz="950" b="1">
+                <a:solidFill>
+                  <a:srgbClr val="980517"/>
+                </a:solidFill>
+                <a:latin typeface="Arial"/>
+              </a:defRPr>
+            </a:pPr>
+            <a:r>
+              <a:t>03 • PRESENTER &amp; ANALIS</a:t>
+            </a:r>
+          </a:p>
+          <a:p>
+            <a:pPr>
+              <a:spcAft>
+                <a:spcPts val="600"/>
+              </a:spcAft>
+              <a:defRPr sz="1300" b="1">
+                <a:solidFill>
+                  <a:srgbClr val="0F172A"/>
+                </a:solidFill>
+                <a:latin typeface="Arial"/>
+              </a:defRPr>
+            </a:pPr>
+            <a:r>
+              <a:t>Tim Pengembang Nirwana</a:t>
+            </a:r>
+          </a:p>
+          <a:p>
+            <a:pPr>
+              <a:spcAft>
+                <a:spcPts val="400"/>
+              </a:spcAft>
+              <a:defRPr sz="1050">
+                <a:solidFill>
+                  <a:srgbClr val="0F172A"/>
+                </a:solidFill>
+                <a:latin typeface="Calibri"/>
+              </a:defRPr>
+            </a:pPr>
+            <a:r>
+              <a:t>•  Fhazar Raffiful Aqyla — Project Manager</a:t>
+            </a:r>
+          </a:p>
+          <a:p>
+            <a:pPr>
+              <a:spcAft>
+                <a:spcPts val="400"/>
+              </a:spcAft>
+              <a:defRPr sz="1050">
+                <a:solidFill>
+                  <a:srgbClr val="0F172A"/>
+                </a:solidFill>
+                <a:latin typeface="Calibri"/>
+              </a:defRPr>
+            </a:pPr>
+            <a:r>
+              <a:t>•  Ferry Noer Hendriawan — Frontend Engineer</a:t>
+            </a:r>
+          </a:p>
+          <a:p>
+            <a:pPr>
+              <a:spcAft>
+                <a:spcPts val="400"/>
+              </a:spcAft>
+              <a:defRPr sz="1050">
+                <a:solidFill>
+                  <a:srgbClr val="0F172A"/>
+                </a:solidFill>
+                <a:latin typeface="Calibri"/>
+              </a:defRPr>
+            </a:pPr>
+            <a:r>
+              <a:t>•  Hildan Anugrah Tamadi Putra — Backend Engineer</a:t>
+            </a:r>
+          </a:p>
+          <a:p>
+            <a:pPr>
+              <a:spcAft>
+                <a:spcPts val="400"/>
+              </a:spcAft>
+              <a:defRPr sz="1050">
+                <a:solidFill>
+                  <a:srgbClr val="0F172A"/>
+                </a:solidFill>
+                <a:latin typeface="Calibri"/>
+              </a:defRPr>
+            </a:pPr>
+            <a:r>
+              <a:t>•  Fadel Rahmadhan — Quality Assurance</a:t>
+            </a:r>
+          </a:p>
+          <a:p>
+            <a:pPr>
+              <a:spcAft>
+                <a:spcPts val="400"/>
+              </a:spcAft>
+              <a:defRPr sz="1050">
+                <a:solidFill>
+                  <a:srgbClr val="0F172A"/>
+                </a:solidFill>
+                <a:latin typeface="Calibri"/>
+              </a:defRPr>
+            </a:pPr>
+            <a:r>
+              <a:t>•  Daffa Nazriel Zaidan — UI/UX Designer</a:t>
+            </a:r>
+          </a:p>
+          <a:p>
+            <a:pPr>
+              <a:spcAft>
+                <a:spcPts val="400"/>
+              </a:spcAft>
+              <a:defRPr sz="1050">
+                <a:solidFill>
+                  <a:srgbClr val="0F172A"/>
+                </a:solidFill>
+                <a:latin typeface="Calibri"/>
+              </a:defRPr>
+            </a:pPr>
+            <a:r>
+              <a:t>•  Acep Ugan Saputra — System Analyst</a:t>
+            </a:r>
+          </a:p>
+          <a:p>
+            <a:pPr>
+              <a:spcBef>
+                <a:spcPts val="400"/>
+              </a:spcBef>
+              <a:defRPr sz="1000" b="1">
+                <a:solidFill>
+                  <a:srgbClr val="980517"/>
+                </a:solidFill>
+                <a:latin typeface="Calibri"/>
+              </a:defRPr>
+            </a:pPr>
+            <a:r>
+              <a:t>➔  URL Sistem Live: unistok.nirwana.biz.id</a:t>
+            </a:r>
+          </a:p>
+        </p:txBody>
+      </p:sp>
+      <p:sp>
+        <p:nvSpPr>
+          <p:cNvPr id="10" name="Rounded Rectangle 9"/>
+          <p:cNvSpPr/>
+          <p:nvPr/>
+        </p:nvSpPr>
+        <p:spPr>
+          <a:xfrm>
+            <a:off x="731520" y="5870448"/>
+            <a:ext cx="10728655" cy="658368"/>
+          </a:xfrm>
+          <a:prstGeom prst="roundRect">
+            <a:avLst/>
+          </a:prstGeom>
+          <a:solidFill>
+            <a:srgbClr val="FEF2F2"/>
+          </a:solidFill>
+          <a:ln w="19050">
+            <a:solidFill>
+              <a:srgbClr val="980517"/>
+            </a:solidFill>
+          </a:ln>
+        </p:spPr>
+        <p:style>
+          <a:lnRef idx="1">
+            <a:schemeClr val="accent1"/>
+          </a:lnRef>
+          <a:fillRef idx="3">
+            <a:schemeClr val="accent1"/>
+          </a:fillRef>
+          <a:effectRef idx="2">
+            <a:schemeClr val="accent1"/>
+          </a:effectRef>
+          <a:fontRef idx="minor">
+            <a:schemeClr val="lt1"/>
+          </a:fontRef>
+        </p:style>
+        <p:txBody>
+          <a:bodyPr rtlCol="0" anchor="ctr" wrap="square" lIns="228600" rIns="228600"/>
+          <a:lstStyle/>
+          <a:p>
+            <a:pPr algn="ctr">
+              <a:defRPr sz="1050" b="1">
+                <a:solidFill>
+                  <a:srgbClr val="980517"/>
+                </a:solidFill>
+                <a:latin typeface="Arial"/>
+              </a:defRPr>
+            </a:pPr>
+            <a:r>
+              <a:t>FOKUS SOLUSI UNISTOCK: </a:t>
+            </a:r>
+            <a:r>
+              <a:rPr sz="1050">
+                <a:solidFill>
+                  <a:srgbClr val="0F172A"/>
+                </a:solidFill>
+                <a:latin typeface="Calibri"/>
+              </a:rPr>
+              <a:t>Menghubungkan Hulu (Vendor Pabrik), Gudang Kampus, Bagian Keuangan, hingga Hilir (Mahasiswa) dalam satu arsitektur terintegrasi bertenaga Laravel 12 dan aturan FIFO.</a:t>
             </a:r>
           </a:p>
         </p:txBody>
@@ -4911,7 +4977,7 @@
     <p:bg>
       <p:bgPr>
         <a:solidFill>
-          <a:srgbClr val="F8FAFC"/>
+          <a:srgbClr val="FFFFFF"/>
         </a:solidFill>
         <a:effectLst/>
       </p:bgPr>
@@ -4925,189 +4991,20 @@
       <p:grpSpPr/>
       <p:sp>
         <p:nvSpPr>
-          <p:cNvPr id="2" name="Rounded Rectangle 1"/>
+          <p:cNvPr id="2" name="Rectangle 1"/>
           <p:cNvSpPr/>
           <p:nvPr/>
         </p:nvSpPr>
         <p:spPr>
           <a:xfrm>
-            <a:off x="548640" y="320040"/>
-            <a:ext cx="3291840" cy="320040"/>
-          </a:xfrm>
-          <a:prstGeom prst="roundRect">
-            <a:avLst/>
-          </a:prstGeom>
-          <a:solidFill>
-            <a:srgbClr val="580B13"/>
-          </a:solidFill>
-          <a:ln>
-            <a:solidFill>
-              <a:srgbClr val="580B13"/>
-            </a:solidFill>
-          </a:ln>
-        </p:spPr>
-        <p:style>
-          <a:lnRef idx="1">
-            <a:schemeClr val="accent1"/>
-          </a:lnRef>
-          <a:fillRef idx="3">
-            <a:schemeClr val="accent1"/>
-          </a:fillRef>
-          <a:effectRef idx="2">
-            <a:schemeClr val="accent1"/>
-          </a:effectRef>
-          <a:fontRef idx="minor">
-            <a:schemeClr val="lt1"/>
-          </a:fontRef>
-        </p:style>
-        <p:txBody>
-          <a:bodyPr rtlCol="0" anchor="ctr" wrap="square"/>
-          <a:lstStyle/>
-          <a:p>
-            <a:pPr algn="ctr">
-              <a:defRPr sz="1000" b="1">
-                <a:solidFill>
-                  <a:srgbClr val="FFD166"/>
-                </a:solidFill>
-              </a:defRPr>
-            </a:pPr>
-            <a:r>
-              <a:t>SLIDE 2 • SUPPLY CHAIN STRUCTURE</a:t>
-            </a:r>
-          </a:p>
-        </p:txBody>
-      </p:sp>
-      <p:sp>
-        <p:nvSpPr>
-          <p:cNvPr id="3" name="TextBox 2"/>
-          <p:cNvSpPr txBox="1"/>
-          <p:nvPr/>
-        </p:nvSpPr>
-        <p:spPr>
-          <a:xfrm>
-            <a:off x="548640" y="685800"/>
-            <a:ext cx="11064240" cy="438912"/>
-          </a:xfrm>
-          <a:prstGeom prst="rect">
-            <a:avLst/>
-          </a:prstGeom>
-          <a:noFill/>
-        </p:spPr>
-        <p:txBody>
-          <a:bodyPr wrap="square">
-            <a:spAutoFit/>
-          </a:bodyPr>
-          <a:lstStyle/>
-          <a:p>
-            <a:pPr>
-              <a:defRPr sz="1900" b="1">
-                <a:solidFill>
-                  <a:srgbClr val="580B13"/>
-                </a:solidFill>
-              </a:defRPr>
-            </a:pPr>
-            <a:r>
-              <a:t>STRUKTUR RANTAI PASOK: STAKEHOLDER, ALIRAN FISIK &amp; INFORMASI</a:t>
-            </a:r>
-          </a:p>
-        </p:txBody>
-      </p:sp>
-      <p:sp>
-        <p:nvSpPr>
-          <p:cNvPr id="4" name="TextBox 3"/>
-          <p:cNvSpPr txBox="1"/>
-          <p:nvPr/>
-        </p:nvSpPr>
-        <p:spPr>
-          <a:xfrm>
-            <a:off x="548640" y="1115568"/>
-            <a:ext cx="11064240" cy="347472"/>
-          </a:xfrm>
-          <a:prstGeom prst="rect">
-            <a:avLst/>
-          </a:prstGeom>
-          <a:noFill/>
-        </p:spPr>
-        <p:txBody>
-          <a:bodyPr wrap="square">
-            <a:spAutoFit/>
-          </a:bodyPr>
-          <a:lstStyle/>
-          <a:p>
-            <a:pPr>
-              <a:defRPr sz="1150">
-                <a:solidFill>
-                  <a:srgbClr val="475569"/>
-                </a:solidFill>
-              </a:defRPr>
-            </a:pPr>
-            <a:r>
-              <a:t>Pemetaan peran stakeholder end-to-end dari hulu ke hilir serta titik kritis perpindahan barang dan otorisasi data.</a:t>
-            </a:r>
-          </a:p>
-        </p:txBody>
-      </p:sp>
-      <p:sp>
-        <p:nvSpPr>
-          <p:cNvPr id="5" name="Rectangle 4"/>
-          <p:cNvSpPr/>
-          <p:nvPr/>
-        </p:nvSpPr>
-        <p:spPr>
-          <a:xfrm>
-            <a:off x="548640" y="1554480"/>
-            <a:ext cx="2606040" cy="4023360"/>
+            <a:off x="731520" y="365760"/>
+            <a:ext cx="73152" cy="777240"/>
           </a:xfrm>
           <a:prstGeom prst="rect">
             <a:avLst/>
           </a:prstGeom>
           <a:solidFill>
-            <a:srgbClr val="FFFFFF"/>
-          </a:solidFill>
-          <a:ln w="19050">
-            <a:solidFill>
-              <a:srgbClr val="6B0F1A"/>
-            </a:solidFill>
-          </a:ln>
-        </p:spPr>
-        <p:style>
-          <a:lnRef idx="1">
-            <a:schemeClr val="accent1"/>
-          </a:lnRef>
-          <a:fillRef idx="3">
-            <a:schemeClr val="accent1"/>
-          </a:fillRef>
-          <a:effectRef idx="2">
-            <a:schemeClr val="accent1"/>
-          </a:effectRef>
-          <a:fontRef idx="minor">
-            <a:schemeClr val="lt1"/>
-          </a:fontRef>
-        </p:style>
-        <p:txBody>
-          <a:bodyPr rtlCol="0" anchor="ctr"/>
-          <a:lstStyle/>
-          <a:p>
-            <a:pPr algn="ctr"/>
-          </a:p>
-        </p:txBody>
-      </p:sp>
-      <p:sp>
-        <p:nvSpPr>
-          <p:cNvPr id="6" name="Rectangle 5"/>
-          <p:cNvSpPr/>
-          <p:nvPr/>
-        </p:nvSpPr>
-        <p:spPr>
-          <a:xfrm>
-            <a:off x="548640" y="1554480"/>
-            <a:ext cx="2606040" cy="347472"/>
-          </a:xfrm>
-          <a:prstGeom prst="rect">
-            <a:avLst/>
-          </a:prstGeom>
-          <a:solidFill>
-            <a:srgbClr val="580B13"/>
+            <a:srgbClr val="980517"/>
           </a:solidFill>
           <a:ln>
             <a:noFill/>
@@ -5131,29 +5028,20 @@
           <a:bodyPr rtlCol="0" anchor="ctr"/>
           <a:lstStyle/>
           <a:p>
-            <a:pPr algn="ctr">
-              <a:defRPr sz="950" b="1">
-                <a:solidFill>
-                  <a:srgbClr val="FFD166"/>
-                </a:solidFill>
-              </a:defRPr>
-            </a:pPr>
-            <a:r>
-              <a:t>01 • SUPPLIER (HULU)</a:t>
-            </a:r>
-          </a:p>
-        </p:txBody>
-      </p:sp>
-      <p:sp>
-        <p:nvSpPr>
-          <p:cNvPr id="7" name="TextBox 6"/>
+            <a:pPr algn="ctr"/>
+          </a:p>
+        </p:txBody>
+      </p:sp>
+      <p:sp>
+        <p:nvSpPr>
+          <p:cNvPr id="3" name="TextBox 2"/>
           <p:cNvSpPr txBox="1"/>
           <p:nvPr/>
         </p:nvSpPr>
         <p:spPr>
           <a:xfrm>
-            <a:off x="658368" y="1938528"/>
-            <a:ext cx="2386584" cy="3566160"/>
+            <a:off x="914400" y="320040"/>
+            <a:ext cx="10515600" cy="256032"/>
           </a:xfrm>
           <a:prstGeom prst="rect">
             <a:avLst/>
@@ -5167,96 +5055,107 @@
           <a:lstStyle/>
           <a:p>
             <a:pPr>
-              <a:defRPr sz="1250" b="1">
-                <a:solidFill>
-                  <a:srgbClr val="580B13"/>
-                </a:solidFill>
-              </a:defRPr>
-            </a:pPr>
-            <a:r>
-              <a:t>Vendor Pabrik</a:t>
-            </a:r>
-          </a:p>
-          <a:p>
-            <a:pPr>
-              <a:defRPr sz="1050">
-                <a:solidFill>
-                  <a:srgbClr val="1E293B"/>
-                </a:solidFill>
-              </a:defRPr>
-            </a:pPr>
-            <a:r>
-              <a:t>Memproduksi paket seragam dan sepatu sesuai PO agregat kampus dengan kode SKU terstandarisasi.</a:t>
-            </a:r>
-            <a:br/>
-            <a:br/>
-            <a:r>
-              <a:t>Titik Barang: Pengiriman kontainer ke gudang kampus.</a:t>
-            </a:r>
-          </a:p>
-        </p:txBody>
-      </p:sp>
-      <p:sp>
-        <p:nvSpPr>
-          <p:cNvPr id="8" name="Rectangle 7"/>
+              <a:defRPr sz="1000" b="1">
+                <a:solidFill>
+                  <a:srgbClr val="980517"/>
+                </a:solidFill>
+                <a:latin typeface="Arial"/>
+              </a:defRPr>
+            </a:pPr>
+            <a:r>
+              <a:t>SLIDE 2 • SUPPLY CHAIN STRUCTURE   |   RUBRIK: SUPPLY CHAIN UNDERSTANDING (15%)</a:t>
+            </a:r>
+          </a:p>
+        </p:txBody>
+      </p:sp>
+      <p:sp>
+        <p:nvSpPr>
+          <p:cNvPr id="4" name="TextBox 3"/>
+          <p:cNvSpPr txBox="1"/>
+          <p:nvPr/>
+        </p:nvSpPr>
+        <p:spPr>
+          <a:xfrm>
+            <a:off x="914400" y="548640"/>
+            <a:ext cx="10515600" cy="411480"/>
+          </a:xfrm>
+          <a:prstGeom prst="rect">
+            <a:avLst/>
+          </a:prstGeom>
+          <a:noFill/>
+        </p:spPr>
+        <p:txBody>
+          <a:bodyPr wrap="square">
+            <a:spAutoFit/>
+          </a:bodyPr>
+          <a:lstStyle/>
+          <a:p>
+            <a:pPr>
+              <a:defRPr sz="2000" b="1">
+                <a:solidFill>
+                  <a:srgbClr val="0F172A"/>
+                </a:solidFill>
+                <a:latin typeface="Arial"/>
+              </a:defRPr>
+            </a:pPr>
+            <a:r>
+              <a:t>STRUKTUR RANTAI PASOK: STAKEHOLDER, ALIRAN FISIK &amp; INFORMASI</a:t>
+            </a:r>
+          </a:p>
+        </p:txBody>
+      </p:sp>
+      <p:sp>
+        <p:nvSpPr>
+          <p:cNvPr id="5" name="TextBox 4"/>
+          <p:cNvSpPr txBox="1"/>
+          <p:nvPr/>
+        </p:nvSpPr>
+        <p:spPr>
+          <a:xfrm>
+            <a:off x="914400" y="960120"/>
+            <a:ext cx="10515600" cy="274320"/>
+          </a:xfrm>
+          <a:prstGeom prst="rect">
+            <a:avLst/>
+          </a:prstGeom>
+          <a:noFill/>
+        </p:spPr>
+        <p:txBody>
+          <a:bodyPr wrap="square">
+            <a:spAutoFit/>
+          </a:bodyPr>
+          <a:lstStyle/>
+          <a:p>
+            <a:pPr>
+              <a:defRPr sz="1150">
+                <a:solidFill>
+                  <a:srgbClr val="475569"/>
+                </a:solidFill>
+                <a:latin typeface="Calibri"/>
+              </a:defRPr>
+            </a:pPr>
+            <a:r>
+              <a:t>Pemetaan peran stakeholder end-to-end dari hulu ke hilir serta titik kritis perpindahan barang dan otorisasi digital.</a:t>
+            </a:r>
+          </a:p>
+        </p:txBody>
+      </p:sp>
+      <p:sp>
+        <p:nvSpPr>
+          <p:cNvPr id="6" name="Rectangle 5"/>
           <p:cNvSpPr/>
           <p:nvPr/>
         </p:nvSpPr>
         <p:spPr>
           <a:xfrm>
-            <a:off x="3364992" y="1554480"/>
-            <a:ext cx="2606040" cy="4023360"/>
+            <a:off x="731520" y="1261872"/>
+            <a:ext cx="10728655" cy="13716"/>
           </a:xfrm>
           <a:prstGeom prst="rect">
             <a:avLst/>
           </a:prstGeom>
           <a:solidFill>
-            <a:srgbClr val="FFFFFF"/>
-          </a:solidFill>
-          <a:ln w="19050">
-            <a:solidFill>
-              <a:srgbClr val="6B0F1A"/>
-            </a:solidFill>
-          </a:ln>
-        </p:spPr>
-        <p:style>
-          <a:lnRef idx="1">
-            <a:schemeClr val="accent1"/>
-          </a:lnRef>
-          <a:fillRef idx="3">
-            <a:schemeClr val="accent1"/>
-          </a:fillRef>
-          <a:effectRef idx="2">
-            <a:schemeClr val="accent1"/>
-          </a:effectRef>
-          <a:fontRef idx="minor">
-            <a:schemeClr val="lt1"/>
-          </a:fontRef>
-        </p:style>
-        <p:txBody>
-          <a:bodyPr rtlCol="0" anchor="ctr"/>
-          <a:lstStyle/>
-          <a:p>
-            <a:pPr algn="ctr"/>
-          </a:p>
-        </p:txBody>
-      </p:sp>
-      <p:sp>
-        <p:nvSpPr>
-          <p:cNvPr id="9" name="Rectangle 8"/>
-          <p:cNvSpPr/>
-          <p:nvPr/>
-        </p:nvSpPr>
-        <p:spPr>
-          <a:xfrm>
-            <a:off x="3364992" y="1554480"/>
-            <a:ext cx="2606040" cy="347472"/>
-          </a:xfrm>
-          <a:prstGeom prst="rect">
-            <a:avLst/>
-          </a:prstGeom>
-          <a:solidFill>
-            <a:srgbClr val="580B13"/>
+            <a:srgbClr val="E2E8F0"/>
           </a:solidFill>
           <a:ln>
             <a:noFill/>
@@ -5280,91 +5179,30 @@
           <a:bodyPr rtlCol="0" anchor="ctr"/>
           <a:lstStyle/>
           <a:p>
-            <a:pPr algn="ctr">
-              <a:defRPr sz="950" b="1">
-                <a:solidFill>
-                  <a:srgbClr val="FFD166"/>
-                </a:solidFill>
-              </a:defRPr>
-            </a:pPr>
-            <a:r>
-              <a:t>02 • GUDANG (INBOUND)</a:t>
-            </a:r>
-          </a:p>
-        </p:txBody>
-      </p:sp>
-      <p:sp>
-        <p:nvSpPr>
-          <p:cNvPr id="10" name="TextBox 9"/>
-          <p:cNvSpPr txBox="1"/>
+            <a:pPr algn="ctr"/>
+          </a:p>
+        </p:txBody>
+      </p:sp>
+      <p:sp>
+        <p:nvSpPr>
+          <p:cNvPr id="7" name="Rounded Rectangle 6"/>
+          <p:cNvSpPr/>
           <p:nvPr/>
         </p:nvSpPr>
         <p:spPr>
           <a:xfrm>
-            <a:off x="3474720" y="1938528"/>
-            <a:ext cx="2386584" cy="3566160"/>
+            <a:off x="731520" y="1417320"/>
+            <a:ext cx="2542032" cy="4297680"/>
           </a:xfrm>
-          <a:prstGeom prst="rect">
-            <a:avLst/>
-          </a:prstGeom>
-          <a:noFill/>
-        </p:spPr>
-        <p:txBody>
-          <a:bodyPr wrap="square">
-            <a:spAutoFit/>
-          </a:bodyPr>
-          <a:lstStyle/>
-          <a:p>
-            <a:pPr>
-              <a:defRPr sz="1250" b="1">
-                <a:solidFill>
-                  <a:srgbClr val="580B13"/>
-                </a:solidFill>
-              </a:defRPr>
-            </a:pPr>
-            <a:r>
-              <a:t>Gudang Kampus</a:t>
-            </a:r>
-          </a:p>
-          <a:p>
-            <a:pPr>
-              <a:defRPr sz="1050">
-                <a:solidFill>
-                  <a:srgbClr val="1E293B"/>
-                </a:solidFill>
-              </a:defRPr>
-            </a:pPr>
-            <a:r>
-              <a:t>Penerimaan stok (StockReceive), penomoran batch FIFO, dan transfer barang ke posko loket.</a:t>
-            </a:r>
-            <a:br/>
-            <a:br/>
-            <a:r>
-              <a:t>Titik Barang &amp; Info: Generate StockMovement dan batch tertua.</a:t>
-            </a:r>
-          </a:p>
-        </p:txBody>
-      </p:sp>
-      <p:sp>
-        <p:nvSpPr>
-          <p:cNvPr id="11" name="Rectangle 10"/>
-          <p:cNvSpPr/>
-          <p:nvPr/>
-        </p:nvSpPr>
-        <p:spPr>
-          <a:xfrm>
-            <a:off x="6181344" y="1554480"/>
-            <a:ext cx="2606040" cy="4023360"/>
-          </a:xfrm>
-          <a:prstGeom prst="rect">
+          <a:prstGeom prst="roundRect">
             <a:avLst/>
           </a:prstGeom>
           <a:solidFill>
-            <a:srgbClr val="FFFFFF"/>
+            <a:srgbClr val="F8FAFC"/>
           </a:solidFill>
-          <a:ln w="19050">
+          <a:ln w="12700">
             <a:solidFill>
-              <a:srgbClr val="6B0F1A"/>
+              <a:srgbClr val="E2E8F0"/>
             </a:solidFill>
           </a:ln>
         </p:spPr>
@@ -5383,32 +5221,124 @@
           </a:fontRef>
         </p:style>
         <p:txBody>
-          <a:bodyPr rtlCol="0" anchor="ctr"/>
-          <a:lstStyle/>
-          <a:p>
-            <a:pPr algn="ctr"/>
-          </a:p>
-        </p:txBody>
-      </p:sp>
-      <p:sp>
-        <p:nvSpPr>
-          <p:cNvPr id="12" name="Rectangle 11"/>
+          <a:bodyPr rtlCol="0" anchor="t" wrap="square" lIns="182880" rIns="182880" tIns="164592" bIns="137160"/>
+          <a:lstStyle/>
+          <a:p>
+            <a:pPr algn="ctr">
+              <a:defRPr sz="950" b="1">
+                <a:solidFill>
+                  <a:srgbClr val="980517"/>
+                </a:solidFill>
+                <a:latin typeface="Arial"/>
+              </a:defRPr>
+            </a:pPr>
+            <a:r>
+              <a:t>01 • SUPPLIER (HULU)</a:t>
+            </a:r>
+          </a:p>
+          <a:p>
+            <a:pPr>
+              <a:spcAft>
+                <a:spcPts val="600"/>
+              </a:spcAft>
+              <a:defRPr sz="1300" b="1">
+                <a:solidFill>
+                  <a:srgbClr val="0F172A"/>
+                </a:solidFill>
+                <a:latin typeface="Arial"/>
+              </a:defRPr>
+            </a:pPr>
+            <a:r>
+              <a:t>Pabrik Garmen &amp; Sepatu</a:t>
+            </a:r>
+          </a:p>
+          <a:p>
+            <a:pPr>
+              <a:spcAft>
+                <a:spcPts val="400"/>
+              </a:spcAft>
+              <a:defRPr sz="1050">
+                <a:solidFill>
+                  <a:srgbClr val="0F172A"/>
+                </a:solidFill>
+                <a:latin typeface="Calibri"/>
+              </a:defRPr>
+            </a:pPr>
+            <a:r>
+              <a:t>•  Memproduksi paket seragam dan sepatu sesuai pesanan pengadaan kampus (PO).</a:t>
+            </a:r>
+          </a:p>
+          <a:p>
+            <a:pPr>
+              <a:spcAft>
+                <a:spcPts val="400"/>
+              </a:spcAft>
+              <a:defRPr sz="1050">
+                <a:solidFill>
+                  <a:srgbClr val="0F172A"/>
+                </a:solidFill>
+                <a:latin typeface="Calibri"/>
+              </a:defRPr>
+            </a:pPr>
+            <a:r>
+              <a:t>•  Menerapkan standarisasi kode varian SKU seragam.</a:t>
+            </a:r>
+          </a:p>
+          <a:p>
+            <a:pPr>
+              <a:spcAft>
+                <a:spcPts val="400"/>
+              </a:spcAft>
+              <a:defRPr sz="1050">
+                <a:solidFill>
+                  <a:srgbClr val="0F172A"/>
+                </a:solidFill>
+                <a:latin typeface="Calibri"/>
+              </a:defRPr>
+            </a:pPr>
+            <a:r>
+              <a:t>•  Titik Barang: Pengiriman kardus seragam ke gudang kampus (Inbound Logistics).</a:t>
+            </a:r>
+          </a:p>
+          <a:p>
+            <a:pPr>
+              <a:spcBef>
+                <a:spcPts val="400"/>
+              </a:spcBef>
+              <a:defRPr sz="1000" b="1">
+                <a:solidFill>
+                  <a:srgbClr val="980517"/>
+                </a:solidFill>
+                <a:latin typeface="Calibri"/>
+              </a:defRPr>
+            </a:pPr>
+            <a:r>
+              <a:t>➔  Aliran: PO Agregat ➔ Fisik Masuk</a:t>
+            </a:r>
+          </a:p>
+        </p:txBody>
+      </p:sp>
+      <p:sp>
+        <p:nvSpPr>
+          <p:cNvPr id="8" name="Rounded Rectangle 7"/>
           <p:cNvSpPr/>
           <p:nvPr/>
         </p:nvSpPr>
         <p:spPr>
           <a:xfrm>
-            <a:off x="6181344" y="1554480"/>
-            <a:ext cx="2606040" cy="347472"/>
+            <a:off x="3456432" y="1417320"/>
+            <a:ext cx="2542032" cy="4297680"/>
           </a:xfrm>
-          <a:prstGeom prst="rect">
+          <a:prstGeom prst="roundRect">
             <a:avLst/>
           </a:prstGeom>
           <a:solidFill>
-            <a:srgbClr val="580B13"/>
+            <a:srgbClr val="F8FAFC"/>
           </a:solidFill>
-          <a:ln>
-            <a:noFill/>
+          <a:ln w="12700">
+            <a:solidFill>
+              <a:srgbClr val="E2E8F0"/>
+            </a:solidFill>
           </a:ln>
         </p:spPr>
         <p:style>
@@ -5426,94 +5356,123 @@
           </a:fontRef>
         </p:style>
         <p:txBody>
-          <a:bodyPr rtlCol="0" anchor="ctr"/>
+          <a:bodyPr rtlCol="0" anchor="t" wrap="square" lIns="182880" rIns="182880" tIns="164592" bIns="137160"/>
           <a:lstStyle/>
           <a:p>
             <a:pPr algn="ctr">
               <a:defRPr sz="950" b="1">
                 <a:solidFill>
-                  <a:srgbClr val="FFD166"/>
-                </a:solidFill>
-              </a:defRPr>
-            </a:pPr>
-            <a:r>
-              <a:t>03 • KEUANGAN &amp; POSKO</a:t>
-            </a:r>
-          </a:p>
-        </p:txBody>
-      </p:sp>
-      <p:sp>
-        <p:nvSpPr>
-          <p:cNvPr id="13" name="TextBox 12"/>
-          <p:cNvSpPr txBox="1"/>
+                  <a:srgbClr val="980517"/>
+                </a:solidFill>
+                <a:latin typeface="Arial"/>
+              </a:defRPr>
+            </a:pPr>
+            <a:r>
+              <a:t>02 • GUDANG (INBOUND)</a:t>
+            </a:r>
+          </a:p>
+          <a:p>
+            <a:pPr>
+              <a:spcAft>
+                <a:spcPts val="600"/>
+              </a:spcAft>
+              <a:defRPr sz="1300" b="1">
+                <a:solidFill>
+                  <a:srgbClr val="0F172A"/>
+                </a:solidFill>
+                <a:latin typeface="Arial"/>
+              </a:defRPr>
+            </a:pPr>
+            <a:r>
+              <a:t>Gudang Logistik Kampus</a:t>
+            </a:r>
+          </a:p>
+          <a:p>
+            <a:pPr>
+              <a:spcAft>
+                <a:spcPts val="400"/>
+              </a:spcAft>
+              <a:defRPr sz="1050">
+                <a:solidFill>
+                  <a:srgbClr val="0F172A"/>
+                </a:solidFill>
+                <a:latin typeface="Calibri"/>
+              </a:defRPr>
+            </a:pPr>
+            <a:r>
+              <a:t>•  Penerimaan fisik barang (StockReceive) dan quality checking kualitas seragam.</a:t>
+            </a:r>
+          </a:p>
+          <a:p>
+            <a:pPr>
+              <a:spcAft>
+                <a:spcPts val="400"/>
+              </a:spcAft>
+              <a:defRPr sz="1050">
+                <a:solidFill>
+                  <a:srgbClr val="0F172A"/>
+                </a:solidFill>
+                <a:latin typeface="Calibri"/>
+              </a:defRPr>
+            </a:pPr>
+            <a:r>
+              <a:t>•  Pencatatan batch urutan FIFO (First-In, First-Out) dan nilai HPP per unit.</a:t>
+            </a:r>
+          </a:p>
+          <a:p>
+            <a:pPr>
+              <a:spcAft>
+                <a:spcPts val="400"/>
+              </a:spcAft>
+              <a:defRPr sz="1050">
+                <a:solidFill>
+                  <a:srgbClr val="0F172A"/>
+                </a:solidFill>
+                <a:latin typeface="Calibri"/>
+              </a:defRPr>
+            </a:pPr>
+            <a:r>
+              <a:t>•  Titik Barang &amp; Info: Transfer stok batch tertua menuju posko distribusi loket.</a:t>
+            </a:r>
+          </a:p>
+          <a:p>
+            <a:pPr>
+              <a:spcBef>
+                <a:spcPts val="400"/>
+              </a:spcBef>
+              <a:defRPr sz="1000" b="1">
+                <a:solidFill>
+                  <a:srgbClr val="980517"/>
+                </a:solidFill>
+                <a:latin typeface="Calibri"/>
+              </a:defRPr>
+            </a:pPr>
+            <a:r>
+              <a:t>➔  Aliran: Inbound ➔ POS Loket</a:t>
+            </a:r>
+          </a:p>
+        </p:txBody>
+      </p:sp>
+      <p:sp>
+        <p:nvSpPr>
+          <p:cNvPr id="9" name="Rounded Rectangle 8"/>
+          <p:cNvSpPr/>
           <p:nvPr/>
         </p:nvSpPr>
         <p:spPr>
           <a:xfrm>
-            <a:off x="6291072" y="1938528"/>
-            <a:ext cx="2386584" cy="3566160"/>
+            <a:off x="6181344" y="1417320"/>
+            <a:ext cx="2542032" cy="4297680"/>
           </a:xfrm>
-          <a:prstGeom prst="rect">
-            <a:avLst/>
-          </a:prstGeom>
-          <a:noFill/>
-        </p:spPr>
-        <p:txBody>
-          <a:bodyPr wrap="square">
-            <a:spAutoFit/>
-          </a:bodyPr>
-          <a:lstStyle/>
-          <a:p>
-            <a:pPr>
-              <a:defRPr sz="1250" b="1">
-                <a:solidFill>
-                  <a:srgbClr val="580B13"/>
-                </a:solidFill>
-              </a:defRPr>
-            </a:pPr>
-            <a:r>
-              <a:t>Keuangan &amp; Staf Posko</a:t>
-            </a:r>
-          </a:p>
-          <a:p>
-            <a:pPr>
-              <a:defRPr sz="1050">
-                <a:solidFill>
-                  <a:srgbClr val="1E293B"/>
-                </a:solidFill>
-              </a:defRPr>
-            </a:pPr>
-            <a:r>
-              <a:t>Keuangan otorisasi status pelunasan (Eligibility). Posko memindai QR Code dan serah terima seragam fisik.</a:t>
-            </a:r>
-            <a:br/>
-            <a:br/>
-            <a:r>
-              <a:t>Titik Kritis: Validasi hak dan fitting.</a:t>
-            </a:r>
-          </a:p>
-        </p:txBody>
-      </p:sp>
-      <p:sp>
-        <p:nvSpPr>
-          <p:cNvPr id="14" name="Rectangle 13"/>
-          <p:cNvSpPr/>
-          <p:nvPr/>
-        </p:nvSpPr>
-        <p:spPr>
-          <a:xfrm>
-            <a:off x="9006840" y="1554480"/>
-            <a:ext cx="2606040" cy="4023360"/>
-          </a:xfrm>
-          <a:prstGeom prst="rect">
+          <a:prstGeom prst="roundRect">
             <a:avLst/>
           </a:prstGeom>
           <a:solidFill>
-            <a:srgbClr val="FFFFFF"/>
+            <a:srgbClr val="FEF2F2"/>
           </a:solidFill>
           <a:ln w="19050">
             <a:solidFill>
-              <a:srgbClr val="6B0F1A"/>
+              <a:srgbClr val="980517"/>
             </a:solidFill>
           </a:ln>
         </p:spPr>
@@ -5532,32 +5491,124 @@
           </a:fontRef>
         </p:style>
         <p:txBody>
-          <a:bodyPr rtlCol="0" anchor="ctr"/>
-          <a:lstStyle/>
-          <a:p>
-            <a:pPr algn="ctr"/>
-          </a:p>
-        </p:txBody>
-      </p:sp>
-      <p:sp>
-        <p:nvSpPr>
-          <p:cNvPr id="15" name="Rectangle 14"/>
+          <a:bodyPr rtlCol="0" anchor="t" wrap="square" lIns="182880" rIns="182880" tIns="164592" bIns="137160"/>
+          <a:lstStyle/>
+          <a:p>
+            <a:pPr algn="ctr">
+              <a:defRPr sz="950" b="1">
+                <a:solidFill>
+                  <a:srgbClr val="980517"/>
+                </a:solidFill>
+                <a:latin typeface="Arial"/>
+              </a:defRPr>
+            </a:pPr>
+            <a:r>
+              <a:t>03 • KEUANGAN &amp; POSKO</a:t>
+            </a:r>
+          </a:p>
+          <a:p>
+            <a:pPr>
+              <a:spcAft>
+                <a:spcPts val="600"/>
+              </a:spcAft>
+              <a:defRPr sz="1300" b="1">
+                <a:solidFill>
+                  <a:srgbClr val="0F172A"/>
+                </a:solidFill>
+                <a:latin typeface="Arial"/>
+              </a:defRPr>
+            </a:pPr>
+            <a:r>
+              <a:t>Staf Keuangan &amp; Posko</a:t>
+            </a:r>
+          </a:p>
+          <a:p>
+            <a:pPr>
+              <a:spcAft>
+                <a:spcPts val="400"/>
+              </a:spcAft>
+              <a:defRPr sz="1050">
+                <a:solidFill>
+                  <a:srgbClr val="0F172A"/>
+                </a:solidFill>
+                <a:latin typeface="Calibri"/>
+              </a:defRPr>
+            </a:pPr>
+            <a:r>
+              <a:t>•  Keuangan: Otorisasi status pelunasan biaya kuliah (Eligibility Record).</a:t>
+            </a:r>
+          </a:p>
+          <a:p>
+            <a:pPr>
+              <a:spcAft>
+                <a:spcPts val="400"/>
+              </a:spcAft>
+              <a:defRPr sz="1050">
+                <a:solidFill>
+                  <a:srgbClr val="0F172A"/>
+                </a:solidFill>
+                <a:latin typeface="Calibri"/>
+              </a:defRPr>
+            </a:pPr>
+            <a:r>
+              <a:t>•  Staf Posko: Melayani meja pembagian fisik seragam di posko kampus.</a:t>
+            </a:r>
+          </a:p>
+          <a:p>
+            <a:pPr>
+              <a:spcAft>
+                <a:spcPts val="400"/>
+              </a:spcAft>
+              <a:defRPr sz="1050">
+                <a:solidFill>
+                  <a:srgbClr val="0F172A"/>
+                </a:solidFill>
+                <a:latin typeface="Calibri"/>
+              </a:defRPr>
+            </a:pPr>
+            <a:r>
+              <a:t>•  Titik Kritis: Validasi QR Code dan pencocokan ukuran saat proses fitting.</a:t>
+            </a:r>
+          </a:p>
+          <a:p>
+            <a:pPr>
+              <a:spcBef>
+                <a:spcPts val="400"/>
+              </a:spcBef>
+              <a:defRPr sz="1000" b="1">
+                <a:solidFill>
+                  <a:srgbClr val="980517"/>
+                </a:solidFill>
+                <a:latin typeface="Calibri"/>
+              </a:defRPr>
+            </a:pPr>
+            <a:r>
+              <a:t>➔  Aliran: Data Lunas ➔ Serah Fisik</a:t>
+            </a:r>
+          </a:p>
+        </p:txBody>
+      </p:sp>
+      <p:sp>
+        <p:nvSpPr>
+          <p:cNvPr id="10" name="Rounded Rectangle 9"/>
           <p:cNvSpPr/>
           <p:nvPr/>
         </p:nvSpPr>
         <p:spPr>
           <a:xfrm>
-            <a:off x="9006840" y="1554480"/>
-            <a:ext cx="2606040" cy="347472"/>
+            <a:off x="8906256" y="1417320"/>
+            <a:ext cx="2542032" cy="4297680"/>
           </a:xfrm>
-          <a:prstGeom prst="rect">
+          <a:prstGeom prst="roundRect">
             <a:avLst/>
           </a:prstGeom>
           <a:solidFill>
-            <a:srgbClr val="580B13"/>
+            <a:srgbClr val="F8FAFC"/>
           </a:solidFill>
-          <a:ln>
-            <a:noFill/>
+          <a:ln w="12700">
+            <a:solidFill>
+              <a:srgbClr val="E2E8F0"/>
+            </a:solidFill>
           </a:ln>
         </p:spPr>
         <p:style>
@@ -5575,94 +5626,123 @@
           </a:fontRef>
         </p:style>
         <p:txBody>
-          <a:bodyPr rtlCol="0" anchor="ctr"/>
+          <a:bodyPr rtlCol="0" anchor="t" wrap="square" lIns="182880" rIns="182880" tIns="164592" bIns="137160"/>
           <a:lstStyle/>
           <a:p>
             <a:pPr algn="ctr">
               <a:defRPr sz="950" b="1">
                 <a:solidFill>
-                  <a:srgbClr val="FFD166"/>
-                </a:solidFill>
-              </a:defRPr>
-            </a:pPr>
-            <a:r>
-              <a:t>04 • CUSTOMER (HILIR)</a:t>
-            </a:r>
-          </a:p>
-        </p:txBody>
-      </p:sp>
-      <p:sp>
-        <p:nvSpPr>
-          <p:cNvPr id="16" name="TextBox 15"/>
-          <p:cNvSpPr txBox="1"/>
+                  <a:srgbClr val="980517"/>
+                </a:solidFill>
+                <a:latin typeface="Arial"/>
+              </a:defRPr>
+            </a:pPr>
+            <a:r>
+              <a:t>04 • KONSUMEN (HILIR)</a:t>
+            </a:r>
+          </a:p>
+          <a:p>
+            <a:pPr>
+              <a:spcAft>
+                <a:spcPts val="600"/>
+              </a:spcAft>
+              <a:defRPr sz="1300" b="1">
+                <a:solidFill>
+                  <a:srgbClr val="0F172A"/>
+                </a:solidFill>
+                <a:latin typeface="Arial"/>
+              </a:defRPr>
+            </a:pPr>
+            <a:r>
+              <a:t>Mahasiswa (Customer)</a:t>
+            </a:r>
+          </a:p>
+          <a:p>
+            <a:pPr>
+              <a:spcAft>
+                <a:spcPts val="400"/>
+              </a:spcAft>
+              <a:defRPr sz="1050">
+                <a:solidFill>
+                  <a:srgbClr val="0F172A"/>
+                </a:solidFill>
+                <a:latin typeface="Calibri"/>
+              </a:defRPr>
+            </a:pPr>
+            <a:r>
+              <a:t>•  Konsumen akhir yang memiliki hak jatah barang (Entitlement) sesuai prodi.</a:t>
+            </a:r>
+          </a:p>
+          <a:p>
+            <a:pPr>
+              <a:spcAft>
+                <a:spcPts val="400"/>
+              </a:spcAft>
+              <a:defRPr sz="1050">
+                <a:solidFill>
+                  <a:srgbClr val="0F172A"/>
+                </a:solidFill>
+                <a:latin typeface="Calibri"/>
+              </a:defRPr>
+            </a:pPr>
+            <a:r>
+              <a:t>•  Mengisi profil ukuran mandiri di web dan menerima tiket jadwal pembagian.</a:t>
+            </a:r>
+          </a:p>
+          <a:p>
+            <a:pPr>
+              <a:spcAft>
+                <a:spcPts val="400"/>
+              </a:spcAft>
+              <a:defRPr sz="1050">
+                <a:solidFill>
+                  <a:srgbClr val="0F172A"/>
+                </a:solidFill>
+                <a:latin typeface="Calibri"/>
+              </a:defRPr>
+            </a:pPr>
+            <a:r>
+              <a:t>•  Titik Info: Menunjukkan QR Code beresolusi tinggi (NIM murni) di meja posko.</a:t>
+            </a:r>
+          </a:p>
+          <a:p>
+            <a:pPr>
+              <a:spcBef>
+                <a:spcPts val="400"/>
+              </a:spcBef>
+              <a:defRPr sz="1000" b="1">
+                <a:solidFill>
+                  <a:srgbClr val="980517"/>
+                </a:solidFill>
+                <a:latin typeface="Calibri"/>
+              </a:defRPr>
+            </a:pPr>
+            <a:r>
+              <a:t>➔  Aliran: Profil ➔ Seragam Pas</a:t>
+            </a:r>
+          </a:p>
+        </p:txBody>
+      </p:sp>
+      <p:sp>
+        <p:nvSpPr>
+          <p:cNvPr id="11" name="Rounded Rectangle 10"/>
+          <p:cNvSpPr/>
           <p:nvPr/>
         </p:nvSpPr>
         <p:spPr>
           <a:xfrm>
-            <a:off x="9116567" y="1938528"/>
-            <a:ext cx="2386584" cy="3566160"/>
+            <a:off x="731520" y="5870448"/>
+            <a:ext cx="10728655" cy="658368"/>
           </a:xfrm>
-          <a:prstGeom prst="rect">
-            <a:avLst/>
-          </a:prstGeom>
-          <a:noFill/>
-        </p:spPr>
-        <p:txBody>
-          <a:bodyPr wrap="square">
-            <a:spAutoFit/>
-          </a:bodyPr>
-          <a:lstStyle/>
-          <a:p>
-            <a:pPr>
-              <a:defRPr sz="1250" b="1">
-                <a:solidFill>
-                  <a:srgbClr val="580B13"/>
-                </a:solidFill>
-              </a:defRPr>
-            </a:pPr>
-            <a:r>
-              <a:t>Mahasiswa</a:t>
-            </a:r>
-          </a:p>
-          <a:p>
-            <a:pPr>
-              <a:defRPr sz="1050">
-                <a:solidFill>
-                  <a:srgbClr val="1E293B"/>
-                </a:solidFill>
-              </a:defRPr>
-            </a:pPr>
-            <a:r>
-              <a:t>Mengisi profil ukuran mandiri di web, menerima jadwal pembagian, dan klaim fisik via identitas QR Code.</a:t>
-            </a:r>
-            <a:br/>
-            <a:br/>
-            <a:r>
-              <a:t>Titik Info: Tiket QR Code beresolusi tinggi.</a:t>
-            </a:r>
-          </a:p>
-        </p:txBody>
-      </p:sp>
-      <p:sp>
-        <p:nvSpPr>
-          <p:cNvPr id="17" name="Rectangle 16"/>
-          <p:cNvSpPr/>
-          <p:nvPr/>
-        </p:nvSpPr>
-        <p:spPr>
-          <a:xfrm>
-            <a:off x="548640" y="5806440"/>
-            <a:ext cx="11064240" cy="685800"/>
-          </a:xfrm>
-          <a:prstGeom prst="rect">
+          <a:prstGeom prst="roundRect">
             <a:avLst/>
           </a:prstGeom>
           <a:solidFill>
-            <a:srgbClr val="580B13"/>
+            <a:srgbClr val="FEF2F2"/>
           </a:solidFill>
           <a:ln w="19050">
             <a:solidFill>
-              <a:srgbClr val="FFD166"/>
+              <a:srgbClr val="980517"/>
             </a:solidFill>
           </a:ln>
         </p:spPr>
@@ -5681,18 +5761,28 @@
           </a:fontRef>
         </p:style>
         <p:txBody>
-          <a:bodyPr rtlCol="0" anchor="ctr" wrap="square"/>
+          <a:bodyPr rtlCol="0" anchor="ctr" wrap="square" lIns="228600" rIns="228600"/>
           <a:lstStyle/>
           <a:p>
             <a:pPr algn="ctr">
-              <a:defRPr sz="1100" b="1">
-                <a:solidFill>
-                  <a:srgbClr val="FFFFFF"/>
-                </a:solidFill>
-              </a:defRPr>
-            </a:pPr>
-            <a:r>
-              <a:t>Prinsip Inti "Data Mengunci Fisik": Barang fisik pantang diserahkan tanpa otorisasi digital. Scan QR Code memvalidasi kelayakan bayar dan memotong stok FIFO terlama.</a:t>
+              <a:defRPr sz="1050" b="1">
+                <a:solidFill>
+                  <a:srgbClr val="980517"/>
+                </a:solidFill>
+                <a:latin typeface="Arial"/>
+              </a:defRPr>
+            </a:pPr>
+            <a:r>
+              <a:t>PRINSIP INTI 'DATA MENGUNCI FISIK': </a:t>
+            </a:r>
+            <a:r>
+              <a:rPr sz="1050">
+                <a:solidFill>
+                  <a:srgbClr val="0F172A"/>
+                </a:solidFill>
+                <a:latin typeface="Calibri"/>
+              </a:rPr>
+              <a:t>Barang fisik di loket gudang pantang diserahkan tanpa otorisasi digital. Pemindaian QR Code mengeksekusi validasi atomik di database: jika belum lunas atau kuota habis, fisik seragam tidak dapat keluar.</a:t>
             </a:r>
           </a:p>
         </p:txBody>
@@ -5711,7 +5801,7 @@
     <p:bg>
       <p:bgPr>
         <a:solidFill>
-          <a:srgbClr val="F8FAFC"/>
+          <a:srgbClr val="FFFFFF"/>
         </a:solidFill>
         <a:effectLst/>
       </p:bgPr>
@@ -5725,25 +5815,23 @@
       <p:grpSpPr/>
       <p:sp>
         <p:nvSpPr>
-          <p:cNvPr id="2" name="Rounded Rectangle 1"/>
+          <p:cNvPr id="2" name="Rectangle 1"/>
           <p:cNvSpPr/>
           <p:nvPr/>
         </p:nvSpPr>
         <p:spPr>
           <a:xfrm>
-            <a:off x="548640" y="320040"/>
-            <a:ext cx="3291840" cy="320040"/>
+            <a:off x="731520" y="365760"/>
+            <a:ext cx="73152" cy="777240"/>
           </a:xfrm>
-          <a:prstGeom prst="roundRect">
+          <a:prstGeom prst="rect">
             <a:avLst/>
           </a:prstGeom>
           <a:solidFill>
-            <a:srgbClr val="580B13"/>
+            <a:srgbClr val="980517"/>
           </a:solidFill>
           <a:ln>
-            <a:solidFill>
-              <a:srgbClr val="580B13"/>
-            </a:solidFill>
+            <a:noFill/>
           </a:ln>
         </p:spPr>
         <p:style>
@@ -5761,19 +5849,10 @@
           </a:fontRef>
         </p:style>
         <p:txBody>
-          <a:bodyPr rtlCol="0" anchor="ctr" wrap="square"/>
-          <a:lstStyle/>
-          <a:p>
-            <a:pPr algn="ctr">
-              <a:defRPr sz="1000" b="1">
-                <a:solidFill>
-                  <a:srgbClr val="FFD166"/>
-                </a:solidFill>
-              </a:defRPr>
-            </a:pPr>
-            <a:r>
-              <a:t>SLIDE 3 • PROBLEM ANALYSIS</a:t>
-            </a:r>
+          <a:bodyPr rtlCol="0" anchor="ctr"/>
+          <a:lstStyle/>
+          <a:p>
+            <a:pPr algn="ctr"/>
           </a:p>
         </p:txBody>
       </p:sp>
@@ -5785,8 +5864,8 @@
         </p:nvSpPr>
         <p:spPr>
           <a:xfrm>
-            <a:off x="548640" y="685800"/>
-            <a:ext cx="11064240" cy="438912"/>
+            <a:off x="914400" y="320040"/>
+            <a:ext cx="10515600" cy="256032"/>
           </a:xfrm>
           <a:prstGeom prst="rect">
             <a:avLst/>
@@ -5800,14 +5879,15 @@
           <a:lstStyle/>
           <a:p>
             <a:pPr>
-              <a:defRPr sz="1900" b="1">
-                <a:solidFill>
-                  <a:srgbClr val="580B13"/>
-                </a:solidFill>
-              </a:defRPr>
-            </a:pPr>
-            <a:r>
-              <a:t>ANALISIS AKAR MASALAH: MENGAPA SISTEM MANUAL GAGAL?</a:t>
+              <a:defRPr sz="1000" b="1">
+                <a:solidFill>
+                  <a:srgbClr val="980517"/>
+                </a:solidFill>
+                <a:latin typeface="Arial"/>
+              </a:defRPr>
+            </a:pPr>
+            <a:r>
+              <a:t>SLIDE 3 • PROBLEM ANALYSIS   |   RUBRIK: PROBLEM ANALYSIS (20%)</a:t>
             </a:r>
           </a:p>
         </p:txBody>
@@ -5820,8 +5900,8 @@
         </p:nvSpPr>
         <p:spPr>
           <a:xfrm>
-            <a:off x="548640" y="1115568"/>
-            <a:ext cx="11064240" cy="347472"/>
+            <a:off x="914400" y="548640"/>
+            <a:ext cx="10515600" cy="411480"/>
           </a:xfrm>
           <a:prstGeom prst="rect">
             <a:avLst/>
@@ -5835,29 +5915,109 @@
           <a:lstStyle/>
           <a:p>
             <a:pPr>
+              <a:defRPr sz="2000" b="1">
+                <a:solidFill>
+                  <a:srgbClr val="0F172A"/>
+                </a:solidFill>
+                <a:latin typeface="Arial"/>
+              </a:defRPr>
+            </a:pPr>
+            <a:r>
+              <a:t>ANALISIS AKAR MASALAH: MENGAPA SISTEM MANUAL GAGAL?</a:t>
+            </a:r>
+          </a:p>
+        </p:txBody>
+      </p:sp>
+      <p:sp>
+        <p:nvSpPr>
+          <p:cNvPr id="5" name="TextBox 4"/>
+          <p:cNvSpPr txBox="1"/>
+          <p:nvPr/>
+        </p:nvSpPr>
+        <p:spPr>
+          <a:xfrm>
+            <a:off x="914400" y="960120"/>
+            <a:ext cx="10515600" cy="274320"/>
+          </a:xfrm>
+          <a:prstGeom prst="rect">
+            <a:avLst/>
+          </a:prstGeom>
+          <a:noFill/>
+        </p:spPr>
+        <p:txBody>
+          <a:bodyPr wrap="square">
+            <a:spAutoFit/>
+          </a:bodyPr>
+          <a:lstStyle/>
+          <a:p>
+            <a:pPr>
               <a:defRPr sz="1150">
                 <a:solidFill>
                   <a:srgbClr val="475569"/>
                 </a:solidFill>
-              </a:defRPr>
-            </a:pPr>
-            <a:r>
-              <a:t>Tabel terstruktur menganalisis empat akar masalah utama serta dampaknya terhadap biaya, waktu, stok, dan mutu pelayanan.</a:t>
-            </a:r>
+                <a:latin typeface="Calibri"/>
+              </a:defRPr>
+            </a:pPr>
+            <a:r>
+              <a:t>Matriks analisis empat masalah utama beserta penyebab sistemik dan dampaknya terhadap biaya, waktu, stok, dan pelayanan.</a:t>
+            </a:r>
+          </a:p>
+        </p:txBody>
+      </p:sp>
+      <p:sp>
+        <p:nvSpPr>
+          <p:cNvPr id="6" name="Rectangle 5"/>
+          <p:cNvSpPr/>
+          <p:nvPr/>
+        </p:nvSpPr>
+        <p:spPr>
+          <a:xfrm>
+            <a:off x="731520" y="1261872"/>
+            <a:ext cx="10728655" cy="13716"/>
+          </a:xfrm>
+          <a:prstGeom prst="rect">
+            <a:avLst/>
+          </a:prstGeom>
+          <a:solidFill>
+            <a:srgbClr val="E2E8F0"/>
+          </a:solidFill>
+          <a:ln>
+            <a:noFill/>
+          </a:ln>
+        </p:spPr>
+        <p:style>
+          <a:lnRef idx="1">
+            <a:schemeClr val="accent1"/>
+          </a:lnRef>
+          <a:fillRef idx="3">
+            <a:schemeClr val="accent1"/>
+          </a:fillRef>
+          <a:effectRef idx="2">
+            <a:schemeClr val="accent1"/>
+          </a:effectRef>
+          <a:fontRef idx="minor">
+            <a:schemeClr val="lt1"/>
+          </a:fontRef>
+        </p:style>
+        <p:txBody>
+          <a:bodyPr rtlCol="0" anchor="ctr"/>
+          <a:lstStyle/>
+          <a:p>
+            <a:pPr algn="ctr"/>
           </a:p>
         </p:txBody>
       </p:sp>
       <p:graphicFrame>
         <p:nvGraphicFramePr>
-          <p:cNvPr id="5" name="Table 4"/>
+          <p:cNvPr id="7" name="Table 6"/>
           <p:cNvGraphicFramePr>
             <a:graphicFrameLocks noGrp="1"/>
           </p:cNvGraphicFramePr>
           <p:nvPr/>
         </p:nvGraphicFramePr>
         <p:xfrm>
-          <a:off x="548640" y="1554480"/>
-          <a:ext cx="11064240" cy="4023360"/>
+          <a:off x="731520" y="1417320"/>
+          <a:ext cx="10728655" cy="4297680"/>
         </p:xfrm>
         <a:graphic>
           <a:graphicData uri="http://schemas.openxmlformats.org/drawingml/2006/table">
@@ -5867,30 +6027,31 @@
               </a:tblPr>
               <a:tblGrid>
                 <a:gridCol w="2926080"/>
-                <a:gridCol w="4023360"/>
-                <a:gridCol w="4114800"/>
+                <a:gridCol w="3840480"/>
+                <a:gridCol w="3962095"/>
               </a:tblGrid>
-              <a:tr h="804672">
+              <a:tr h="859536">
                 <a:tc>
                   <a:txBody>
                     <a:bodyPr/>
                     <a:lstStyle/>
                     <a:p>
                       <a:pPr>
-                        <a:defRPr b="1" sz="1100">
+                        <a:defRPr sz="1100" b="1">
                           <a:solidFill>
-                            <a:srgbClr val="FFD166"/>
+                            <a:srgbClr val="FFFFFF"/>
                           </a:solidFill>
+                          <a:latin typeface="Arial"/>
                         </a:defRPr>
                       </a:pPr>
                       <a:r>
-                        <a:t>Masalah Utama (Gejala)</a:t>
+                        <a:t>Masalah Utama (Gejala Lapangan)</a:t>
                       </a:r>
                     </a:p>
                   </a:txBody>
                   <a:tcPr>
                     <a:solidFill>
-                      <a:srgbClr val="580B13"/>
+                      <a:srgbClr val="980517"/>
                     </a:solidFill>
                   </a:tcPr>
                 </a:tc>
@@ -5900,20 +6061,21 @@
                     <a:lstStyle/>
                     <a:p>
                       <a:pPr>
-                        <a:defRPr b="1" sz="1100">
+                        <a:defRPr sz="1100" b="1">
                           <a:solidFill>
-                            <a:srgbClr val="FFD166"/>
+                            <a:srgbClr val="FFFFFF"/>
                           </a:solidFill>
+                          <a:latin typeface="Arial"/>
                         </a:defRPr>
                       </a:pPr>
                       <a:r>
-                        <a:t>Analisis Akar Penyebab (Root Cause)</a:t>
+                        <a:t>Akar Penyebab Masalah (Root Cause)</a:t>
                       </a:r>
                     </a:p>
                   </a:txBody>
                   <a:tcPr>
                     <a:solidFill>
-                      <a:srgbClr val="580B13"/>
+                      <a:srgbClr val="980517"/>
                     </a:solidFill>
                   </a:tcPr>
                 </a:tc>
@@ -5923,45 +6085,47 @@
                     <a:lstStyle/>
                     <a:p>
                       <a:pPr>
-                        <a:defRPr b="1" sz="1100">
+                        <a:defRPr sz="1100" b="1">
                           <a:solidFill>
-                            <a:srgbClr val="FFD166"/>
+                            <a:srgbClr val="FFFFFF"/>
                           </a:solidFill>
+                          <a:latin typeface="Arial"/>
                         </a:defRPr>
                       </a:pPr>
                       <a:r>
-                        <a:t>Dampak terhadap Biaya, Waktu, Stok &amp; Pelayanan</a:t>
+                        <a:t>Dampak terhadap Biaya, Waktu, Stok &amp; Layanan</a:t>
                       </a:r>
                     </a:p>
                   </a:txBody>
                   <a:tcPr>
                     <a:solidFill>
-                      <a:srgbClr val="580B13"/>
+                      <a:srgbClr val="980517"/>
                     </a:solidFill>
                   </a:tcPr>
                 </a:tc>
               </a:tr>
-              <a:tr h="804672">
+              <a:tr h="859536">
                 <a:tc>
                   <a:txBody>
                     <a:bodyPr/>
                     <a:lstStyle/>
                     <a:p>
                       <a:pPr>
-                        <a:defRPr sz="950" b="1">
+                        <a:defRPr sz="1000" b="1">
                           <a:solidFill>
-                            <a:srgbClr val="580B13"/>
+                            <a:srgbClr val="980517"/>
                           </a:solidFill>
+                          <a:latin typeface="Calibri"/>
                         </a:defRPr>
                       </a:pPr>
                       <a:r>
-                        <a:t>1. Ketidakcocokan Ukuran &amp; Dead-Stock</a:t>
+                        <a:t>1. Ketidakcocokan Ukuran &amp; Penumpukan Dead-Stock</a:t>
                       </a:r>
                     </a:p>
                   </a:txBody>
                   <a:tcPr>
                     <a:solidFill>
-                      <a:srgbClr val="FFFFFF"/>
+                      <a:srgbClr val="F8FAFC"/>
                     </a:solidFill>
                   </a:tcPr>
                 </a:tc>
@@ -5971,20 +6135,21 @@
                     <a:lstStyle/>
                     <a:p>
                       <a:pPr>
-                        <a:defRPr sz="950">
+                        <a:defRPr sz="1000">
                           <a:solidFill>
-                            <a:srgbClr val="1E293B"/>
+                            <a:srgbClr val="0F172A"/>
                           </a:solidFill>
+                          <a:latin typeface="Calibri"/>
                         </a:defRPr>
                       </a:pPr>
                       <a:r>
-                        <a:t>Pemesanan ke pabrik hanya estimasi historis tanpa survey ukuran mandiri mahasiswa sebelum tender.</a:t>
+                        <a:t>Pemesanan pengadaan ke vendor pabrik hanya menggunakan tebakan rasio historis. Tidak ada sistem survey profil ukuran mandiri sebelum tender dibuka.</a:t>
                       </a:r>
                     </a:p>
                   </a:txBody>
                   <a:tcPr>
                     <a:solidFill>
-                      <a:srgbClr val="FFFFFF"/>
+                      <a:srgbClr val="F8FAFC"/>
                     </a:solidFill>
                   </a:tcPr>
                 </a:tc>
@@ -5994,45 +6159,47 @@
                     <a:lstStyle/>
                     <a:p>
                       <a:pPr>
-                        <a:defRPr sz="950">
+                        <a:defRPr sz="1000">
                           <a:solidFill>
-                            <a:srgbClr val="1E293B"/>
+                            <a:srgbClr val="0F172A"/>
                           </a:solidFill>
+                          <a:latin typeface="Calibri"/>
                         </a:defRPr>
                       </a:pPr>
                       <a:r>
-                        <a:t>Ukuran populer (M/L) ludes hari pertama, ukuran ekstrem menumpuk bertahun-tahun. Modal kampus mengendap jadi dead-stock.</a:t>
+                        <a:t>Dampak Stok &amp; Biaya: Ukuran favorit (M/L) habis pada hari pertama pembagian, ukuran ekstrem (XS, 3XL) menumpuk bertahun-tahun. Modal kampus mengendap menjadi dead-stock.</a:t>
                       </a:r>
                     </a:p>
                   </a:txBody>
                   <a:tcPr>
                     <a:solidFill>
-                      <a:srgbClr val="FFFFFF"/>
+                      <a:srgbClr val="F8FAFC"/>
                     </a:solidFill>
                   </a:tcPr>
                 </a:tc>
               </a:tr>
-              <a:tr h="804672">
+              <a:tr h="859536">
                 <a:tc>
                   <a:txBody>
                     <a:bodyPr/>
                     <a:lstStyle/>
                     <a:p>
                       <a:pPr>
-                        <a:defRPr sz="950" b="1">
+                        <a:defRPr sz="1000" b="1">
                           <a:solidFill>
-                            <a:srgbClr val="580B13"/>
+                            <a:srgbClr val="980517"/>
                           </a:solidFill>
+                          <a:latin typeface="Calibri"/>
                         </a:defRPr>
                       </a:pPr>
                       <a:r>
-                        <a:t>2. Excel Crash &amp; Broadcast Lambat</a:t>
+                        <a:t>2. File Excel Sering Crash &amp; Pengumuman Lambat</a:t>
                       </a:r>
                     </a:p>
                   </a:txBody>
                   <a:tcPr>
                     <a:solidFill>
-                      <a:srgbClr val="FDF4F5"/>
+                      <a:srgbClr val="FEF2F2"/>
                     </a:solidFill>
                   </a:tcPr>
                 </a:tc>
@@ -6042,20 +6209,21 @@
                     <a:lstStyle/>
                     <a:p>
                       <a:pPr>
-                        <a:defRPr sz="950">
+                        <a:defRPr sz="1000">
                           <a:solidFill>
-                            <a:srgbClr val="1E293B"/>
+                            <a:srgbClr val="0F172A"/>
                           </a:solidFill>
+                          <a:latin typeface="Calibri"/>
                         </a:defRPr>
                       </a:pPr>
                       <a:r>
-                        <a:t>Menggunakan spreadsheet Excel induk (~4.5 MB) dan broadcast jadwal dikirim manual per email.</a:t>
+                        <a:t>Departemen Keuangan memakai satu file spreadsheet raksasa (~4.5 MB, 19 sheet) untuk ribuan data mahasiswa. Pengiriman jadwal disebarkan manual via surel.</a:t>
                       </a:r>
                     </a:p>
                   </a:txBody>
                   <a:tcPr>
                     <a:solidFill>
-                      <a:srgbClr val="FDF4F5"/>
+                      <a:srgbClr val="FEF2F2"/>
                     </a:solidFill>
                   </a:tcPr>
                 </a:tc>
@@ -6065,45 +6233,47 @@
                     <a:lstStyle/>
                     <a:p>
                       <a:pPr>
-                        <a:defRPr sz="950">
+                        <a:defRPr sz="1000">
                           <a:solidFill>
-                            <a:srgbClr val="1E293B"/>
+                            <a:srgbClr val="0F172A"/>
                           </a:solidFill>
+                          <a:latin typeface="Calibri"/>
                         </a:defRPr>
                       </a:pPr>
                       <a:r>
-                        <a:t>Aplikasi sering not responding, rekap data berminggu-minggu, mahasiswa terlambat mengetahui sesi pengambilan.</a:t>
+                        <a:t>Dampak Waktu &amp; Layanan: Aplikasi sering not responding atau data korup. Rekapitulasi memakan waktu berminggu-minggu dan info jadwal terlambat diterima mahasiswa.</a:t>
                       </a:r>
                     </a:p>
                   </a:txBody>
                   <a:tcPr>
                     <a:solidFill>
-                      <a:srgbClr val="FDF4F5"/>
+                      <a:srgbClr val="FEF2F2"/>
                     </a:solidFill>
                   </a:tcPr>
                 </a:tc>
               </a:tr>
-              <a:tr h="804672">
+              <a:tr h="859536">
                 <a:tc>
                   <a:txBody>
                     <a:bodyPr/>
                     <a:lstStyle/>
                     <a:p>
                       <a:pPr>
-                        <a:defRPr sz="950" b="1">
+                        <a:defRPr sz="1000" b="1">
                           <a:solidFill>
-                            <a:srgbClr val="580B13"/>
+                            <a:srgbClr val="980517"/>
                           </a:solidFill>
+                          <a:latin typeface="Calibri"/>
                         </a:defRPr>
                       </a:pPr>
                       <a:r>
-                        <a:t>3. Bottleneck Loket &amp; Double-Claim</a:t>
+                        <a:t>3. Bottleneck Loket Posko &amp; Risiko Double-Claim</a:t>
                       </a:r>
                     </a:p>
                   </a:txBody>
                   <a:tcPr>
                     <a:solidFill>
-                      <a:srgbClr val="FFFFFF"/>
+                      <a:srgbClr val="F8FAFC"/>
                     </a:solidFill>
                   </a:tcPr>
                 </a:tc>
@@ -6113,20 +6283,21 @@
                     <a:lstStyle/>
                     <a:p>
                       <a:pPr>
-                        <a:defRPr sz="950">
+                        <a:defRPr sz="1000">
                           <a:solidFill>
-                            <a:srgbClr val="1E293B"/>
+                            <a:srgbClr val="0F172A"/>
                           </a:solidFill>
+                          <a:latin typeface="Calibri"/>
                         </a:defRPr>
                       </a:pPr>
                       <a:r>
-                        <a:t>Validasi lunas dan checklist serah terima masih menggunakan formulir kertas manual.</a:t>
+                        <a:t>Pengecekan lunas, pencocokan hak prodi, dan paraf bukti serah terima dilakukan manual dengan mencentang map formulir kertas fisik.</a:t>
                       </a:r>
                     </a:p>
                   </a:txBody>
                   <a:tcPr>
                     <a:solidFill>
-                      <a:srgbClr val="FFFFFF"/>
+                      <a:srgbClr val="F8FAFC"/>
                     </a:solidFill>
                   </a:tcPr>
                 </a:tc>
@@ -6136,45 +6307,47 @@
                     <a:lstStyle/>
                     <a:p>
                       <a:pPr>
-                        <a:defRPr sz="950">
+                        <a:defRPr sz="1000">
                           <a:solidFill>
-                            <a:srgbClr val="1E293B"/>
+                            <a:srgbClr val="0F172A"/>
                           </a:solidFill>
+                          <a:latin typeface="Calibri"/>
                         </a:defRPr>
                       </a:pPr>
                       <a:r>
-                        <a:t>Waktu layan sangat lambat (15-20 menit/orang), antrean berjam-jam, serta rawan klaim ganda di loket/hari berbeda.</a:t>
+                        <a:t>Dampak Waktu &amp; Akurasi: Waktu pelayanan lambat (15–20 menit per orang), antrean ratusan meter, serta rawan klaim ganda (double-claim) di loket atau hari berbeda.</a:t>
                       </a:r>
                     </a:p>
                   </a:txBody>
                   <a:tcPr>
                     <a:solidFill>
-                      <a:srgbClr val="FFFFFF"/>
+                      <a:srgbClr val="F8FAFC"/>
                     </a:solidFill>
                   </a:tcPr>
                 </a:tc>
               </a:tr>
-              <a:tr h="804672">
+              <a:tr h="859536">
                 <a:tc>
                   <a:txBody>
                     <a:bodyPr/>
                     <a:lstStyle/>
                     <a:p>
                       <a:pPr>
-                        <a:defRPr sz="950" b="1">
+                        <a:defRPr sz="1000" b="1">
                           <a:solidFill>
-                            <a:srgbClr val="580B13"/>
+                            <a:srgbClr val="980517"/>
                           </a:solidFill>
+                          <a:latin typeface="Calibri"/>
                         </a:defRPr>
                       </a:pPr>
                       <a:r>
-                        <a:t>4. Susut Stok Liar &amp; HPP Buram</a:t>
+                        <a:t>4. Susut Stok Liar &amp; Valuasi HPP Buram</a:t>
                       </a:r>
                     </a:p>
                   </a:txBody>
                   <a:tcPr>
                     <a:solidFill>
-                      <a:srgbClr val="FDF4F5"/>
+                      <a:srgbClr val="FEF2F2"/>
                     </a:solidFill>
                   </a:tcPr>
                 </a:tc>
@@ -6184,20 +6357,21 @@
                     <a:lstStyle/>
                     <a:p>
                       <a:pPr>
-                        <a:defRPr sz="950">
+                        <a:defRPr sz="1000">
                           <a:solidFill>
-                            <a:srgbClr val="1E293B"/>
+                            <a:srgbClr val="0F172A"/>
                           </a:solidFill>
+                          <a:latin typeface="Calibri"/>
                         </a:defRPr>
                       </a:pPr>
                       <a:r>
-                        <a:t>Penerimaan barang berbeda harga tidak dicatat per batch FIFO dan tanpa kartu stok otomatis.</a:t>
+                        <a:t>Penerimaan seragam dari vendor dengan harga berbeda tidak dicatat per batch FIFO dan tanpa kartu mutasi stok otomatis yang terikat ke transaksi loket.</a:t>
                       </a:r>
                     </a:p>
                   </a:txBody>
                   <a:tcPr>
                     <a:solidFill>
-                      <a:srgbClr val="FDF4F5"/>
+                      <a:srgbClr val="FEF2F2"/>
                     </a:solidFill>
                   </a:tcPr>
                 </a:tc>
@@ -6207,20 +6381,21 @@
                     <a:lstStyle/>
                     <a:p>
                       <a:pPr>
-                        <a:defRPr sz="950">
+                        <a:defRPr sz="1000">
                           <a:solidFill>
-                            <a:srgbClr val="1E293B"/>
+                            <a:srgbClr val="0F172A"/>
                           </a:solidFill>
+                          <a:latin typeface="Calibri"/>
                         </a:defRPr>
                       </a:pPr>
                       <a:r>
-                        <a:t>Selisih barang hilang tidak terlacak penanggungjawabnya, valuasi HPP dan laba kotor (GPM) terdistorsi.</a:t>
+                        <a:t>Dampak Biaya &amp; Akuntansi: Selisih barang susut (shrinkage) tidak terlacak penanggungjawabnya. Valuasi HPP dan analisis Gross Profit Margin (GPM) terdistorsi.</a:t>
                       </a:r>
                     </a:p>
                   </a:txBody>
                   <a:tcPr>
                     <a:solidFill>
-                      <a:srgbClr val="FDF4F5"/>
+                      <a:srgbClr val="FEF2F2"/>
                     </a:solidFill>
                   </a:tcPr>
                 </a:tc>
@@ -6231,24 +6406,24 @@
       </p:graphicFrame>
       <p:sp>
         <p:nvSpPr>
-          <p:cNvPr id="6" name="Rectangle 5"/>
+          <p:cNvPr id="8" name="Rounded Rectangle 7"/>
           <p:cNvSpPr/>
           <p:nvPr/>
         </p:nvSpPr>
         <p:spPr>
           <a:xfrm>
-            <a:off x="548640" y="5806440"/>
-            <a:ext cx="11064240" cy="685800"/>
+            <a:off x="731520" y="5870448"/>
+            <a:ext cx="10728655" cy="658368"/>
           </a:xfrm>
-          <a:prstGeom prst="rect">
+          <a:prstGeom prst="roundRect">
             <a:avLst/>
           </a:prstGeom>
           <a:solidFill>
-            <a:srgbClr val="580B13"/>
+            <a:srgbClr val="FEF2F2"/>
           </a:solidFill>
           <a:ln w="19050">
             <a:solidFill>
-              <a:srgbClr val="FFD166"/>
+              <a:srgbClr val="980517"/>
             </a:solidFill>
           </a:ln>
         </p:spPr>
@@ -6267,18 +6442,28 @@
           </a:fontRef>
         </p:style>
         <p:txBody>
-          <a:bodyPr rtlCol="0" anchor="ctr" wrap="square"/>
+          <a:bodyPr rtlCol="0" anchor="ctr" wrap="square" lIns="228600" rIns="228600"/>
           <a:lstStyle/>
           <a:p>
             <a:pPr algn="ctr">
-              <a:defRPr sz="1100" b="1">
-                <a:solidFill>
-                  <a:srgbClr val="FFFFFF"/>
-                </a:solidFill>
-              </a:defRPr>
-            </a:pPr>
-            <a:r>
-              <a:t>Akar Kegagalan Sistemik: Ketiadaan Single Source of Truth menyebabkan data silo, inefisiensi hulu-hilir, dan membahayakan akuntabilitas keuangan.</a:t>
+              <a:defRPr sz="1050" b="1">
+                <a:solidFill>
+                  <a:srgbClr val="980517"/>
+                </a:solidFill>
+                <a:latin typeface="Arial"/>
+              </a:defRPr>
+            </a:pPr>
+            <a:r>
+              <a:t>AKAR KEGAGALAN SISTEMIK: </a:t>
+            </a:r>
+            <a:r>
+              <a:rPr sz="1050">
+                <a:solidFill>
+                  <a:srgbClr val="0F172A"/>
+                </a:solidFill>
+                <a:latin typeface="Calibri"/>
+              </a:rPr>
+              <a:t>Ketiadaan Single Source of Truth berbasis database relasional menyebabkan silo data antar-staf, memicu kebocoran persediaan, dan membahayakan akuntabilitas keuangan.</a:t>
             </a:r>
           </a:p>
         </p:txBody>
@@ -6297,7 +6482,7 @@
     <p:bg>
       <p:bgPr>
         <a:solidFill>
-          <a:srgbClr val="F8FAFC"/>
+          <a:srgbClr val="FFFFFF"/>
         </a:solidFill>
         <a:effectLst/>
       </p:bgPr>
@@ -6311,189 +6496,20 @@
       <p:grpSpPr/>
       <p:sp>
         <p:nvSpPr>
-          <p:cNvPr id="2" name="Rounded Rectangle 1"/>
+          <p:cNvPr id="2" name="Rectangle 1"/>
           <p:cNvSpPr/>
           <p:nvPr/>
         </p:nvSpPr>
         <p:spPr>
           <a:xfrm>
-            <a:off x="548640" y="320040"/>
-            <a:ext cx="3291840" cy="320040"/>
-          </a:xfrm>
-          <a:prstGeom prst="roundRect">
-            <a:avLst/>
-          </a:prstGeom>
-          <a:solidFill>
-            <a:srgbClr val="580B13"/>
-          </a:solidFill>
-          <a:ln>
-            <a:solidFill>
-              <a:srgbClr val="580B13"/>
-            </a:solidFill>
-          </a:ln>
-        </p:spPr>
-        <p:style>
-          <a:lnRef idx="1">
-            <a:schemeClr val="accent1"/>
-          </a:lnRef>
-          <a:fillRef idx="3">
-            <a:schemeClr val="accent1"/>
-          </a:fillRef>
-          <a:effectRef idx="2">
-            <a:schemeClr val="accent1"/>
-          </a:effectRef>
-          <a:fontRef idx="minor">
-            <a:schemeClr val="lt1"/>
-          </a:fontRef>
-        </p:style>
-        <p:txBody>
-          <a:bodyPr rtlCol="0" anchor="ctr" wrap="square"/>
-          <a:lstStyle/>
-          <a:p>
-            <a:pPr algn="ctr">
-              <a:defRPr sz="1000" b="1">
-                <a:solidFill>
-                  <a:srgbClr val="FFD166"/>
-                </a:solidFill>
-              </a:defRPr>
-            </a:pPr>
-            <a:r>
-              <a:t>SLIDE 4 • INFORMATION FLOW ANALYSIS</a:t>
-            </a:r>
-          </a:p>
-        </p:txBody>
-      </p:sp>
-      <p:sp>
-        <p:nvSpPr>
-          <p:cNvPr id="3" name="TextBox 2"/>
-          <p:cNvSpPr txBox="1"/>
-          <p:nvPr/>
-        </p:nvSpPr>
-        <p:spPr>
-          <a:xfrm>
-            <a:off x="548640" y="685800"/>
-            <a:ext cx="11064240" cy="438912"/>
-          </a:xfrm>
-          <a:prstGeom prst="rect">
-            <a:avLst/>
-          </a:prstGeom>
-          <a:noFill/>
-        </p:spPr>
-        <p:txBody>
-          <a:bodyPr wrap="square">
-            <a:spAutoFit/>
-          </a:bodyPr>
-          <a:lstStyle/>
-          <a:p>
-            <a:pPr>
-              <a:defRPr sz="1900" b="1">
-                <a:solidFill>
-                  <a:srgbClr val="580B13"/>
-                </a:solidFill>
-              </a:defRPr>
-            </a:pPr>
-            <a:r>
-              <a:t>DIAGRAM ALIRAN INFORMASI &amp; TITIK KEMACETAN (AS-IS STATE)</a:t>
-            </a:r>
-          </a:p>
-        </p:txBody>
-      </p:sp>
-      <p:sp>
-        <p:nvSpPr>
-          <p:cNvPr id="4" name="TextBox 3"/>
-          <p:cNvSpPr txBox="1"/>
-          <p:nvPr/>
-        </p:nvSpPr>
-        <p:spPr>
-          <a:xfrm>
-            <a:off x="548640" y="1115568"/>
-            <a:ext cx="11064240" cy="347472"/>
-          </a:xfrm>
-          <a:prstGeom prst="rect">
-            <a:avLst/>
-          </a:prstGeom>
-          <a:noFill/>
-        </p:spPr>
-        <p:txBody>
-          <a:bodyPr wrap="square">
-            <a:spAutoFit/>
-          </a:bodyPr>
-          <a:lstStyle/>
-          <a:p>
-            <a:pPr>
-              <a:defRPr sz="1150">
-                <a:solidFill>
-                  <a:srgbClr val="475569"/>
-                </a:solidFill>
-              </a:defRPr>
-            </a:pPr>
-            <a:r>
-              <a:t>Identifikasi informasi kebutuhan stakeholder, asal-tujuan data, dan titik kritis informasi terlambat/terputus.</a:t>
-            </a:r>
-          </a:p>
-        </p:txBody>
-      </p:sp>
-      <p:sp>
-        <p:nvSpPr>
-          <p:cNvPr id="5" name="Rectangle 4"/>
-          <p:cNvSpPr/>
-          <p:nvPr/>
-        </p:nvSpPr>
-        <p:spPr>
-          <a:xfrm>
-            <a:off x="548640" y="1554480"/>
-            <a:ext cx="5349240" cy="1920240"/>
+            <a:off x="731520" y="365760"/>
+            <a:ext cx="73152" cy="777240"/>
           </a:xfrm>
           <a:prstGeom prst="rect">
             <a:avLst/>
           </a:prstGeom>
           <a:solidFill>
-            <a:srgbClr val="FFFFFF"/>
-          </a:solidFill>
-          <a:ln w="19050">
-            <a:solidFill>
-              <a:srgbClr val="6B0F1A"/>
-            </a:solidFill>
-          </a:ln>
-        </p:spPr>
-        <p:style>
-          <a:lnRef idx="1">
-            <a:schemeClr val="accent1"/>
-          </a:lnRef>
-          <a:fillRef idx="3">
-            <a:schemeClr val="accent1"/>
-          </a:fillRef>
-          <a:effectRef idx="2">
-            <a:schemeClr val="accent1"/>
-          </a:effectRef>
-          <a:fontRef idx="minor">
-            <a:schemeClr val="lt1"/>
-          </a:fontRef>
-        </p:style>
-        <p:txBody>
-          <a:bodyPr rtlCol="0" anchor="ctr"/>
-          <a:lstStyle/>
-          <a:p>
-            <a:pPr algn="ctr"/>
-          </a:p>
-        </p:txBody>
-      </p:sp>
-      <p:sp>
-        <p:nvSpPr>
-          <p:cNvPr id="6" name="Rectangle 5"/>
-          <p:cNvSpPr/>
-          <p:nvPr/>
-        </p:nvSpPr>
-        <p:spPr>
-          <a:xfrm>
-            <a:off x="548640" y="1554480"/>
-            <a:ext cx="5349240" cy="347472"/>
-          </a:xfrm>
-          <a:prstGeom prst="rect">
-            <a:avLst/>
-          </a:prstGeom>
-          <a:solidFill>
-            <a:srgbClr val="580B13"/>
+            <a:srgbClr val="980517"/>
           </a:solidFill>
           <a:ln>
             <a:noFill/>
@@ -6517,29 +6533,20 @@
           <a:bodyPr rtlCol="0" anchor="ctr"/>
           <a:lstStyle/>
           <a:p>
-            <a:pPr algn="ctr">
-              <a:defRPr sz="950" b="1">
-                <a:solidFill>
-                  <a:srgbClr val="FFD166"/>
-                </a:solidFill>
-              </a:defRPr>
-            </a:pPr>
-            <a:r>
-              <a:t>ALIRAN 01 • MAHASISWA ➔ KEUANGAN</a:t>
-            </a:r>
-          </a:p>
-        </p:txBody>
-      </p:sp>
-      <p:sp>
-        <p:nvSpPr>
-          <p:cNvPr id="7" name="TextBox 6"/>
+            <a:pPr algn="ctr"/>
+          </a:p>
+        </p:txBody>
+      </p:sp>
+      <p:sp>
+        <p:nvSpPr>
+          <p:cNvPr id="3" name="TextBox 2"/>
           <p:cNvSpPr txBox="1"/>
           <p:nvPr/>
         </p:nvSpPr>
         <p:spPr>
           <a:xfrm>
-            <a:off x="658368" y="1938528"/>
-            <a:ext cx="5129783" cy="1463040"/>
+            <a:off x="914400" y="320040"/>
+            <a:ext cx="10515600" cy="256032"/>
           </a:xfrm>
           <a:prstGeom prst="rect">
             <a:avLst/>
@@ -6553,95 +6560,107 @@
           <a:lstStyle/>
           <a:p>
             <a:pPr>
-              <a:defRPr sz="1250" b="1">
-                <a:solidFill>
-                  <a:srgbClr val="580B13"/>
-                </a:solidFill>
-              </a:defRPr>
-            </a:pPr>
-            <a:r>
-              <a:t>Kebutuhan: Profil Ukuran &amp; Jadwal</a:t>
-            </a:r>
-          </a:p>
-          <a:p>
-            <a:pPr>
-              <a:defRPr sz="1050">
-                <a:solidFill>
-                  <a:srgbClr val="1E293B"/>
-                </a:solidFill>
-              </a:defRPr>
-            </a:pPr>
-            <a:r>
-              <a:t>Asal &amp; Tujuan: Mahasiswa mengisi form ke kampus dan menerima jadwal via email.</a:t>
-            </a:r>
-            <a:br/>
-            <a:r>
-              <a:t>Titik Masalah: Form tidak terstandarisasi, input ganda, dan jadwal terlambat.</a:t>
-            </a:r>
-          </a:p>
-        </p:txBody>
-      </p:sp>
-      <p:sp>
-        <p:nvSpPr>
-          <p:cNvPr id="8" name="Rectangle 7"/>
+              <a:defRPr sz="1000" b="1">
+                <a:solidFill>
+                  <a:srgbClr val="980517"/>
+                </a:solidFill>
+                <a:latin typeface="Arial"/>
+              </a:defRPr>
+            </a:pPr>
+            <a:r>
+              <a:t>SLIDE 4 • INFORMATION FLOW ANALYSIS   |   RUBRIK: INFORMATION FLOW ANALYSIS (15%)</a:t>
+            </a:r>
+          </a:p>
+        </p:txBody>
+      </p:sp>
+      <p:sp>
+        <p:nvSpPr>
+          <p:cNvPr id="4" name="TextBox 3"/>
+          <p:cNvSpPr txBox="1"/>
+          <p:nvPr/>
+        </p:nvSpPr>
+        <p:spPr>
+          <a:xfrm>
+            <a:off x="914400" y="548640"/>
+            <a:ext cx="10515600" cy="411480"/>
+          </a:xfrm>
+          <a:prstGeom prst="rect">
+            <a:avLst/>
+          </a:prstGeom>
+          <a:noFill/>
+        </p:spPr>
+        <p:txBody>
+          <a:bodyPr wrap="square">
+            <a:spAutoFit/>
+          </a:bodyPr>
+          <a:lstStyle/>
+          <a:p>
+            <a:pPr>
+              <a:defRPr sz="2000" b="1">
+                <a:solidFill>
+                  <a:srgbClr val="0F172A"/>
+                </a:solidFill>
+                <a:latin typeface="Arial"/>
+              </a:defRPr>
+            </a:pPr>
+            <a:r>
+              <a:t>DIAGRAM ALIRAN INFORMASI &amp; TITIK KEMACETAN (AS-IS STATE)</a:t>
+            </a:r>
+          </a:p>
+        </p:txBody>
+      </p:sp>
+      <p:sp>
+        <p:nvSpPr>
+          <p:cNvPr id="5" name="TextBox 4"/>
+          <p:cNvSpPr txBox="1"/>
+          <p:nvPr/>
+        </p:nvSpPr>
+        <p:spPr>
+          <a:xfrm>
+            <a:off x="914400" y="960120"/>
+            <a:ext cx="10515600" cy="274320"/>
+          </a:xfrm>
+          <a:prstGeom prst="rect">
+            <a:avLst/>
+          </a:prstGeom>
+          <a:noFill/>
+        </p:spPr>
+        <p:txBody>
+          <a:bodyPr wrap="square">
+            <a:spAutoFit/>
+          </a:bodyPr>
+          <a:lstStyle/>
+          <a:p>
+            <a:pPr>
+              <a:defRPr sz="1150">
+                <a:solidFill>
+                  <a:srgbClr val="475569"/>
+                </a:solidFill>
+                <a:latin typeface="Calibri"/>
+              </a:defRPr>
+            </a:pPr>
+            <a:r>
+              <a:t>Identifikasi kebutuhan informasi stakeholder, asal-tujuan data, serta titik kritis informasi terlambat, tidak akurat, atau terputus.</a:t>
+            </a:r>
+          </a:p>
+        </p:txBody>
+      </p:sp>
+      <p:sp>
+        <p:nvSpPr>
+          <p:cNvPr id="6" name="Rectangle 5"/>
           <p:cNvSpPr/>
           <p:nvPr/>
         </p:nvSpPr>
         <p:spPr>
           <a:xfrm>
-            <a:off x="6263640" y="1554480"/>
-            <a:ext cx="5349240" cy="1920240"/>
+            <a:off x="731520" y="1261872"/>
+            <a:ext cx="10728655" cy="13716"/>
           </a:xfrm>
           <a:prstGeom prst="rect">
             <a:avLst/>
           </a:prstGeom>
           <a:solidFill>
-            <a:srgbClr val="FFFFFF"/>
-          </a:solidFill>
-          <a:ln w="19050">
-            <a:solidFill>
-              <a:srgbClr val="6B0F1A"/>
-            </a:solidFill>
-          </a:ln>
-        </p:spPr>
-        <p:style>
-          <a:lnRef idx="1">
-            <a:schemeClr val="accent1"/>
-          </a:lnRef>
-          <a:fillRef idx="3">
-            <a:schemeClr val="accent1"/>
-          </a:fillRef>
-          <a:effectRef idx="2">
-            <a:schemeClr val="accent1"/>
-          </a:effectRef>
-          <a:fontRef idx="minor">
-            <a:schemeClr val="lt1"/>
-          </a:fontRef>
-        </p:style>
-        <p:txBody>
-          <a:bodyPr rtlCol="0" anchor="ctr"/>
-          <a:lstStyle/>
-          <a:p>
-            <a:pPr algn="ctr"/>
-          </a:p>
-        </p:txBody>
-      </p:sp>
-      <p:sp>
-        <p:nvSpPr>
-          <p:cNvPr id="9" name="Rectangle 8"/>
-          <p:cNvSpPr/>
-          <p:nvPr/>
-        </p:nvSpPr>
-        <p:spPr>
-          <a:xfrm>
-            <a:off x="6263640" y="1554480"/>
-            <a:ext cx="5349240" cy="347472"/>
-          </a:xfrm>
-          <a:prstGeom prst="rect">
-            <a:avLst/>
-          </a:prstGeom>
-          <a:solidFill>
-            <a:srgbClr val="580B13"/>
+            <a:srgbClr val="E2E8F0"/>
           </a:solidFill>
           <a:ln>
             <a:noFill/>
@@ -6665,90 +6684,30 @@
           <a:bodyPr rtlCol="0" anchor="ctr"/>
           <a:lstStyle/>
           <a:p>
-            <a:pPr algn="ctr">
-              <a:defRPr sz="950" b="1">
-                <a:solidFill>
-                  <a:srgbClr val="FFD166"/>
-                </a:solidFill>
-              </a:defRPr>
-            </a:pPr>
-            <a:r>
-              <a:t>ALIRAN 02 • KEUANGAN ➔ POSKO HARI-H</a:t>
-            </a:r>
-          </a:p>
-        </p:txBody>
-      </p:sp>
-      <p:sp>
-        <p:nvSpPr>
-          <p:cNvPr id="10" name="TextBox 9"/>
-          <p:cNvSpPr txBox="1"/>
+            <a:pPr algn="ctr"/>
+          </a:p>
+        </p:txBody>
+      </p:sp>
+      <p:sp>
+        <p:nvSpPr>
+          <p:cNvPr id="7" name="Rounded Rectangle 6"/>
+          <p:cNvSpPr/>
           <p:nvPr/>
         </p:nvSpPr>
         <p:spPr>
           <a:xfrm>
-            <a:off x="6373368" y="1938528"/>
-            <a:ext cx="5129783" cy="1463040"/>
+            <a:off x="731520" y="1417320"/>
+            <a:ext cx="5257800" cy="2057400"/>
           </a:xfrm>
-          <a:prstGeom prst="rect">
-            <a:avLst/>
-          </a:prstGeom>
-          <a:noFill/>
-        </p:spPr>
-        <p:txBody>
-          <a:bodyPr wrap="square">
-            <a:spAutoFit/>
-          </a:bodyPr>
-          <a:lstStyle/>
-          <a:p>
-            <a:pPr>
-              <a:defRPr sz="1250" b="1">
-                <a:solidFill>
-                  <a:srgbClr val="580B13"/>
-                </a:solidFill>
-              </a:defRPr>
-            </a:pPr>
-            <a:r>
-              <a:t>Kebutuhan: Status Lunas (Eligibility)</a:t>
-            </a:r>
-          </a:p>
-          <a:p>
-            <a:pPr>
-              <a:defRPr sz="1050">
-                <a:solidFill>
-                  <a:srgbClr val="1E293B"/>
-                </a:solidFill>
-              </a:defRPr>
-            </a:pPr>
-            <a:r>
-              <a:t>Asal &amp; Tujuan: Keuangan mengekspor status bayar mahasiswa ke posko.</a:t>
-            </a:r>
-            <a:br/>
-            <a:r>
-              <a:t>Titik Masalah: Data terisolasi di Excel lokal, posko tidak terupdate jika ada pelunasan baru.</a:t>
-            </a:r>
-          </a:p>
-        </p:txBody>
-      </p:sp>
-      <p:sp>
-        <p:nvSpPr>
-          <p:cNvPr id="11" name="Rectangle 10"/>
-          <p:cNvSpPr/>
-          <p:nvPr/>
-        </p:nvSpPr>
-        <p:spPr>
-          <a:xfrm>
-            <a:off x="548640" y="3657600"/>
-            <a:ext cx="5349240" cy="1920240"/>
-          </a:xfrm>
-          <a:prstGeom prst="rect">
+          <a:prstGeom prst="roundRect">
             <a:avLst/>
           </a:prstGeom>
           <a:solidFill>
-            <a:srgbClr val="FFFFFF"/>
+            <a:srgbClr val="F8FAFC"/>
           </a:solidFill>
-          <a:ln w="19050">
+          <a:ln w="12700">
             <a:solidFill>
-              <a:srgbClr val="6B0F1A"/>
+              <a:srgbClr val="E2E8F0"/>
             </a:solidFill>
           </a:ln>
         </p:spPr>
@@ -6767,32 +6726,108 @@
           </a:fontRef>
         </p:style>
         <p:txBody>
-          <a:bodyPr rtlCol="0" anchor="ctr"/>
-          <a:lstStyle/>
-          <a:p>
-            <a:pPr algn="ctr"/>
-          </a:p>
-        </p:txBody>
-      </p:sp>
-      <p:sp>
-        <p:nvSpPr>
-          <p:cNvPr id="12" name="Rectangle 11"/>
+          <a:bodyPr rtlCol="0" anchor="t" wrap="square" lIns="182880" rIns="182880" tIns="164592" bIns="137160"/>
+          <a:lstStyle/>
+          <a:p>
+            <a:pPr algn="ctr">
+              <a:defRPr sz="950" b="1">
+                <a:solidFill>
+                  <a:srgbClr val="980517"/>
+                </a:solidFill>
+                <a:latin typeface="Arial"/>
+              </a:defRPr>
+            </a:pPr>
+            <a:r>
+              <a:t>ALIRAN 01 • MAHASISWA ➔ KAMPUS</a:t>
+            </a:r>
+          </a:p>
+          <a:p>
+            <a:pPr>
+              <a:spcAft>
+                <a:spcPts val="600"/>
+              </a:spcAft>
+              <a:defRPr sz="1300" b="1">
+                <a:solidFill>
+                  <a:srgbClr val="0F172A"/>
+                </a:solidFill>
+                <a:latin typeface="Arial"/>
+              </a:defRPr>
+            </a:pPr>
+            <a:r>
+              <a:t>Kebutuhan: Profil Ukuran &amp; Jadwal</a:t>
+            </a:r>
+          </a:p>
+          <a:p>
+            <a:pPr>
+              <a:spcAft>
+                <a:spcPts val="400"/>
+              </a:spcAft>
+              <a:defRPr sz="1050">
+                <a:solidFill>
+                  <a:srgbClr val="0F172A"/>
+                </a:solidFill>
+                <a:latin typeface="Calibri"/>
+              </a:defRPr>
+            </a:pPr>
+            <a:r>
+              <a:t>•  Asal &amp; Tujuan: Mahasiswa mengisi form ke kampus dan menerima jadwal pembagian via email.</a:t>
+            </a:r>
+          </a:p>
+          <a:p>
+            <a:pPr>
+              <a:spcAft>
+                <a:spcPts val="400"/>
+              </a:spcAft>
+              <a:defRPr sz="1050">
+                <a:solidFill>
+                  <a:srgbClr val="0F172A"/>
+                </a:solidFill>
+                <a:latin typeface="Calibri"/>
+              </a:defRPr>
+            </a:pPr>
+            <a:r>
+              <a:t>•  Titik Masalah: Google Form terpisah tanpa validasi SKU baku, memicu input ganda dan rekap manual staf terlambat berminggu-minggu.</a:t>
+            </a:r>
+          </a:p>
+          <a:p>
+            <a:pPr>
+              <a:spcBef>
+                <a:spcPts val="400"/>
+              </a:spcBef>
+              <a:defRPr sz="1000" b="1">
+                <a:solidFill>
+                  <a:srgbClr val="980517"/>
+                </a:solidFill>
+                <a:latin typeface="Calibri"/>
+              </a:defRPr>
+            </a:pPr>
+            <a:r>
+              <a:t>➔  Kondisi: Informasi Terlambat &amp; Format Liar</a:t>
+            </a:r>
+          </a:p>
+        </p:txBody>
+      </p:sp>
+      <p:sp>
+        <p:nvSpPr>
+          <p:cNvPr id="8" name="Rounded Rectangle 7"/>
           <p:cNvSpPr/>
           <p:nvPr/>
         </p:nvSpPr>
         <p:spPr>
           <a:xfrm>
-            <a:off x="548640" y="3657600"/>
-            <a:ext cx="5349240" cy="347472"/>
+            <a:off x="6199632" y="1417320"/>
+            <a:ext cx="5257800" cy="2057400"/>
           </a:xfrm>
-          <a:prstGeom prst="rect">
+          <a:prstGeom prst="roundRect">
             <a:avLst/>
           </a:prstGeom>
           <a:solidFill>
-            <a:srgbClr val="580B13"/>
+            <a:srgbClr val="FEF2F2"/>
           </a:solidFill>
-          <a:ln>
-            <a:noFill/>
+          <a:ln w="19050">
+            <a:solidFill>
+              <a:srgbClr val="980517"/>
+            </a:solidFill>
           </a:ln>
         </p:spPr>
         <p:style>
@@ -6810,93 +6845,107 @@
           </a:fontRef>
         </p:style>
         <p:txBody>
-          <a:bodyPr rtlCol="0" anchor="ctr"/>
+          <a:bodyPr rtlCol="0" anchor="t" wrap="square" lIns="182880" rIns="182880" tIns="164592" bIns="137160"/>
           <a:lstStyle/>
           <a:p>
             <a:pPr algn="ctr">
               <a:defRPr sz="950" b="1">
                 <a:solidFill>
-                  <a:srgbClr val="FFD166"/>
-                </a:solidFill>
-              </a:defRPr>
-            </a:pPr>
-            <a:r>
-              <a:t>ALIRAN 03 • POSKO ➔ GUDANG &amp; SISWA</a:t>
-            </a:r>
-          </a:p>
-        </p:txBody>
-      </p:sp>
-      <p:sp>
-        <p:nvSpPr>
-          <p:cNvPr id="13" name="TextBox 12"/>
-          <p:cNvSpPr txBox="1"/>
+                  <a:srgbClr val="980517"/>
+                </a:solidFill>
+                <a:latin typeface="Arial"/>
+              </a:defRPr>
+            </a:pPr>
+            <a:r>
+              <a:t>ALIRAN 02 • KEUANGAN ➔ POSKO HARI-H</a:t>
+            </a:r>
+          </a:p>
+          <a:p>
+            <a:pPr>
+              <a:spcAft>
+                <a:spcPts val="600"/>
+              </a:spcAft>
+              <a:defRPr sz="1300" b="1">
+                <a:solidFill>
+                  <a:srgbClr val="0F172A"/>
+                </a:solidFill>
+                <a:latin typeface="Arial"/>
+              </a:defRPr>
+            </a:pPr>
+            <a:r>
+              <a:t>Kebutuhan: Status Lunas (Eligibility)</a:t>
+            </a:r>
+          </a:p>
+          <a:p>
+            <a:pPr>
+              <a:spcAft>
+                <a:spcPts val="400"/>
+              </a:spcAft>
+              <a:defRPr sz="1050">
+                <a:solidFill>
+                  <a:srgbClr val="0F172A"/>
+                </a:solidFill>
+                <a:latin typeface="Calibri"/>
+              </a:defRPr>
+            </a:pPr>
+            <a:r>
+              <a:t>•  Asal &amp; Tujuan: Staf Keuangan mengekspor data lunas ke staf meja posko pembagian seragam.</a:t>
+            </a:r>
+          </a:p>
+          <a:p>
+            <a:pPr>
+              <a:spcAft>
+                <a:spcPts val="400"/>
+              </a:spcAft>
+              <a:defRPr sz="1050">
+                <a:solidFill>
+                  <a:srgbClr val="0F172A"/>
+                </a:solidFill>
+                <a:latin typeface="Calibri"/>
+              </a:defRPr>
+            </a:pPr>
+            <a:r>
+              <a:t>•  Titik Masalah: Data terisolasi di file Excel lokal staf. Saat ada pelunasan baru di bank pada hari-H, staf posko tidak terupdate sehingga maba tertolak.</a:t>
+            </a:r>
+          </a:p>
+          <a:p>
+            <a:pPr>
+              <a:spcBef>
+                <a:spcPts val="400"/>
+              </a:spcBef>
+              <a:defRPr sz="1000" b="1">
+                <a:solidFill>
+                  <a:srgbClr val="980517"/>
+                </a:solidFill>
+                <a:latin typeface="Calibri"/>
+              </a:defRPr>
+            </a:pPr>
+            <a:r>
+              <a:t>➔  Kondisi: Informasi Terputus (Silo Data Lokal)</a:t>
+            </a:r>
+          </a:p>
+        </p:txBody>
+      </p:sp>
+      <p:sp>
+        <p:nvSpPr>
+          <p:cNvPr id="9" name="Rounded Rectangle 8"/>
+          <p:cNvSpPr/>
           <p:nvPr/>
         </p:nvSpPr>
         <p:spPr>
           <a:xfrm>
-            <a:off x="658368" y="4041648"/>
-            <a:ext cx="5129783" cy="1463040"/>
+            <a:off x="731520" y="3657600"/>
+            <a:ext cx="5257800" cy="2057400"/>
           </a:xfrm>
-          <a:prstGeom prst="rect">
-            <a:avLst/>
-          </a:prstGeom>
-          <a:noFill/>
-        </p:spPr>
-        <p:txBody>
-          <a:bodyPr wrap="square">
-            <a:spAutoFit/>
-          </a:bodyPr>
-          <a:lstStyle/>
-          <a:p>
-            <a:pPr>
-              <a:defRPr sz="1250" b="1">
-                <a:solidFill>
-                  <a:srgbClr val="580B13"/>
-                </a:solidFill>
-              </a:defRPr>
-            </a:pPr>
-            <a:r>
-              <a:t>Kebutuhan: Kuota Hak &amp; Kartu Stok</a:t>
-            </a:r>
-          </a:p>
-          <a:p>
-            <a:pPr>
-              <a:defRPr sz="1050">
-                <a:solidFill>
-                  <a:srgbClr val="1E293B"/>
-                </a:solidFill>
-              </a:defRPr>
-            </a:pPr>
-            <a:r>
-              <a:t>Asal &amp; Tujuan: Posko verifikasi hak paket prodi dan mencatat mutasi stok.</a:t>
-            </a:r>
-            <a:br/>
-            <a:r>
-              <a:t>Titik Masalah: Serah terima dicatat di kertas, mutasi stok terlambat direkap, picu stock shrinkage.</a:t>
-            </a:r>
-          </a:p>
-        </p:txBody>
-      </p:sp>
-      <p:sp>
-        <p:nvSpPr>
-          <p:cNvPr id="14" name="Rectangle 13"/>
-          <p:cNvSpPr/>
-          <p:nvPr/>
-        </p:nvSpPr>
-        <p:spPr>
-          <a:xfrm>
-            <a:off x="6263640" y="3657600"/>
-            <a:ext cx="5349240" cy="1920240"/>
-          </a:xfrm>
-          <a:prstGeom prst="rect">
+          <a:prstGeom prst="roundRect">
             <a:avLst/>
           </a:prstGeom>
           <a:solidFill>
-            <a:srgbClr val="FFFFFF"/>
+            <a:srgbClr val="F8FAFC"/>
           </a:solidFill>
-          <a:ln w="19050">
+          <a:ln w="12700">
             <a:solidFill>
-              <a:srgbClr val="6B0F1A"/>
+              <a:srgbClr val="E2E8F0"/>
             </a:solidFill>
           </a:ln>
         </p:spPr>
@@ -6915,32 +6964,108 @@
           </a:fontRef>
         </p:style>
         <p:txBody>
-          <a:bodyPr rtlCol="0" anchor="ctr"/>
-          <a:lstStyle/>
-          <a:p>
-            <a:pPr algn="ctr"/>
-          </a:p>
-        </p:txBody>
-      </p:sp>
-      <p:sp>
-        <p:nvSpPr>
-          <p:cNvPr id="15" name="Rectangle 14"/>
+          <a:bodyPr rtlCol="0" anchor="t" wrap="square" lIns="182880" rIns="182880" tIns="164592" bIns="137160"/>
+          <a:lstStyle/>
+          <a:p>
+            <a:pPr algn="ctr">
+              <a:defRPr sz="950" b="1">
+                <a:solidFill>
+                  <a:srgbClr val="980517"/>
+                </a:solidFill>
+                <a:latin typeface="Arial"/>
+              </a:defRPr>
+            </a:pPr>
+            <a:r>
+              <a:t>ALIRAN 03 • MEJA POSKO ➔ GUDANG</a:t>
+            </a:r>
+          </a:p>
+          <a:p>
+            <a:pPr>
+              <a:spcAft>
+                <a:spcPts val="600"/>
+              </a:spcAft>
+              <a:defRPr sz="1300" b="1">
+                <a:solidFill>
+                  <a:srgbClr val="0F172A"/>
+                </a:solidFill>
+                <a:latin typeface="Arial"/>
+              </a:defRPr>
+            </a:pPr>
+            <a:r>
+              <a:t>Kebutuhan: Kuota Hak &amp; Kartu Mutasi</a:t>
+            </a:r>
+          </a:p>
+          <a:p>
+            <a:pPr>
+              <a:spcAft>
+                <a:spcPts val="400"/>
+              </a:spcAft>
+              <a:defRPr sz="1050">
+                <a:solidFill>
+                  <a:srgbClr val="0F172A"/>
+                </a:solidFill>
+                <a:latin typeface="Calibri"/>
+              </a:defRPr>
+            </a:pPr>
+            <a:r>
+              <a:t>•  Asal &amp; Tujuan: Staf posko memverifikasi paket hak prodi dan mencatat mutasi seragam yang keluar.</a:t>
+            </a:r>
+          </a:p>
+          <a:p>
+            <a:pPr>
+              <a:spcAft>
+                <a:spcPts val="400"/>
+              </a:spcAft>
+              <a:defRPr sz="1050">
+                <a:solidFill>
+                  <a:srgbClr val="0F172A"/>
+                </a:solidFill>
+                <a:latin typeface="Calibri"/>
+              </a:defRPr>
+            </a:pPr>
+            <a:r>
+              <a:t>•  Titik Masalah: Penyerahan seragam dicatat di lembaran kertas. Pengurangan saldo stok gudang baru direkap malam hari, memicu risiko susut stok.</a:t>
+            </a:r>
+          </a:p>
+          <a:p>
+            <a:pPr>
+              <a:spcBef>
+                <a:spcPts val="400"/>
+              </a:spcBef>
+              <a:defRPr sz="1000" b="1">
+                <a:solidFill>
+                  <a:srgbClr val="980517"/>
+                </a:solidFill>
+                <a:latin typeface="Calibri"/>
+              </a:defRPr>
+            </a:pPr>
+            <a:r>
+              <a:t>➔  Kondisi: Informasi Terlambat (Paper-Based Tracking)</a:t>
+            </a:r>
+          </a:p>
+        </p:txBody>
+      </p:sp>
+      <p:sp>
+        <p:nvSpPr>
+          <p:cNvPr id="10" name="Rounded Rectangle 9"/>
           <p:cNvSpPr/>
           <p:nvPr/>
         </p:nvSpPr>
         <p:spPr>
           <a:xfrm>
-            <a:off x="6263640" y="3657600"/>
-            <a:ext cx="5349240" cy="347472"/>
+            <a:off x="6199632" y="3657600"/>
+            <a:ext cx="5257800" cy="2057400"/>
           </a:xfrm>
-          <a:prstGeom prst="rect">
+          <a:prstGeom prst="roundRect">
             <a:avLst/>
           </a:prstGeom>
           <a:solidFill>
-            <a:srgbClr val="580B13"/>
+            <a:srgbClr val="F8FAFC"/>
           </a:solidFill>
-          <a:ln>
-            <a:noFill/>
+          <a:ln w="12700">
+            <a:solidFill>
+              <a:srgbClr val="E2E8F0"/>
+            </a:solidFill>
           </a:ln>
         </p:spPr>
         <p:style>
@@ -6958,93 +7083,107 @@
           </a:fontRef>
         </p:style>
         <p:txBody>
-          <a:bodyPr rtlCol="0" anchor="ctr"/>
+          <a:bodyPr rtlCol="0" anchor="t" wrap="square" lIns="182880" rIns="182880" tIns="164592" bIns="137160"/>
           <a:lstStyle/>
           <a:p>
             <a:pPr algn="ctr">
               <a:defRPr sz="950" b="1">
                 <a:solidFill>
-                  <a:srgbClr val="FFD166"/>
-                </a:solidFill>
-              </a:defRPr>
-            </a:pPr>
-            <a:r>
-              <a:t>ALIRAN 04 • GUDANG ➔ VENDOR PABRIK</a:t>
-            </a:r>
-          </a:p>
-        </p:txBody>
-      </p:sp>
-      <p:sp>
-        <p:nvSpPr>
-          <p:cNvPr id="16" name="TextBox 15"/>
-          <p:cNvSpPr txBox="1"/>
+                  <a:srgbClr val="980517"/>
+                </a:solidFill>
+                <a:latin typeface="Arial"/>
+              </a:defRPr>
+            </a:pPr>
+            <a:r>
+              <a:t>ALIRAN 04 • PENGADAAN ➔ PABRIK</a:t>
+            </a:r>
+          </a:p>
+          <a:p>
+            <a:pPr>
+              <a:spcAft>
+                <a:spcPts val="600"/>
+              </a:spcAft>
+              <a:defRPr sz="1300" b="1">
+                <a:solidFill>
+                  <a:srgbClr val="0F172A"/>
+                </a:solidFill>
+                <a:latin typeface="Arial"/>
+              </a:defRPr>
+            </a:pPr>
+            <a:r>
+              <a:t>Kebutuhan: Purchase Order Agregat</a:t>
+            </a:r>
+          </a:p>
+          <a:p>
+            <a:pPr>
+              <a:spcAft>
+                <a:spcPts val="400"/>
+              </a:spcAft>
+              <a:defRPr sz="1050">
+                <a:solidFill>
+                  <a:srgbClr val="0F172A"/>
+                </a:solidFill>
+                <a:latin typeface="Calibri"/>
+              </a:defRPr>
+            </a:pPr>
+            <a:r>
+              <a:t>•  Asal &amp; Tujuan: Pengadaan kampus mengirim rincian jumlah potong seragam dan sepatu ke pabrik.</a:t>
+            </a:r>
+          </a:p>
+          <a:p>
+            <a:pPr>
+              <a:spcAft>
+                <a:spcPts val="400"/>
+              </a:spcAft>
+              <a:defRPr sz="1050">
+                <a:solidFill>
+                  <a:srgbClr val="0F172A"/>
+                </a:solidFill>
+                <a:latin typeface="Calibri"/>
+              </a:defRPr>
+            </a:pPr>
+            <a:r>
+              <a:t>•  Titik Masalah: Purchase Order ke pabrik hanya estimasi kasar tanpa dasar profil data riil maba, memicu lead-time penukaran barang berbulan-bulan.</a:t>
+            </a:r>
+          </a:p>
+          <a:p>
+            <a:pPr>
+              <a:spcBef>
+                <a:spcPts val="400"/>
+              </a:spcBef>
+              <a:defRPr sz="1000" b="1">
+                <a:solidFill>
+                  <a:srgbClr val="980517"/>
+                </a:solidFill>
+                <a:latin typeface="Calibri"/>
+              </a:defRPr>
+            </a:pPr>
+            <a:r>
+              <a:t>➔  Kondisi: Informasi Tidak Akurat (Blind Ordering)</a:t>
+            </a:r>
+          </a:p>
+        </p:txBody>
+      </p:sp>
+      <p:sp>
+        <p:nvSpPr>
+          <p:cNvPr id="11" name="Rounded Rectangle 10"/>
+          <p:cNvSpPr/>
           <p:nvPr/>
         </p:nvSpPr>
         <p:spPr>
           <a:xfrm>
-            <a:off x="6373368" y="4041648"/>
-            <a:ext cx="5129783" cy="1463040"/>
+            <a:off x="731520" y="5870448"/>
+            <a:ext cx="10728655" cy="658368"/>
           </a:xfrm>
-          <a:prstGeom prst="rect">
-            <a:avLst/>
-          </a:prstGeom>
-          <a:noFill/>
-        </p:spPr>
-        <p:txBody>
-          <a:bodyPr wrap="square">
-            <a:spAutoFit/>
-          </a:bodyPr>
-          <a:lstStyle/>
-          <a:p>
-            <a:pPr>
-              <a:defRPr sz="1250" b="1">
-                <a:solidFill>
-                  <a:srgbClr val="580B13"/>
-                </a:solidFill>
-              </a:defRPr>
-            </a:pPr>
-            <a:r>
-              <a:t>Kebutuhan: Purchase Order Agregat</a:t>
-            </a:r>
-          </a:p>
-          <a:p>
-            <a:pPr>
-              <a:defRPr sz="1050">
-                <a:solidFill>
-                  <a:srgbClr val="1E293B"/>
-                </a:solidFill>
-              </a:defRPr>
-            </a:pPr>
-            <a:r>
-              <a:t>Asal &amp; Tujuan: Pengadaan mengirim jumlah seragam/sepatu ke vendor pabrik.</a:t>
-            </a:r>
-            <a:br/>
-            <a:r>
-              <a:t>Titik Masalah: PO hanya estimasi kasar tanpa dasar profil data riil maba.</a:t>
-            </a:r>
-          </a:p>
-        </p:txBody>
-      </p:sp>
-      <p:sp>
-        <p:nvSpPr>
-          <p:cNvPr id="17" name="Rectangle 16"/>
-          <p:cNvSpPr/>
-          <p:nvPr/>
-        </p:nvSpPr>
-        <p:spPr>
-          <a:xfrm>
-            <a:off x="548640" y="5806440"/>
-            <a:ext cx="11064240" cy="685800"/>
-          </a:xfrm>
-          <a:prstGeom prst="rect">
+          <a:prstGeom prst="roundRect">
             <a:avLst/>
           </a:prstGeom>
           <a:solidFill>
-            <a:srgbClr val="580B13"/>
+            <a:srgbClr val="FEF2F2"/>
           </a:solidFill>
           <a:ln w="19050">
             <a:solidFill>
-              <a:srgbClr val="FFD166"/>
+              <a:srgbClr val="980517"/>
             </a:solidFill>
           </a:ln>
         </p:spPr>
@@ -7063,18 +7202,28 @@
           </a:fontRef>
         </p:style>
         <p:txBody>
-          <a:bodyPr rtlCol="0" anchor="ctr" wrap="square"/>
+          <a:bodyPr rtlCol="0" anchor="ctr" wrap="square" lIns="228600" rIns="228600"/>
           <a:lstStyle/>
           <a:p>
             <a:pPr algn="ctr">
-              <a:defRPr sz="1100" b="1">
-                <a:solidFill>
-                  <a:srgbClr val="FFFFFF"/>
-                </a:solidFill>
-              </a:defRPr>
-            </a:pPr>
-            <a:r>
-              <a:t>Diagnosa Kunci: Terjadi Information Latency dan Data Asymmetry akut yang menuntut platform web tunggal real-time.</a:t>
+              <a:defRPr sz="1050" b="1">
+                <a:solidFill>
+                  <a:srgbClr val="980517"/>
+                </a:solidFill>
+                <a:latin typeface="Arial"/>
+              </a:defRPr>
+            </a:pPr>
+            <a:r>
+              <a:t>DIAGNOSA KUNCI: </a:t>
+            </a:r>
+            <a:r>
+              <a:rPr sz="1050">
+                <a:solidFill>
+                  <a:srgbClr val="0F172A"/>
+                </a:solidFill>
+                <a:latin typeface="Calibri"/>
+              </a:rPr>
+              <a:t>Terjadi Information Latency dan Data Asymmetry akut yang melumpuhkan koordinasi antar-bagian. Solusi mutlak membutuhkan platform web tunggal terpusat.</a:t>
             </a:r>
           </a:p>
         </p:txBody>
@@ -7093,7 +7242,7 @@
     <p:bg>
       <p:bgPr>
         <a:solidFill>
-          <a:srgbClr val="F8FAFC"/>
+          <a:srgbClr val="FFFFFF"/>
         </a:solidFill>
         <a:effectLst/>
       </p:bgPr>
@@ -7107,25 +7256,23 @@
       <p:grpSpPr/>
       <p:sp>
         <p:nvSpPr>
-          <p:cNvPr id="2" name="Rounded Rectangle 1"/>
+          <p:cNvPr id="2" name="Rectangle 1"/>
           <p:cNvSpPr/>
           <p:nvPr/>
         </p:nvSpPr>
         <p:spPr>
           <a:xfrm>
-            <a:off x="548640" y="320040"/>
-            <a:ext cx="3291840" cy="320040"/>
+            <a:off x="731520" y="365760"/>
+            <a:ext cx="73152" cy="777240"/>
           </a:xfrm>
-          <a:prstGeom prst="roundRect">
+          <a:prstGeom prst="rect">
             <a:avLst/>
           </a:prstGeom>
           <a:solidFill>
-            <a:srgbClr val="580B13"/>
+            <a:srgbClr val="980517"/>
           </a:solidFill>
           <a:ln>
-            <a:solidFill>
-              <a:srgbClr val="580B13"/>
-            </a:solidFill>
+            <a:noFill/>
           </a:ln>
         </p:spPr>
         <p:style>
@@ -7143,19 +7290,10 @@
           </a:fontRef>
         </p:style>
         <p:txBody>
-          <a:bodyPr rtlCol="0" anchor="ctr" wrap="square"/>
-          <a:lstStyle/>
-          <a:p>
-            <a:pPr algn="ctr">
-              <a:defRPr sz="1000" b="1">
-                <a:solidFill>
-                  <a:srgbClr val="FFD166"/>
-                </a:solidFill>
-              </a:defRPr>
-            </a:pPr>
-            <a:r>
-              <a:t>SLIDE 5 • RECOMMENDED INFORMATION SYSTEMS</a:t>
-            </a:r>
+          <a:bodyPr rtlCol="0" anchor="ctr"/>
+          <a:lstStyle/>
+          <a:p>
+            <a:pPr algn="ctr"/>
           </a:p>
         </p:txBody>
       </p:sp>
@@ -7167,8 +7305,8 @@
         </p:nvSpPr>
         <p:spPr>
           <a:xfrm>
-            <a:off x="548640" y="685800"/>
-            <a:ext cx="11064240" cy="438912"/>
+            <a:off x="914400" y="320040"/>
+            <a:ext cx="10515600" cy="256032"/>
           </a:xfrm>
           <a:prstGeom prst="rect">
             <a:avLst/>
@@ -7182,14 +7320,15 @@
           <a:lstStyle/>
           <a:p>
             <a:pPr>
-              <a:defRPr sz="1900" b="1">
-                <a:solidFill>
-                  <a:srgbClr val="580B13"/>
-                </a:solidFill>
-              </a:defRPr>
-            </a:pPr>
-            <a:r>
-              <a:t>REKOMENDASI SISTEM INFORMASI: ARSITEKTUR HORIZONU UNIFORM</a:t>
+              <a:defRPr sz="1000" b="1">
+                <a:solidFill>
+                  <a:srgbClr val="980517"/>
+                </a:solidFill>
+                <a:latin typeface="Arial"/>
+              </a:defRPr>
+            </a:pPr>
+            <a:r>
+              <a:t>SLIDE 5 • RECOMMENDED INFORMATION SYSTEMS   |   RUBRIK: IS JUSTIFICATION (20%)</a:t>
             </a:r>
           </a:p>
         </p:txBody>
@@ -7202,8 +7341,8 @@
         </p:nvSpPr>
         <p:spPr>
           <a:xfrm>
-            <a:off x="548640" y="1115568"/>
-            <a:ext cx="11064240" cy="347472"/>
+            <a:off x="914400" y="548640"/>
+            <a:ext cx="10515600" cy="411480"/>
           </a:xfrm>
           <a:prstGeom prst="rect">
             <a:avLst/>
@@ -7217,29 +7356,109 @@
           <a:lstStyle/>
           <a:p>
             <a:pPr>
+              <a:defRPr sz="2000" b="1">
+                <a:solidFill>
+                  <a:srgbClr val="0F172A"/>
+                </a:solidFill>
+                <a:latin typeface="Arial"/>
+              </a:defRPr>
+            </a:pPr>
+            <a:r>
+              <a:t>REKOMENDASI SISTEM INFORMASI: EKOSISTEM HORIZONU UNIFORM</a:t>
+            </a:r>
+          </a:p>
+        </p:txBody>
+      </p:sp>
+      <p:sp>
+        <p:nvSpPr>
+          <p:cNvPr id="5" name="TextBox 4"/>
+          <p:cNvSpPr txBox="1"/>
+          <p:nvPr/>
+        </p:nvSpPr>
+        <p:spPr>
+          <a:xfrm>
+            <a:off x="914400" y="960120"/>
+            <a:ext cx="10515600" cy="274320"/>
+          </a:xfrm>
+          <a:prstGeom prst="rect">
+            <a:avLst/>
+          </a:prstGeom>
+          <a:noFill/>
+        </p:spPr>
+        <p:txBody>
+          <a:bodyPr wrap="square">
+            <a:spAutoFit/>
+          </a:bodyPr>
+          <a:lstStyle/>
+          <a:p>
+            <a:pPr>
               <a:defRPr sz="1150">
                 <a:solidFill>
                   <a:srgbClr val="475569"/>
                 </a:solidFill>
-              </a:defRPr>
-            </a:pPr>
-            <a:r>
-              <a:t>Pemilihan sistem spesifik (ERP, SCM, POS, WMS), justifikasi pemilihan, fungsi, dan manfaatnya.</a:t>
-            </a:r>
+                <a:latin typeface="Calibri"/>
+              </a:defRPr>
+            </a:pPr>
+            <a:r>
+              <a:t>Pemilihan sistem terpadu (ERP, SCM, POS, WMS), justifikasi integrasi, fungsi operasional, dan manfaat nyata terukur.</a:t>
+            </a:r>
+          </a:p>
+        </p:txBody>
+      </p:sp>
+      <p:sp>
+        <p:nvSpPr>
+          <p:cNvPr id="6" name="Rectangle 5"/>
+          <p:cNvSpPr/>
+          <p:nvPr/>
+        </p:nvSpPr>
+        <p:spPr>
+          <a:xfrm>
+            <a:off x="731520" y="1261872"/>
+            <a:ext cx="10728655" cy="13716"/>
+          </a:xfrm>
+          <a:prstGeom prst="rect">
+            <a:avLst/>
+          </a:prstGeom>
+          <a:solidFill>
+            <a:srgbClr val="E2E8F0"/>
+          </a:solidFill>
+          <a:ln>
+            <a:noFill/>
+          </a:ln>
+        </p:spPr>
+        <p:style>
+          <a:lnRef idx="1">
+            <a:schemeClr val="accent1"/>
+          </a:lnRef>
+          <a:fillRef idx="3">
+            <a:schemeClr val="accent1"/>
+          </a:fillRef>
+          <a:effectRef idx="2">
+            <a:schemeClr val="accent1"/>
+          </a:effectRef>
+          <a:fontRef idx="minor">
+            <a:schemeClr val="lt1"/>
+          </a:fontRef>
+        </p:style>
+        <p:txBody>
+          <a:bodyPr rtlCol="0" anchor="ctr"/>
+          <a:lstStyle/>
+          <a:p>
+            <a:pPr algn="ctr"/>
           </a:p>
         </p:txBody>
       </p:sp>
       <p:graphicFrame>
         <p:nvGraphicFramePr>
-          <p:cNvPr id="5" name="Table 4"/>
+          <p:cNvPr id="7" name="Table 6"/>
           <p:cNvGraphicFramePr>
             <a:graphicFrameLocks noGrp="1"/>
           </p:cNvGraphicFramePr>
           <p:nvPr/>
         </p:nvGraphicFramePr>
         <p:xfrm>
-          <a:off x="548640" y="1554480"/>
-          <a:ext cx="11064240" cy="4023360"/>
+          <a:off x="731520" y="1417320"/>
+          <a:ext cx="10728654" cy="4297680"/>
         </p:xfrm>
         <a:graphic>
           <a:graphicData uri="http://schemas.openxmlformats.org/drawingml/2006/table">
@@ -7249,31 +7468,32 @@
               </a:tblPr>
               <a:tblGrid>
                 <a:gridCol w="2286000"/>
-                <a:gridCol w="2743200"/>
-                <a:gridCol w="3840480"/>
-                <a:gridCol w="2194560"/>
+                <a:gridCol w="2651760"/>
+                <a:gridCol w="3749039"/>
+                <a:gridCol w="2041855"/>
               </a:tblGrid>
-              <a:tr h="804672">
+              <a:tr h="859536">
                 <a:tc>
                   <a:txBody>
                     <a:bodyPr/>
                     <a:lstStyle/>
                     <a:p>
                       <a:pPr>
-                        <a:defRPr b="1" sz="1100">
+                        <a:defRPr sz="1100" b="1">
                           <a:solidFill>
-                            <a:srgbClr val="FFD166"/>
+                            <a:srgbClr val="FFFFFF"/>
                           </a:solidFill>
+                          <a:latin typeface="Arial"/>
                         </a:defRPr>
                       </a:pPr>
                       <a:r>
-                        <a:t>Masalah Diselesaikan</a:t>
+                        <a:t>Masalah yang Diselesaikan</a:t>
                       </a:r>
                     </a:p>
                   </a:txBody>
                   <a:tcPr>
                     <a:solidFill>
-                      <a:srgbClr val="580B13"/>
+                      <a:srgbClr val="980517"/>
                     </a:solidFill>
                   </a:tcPr>
                 </a:tc>
@@ -7283,10 +7503,11 @@
                     <a:lstStyle/>
                     <a:p>
                       <a:pPr>
-                        <a:defRPr b="1" sz="1100">
+                        <a:defRPr sz="1100" b="1">
                           <a:solidFill>
-                            <a:srgbClr val="FFD166"/>
+                            <a:srgbClr val="FFFFFF"/>
                           </a:solidFill>
+                          <a:latin typeface="Arial"/>
                         </a:defRPr>
                       </a:pPr>
                       <a:r>
@@ -7296,7 +7517,7 @@
                   </a:txBody>
                   <a:tcPr>
                     <a:solidFill>
-                      <a:srgbClr val="580B13"/>
+                      <a:srgbClr val="980517"/>
                     </a:solidFill>
                   </a:tcPr>
                 </a:tc>
@@ -7306,10 +7527,11 @@
                     <a:lstStyle/>
                     <a:p>
                       <a:pPr>
-                        <a:defRPr b="1" sz="1100">
+                        <a:defRPr sz="1100" b="1">
                           <a:solidFill>
-                            <a:srgbClr val="FFD166"/>
+                            <a:srgbClr val="FFFFFF"/>
                           </a:solidFill>
+                          <a:latin typeface="Arial"/>
                         </a:defRPr>
                       </a:pPr>
                       <a:r>
@@ -7319,7 +7541,7 @@
                   </a:txBody>
                   <a:tcPr>
                     <a:solidFill>
-                      <a:srgbClr val="580B13"/>
+                      <a:srgbClr val="980517"/>
                     </a:solidFill>
                   </a:tcPr>
                 </a:tc>
@@ -7329,45 +7551,47 @@
                     <a:lstStyle/>
                     <a:p>
                       <a:pPr>
-                        <a:defRPr b="1" sz="1100">
+                        <a:defRPr sz="1100" b="1">
                           <a:solidFill>
-                            <a:srgbClr val="FFD166"/>
+                            <a:srgbClr val="FFFFFF"/>
                           </a:solidFill>
+                          <a:latin typeface="Arial"/>
                         </a:defRPr>
                       </a:pPr>
                       <a:r>
-                        <a:t>Manfaat Terukur</a:t>
+                        <a:t>Manfaat Nyata Terukur</a:t>
                       </a:r>
                     </a:p>
                   </a:txBody>
                   <a:tcPr>
                     <a:solidFill>
-                      <a:srgbClr val="580B13"/>
+                      <a:srgbClr val="980517"/>
                     </a:solidFill>
                   </a:tcPr>
                 </a:tc>
               </a:tr>
-              <a:tr h="804672">
+              <a:tr h="859536">
                 <a:tc>
                   <a:txBody>
                     <a:bodyPr/>
                     <a:lstStyle/>
                     <a:p>
                       <a:pPr>
-                        <a:defRPr sz="950" b="1">
+                        <a:defRPr sz="1000" b="1">
                           <a:solidFill>
-                            <a:srgbClr val="580B13"/>
+                            <a:srgbClr val="980517"/>
                           </a:solidFill>
+                          <a:latin typeface="Calibri"/>
                         </a:defRPr>
                       </a:pPr>
                       <a:r>
-                        <a:t>Excel Crash &amp; Data Terpecah</a:t>
+                        <a:t>Excel Crash &amp; Data Mahasiswa Terpecah</a:t>
                       </a:r>
                     </a:p>
                   </a:txBody>
                   <a:tcPr>
                     <a:solidFill>
-                      <a:srgbClr val="FFFFFF"/>
+                      <a:srgbClr val="F8FAFC"/>
                     </a:solidFill>
                   </a:tcPr>
                 </a:tc>
@@ -7377,20 +7601,21 @@
                     <a:lstStyle/>
                     <a:p>
                       <a:pPr>
-                        <a:defRPr sz="950">
+                        <a:defRPr sz="1000">
                           <a:solidFill>
-                            <a:srgbClr val="1E293B"/>
+                            <a:srgbClr val="0F172A"/>
                           </a:solidFill>
+                          <a:latin typeface="Calibri"/>
                         </a:defRPr>
                       </a:pPr>
                       <a:r>
-                        <a:t>ERP Master &amp; Entitlement Engine</a:t>
+                        <a:t>ERP Master &amp; Entitlement Engine (Database MySQL InnoDB)</a:t>
                       </a:r>
                     </a:p>
                   </a:txBody>
                   <a:tcPr>
                     <a:solidFill>
-                      <a:srgbClr val="FFFFFF"/>
+                      <a:srgbClr val="F8FAFC"/>
                     </a:solidFill>
                   </a:tcPr>
                 </a:tc>
@@ -7400,20 +7625,21 @@
                     <a:lstStyle/>
                     <a:p>
                       <a:pPr>
-                        <a:defRPr sz="950">
+                        <a:defRPr sz="1000">
                           <a:solidFill>
-                            <a:srgbClr val="1E293B"/>
+                            <a:srgbClr val="0F172A"/>
                           </a:solidFill>
+                          <a:latin typeface="Calibri"/>
                         </a:defRPr>
                       </a:pPr>
                       <a:r>
-                        <a:t>Kelola master data mahasiswa, base code SKU, import massal, dan kuota jatah paket seragam prodi.</a:t>
+                        <a:t>Mengelola master data mahasiswa, struktur base code 4-segmen, impor massal via Maatwebsite, serta matriks kuota hak (Entitlement) otomatis per jenjang dan prodi.</a:t>
                       </a:r>
                     </a:p>
                   </a:txBody>
                   <a:tcPr>
                     <a:solidFill>
-                      <a:srgbClr val="FFFFFF"/>
+                      <a:srgbClr val="F8FAFC"/>
                     </a:solidFill>
                   </a:tcPr>
                 </a:tc>
@@ -7423,45 +7649,47 @@
                     <a:lstStyle/>
                     <a:p>
                       <a:pPr>
-                        <a:defRPr sz="950">
+                        <a:defRPr sz="1000">
                           <a:solidFill>
-                            <a:srgbClr val="1E293B"/>
+                            <a:srgbClr val="0F172A"/>
                           </a:solidFill>
+                          <a:latin typeface="Calibri"/>
                         </a:defRPr>
                       </a:pPr>
                       <a:r>
-                        <a:t>100% bebas crash Excel, data terisolasi ACID.</a:t>
+                        <a:t>100% Bebas Crash Excel, data terisolasi ACID, single source of truth.</a:t>
                       </a:r>
                     </a:p>
                   </a:txBody>
                   <a:tcPr>
                     <a:solidFill>
-                      <a:srgbClr val="FFFFFF"/>
+                      <a:srgbClr val="F8FAFC"/>
                     </a:solidFill>
                   </a:tcPr>
                 </a:tc>
               </a:tr>
-              <a:tr h="804672">
+              <a:tr h="859536">
                 <a:tc>
                   <a:txBody>
                     <a:bodyPr/>
                     <a:lstStyle/>
                     <a:p>
                       <a:pPr>
-                        <a:defRPr sz="950" b="1">
+                        <a:defRPr sz="1000" b="1">
                           <a:solidFill>
-                            <a:srgbClr val="580B13"/>
+                            <a:srgbClr val="980517"/>
                           </a:solidFill>
+                          <a:latin typeface="Calibri"/>
                         </a:defRPr>
                       </a:pPr>
                       <a:r>
-                        <a:t>Dead-Stock &amp; Info Lambat</a:t>
+                        <a:t>Dead-Stock &amp; Pengumuman Jadwal Lambat</a:t>
                       </a:r>
                     </a:p>
                   </a:txBody>
                   <a:tcPr>
                     <a:solidFill>
-                      <a:srgbClr val="FDF4F5"/>
+                      <a:srgbClr val="FEF2F2"/>
                     </a:solidFill>
                   </a:tcPr>
                 </a:tc>
@@ -7471,20 +7699,21 @@
                     <a:lstStyle/>
                     <a:p>
                       <a:pPr>
-                        <a:defRPr sz="950">
+                        <a:defRPr sz="1000">
                           <a:solidFill>
-                            <a:srgbClr val="1E293B"/>
+                            <a:srgbClr val="0F172A"/>
                           </a:solidFill>
+                          <a:latin typeface="Calibri"/>
                         </a:defRPr>
                       </a:pPr>
                       <a:r>
-                        <a:t>SCM Demand Planning Portal</a:t>
+                        <a:t>SCM Demand Planning Portal (Size Event &amp; Announcement Hub)</a:t>
                       </a:r>
                     </a:p>
                   </a:txBody>
                   <a:tcPr>
                     <a:solidFill>
-                      <a:srgbClr val="FDF4F5"/>
+                      <a:srgbClr val="FEF2F2"/>
                     </a:solidFill>
                   </a:tcPr>
                 </a:tc>
@@ -7494,20 +7723,21 @@
                     <a:lstStyle/>
                     <a:p>
                       <a:pPr>
-                        <a:defRPr sz="950">
+                        <a:defRPr sz="1000">
                           <a:solidFill>
-                            <a:srgbClr val="1E293B"/>
+                            <a:srgbClr val="0F172A"/>
                           </a:solidFill>
+                          <a:latin typeface="Calibri"/>
                         </a:defRPr>
                       </a:pPr>
                       <a:r>
-                        <a:t>Portal input ukuran mandiri mahasiswa, siaran jadwal web, serta kalkulasi demand vs shortage otomatis.</a:t>
+                        <a:t>Membuka event input profil ukuran mandiri mahasiswa (SizeChangeEvent), siaran jadwal terfilter per prodi, serta kalkulasi otomatis Demand vs Shortage untuk tender vendor.</a:t>
                       </a:r>
                     </a:p>
                   </a:txBody>
                   <a:tcPr>
                     <a:solidFill>
-                      <a:srgbClr val="FDF4F5"/>
+                      <a:srgbClr val="FEF2F2"/>
                     </a:solidFill>
                   </a:tcPr>
                 </a:tc>
@@ -7517,45 +7747,47 @@
                     <a:lstStyle/>
                     <a:p>
                       <a:pPr>
-                        <a:defRPr sz="950">
+                        <a:defRPr sz="1000">
                           <a:solidFill>
-                            <a:srgbClr val="1E293B"/>
+                            <a:srgbClr val="0F172A"/>
                           </a:solidFill>
+                          <a:latin typeface="Calibri"/>
                         </a:defRPr>
                       </a:pPr>
                       <a:r>
-                        <a:t>Zero dead-stock pengadaan pabrik presisi 100%.</a:t>
+                        <a:t>Zero Dead-Stock, pengadaan pabrik presisi 100% sesuai ukuran riil.</a:t>
                       </a:r>
                     </a:p>
                   </a:txBody>
                   <a:tcPr>
                     <a:solidFill>
-                      <a:srgbClr val="FDF4F5"/>
+                      <a:srgbClr val="FEF2F2"/>
                     </a:solidFill>
                   </a:tcPr>
                 </a:tc>
               </a:tr>
-              <a:tr h="804672">
+              <a:tr h="859536">
                 <a:tc>
                   <a:txBody>
                     <a:bodyPr/>
                     <a:lstStyle/>
                     <a:p>
                       <a:pPr>
-                        <a:defRPr sz="950" b="1">
+                        <a:defRPr sz="1000" b="1">
                           <a:solidFill>
-                            <a:srgbClr val="580B13"/>
+                            <a:srgbClr val="980517"/>
                           </a:solidFill>
+                          <a:latin typeface="Calibri"/>
                         </a:defRPr>
                       </a:pPr>
                       <a:r>
-                        <a:t>Bottleneck Loket &amp; Double-Claim</a:t>
+                        <a:t>Bottleneck Antrean &amp; Risiko Double-Claim</a:t>
                       </a:r>
                     </a:p>
                   </a:txBody>
                   <a:tcPr>
                     <a:solidFill>
-                      <a:srgbClr val="FFFFFF"/>
+                      <a:srgbClr val="F8FAFC"/>
                     </a:solidFill>
                   </a:tcPr>
                 </a:tc>
@@ -7565,20 +7797,21 @@
                     <a:lstStyle/>
                     <a:p>
                       <a:pPr>
-                        <a:defRPr sz="950">
+                        <a:defRPr sz="1000">
                           <a:solidFill>
-                            <a:srgbClr val="1E293B"/>
+                            <a:srgbClr val="0F172A"/>
                           </a:solidFill>
+                          <a:latin typeface="Calibri"/>
                         </a:defRPr>
                       </a:pPr>
                       <a:r>
-                        <a:t>POS QR Verification Engine</a:t>
+                        <a:t>POS QR Verification Engine (BaconQrCode &amp; HTML5 Scanner)</a:t>
                       </a:r>
                     </a:p>
                   </a:txBody>
                   <a:tcPr>
                     <a:solidFill>
-                      <a:srgbClr val="FFFFFF"/>
+                      <a:srgbClr val="F8FAFC"/>
                     </a:solidFill>
                   </a:tcPr>
                 </a:tc>
@@ -7588,20 +7821,21 @@
                     <a:lstStyle/>
                     <a:p>
                       <a:pPr>
-                        <a:defRPr sz="950">
+                        <a:defRPr sz="1000">
                           <a:solidFill>
-                            <a:srgbClr val="1E293B"/>
+                            <a:srgbClr val="0F172A"/>
                           </a:solidFill>
+                          <a:latin typeface="Calibri"/>
                         </a:defRPr>
                       </a:pPr>
                       <a:r>
-                        <a:t>QR Code NIM instan (Level H) dan eksekusi 6-lapis validasi atomik via webcam scanner loket.</a:t>
+                        <a:t>Penerbitan QR Code NIM beresolusi tinggi (Level H) dan eksekusi 6-Lapis Validasi Atomik via kamera webcam loket (Lunas, Sesi, Prodi, Gender, Sisa Hak, Stok Rak).</a:t>
                       </a:r>
                     </a:p>
                   </a:txBody>
                   <a:tcPr>
                     <a:solidFill>
-                      <a:srgbClr val="FFFFFF"/>
+                      <a:srgbClr val="F8FAFC"/>
                     </a:solidFill>
                   </a:tcPr>
                 </a:tc>
@@ -7611,45 +7845,47 @@
                     <a:lstStyle/>
                     <a:p>
                       <a:pPr>
-                        <a:defRPr sz="950">
+                        <a:defRPr sz="1000">
                           <a:solidFill>
-                            <a:srgbClr val="1E293B"/>
+                            <a:srgbClr val="0F172A"/>
                           </a:solidFill>
+                          <a:latin typeface="Calibri"/>
                         </a:defRPr>
                       </a:pPr>
                       <a:r>
-                        <a:t>Waktu layan &lt; 30 detik/mhs, nol potensi klaim ganda.</a:t>
+                        <a:t>Waktu layan &lt; 30 detik/mhs, nol risiko penyerahan ganda.</a:t>
                       </a:r>
                     </a:p>
                   </a:txBody>
                   <a:tcPr>
                     <a:solidFill>
-                      <a:srgbClr val="FFFFFF"/>
+                      <a:srgbClr val="F8FAFC"/>
                     </a:solidFill>
                   </a:tcPr>
                 </a:tc>
               </a:tr>
-              <a:tr h="804672">
+              <a:tr h="859536">
                 <a:tc>
                   <a:txBody>
                     <a:bodyPr/>
                     <a:lstStyle/>
                     <a:p>
                       <a:pPr>
-                        <a:defRPr sz="950" b="1">
+                        <a:defRPr sz="1000" b="1">
                           <a:solidFill>
-                            <a:srgbClr val="580B13"/>
+                            <a:srgbClr val="980517"/>
                           </a:solidFill>
+                          <a:latin typeface="Calibri"/>
                         </a:defRPr>
                       </a:pPr>
                       <a:r>
-                        <a:t>Susut Stok &amp; HPP Buram</a:t>
+                        <a:t>Susut Stok Gudang &amp; Valuasi HPP Buram</a:t>
                       </a:r>
                     </a:p>
                   </a:txBody>
                   <a:tcPr>
                     <a:solidFill>
-                      <a:srgbClr val="FDF4F5"/>
+                      <a:srgbClr val="FEF2F2"/>
                     </a:solidFill>
                   </a:tcPr>
                 </a:tc>
@@ -7659,20 +7895,21 @@
                     <a:lstStyle/>
                     <a:p>
                       <a:pPr>
-                        <a:defRPr sz="950">
+                        <a:defRPr sz="1000">
                           <a:solidFill>
-                            <a:srgbClr val="1E293B"/>
+                            <a:srgbClr val="0F172A"/>
                           </a:solidFill>
+                          <a:latin typeface="Calibri"/>
                         </a:defRPr>
                       </a:pPr>
                       <a:r>
-                        <a:t>WMS &amp; FIFO Costing Engine</a:t>
+                        <a:t>WMS &amp; FIFO Costing Engine (StockBatch &amp; Movement Ledger)</a:t>
                       </a:r>
                     </a:p>
                   </a:txBody>
                   <a:tcPr>
                     <a:solidFill>
-                      <a:srgbClr val="FDF4F5"/>
+                      <a:srgbClr val="FEF2F2"/>
                     </a:solidFill>
                   </a:tcPr>
                 </a:tc>
@@ -7682,20 +7919,21 @@
                     <a:lstStyle/>
                     <a:p>
                       <a:pPr>
-                        <a:defRPr sz="950">
+                        <a:defRPr sz="1000">
                           <a:solidFill>
-                            <a:srgbClr val="1E293B"/>
+                            <a:srgbClr val="0F172A"/>
                           </a:solidFill>
+                          <a:latin typeface="Calibri"/>
                         </a:defRPr>
                       </a:pPr>
                       <a:r>
-                        <a:t>Melacak batch FIFO, pemotongan stok berkartu audit, rekonsiliasi opname, dan laporan margin GPM.</a:t>
+                        <a:t>Melacak batch penerimaan vendor tertua (FIFO), pemotongan stok berkartu audit, rekonsiliasi Stock Opname fisik via variance kalkulator, serta analitik margin laba kotor.</a:t>
                       </a:r>
                     </a:p>
                   </a:txBody>
                   <a:tcPr>
                     <a:solidFill>
-                      <a:srgbClr val="FDF4F5"/>
+                      <a:srgbClr val="FEF2F2"/>
                     </a:solidFill>
                   </a:tcPr>
                 </a:tc>
@@ -7705,20 +7943,21 @@
                     <a:lstStyle/>
                     <a:p>
                       <a:pPr>
-                        <a:defRPr sz="950">
+                        <a:defRPr sz="1000">
                           <a:solidFill>
-                            <a:srgbClr val="1E293B"/>
+                            <a:srgbClr val="0F172A"/>
                           </a:solidFill>
+                          <a:latin typeface="Calibri"/>
                         </a:defRPr>
                       </a:pPr>
                       <a:r>
-                        <a:t>Valuasi HPP presisi real-time, audit transparan.</a:t>
+                        <a:t>Valuasi HPP FIFO real-time, audit transparan, cegah selisih fisik.</a:t>
                       </a:r>
                     </a:p>
                   </a:txBody>
                   <a:tcPr>
                     <a:solidFill>
-                      <a:srgbClr val="FDF4F5"/>
+                      <a:srgbClr val="FEF2F2"/>
                     </a:solidFill>
                   </a:tcPr>
                 </a:tc>
@@ -7729,24 +7968,24 @@
       </p:graphicFrame>
       <p:sp>
         <p:nvSpPr>
-          <p:cNvPr id="6" name="Rectangle 5"/>
+          <p:cNvPr id="8" name="Rounded Rectangle 7"/>
           <p:cNvSpPr/>
           <p:nvPr/>
         </p:nvSpPr>
         <p:spPr>
           <a:xfrm>
-            <a:off x="548640" y="5806440"/>
-            <a:ext cx="11064240" cy="685800"/>
+            <a:off x="731520" y="5870448"/>
+            <a:ext cx="10728655" cy="658368"/>
           </a:xfrm>
-          <a:prstGeom prst="rect">
+          <a:prstGeom prst="roundRect">
             <a:avLst/>
           </a:prstGeom>
           <a:solidFill>
-            <a:srgbClr val="580B13"/>
+            <a:srgbClr val="FEF2F2"/>
           </a:solidFill>
           <a:ln w="19050">
             <a:solidFill>
-              <a:srgbClr val="FFD166"/>
+              <a:srgbClr val="980517"/>
             </a:solidFill>
           </a:ln>
         </p:spPr>
@@ -7765,18 +8004,28 @@
           </a:fontRef>
         </p:style>
         <p:txBody>
-          <a:bodyPr rtlCol="0" anchor="ctr" wrap="square"/>
+          <a:bodyPr rtlCol="0" anchor="ctr" wrap="square" lIns="228600" rIns="228600"/>
           <a:lstStyle/>
           <a:p>
             <a:pPr algn="ctr">
-              <a:defRPr sz="1100" b="1">
-                <a:solidFill>
-                  <a:srgbClr val="FFFFFF"/>
-                </a:solidFill>
-              </a:defRPr>
-            </a:pPr>
-            <a:r>
-              <a:t>Keunggulan UniStock: Menggabungkan keandalan ERP, perencanaan SCM, kecepatan POS, dan ketatnya WMS dalam satu portal Laravel 12 modern.</a:t>
+              <a:defRPr sz="1050" b="1">
+                <a:solidFill>
+                  <a:srgbClr val="980517"/>
+                </a:solidFill>
+                <a:latin typeface="Arial"/>
+              </a:defRPr>
+            </a:pPr>
+            <a:r>
+              <a:t>KEUNGGULAN INTEGRASI UNISTOCK: </a:t>
+            </a:r>
+            <a:r>
+              <a:rPr sz="1050">
+                <a:solidFill>
+                  <a:srgbClr val="0F172A"/>
+                </a:solidFill>
+                <a:latin typeface="Calibri"/>
+              </a:rPr>
+              <a:t>Menyatukan keandalan ERP, perencanaan SCM, kecepatan POS loket, dan ketatnya WMS dalam satu portal monolitik Laravel 12 modern yang tangguh.</a:t>
             </a:r>
           </a:p>
         </p:txBody>
@@ -7795,7 +8044,7 @@
     <p:bg>
       <p:bgPr>
         <a:solidFill>
-          <a:srgbClr val="F8FAFC"/>
+          <a:srgbClr val="FFFFFF"/>
         </a:solidFill>
         <a:effectLst/>
       </p:bgPr>
@@ -7809,189 +8058,20 @@
       <p:grpSpPr/>
       <p:sp>
         <p:nvSpPr>
-          <p:cNvPr id="2" name="Rounded Rectangle 1"/>
+          <p:cNvPr id="2" name="Rectangle 1"/>
           <p:cNvSpPr/>
           <p:nvPr/>
         </p:nvSpPr>
         <p:spPr>
           <a:xfrm>
-            <a:off x="548640" y="320040"/>
-            <a:ext cx="3291840" cy="320040"/>
-          </a:xfrm>
-          <a:prstGeom prst="roundRect">
-            <a:avLst/>
-          </a:prstGeom>
-          <a:solidFill>
-            <a:srgbClr val="580B13"/>
-          </a:solidFill>
-          <a:ln>
-            <a:solidFill>
-              <a:srgbClr val="580B13"/>
-            </a:solidFill>
-          </a:ln>
-        </p:spPr>
-        <p:style>
-          <a:lnRef idx="1">
-            <a:schemeClr val="accent1"/>
-          </a:lnRef>
-          <a:fillRef idx="3">
-            <a:schemeClr val="accent1"/>
-          </a:fillRef>
-          <a:effectRef idx="2">
-            <a:schemeClr val="accent1"/>
-          </a:effectRef>
-          <a:fontRef idx="minor">
-            <a:schemeClr val="lt1"/>
-          </a:fontRef>
-        </p:style>
-        <p:txBody>
-          <a:bodyPr rtlCol="0" anchor="ctr" wrap="square"/>
-          <a:lstStyle/>
-          <a:p>
-            <a:pPr algn="ctr">
-              <a:defRPr sz="1000" b="1">
-                <a:solidFill>
-                  <a:srgbClr val="FFD166"/>
-                </a:solidFill>
-              </a:defRPr>
-            </a:pPr>
-            <a:r>
-              <a:t>SLIDE 6 • PROPOSED SOLUTION DESIGN</a:t>
-            </a:r>
-          </a:p>
-        </p:txBody>
-      </p:sp>
-      <p:sp>
-        <p:nvSpPr>
-          <p:cNvPr id="3" name="TextBox 2"/>
-          <p:cNvSpPr txBox="1"/>
-          <p:nvPr/>
-        </p:nvSpPr>
-        <p:spPr>
-          <a:xfrm>
-            <a:off x="548640" y="685800"/>
-            <a:ext cx="11064240" cy="438912"/>
-          </a:xfrm>
-          <a:prstGeom prst="rect">
-            <a:avLst/>
-          </a:prstGeom>
-          <a:noFill/>
-        </p:spPr>
-        <p:txBody>
-          <a:bodyPr wrap="square">
-            <a:spAutoFit/>
-          </a:bodyPr>
-          <a:lstStyle/>
-          <a:p>
-            <a:pPr>
-              <a:defRPr sz="1900" b="1">
-                <a:solidFill>
-                  <a:srgbClr val="580B13"/>
-                </a:solidFill>
-              </a:defRPr>
-            </a:pPr>
-            <a:r>
-              <a:t>DIAGRAM ARSITEKTUR SOLUSI: 4 FASE CLOSED-LOOP SCM ENGINE</a:t>
-            </a:r>
-          </a:p>
-        </p:txBody>
-      </p:sp>
-      <p:sp>
-        <p:nvSpPr>
-          <p:cNvPr id="4" name="TextBox 3"/>
-          <p:cNvSpPr txBox="1"/>
-          <p:nvPr/>
-        </p:nvSpPr>
-        <p:spPr>
-          <a:xfrm>
-            <a:off x="548640" y="1115568"/>
-            <a:ext cx="11064240" cy="347472"/>
-          </a:xfrm>
-          <a:prstGeom prst="rect">
-            <a:avLst/>
-          </a:prstGeom>
-          <a:noFill/>
-        </p:spPr>
-        <p:txBody>
-          <a:bodyPr wrap="square">
-            <a:spAutoFit/>
-          </a:bodyPr>
-          <a:lstStyle/>
-          <a:p>
-            <a:pPr>
-              <a:defRPr sz="1150">
-                <a:solidFill>
-                  <a:srgbClr val="475569"/>
-                </a:solidFill>
-              </a:defRPr>
-            </a:pPr>
-            <a:r>
-              <a:t>Bagaimana subsistem terhubung erat, aliran data perbaikan, dan pemanfaatan data untuk keputusan.</a:t>
-            </a:r>
-          </a:p>
-        </p:txBody>
-      </p:sp>
-      <p:sp>
-        <p:nvSpPr>
-          <p:cNvPr id="5" name="Rectangle 4"/>
-          <p:cNvSpPr/>
-          <p:nvPr/>
-        </p:nvSpPr>
-        <p:spPr>
-          <a:xfrm>
-            <a:off x="548640" y="1554480"/>
-            <a:ext cx="2606040" cy="4023360"/>
+            <a:off x="731520" y="365760"/>
+            <a:ext cx="73152" cy="777240"/>
           </a:xfrm>
           <a:prstGeom prst="rect">
             <a:avLst/>
           </a:prstGeom>
           <a:solidFill>
-            <a:srgbClr val="FFFFFF"/>
-          </a:solidFill>
-          <a:ln w="19050">
-            <a:solidFill>
-              <a:srgbClr val="6B0F1A"/>
-            </a:solidFill>
-          </a:ln>
-        </p:spPr>
-        <p:style>
-          <a:lnRef idx="1">
-            <a:schemeClr val="accent1"/>
-          </a:lnRef>
-          <a:fillRef idx="3">
-            <a:schemeClr val="accent1"/>
-          </a:fillRef>
-          <a:effectRef idx="2">
-            <a:schemeClr val="accent1"/>
-          </a:effectRef>
-          <a:fontRef idx="minor">
-            <a:schemeClr val="lt1"/>
-          </a:fontRef>
-        </p:style>
-        <p:txBody>
-          <a:bodyPr rtlCol="0" anchor="ctr"/>
-          <a:lstStyle/>
-          <a:p>
-            <a:pPr algn="ctr"/>
-          </a:p>
-        </p:txBody>
-      </p:sp>
-      <p:sp>
-        <p:nvSpPr>
-          <p:cNvPr id="6" name="Rectangle 5"/>
-          <p:cNvSpPr/>
-          <p:nvPr/>
-        </p:nvSpPr>
-        <p:spPr>
-          <a:xfrm>
-            <a:off x="548640" y="1554480"/>
-            <a:ext cx="2606040" cy="347472"/>
-          </a:xfrm>
-          <a:prstGeom prst="rect">
-            <a:avLst/>
-          </a:prstGeom>
-          <a:solidFill>
-            <a:srgbClr val="580B13"/>
+            <a:srgbClr val="980517"/>
           </a:solidFill>
           <a:ln>
             <a:noFill/>
@@ -8015,29 +8095,20 @@
           <a:bodyPr rtlCol="0" anchor="ctr"/>
           <a:lstStyle/>
           <a:p>
-            <a:pPr algn="ctr">
-              <a:defRPr sz="950" b="1">
-                <a:solidFill>
-                  <a:srgbClr val="FFD166"/>
-                </a:solidFill>
-              </a:defRPr>
-            </a:pPr>
-            <a:r>
-              <a:t>FASE 1 • HULU (INBOUND)</a:t>
-            </a:r>
-          </a:p>
-        </p:txBody>
-      </p:sp>
-      <p:sp>
-        <p:nvSpPr>
-          <p:cNvPr id="7" name="TextBox 6"/>
+            <a:pPr algn="ctr"/>
+          </a:p>
+        </p:txBody>
+      </p:sp>
+      <p:sp>
+        <p:nvSpPr>
+          <p:cNvPr id="3" name="TextBox 2"/>
           <p:cNvSpPr txBox="1"/>
           <p:nvPr/>
         </p:nvSpPr>
         <p:spPr>
           <a:xfrm>
-            <a:off x="658368" y="1938528"/>
-            <a:ext cx="2386584" cy="3566160"/>
+            <a:off x="914400" y="320040"/>
+            <a:ext cx="10515600" cy="256032"/>
           </a:xfrm>
           <a:prstGeom prst="rect">
             <a:avLst/>
@@ -8051,99 +8122,107 @@
           <a:lstStyle/>
           <a:p>
             <a:pPr>
-              <a:defRPr sz="1250" b="1">
-                <a:solidFill>
-                  <a:srgbClr val="580B13"/>
-                </a:solidFill>
-              </a:defRPr>
-            </a:pPr>
-            <a:r>
-              <a:t>Inbound &amp; Batch FIFO</a:t>
-            </a:r>
-          </a:p>
-          <a:p>
-            <a:pPr>
-              <a:defRPr sz="1050">
-                <a:solidFill>
-                  <a:srgbClr val="1E293B"/>
-                </a:solidFill>
-              </a:defRPr>
-            </a:pPr>
-            <a:r>
-              <a:t>• Catat barang vendor di StockReceive.</a:t>
-            </a:r>
-            <a:br/>
-            <a:r>
-              <a:t>• Terbitkan ID urutan Batch FIFO.</a:t>
-            </a:r>
-            <a:br/>
-            <a:r>
-              <a:t>• Catat jurnal mutasi StockMovement IN dan unit HPP batch pembelian.</a:t>
-            </a:r>
-          </a:p>
-        </p:txBody>
-      </p:sp>
-      <p:sp>
-        <p:nvSpPr>
-          <p:cNvPr id="8" name="Rectangle 7"/>
+              <a:defRPr sz="1000" b="1">
+                <a:solidFill>
+                  <a:srgbClr val="980517"/>
+                </a:solidFill>
+                <a:latin typeface="Arial"/>
+              </a:defRPr>
+            </a:pPr>
+            <a:r>
+              <a:t>SLIDE 6 • PROPOSED SOLUTION DESIGN   |   RUBRIK: PROPOSED SOLUTION (15%)</a:t>
+            </a:r>
+          </a:p>
+        </p:txBody>
+      </p:sp>
+      <p:sp>
+        <p:nvSpPr>
+          <p:cNvPr id="4" name="TextBox 3"/>
+          <p:cNvSpPr txBox="1"/>
+          <p:nvPr/>
+        </p:nvSpPr>
+        <p:spPr>
+          <a:xfrm>
+            <a:off x="914400" y="548640"/>
+            <a:ext cx="10515600" cy="411480"/>
+          </a:xfrm>
+          <a:prstGeom prst="rect">
+            <a:avLst/>
+          </a:prstGeom>
+          <a:noFill/>
+        </p:spPr>
+        <p:txBody>
+          <a:bodyPr wrap="square">
+            <a:spAutoFit/>
+          </a:bodyPr>
+          <a:lstStyle/>
+          <a:p>
+            <a:pPr>
+              <a:defRPr sz="2000" b="1">
+                <a:solidFill>
+                  <a:srgbClr val="0F172A"/>
+                </a:solidFill>
+                <a:latin typeface="Arial"/>
+              </a:defRPr>
+            </a:pPr>
+            <a:r>
+              <a:t>DIAGRAM ARSITEKTUR SOLUSI: 4 FASE CLOSED-LOOP SCM ENGINE</a:t>
+            </a:r>
+          </a:p>
+        </p:txBody>
+      </p:sp>
+      <p:sp>
+        <p:nvSpPr>
+          <p:cNvPr id="5" name="TextBox 4"/>
+          <p:cNvSpPr txBox="1"/>
+          <p:nvPr/>
+        </p:nvSpPr>
+        <p:spPr>
+          <a:xfrm>
+            <a:off x="914400" y="960120"/>
+            <a:ext cx="10515600" cy="274320"/>
+          </a:xfrm>
+          <a:prstGeom prst="rect">
+            <a:avLst/>
+          </a:prstGeom>
+          <a:noFill/>
+        </p:spPr>
+        <p:txBody>
+          <a:bodyPr wrap="square">
+            <a:spAutoFit/>
+          </a:bodyPr>
+          <a:lstStyle/>
+          <a:p>
+            <a:pPr>
+              <a:defRPr sz="1150">
+                <a:solidFill>
+                  <a:srgbClr val="475569"/>
+                </a:solidFill>
+                <a:latin typeface="Calibri"/>
+              </a:defRPr>
+            </a:pPr>
+            <a:r>
+              <a:t>Bagaimana subsistem terhubung erat, aliran data setelah perbaikan, dan pemanfaatan data untuk pengambilan keputusan.</a:t>
+            </a:r>
+          </a:p>
+        </p:txBody>
+      </p:sp>
+      <p:sp>
+        <p:nvSpPr>
+          <p:cNvPr id="6" name="Rectangle 5"/>
           <p:cNvSpPr/>
           <p:nvPr/>
         </p:nvSpPr>
         <p:spPr>
           <a:xfrm>
-            <a:off x="3364992" y="1554480"/>
-            <a:ext cx="2606040" cy="4023360"/>
+            <a:off x="731520" y="1261872"/>
+            <a:ext cx="10728655" cy="13716"/>
           </a:xfrm>
           <a:prstGeom prst="rect">
             <a:avLst/>
           </a:prstGeom>
           <a:solidFill>
-            <a:srgbClr val="FFFFFF"/>
-          </a:solidFill>
-          <a:ln w="19050">
-            <a:solidFill>
-              <a:srgbClr val="6B0F1A"/>
-            </a:solidFill>
-          </a:ln>
-        </p:spPr>
-        <p:style>
-          <a:lnRef idx="1">
-            <a:schemeClr val="accent1"/>
-          </a:lnRef>
-          <a:fillRef idx="3">
-            <a:schemeClr val="accent1"/>
-          </a:fillRef>
-          <a:effectRef idx="2">
-            <a:schemeClr val="accent1"/>
-          </a:effectRef>
-          <a:fontRef idx="minor">
-            <a:schemeClr val="lt1"/>
-          </a:fontRef>
-        </p:style>
-        <p:txBody>
-          <a:bodyPr rtlCol="0" anchor="ctr"/>
-          <a:lstStyle/>
-          <a:p>
-            <a:pPr algn="ctr"/>
-          </a:p>
-        </p:txBody>
-      </p:sp>
-      <p:sp>
-        <p:nvSpPr>
-          <p:cNvPr id="9" name="Rectangle 8"/>
-          <p:cNvSpPr/>
-          <p:nvPr/>
-        </p:nvSpPr>
-        <p:spPr>
-          <a:xfrm>
-            <a:off x="3364992" y="1554480"/>
-            <a:ext cx="2606040" cy="347472"/>
-          </a:xfrm>
-          <a:prstGeom prst="rect">
-            <a:avLst/>
-          </a:prstGeom>
-          <a:solidFill>
-            <a:srgbClr val="580B13"/>
+            <a:srgbClr val="E2E8F0"/>
           </a:solidFill>
           <a:ln>
             <a:noFill/>
@@ -8167,94 +8246,30 @@
           <a:bodyPr rtlCol="0" anchor="ctr"/>
           <a:lstStyle/>
           <a:p>
-            <a:pPr algn="ctr">
-              <a:defRPr sz="950" b="1">
-                <a:solidFill>
-                  <a:srgbClr val="FFD166"/>
-                </a:solidFill>
-              </a:defRPr>
-            </a:pPr>
-            <a:r>
-              <a:t>FASE 2 • DEMAND (PLANNING)</a:t>
-            </a:r>
-          </a:p>
-        </p:txBody>
-      </p:sp>
-      <p:sp>
-        <p:nvSpPr>
-          <p:cNvPr id="10" name="TextBox 9"/>
-          <p:cNvSpPr txBox="1"/>
+            <a:pPr algn="ctr"/>
+          </a:p>
+        </p:txBody>
+      </p:sp>
+      <p:sp>
+        <p:nvSpPr>
+          <p:cNvPr id="7" name="Rounded Rectangle 6"/>
+          <p:cNvSpPr/>
           <p:nvPr/>
         </p:nvSpPr>
         <p:spPr>
           <a:xfrm>
-            <a:off x="3474720" y="1938528"/>
-            <a:ext cx="2386584" cy="3566160"/>
+            <a:off x="731520" y="1417320"/>
+            <a:ext cx="2542032" cy="4297680"/>
           </a:xfrm>
-          <a:prstGeom prst="rect">
-            <a:avLst/>
-          </a:prstGeom>
-          <a:noFill/>
-        </p:spPr>
-        <p:txBody>
-          <a:bodyPr wrap="square">
-            <a:spAutoFit/>
-          </a:bodyPr>
-          <a:lstStyle/>
-          <a:p>
-            <a:pPr>
-              <a:defRPr sz="1250" b="1">
-                <a:solidFill>
-                  <a:srgbClr val="580B13"/>
-                </a:solidFill>
-              </a:defRPr>
-            </a:pPr>
-            <a:r>
-              <a:t>Eligibility &amp; Profiling</a:t>
-            </a:r>
-          </a:p>
-          <a:p>
-            <a:pPr>
-              <a:defRPr sz="1050">
-                <a:solidFill>
-                  <a:srgbClr val="1E293B"/>
-                </a:solidFill>
-              </a:defRPr>
-            </a:pPr>
-            <a:r>
-              <a:t>• Keuangan aktifkan data lunas di EligibilityRecord.</a:t>
-            </a:r>
-            <a:br/>
-            <a:r>
-              <a:t>• Mahasiswa isi ukuran di event portal.</a:t>
-            </a:r>
-            <a:br/>
-            <a:r>
-              <a:t>• Kalkulasi Demand vs Shortage untuk belanja vendor.</a:t>
-            </a:r>
-          </a:p>
-        </p:txBody>
-      </p:sp>
-      <p:sp>
-        <p:nvSpPr>
-          <p:cNvPr id="11" name="Rectangle 10"/>
-          <p:cNvSpPr/>
-          <p:nvPr/>
-        </p:nvSpPr>
-        <p:spPr>
-          <a:xfrm>
-            <a:off x="6181344" y="1554480"/>
-            <a:ext cx="2606040" cy="4023360"/>
-          </a:xfrm>
-          <a:prstGeom prst="rect">
+          <a:prstGeom prst="roundRect">
             <a:avLst/>
           </a:prstGeom>
           <a:solidFill>
-            <a:srgbClr val="FFFFFF"/>
+            <a:srgbClr val="F8FAFC"/>
           </a:solidFill>
-          <a:ln w="19050">
+          <a:ln w="12700">
             <a:solidFill>
-              <a:srgbClr val="6B0F1A"/>
+              <a:srgbClr val="E2E8F0"/>
             </a:solidFill>
           </a:ln>
         </p:spPr>
@@ -8273,32 +8288,124 @@
           </a:fontRef>
         </p:style>
         <p:txBody>
-          <a:bodyPr rtlCol="0" anchor="ctr"/>
-          <a:lstStyle/>
-          <a:p>
-            <a:pPr algn="ctr"/>
-          </a:p>
-        </p:txBody>
-      </p:sp>
-      <p:sp>
-        <p:nvSpPr>
-          <p:cNvPr id="12" name="Rectangle 11"/>
+          <a:bodyPr rtlCol="0" anchor="t" wrap="square" lIns="182880" rIns="182880" tIns="164592" bIns="137160"/>
+          <a:lstStyle/>
+          <a:p>
+            <a:pPr algn="ctr">
+              <a:defRPr sz="950" b="1">
+                <a:solidFill>
+                  <a:srgbClr val="980517"/>
+                </a:solidFill>
+                <a:latin typeface="Arial"/>
+              </a:defRPr>
+            </a:pPr>
+            <a:r>
+              <a:t>FASE 1 • HULU (INBOUND)</a:t>
+            </a:r>
+          </a:p>
+          <a:p>
+            <a:pPr>
+              <a:spcAft>
+                <a:spcPts val="600"/>
+              </a:spcAft>
+              <a:defRPr sz="1300" b="1">
+                <a:solidFill>
+                  <a:srgbClr val="0F172A"/>
+                </a:solidFill>
+                <a:latin typeface="Arial"/>
+              </a:defRPr>
+            </a:pPr>
+            <a:r>
+              <a:t>Inbound &amp; Batch FIFO</a:t>
+            </a:r>
+          </a:p>
+          <a:p>
+            <a:pPr>
+              <a:spcAft>
+                <a:spcPts val="400"/>
+              </a:spcAft>
+              <a:defRPr sz="1050">
+                <a:solidFill>
+                  <a:srgbClr val="0F172A"/>
+                </a:solidFill>
+                <a:latin typeface="Calibri"/>
+              </a:defRPr>
+            </a:pPr>
+            <a:r>
+              <a:t>•  Pencatatan barang dari vendor garmen pada modul StockReceive.</a:t>
+            </a:r>
+          </a:p>
+          <a:p>
+            <a:pPr>
+              <a:spcAft>
+                <a:spcPts val="400"/>
+              </a:spcAft>
+              <a:defRPr sz="1050">
+                <a:solidFill>
+                  <a:srgbClr val="0F172A"/>
+                </a:solidFill>
+                <a:latin typeface="Calibri"/>
+              </a:defRPr>
+            </a:pPr>
+            <a:r>
+              <a:t>•  Sistem menerbitkan ID batch terurut (FIFO Queue Sequence).</a:t>
+            </a:r>
+          </a:p>
+          <a:p>
+            <a:pPr>
+              <a:spcAft>
+                <a:spcPts val="400"/>
+              </a:spcAft>
+              <a:defRPr sz="1050">
+                <a:solidFill>
+                  <a:srgbClr val="0F172A"/>
+                </a:solidFill>
+                <a:latin typeface="Calibri"/>
+              </a:defRPr>
+            </a:pPr>
+            <a:r>
+              <a:t>•  Pencatatan otomatis jurnal mutasi masuk (StockMovement IN) dan penetapan unit HPP batch.</a:t>
+            </a:r>
+          </a:p>
+          <a:p>
+            <a:pPr>
+              <a:spcBef>
+                <a:spcPts val="400"/>
+              </a:spcBef>
+              <a:defRPr sz="1000" b="1">
+                <a:solidFill>
+                  <a:srgbClr val="980517"/>
+                </a:solidFill>
+                <a:latin typeface="Calibri"/>
+              </a:defRPr>
+            </a:pPr>
+            <a:r>
+              <a:t>➔  Output: Batch FIFO Terdaftar</a:t>
+            </a:r>
+          </a:p>
+        </p:txBody>
+      </p:sp>
+      <p:sp>
+        <p:nvSpPr>
+          <p:cNvPr id="8" name="Rounded Rectangle 7"/>
           <p:cNvSpPr/>
           <p:nvPr/>
         </p:nvSpPr>
         <p:spPr>
           <a:xfrm>
-            <a:off x="6181344" y="1554480"/>
-            <a:ext cx="2606040" cy="347472"/>
+            <a:off x="3456432" y="1417320"/>
+            <a:ext cx="2542032" cy="4297680"/>
           </a:xfrm>
-          <a:prstGeom prst="rect">
+          <a:prstGeom prst="roundRect">
             <a:avLst/>
           </a:prstGeom>
           <a:solidFill>
-            <a:srgbClr val="580B13"/>
+            <a:srgbClr val="F8FAFC"/>
           </a:solidFill>
-          <a:ln>
-            <a:noFill/>
+          <a:ln w="12700">
+            <a:solidFill>
+              <a:srgbClr val="E2E8F0"/>
+            </a:solidFill>
           </a:ln>
         </p:spPr>
         <p:style>
@@ -8316,97 +8423,123 @@
           </a:fontRef>
         </p:style>
         <p:txBody>
-          <a:bodyPr rtlCol="0" anchor="ctr"/>
+          <a:bodyPr rtlCol="0" anchor="t" wrap="square" lIns="182880" rIns="182880" tIns="164592" bIns="137160"/>
           <a:lstStyle/>
           <a:p>
             <a:pPr algn="ctr">
               <a:defRPr sz="950" b="1">
                 <a:solidFill>
-                  <a:srgbClr val="FFD166"/>
-                </a:solidFill>
-              </a:defRPr>
-            </a:pPr>
-            <a:r>
-              <a:t>FASE 3 • HILIR (OUTBOUND)</a:t>
-            </a:r>
-          </a:p>
-        </p:txBody>
-      </p:sp>
-      <p:sp>
-        <p:nvSpPr>
-          <p:cNvPr id="13" name="TextBox 12"/>
-          <p:cNvSpPr txBox="1"/>
+                  <a:srgbClr val="980517"/>
+                </a:solidFill>
+                <a:latin typeface="Arial"/>
+              </a:defRPr>
+            </a:pPr>
+            <a:r>
+              <a:t>FASE 2 • DEMAND (PLANNING)</a:t>
+            </a:r>
+          </a:p>
+          <a:p>
+            <a:pPr>
+              <a:spcAft>
+                <a:spcPts val="600"/>
+              </a:spcAft>
+              <a:defRPr sz="1300" b="1">
+                <a:solidFill>
+                  <a:srgbClr val="0F172A"/>
+                </a:solidFill>
+                <a:latin typeface="Arial"/>
+              </a:defRPr>
+            </a:pPr>
+            <a:r>
+              <a:t>Eligibility &amp; Profiling</a:t>
+            </a:r>
+          </a:p>
+          <a:p>
+            <a:pPr>
+              <a:spcAft>
+                <a:spcPts val="400"/>
+              </a:spcAft>
+              <a:defRPr sz="1050">
+                <a:solidFill>
+                  <a:srgbClr val="0F172A"/>
+                </a:solidFill>
+                <a:latin typeface="Calibri"/>
+              </a:defRPr>
+            </a:pPr>
+            <a:r>
+              <a:t>•  Keuangan mengaktifkan data mahasiswa lunas di EligibilityRecord.</a:t>
+            </a:r>
+          </a:p>
+          <a:p>
+            <a:pPr>
+              <a:spcAft>
+                <a:spcPts val="400"/>
+              </a:spcAft>
+              <a:defRPr sz="1050">
+                <a:solidFill>
+                  <a:srgbClr val="0F172A"/>
+                </a:solidFill>
+                <a:latin typeface="Calibri"/>
+              </a:defRPr>
+            </a:pPr>
+            <a:r>
+              <a:t>•  Mahasiswa input profil ukuran badan mandiri di event portal.</a:t>
+            </a:r>
+          </a:p>
+          <a:p>
+            <a:pPr>
+              <a:spcAft>
+                <a:spcPts val="400"/>
+              </a:spcAft>
+              <a:defRPr sz="1050">
+                <a:solidFill>
+                  <a:srgbClr val="0F172A"/>
+                </a:solidFill>
+                <a:latin typeface="Calibri"/>
+              </a:defRPr>
+            </a:pPr>
+            <a:r>
+              <a:t>•  Sistem menghitung Demand vs Shortage untuk acuan belanja pengadaan vendor.</a:t>
+            </a:r>
+          </a:p>
+          <a:p>
+            <a:pPr>
+              <a:spcBef>
+                <a:spcPts val="400"/>
+              </a:spcBef>
+              <a:defRPr sz="1000" b="1">
+                <a:solidFill>
+                  <a:srgbClr val="980517"/>
+                </a:solidFill>
+                <a:latin typeface="Calibri"/>
+              </a:defRPr>
+            </a:pPr>
+            <a:r>
+              <a:t>➔  Output: QR Code &amp; Jadwal Aktif</a:t>
+            </a:r>
+          </a:p>
+        </p:txBody>
+      </p:sp>
+      <p:sp>
+        <p:nvSpPr>
+          <p:cNvPr id="9" name="Rounded Rectangle 8"/>
+          <p:cNvSpPr/>
           <p:nvPr/>
         </p:nvSpPr>
         <p:spPr>
           <a:xfrm>
-            <a:off x="6291072" y="1938528"/>
-            <a:ext cx="2386584" cy="3566160"/>
+            <a:off x="6181344" y="1417320"/>
+            <a:ext cx="2542032" cy="4297680"/>
           </a:xfrm>
-          <a:prstGeom prst="rect">
-            <a:avLst/>
-          </a:prstGeom>
-          <a:noFill/>
-        </p:spPr>
-        <p:txBody>
-          <a:bodyPr wrap="square">
-            <a:spAutoFit/>
-          </a:bodyPr>
-          <a:lstStyle/>
-          <a:p>
-            <a:pPr>
-              <a:defRPr sz="1250" b="1">
-                <a:solidFill>
-                  <a:srgbClr val="580B13"/>
-                </a:solidFill>
-              </a:defRPr>
-            </a:pPr>
-            <a:r>
-              <a:t>POS QR &amp; Validasi 6-Lapis</a:t>
-            </a:r>
-          </a:p>
-          <a:p>
-            <a:pPr>
-              <a:defRPr sz="1050">
-                <a:solidFill>
-                  <a:srgbClr val="1E293B"/>
-                </a:solidFill>
-              </a:defRPr>
-            </a:pPr>
-            <a:r>
-              <a:t>• Staf scan QR NIM di loket gudang.</a:t>
-            </a:r>
-            <a:br/>
-            <a:r>
-              <a:t>• Eksekusi 6-lapis validasi via lockForUpdate().</a:t>
-            </a:r>
-            <a:br/>
-            <a:r>
-              <a:t>• Potong batch tertua otomatis (deductStockFifo).</a:t>
-            </a:r>
-          </a:p>
-        </p:txBody>
-      </p:sp>
-      <p:sp>
-        <p:nvSpPr>
-          <p:cNvPr id="14" name="Rectangle 13"/>
-          <p:cNvSpPr/>
-          <p:nvPr/>
-        </p:nvSpPr>
-        <p:spPr>
-          <a:xfrm>
-            <a:off x="9006840" y="1554480"/>
-            <a:ext cx="2606040" cy="4023360"/>
-          </a:xfrm>
-          <a:prstGeom prst="rect">
+          <a:prstGeom prst="roundRect">
             <a:avLst/>
           </a:prstGeom>
           <a:solidFill>
-            <a:srgbClr val="FFFFFF"/>
+            <a:srgbClr val="FEF2F2"/>
           </a:solidFill>
           <a:ln w="19050">
             <a:solidFill>
-              <a:srgbClr val="6B0F1A"/>
+              <a:srgbClr val="980517"/>
             </a:solidFill>
           </a:ln>
         </p:spPr>
@@ -8425,32 +8558,124 @@
           </a:fontRef>
         </p:style>
         <p:txBody>
-          <a:bodyPr rtlCol="0" anchor="ctr"/>
-          <a:lstStyle/>
-          <a:p>
-            <a:pPr algn="ctr"/>
-          </a:p>
-        </p:txBody>
-      </p:sp>
-      <p:sp>
-        <p:nvSpPr>
-          <p:cNvPr id="15" name="Rectangle 14"/>
+          <a:bodyPr rtlCol="0" anchor="t" wrap="square" lIns="182880" rIns="182880" tIns="164592" bIns="137160"/>
+          <a:lstStyle/>
+          <a:p>
+            <a:pPr algn="ctr">
+              <a:defRPr sz="950" b="1">
+                <a:solidFill>
+                  <a:srgbClr val="980517"/>
+                </a:solidFill>
+                <a:latin typeface="Arial"/>
+              </a:defRPr>
+            </a:pPr>
+            <a:r>
+              <a:t>FASE 3 • HILIR (OUTBOUND)</a:t>
+            </a:r>
+          </a:p>
+          <a:p>
+            <a:pPr>
+              <a:spcAft>
+                <a:spcPts val="600"/>
+              </a:spcAft>
+              <a:defRPr sz="1300" b="1">
+                <a:solidFill>
+                  <a:srgbClr val="0F172A"/>
+                </a:solidFill>
+                <a:latin typeface="Arial"/>
+              </a:defRPr>
+            </a:pPr>
+            <a:r>
+              <a:t>POS QR &amp; 6-Lapis Validasi</a:t>
+            </a:r>
+          </a:p>
+          <a:p>
+            <a:pPr>
+              <a:spcAft>
+                <a:spcPts val="400"/>
+              </a:spcAft>
+              <a:defRPr sz="1050">
+                <a:solidFill>
+                  <a:srgbClr val="0F172A"/>
+                </a:solidFill>
+                <a:latin typeface="Calibri"/>
+              </a:defRPr>
+            </a:pPr>
+            <a:r>
+              <a:t>•  Staf memindai QR NIM mahasiswa di loket posko kampus.</a:t>
+            </a:r>
+          </a:p>
+          <a:p>
+            <a:pPr>
+              <a:spcAft>
+                <a:spcPts val="400"/>
+              </a:spcAft>
+              <a:defRPr sz="1050">
+                <a:solidFill>
+                  <a:srgbClr val="0F172A"/>
+                </a:solidFill>
+                <a:latin typeface="Calibri"/>
+              </a:defRPr>
+            </a:pPr>
+            <a:r>
+              <a:t>•  Eksekusi 6-Lapis Validasi Atomik via pessimistic lock (lockForUpdate).</a:t>
+            </a:r>
+          </a:p>
+          <a:p>
+            <a:pPr>
+              <a:spcAft>
+                <a:spcPts val="400"/>
+              </a:spcAft>
+              <a:defRPr sz="1050">
+                <a:solidFill>
+                  <a:srgbClr val="0F172A"/>
+                </a:solidFill>
+                <a:latin typeface="Calibri"/>
+              </a:defRPr>
+            </a:pPr>
+            <a:r>
+              <a:t>•  Pemotongan batch tertua otomatis (deductStockFifo) dan cetak tiket serah terima fisik.</a:t>
+            </a:r>
+          </a:p>
+          <a:p>
+            <a:pPr>
+              <a:spcBef>
+                <a:spcPts val="400"/>
+              </a:spcBef>
+              <a:defRPr sz="1000" b="1">
+                <a:solidFill>
+                  <a:srgbClr val="980517"/>
+                </a:solidFill>
+                <a:latin typeface="Calibri"/>
+              </a:defRPr>
+            </a:pPr>
+            <a:r>
+              <a:t>➔  Output: Seragam Diterima Pas</a:t>
+            </a:r>
+          </a:p>
+        </p:txBody>
+      </p:sp>
+      <p:sp>
+        <p:nvSpPr>
+          <p:cNvPr id="10" name="Rounded Rectangle 9"/>
           <p:cNvSpPr/>
           <p:nvPr/>
         </p:nvSpPr>
         <p:spPr>
           <a:xfrm>
-            <a:off x="9006840" y="1554480"/>
-            <a:ext cx="2606040" cy="347472"/>
+            <a:off x="8906256" y="1417320"/>
+            <a:ext cx="2542032" cy="4297680"/>
           </a:xfrm>
-          <a:prstGeom prst="rect">
+          <a:prstGeom prst="roundRect">
             <a:avLst/>
           </a:prstGeom>
           <a:solidFill>
-            <a:srgbClr val="580B13"/>
+            <a:srgbClr val="F8FAFC"/>
           </a:solidFill>
-          <a:ln>
-            <a:noFill/>
+          <a:ln w="12700">
+            <a:solidFill>
+              <a:srgbClr val="E2E8F0"/>
+            </a:solidFill>
           </a:ln>
         </p:spPr>
         <p:style>
@@ -8468,97 +8693,123 @@
           </a:fontRef>
         </p:style>
         <p:txBody>
-          <a:bodyPr rtlCol="0" anchor="ctr"/>
+          <a:bodyPr rtlCol="0" anchor="t" wrap="square" lIns="182880" rIns="182880" tIns="164592" bIns="137160"/>
           <a:lstStyle/>
           <a:p>
             <a:pPr algn="ctr">
               <a:defRPr sz="950" b="1">
                 <a:solidFill>
-                  <a:srgbClr val="FFD166"/>
-                </a:solidFill>
+                  <a:srgbClr val="980517"/>
+                </a:solidFill>
+                <a:latin typeface="Arial"/>
               </a:defRPr>
             </a:pPr>
             <a:r>
               <a:t>FASE 4 • KONTROL (AUDIT)</a:t>
             </a:r>
           </a:p>
-        </p:txBody>
-      </p:sp>
-      <p:sp>
-        <p:nvSpPr>
-          <p:cNvPr id="16" name="TextBox 15"/>
-          <p:cNvSpPr txBox="1"/>
+          <a:p>
+            <a:pPr>
+              <a:spcAft>
+                <a:spcPts val="600"/>
+              </a:spcAft>
+              <a:defRPr sz="1300" b="1">
+                <a:solidFill>
+                  <a:srgbClr val="0F172A"/>
+                </a:solidFill>
+                <a:latin typeface="Arial"/>
+              </a:defRPr>
+            </a:pPr>
+            <a:r>
+              <a:t>Opname &amp; Closed-Loop</a:t>
+            </a:r>
+          </a:p>
+          <a:p>
+            <a:pPr>
+              <a:spcAft>
+                <a:spcPts val="400"/>
+              </a:spcAft>
+              <a:defRPr sz="1050">
+                <a:solidFill>
+                  <a:srgbClr val="0F172A"/>
+                </a:solidFill>
+                <a:latin typeface="Calibri"/>
+              </a:defRPr>
+            </a:pPr>
+            <a:r>
+              <a:t>•  Stock Opname fisik berkala menghitung selisih variance otomatis.</a:t>
+            </a:r>
+          </a:p>
+          <a:p>
+            <a:pPr>
+              <a:spcAft>
+                <a:spcPts val="400"/>
+              </a:spcAft>
+              <a:defRPr sz="1050">
+                <a:solidFill>
+                  <a:srgbClr val="0F172A"/>
+                </a:solidFill>
+                <a:latin typeface="Calibri"/>
+              </a:defRPr>
+            </a:pPr>
+            <a:r>
+              <a:t>•  Penerbitan jurnal penyesuaian susut/surplus stok gudang.</a:t>
+            </a:r>
+          </a:p>
+          <a:p>
+            <a:pPr>
+              <a:spcAft>
+                <a:spcPts val="400"/>
+              </a:spcAft>
+              <a:defRPr sz="1050">
+                <a:solidFill>
+                  <a:srgbClr val="0F172A"/>
+                </a:solidFill>
+                <a:latin typeface="Calibri"/>
+              </a:defRPr>
+            </a:pPr>
+            <a:r>
+              <a:t>•  Generate analitik Gross Profit Margin (GPM) dan laporan sisa stok untuk pimpinan.</a:t>
+            </a:r>
+          </a:p>
+          <a:p>
+            <a:pPr>
+              <a:spcBef>
+                <a:spcPts val="400"/>
+              </a:spcBef>
+              <a:defRPr sz="1000" b="1">
+                <a:solidFill>
+                  <a:srgbClr val="980517"/>
+                </a:solidFill>
+                <a:latin typeface="Calibri"/>
+              </a:defRPr>
+            </a:pPr>
+            <a:r>
+              <a:t>➔  Output: Feedback Siklus Baru</a:t>
+            </a:r>
+          </a:p>
+        </p:txBody>
+      </p:sp>
+      <p:sp>
+        <p:nvSpPr>
+          <p:cNvPr id="11" name="Rounded Rectangle 10"/>
+          <p:cNvSpPr/>
           <p:nvPr/>
         </p:nvSpPr>
         <p:spPr>
           <a:xfrm>
-            <a:off x="9116567" y="1938528"/>
-            <a:ext cx="2386584" cy="3566160"/>
+            <a:off x="731520" y="5870448"/>
+            <a:ext cx="10728655" cy="658368"/>
           </a:xfrm>
-          <a:prstGeom prst="rect">
-            <a:avLst/>
-          </a:prstGeom>
-          <a:noFill/>
-        </p:spPr>
-        <p:txBody>
-          <a:bodyPr wrap="square">
-            <a:spAutoFit/>
-          </a:bodyPr>
-          <a:lstStyle/>
-          <a:p>
-            <a:pPr>
-              <a:defRPr sz="1250" b="1">
-                <a:solidFill>
-                  <a:srgbClr val="580B13"/>
-                </a:solidFill>
-              </a:defRPr>
-            </a:pPr>
-            <a:r>
-              <a:t>Opname &amp; Closed-Loop</a:t>
-            </a:r>
-          </a:p>
-          <a:p>
-            <a:pPr>
-              <a:defRPr sz="1050">
-                <a:solidFill>
-                  <a:srgbClr val="1E293B"/>
-                </a:solidFill>
-              </a:defRPr>
-            </a:pPr>
-            <a:r>
-              <a:t>• Stock opname berkala menghitung variance.</a:t>
-            </a:r>
-            <a:br/>
-            <a:r>
-              <a:t>• Jurnal penyesuaian susut/surplus.</a:t>
-            </a:r>
-            <a:br/>
-            <a:r>
-              <a:t>• Dasbor analitik GPM dan feedback pengadaan siklus baru.</a:t>
-            </a:r>
-          </a:p>
-        </p:txBody>
-      </p:sp>
-      <p:sp>
-        <p:nvSpPr>
-          <p:cNvPr id="17" name="Rectangle 16"/>
-          <p:cNvSpPr/>
-          <p:nvPr/>
-        </p:nvSpPr>
-        <p:spPr>
-          <a:xfrm>
-            <a:off x="548640" y="5806440"/>
-            <a:ext cx="11064240" cy="685800"/>
-          </a:xfrm>
-          <a:prstGeom prst="rect">
+          <a:prstGeom prst="roundRect">
             <a:avLst/>
           </a:prstGeom>
           <a:solidFill>
-            <a:srgbClr val="580B13"/>
+            <a:srgbClr val="FEF2F2"/>
           </a:solidFill>
           <a:ln w="19050">
             <a:solidFill>
-              <a:srgbClr val="FFD166"/>
+              <a:srgbClr val="980517"/>
             </a:solidFill>
           </a:ln>
         </p:spPr>
@@ -8577,18 +8828,28 @@
           </a:fontRef>
         </p:style>
         <p:txBody>
-          <a:bodyPr rtlCol="0" anchor="ctr" wrap="square"/>
+          <a:bodyPr rtlCol="0" anchor="ctr" wrap="square" lIns="228600" rIns="228600"/>
           <a:lstStyle/>
           <a:p>
             <a:pPr algn="ctr">
-              <a:defRPr sz="1100" b="1">
-                <a:solidFill>
-                  <a:srgbClr val="FFFFFF"/>
-                </a:solidFill>
-              </a:defRPr>
-            </a:pPr>
-            <a:r>
-              <a:t>Pengambilan Keputusan Closed-Loop: Data analitik stok sisa dan tren ukuran dari Fase 4 otomatis menjadi input PO vendor pada Fase 1 semester depan.</a:t>
+              <a:defRPr sz="1050" b="1">
+                <a:solidFill>
+                  <a:srgbClr val="980517"/>
+                </a:solidFill>
+                <a:latin typeface="Arial"/>
+              </a:defRPr>
+            </a:pPr>
+            <a:r>
+              <a:t>PENGAMBILAN KEPUTUSAN CLOSED-LOOP: </a:t>
+            </a:r>
+            <a:r>
+              <a:rPr sz="1050">
+                <a:solidFill>
+                  <a:srgbClr val="0F172A"/>
+                </a:solidFill>
+                <a:latin typeface="Calibri"/>
+              </a:rPr>
+              <a:t>Data analitik stok sisa dan tren ukuran dari Fase 4 secara otomatis menjadi input penetapan kuota anggaran dan purchase order ke pabrik pada Fase 1 semester berikutnya.</a:t>
             </a:r>
           </a:p>
         </p:txBody>
@@ -8607,7 +8868,7 @@
     <p:bg>
       <p:bgPr>
         <a:solidFill>
-          <a:srgbClr val="F8FAFC"/>
+          <a:srgbClr val="FFFFFF"/>
         </a:solidFill>
         <a:effectLst/>
       </p:bgPr>
@@ -8621,189 +8882,20 @@
       <p:grpSpPr/>
       <p:sp>
         <p:nvSpPr>
-          <p:cNvPr id="2" name="Rounded Rectangle 1"/>
+          <p:cNvPr id="2" name="Rectangle 1"/>
           <p:cNvSpPr/>
           <p:nvPr/>
         </p:nvSpPr>
         <p:spPr>
           <a:xfrm>
-            <a:off x="548640" y="320040"/>
-            <a:ext cx="3291840" cy="320040"/>
-          </a:xfrm>
-          <a:prstGeom prst="roundRect">
-            <a:avLst/>
-          </a:prstGeom>
-          <a:solidFill>
-            <a:srgbClr val="580B13"/>
-          </a:solidFill>
-          <a:ln>
-            <a:solidFill>
-              <a:srgbClr val="580B13"/>
-            </a:solidFill>
-          </a:ln>
-        </p:spPr>
-        <p:style>
-          <a:lnRef idx="1">
-            <a:schemeClr val="accent1"/>
-          </a:lnRef>
-          <a:fillRef idx="3">
-            <a:schemeClr val="accent1"/>
-          </a:fillRef>
-          <a:effectRef idx="2">
-            <a:schemeClr val="accent1"/>
-          </a:effectRef>
-          <a:fontRef idx="minor">
-            <a:schemeClr val="lt1"/>
-          </a:fontRef>
-        </p:style>
-        <p:txBody>
-          <a:bodyPr rtlCol="0" anchor="ctr" wrap="square"/>
-          <a:lstStyle/>
-          <a:p>
-            <a:pPr algn="ctr">
-              <a:defRPr sz="1000" b="1">
-                <a:solidFill>
-                  <a:srgbClr val="FFD166"/>
-                </a:solidFill>
-              </a:defRPr>
-            </a:pPr>
-            <a:r>
-              <a:t>SLIDE 7 • IMPLEMENTATION AND RISKS</a:t>
-            </a:r>
-          </a:p>
-        </p:txBody>
-      </p:sp>
-      <p:sp>
-        <p:nvSpPr>
-          <p:cNvPr id="3" name="TextBox 2"/>
-          <p:cNvSpPr txBox="1"/>
-          <p:nvPr/>
-        </p:nvSpPr>
-        <p:spPr>
-          <a:xfrm>
-            <a:off x="548640" y="685800"/>
-            <a:ext cx="11064240" cy="438912"/>
-          </a:xfrm>
-          <a:prstGeom prst="rect">
-            <a:avLst/>
-          </a:prstGeom>
-          <a:noFill/>
-        </p:spPr>
-        <p:txBody>
-          <a:bodyPr wrap="square">
-            <a:spAutoFit/>
-          </a:bodyPr>
-          <a:lstStyle/>
-          <a:p>
-            <a:pPr>
-              <a:defRPr sz="1900" b="1">
-                <a:solidFill>
-                  <a:srgbClr val="580B13"/>
-                </a:solidFill>
-              </a:defRPr>
-            </a:pPr>
-            <a:r>
-              <a:t>PRIORITAS IMPLEMENTASI &amp; MITIGASI RISIKO LAPANGAN</a:t>
-            </a:r>
-          </a:p>
-        </p:txBody>
-      </p:sp>
-      <p:sp>
-        <p:nvSpPr>
-          <p:cNvPr id="4" name="TextBox 3"/>
-          <p:cNvSpPr txBox="1"/>
-          <p:nvPr/>
-        </p:nvSpPr>
-        <p:spPr>
-          <a:xfrm>
-            <a:off x="548640" y="1115568"/>
-            <a:ext cx="11064240" cy="347472"/>
-          </a:xfrm>
-          <a:prstGeom prst="rect">
-            <a:avLst/>
-          </a:prstGeom>
-          <a:noFill/>
-        </p:spPr>
-        <p:txBody>
-          <a:bodyPr wrap="square">
-            <a:spAutoFit/>
-          </a:bodyPr>
-          <a:lstStyle/>
-          <a:p>
-            <a:pPr>
-              <a:defRPr sz="1150">
-                <a:solidFill>
-                  <a:srgbClr val="475569"/>
-                </a:solidFill>
-              </a:defRPr>
-            </a:pPr>
-            <a:r>
-              <a:t>Langkah penerapan terencana, kebutuhan SDM, serta mitigasi risiko kontingensi hari-H.</a:t>
-            </a:r>
-          </a:p>
-        </p:txBody>
-      </p:sp>
-      <p:sp>
-        <p:nvSpPr>
-          <p:cNvPr id="5" name="Rectangle 4"/>
-          <p:cNvSpPr/>
-          <p:nvPr/>
-        </p:nvSpPr>
-        <p:spPr>
-          <a:xfrm>
-            <a:off x="548640" y="1554480"/>
-            <a:ext cx="3474720" cy="1874519"/>
+            <a:off x="731520" y="365760"/>
+            <a:ext cx="73152" cy="777240"/>
           </a:xfrm>
           <a:prstGeom prst="rect">
             <a:avLst/>
           </a:prstGeom>
           <a:solidFill>
-            <a:srgbClr val="FFFFFF"/>
-          </a:solidFill>
-          <a:ln w="19050">
-            <a:solidFill>
-              <a:srgbClr val="6B0F1A"/>
-            </a:solidFill>
-          </a:ln>
-        </p:spPr>
-        <p:style>
-          <a:lnRef idx="1">
-            <a:schemeClr val="accent1"/>
-          </a:lnRef>
-          <a:fillRef idx="3">
-            <a:schemeClr val="accent1"/>
-          </a:fillRef>
-          <a:effectRef idx="2">
-            <a:schemeClr val="accent1"/>
-          </a:effectRef>
-          <a:fontRef idx="minor">
-            <a:schemeClr val="lt1"/>
-          </a:fontRef>
-        </p:style>
-        <p:txBody>
-          <a:bodyPr rtlCol="0" anchor="ctr"/>
-          <a:lstStyle/>
-          <a:p>
-            <a:pPr algn="ctr"/>
-          </a:p>
-        </p:txBody>
-      </p:sp>
-      <p:sp>
-        <p:nvSpPr>
-          <p:cNvPr id="6" name="Rectangle 5"/>
-          <p:cNvSpPr/>
-          <p:nvPr/>
-        </p:nvSpPr>
-        <p:spPr>
-          <a:xfrm>
-            <a:off x="548640" y="1554480"/>
-            <a:ext cx="3474720" cy="347472"/>
-          </a:xfrm>
-          <a:prstGeom prst="rect">
-            <a:avLst/>
-          </a:prstGeom>
-          <a:solidFill>
-            <a:srgbClr val="580B13"/>
+            <a:srgbClr val="980517"/>
           </a:solidFill>
           <a:ln>
             <a:noFill/>
@@ -8827,29 +8919,20 @@
           <a:bodyPr rtlCol="0" anchor="ctr"/>
           <a:lstStyle/>
           <a:p>
-            <a:pPr algn="ctr">
-              <a:defRPr sz="950" b="1">
-                <a:solidFill>
-                  <a:srgbClr val="FFD166"/>
-                </a:solidFill>
-              </a:defRPr>
-            </a:pPr>
-            <a:r>
-              <a:t>PRIORITAS 1 • DATA FOUNDATION</a:t>
-            </a:r>
-          </a:p>
-        </p:txBody>
-      </p:sp>
-      <p:sp>
-        <p:nvSpPr>
-          <p:cNvPr id="7" name="TextBox 6"/>
+            <a:pPr algn="ctr"/>
+          </a:p>
+        </p:txBody>
+      </p:sp>
+      <p:sp>
+        <p:nvSpPr>
+          <p:cNvPr id="3" name="TextBox 2"/>
           <p:cNvSpPr txBox="1"/>
           <p:nvPr/>
         </p:nvSpPr>
         <p:spPr>
           <a:xfrm>
-            <a:off x="658368" y="1938528"/>
-            <a:ext cx="3255263" cy="1417319"/>
+            <a:off x="914400" y="320040"/>
+            <a:ext cx="10515600" cy="256032"/>
           </a:xfrm>
           <a:prstGeom prst="rect">
             <a:avLst/>
@@ -8863,91 +8946,107 @@
           <a:lstStyle/>
           <a:p>
             <a:pPr>
-              <a:defRPr sz="1250" b="1">
-                <a:solidFill>
-                  <a:srgbClr val="580B13"/>
-                </a:solidFill>
-              </a:defRPr>
-            </a:pPr>
-            <a:r>
-              <a:t>Standarisasi Master Data</a:t>
-            </a:r>
-          </a:p>
-          <a:p>
-            <a:pPr>
-              <a:defRPr sz="1050">
-                <a:solidFill>
-                  <a:srgbClr val="1E293B"/>
-                </a:solidFill>
-              </a:defRPr>
-            </a:pPr>
-            <a:r>
-              <a:t>Pembersihan data lama, pembuatan skema SKU 5-segmen, impor data mahasiswa, dan konfigurasi hak seragam per prodi.</a:t>
-            </a:r>
-          </a:p>
-        </p:txBody>
-      </p:sp>
-      <p:sp>
-        <p:nvSpPr>
-          <p:cNvPr id="8" name="Rectangle 7"/>
+              <a:defRPr sz="1000" b="1">
+                <a:solidFill>
+                  <a:srgbClr val="980517"/>
+                </a:solidFill>
+                <a:latin typeface="Arial"/>
+              </a:defRPr>
+            </a:pPr>
+            <a:r>
+              <a:t>SLIDE 7 • IMPLEMENTATION AND RISKS   |   RUBRIK: FEASIBILITY &amp; RISK MITIGATION (15%)</a:t>
+            </a:r>
+          </a:p>
+        </p:txBody>
+      </p:sp>
+      <p:sp>
+        <p:nvSpPr>
+          <p:cNvPr id="4" name="TextBox 3"/>
+          <p:cNvSpPr txBox="1"/>
+          <p:nvPr/>
+        </p:nvSpPr>
+        <p:spPr>
+          <a:xfrm>
+            <a:off x="914400" y="548640"/>
+            <a:ext cx="10515600" cy="411480"/>
+          </a:xfrm>
+          <a:prstGeom prst="rect">
+            <a:avLst/>
+          </a:prstGeom>
+          <a:noFill/>
+        </p:spPr>
+        <p:txBody>
+          <a:bodyPr wrap="square">
+            <a:spAutoFit/>
+          </a:bodyPr>
+          <a:lstStyle/>
+          <a:p>
+            <a:pPr>
+              <a:defRPr sz="2000" b="1">
+                <a:solidFill>
+                  <a:srgbClr val="0F172A"/>
+                </a:solidFill>
+                <a:latin typeface="Arial"/>
+              </a:defRPr>
+            </a:pPr>
+            <a:r>
+              <a:t>PRIORITAS IMPLEMENTASI &amp; MITIGASI RISIKO LAPANGAN</a:t>
+            </a:r>
+          </a:p>
+        </p:txBody>
+      </p:sp>
+      <p:sp>
+        <p:nvSpPr>
+          <p:cNvPr id="5" name="TextBox 4"/>
+          <p:cNvSpPr txBox="1"/>
+          <p:nvPr/>
+        </p:nvSpPr>
+        <p:spPr>
+          <a:xfrm>
+            <a:off x="914400" y="960120"/>
+            <a:ext cx="10515600" cy="274320"/>
+          </a:xfrm>
+          <a:prstGeom prst="rect">
+            <a:avLst/>
+          </a:prstGeom>
+          <a:noFill/>
+        </p:spPr>
+        <p:txBody>
+          <a:bodyPr wrap="square">
+            <a:spAutoFit/>
+          </a:bodyPr>
+          <a:lstStyle/>
+          <a:p>
+            <a:pPr>
+              <a:defRPr sz="1150">
+                <a:solidFill>
+                  <a:srgbClr val="475569"/>
+                </a:solidFill>
+                <a:latin typeface="Calibri"/>
+              </a:defRPr>
+            </a:pPr>
+            <a:r>
+              <a:t>Tiga langkah penerapan terencana, kesiapan SDM, serta mitigasi risiko kontingensi darurat hari-H pembagian.</a:t>
+            </a:r>
+          </a:p>
+        </p:txBody>
+      </p:sp>
+      <p:sp>
+        <p:nvSpPr>
+          <p:cNvPr id="6" name="Rectangle 5"/>
           <p:cNvSpPr/>
           <p:nvPr/>
         </p:nvSpPr>
         <p:spPr>
           <a:xfrm>
-            <a:off x="4343400" y="1554480"/>
-            <a:ext cx="3474720" cy="1874519"/>
+            <a:off x="731520" y="1261872"/>
+            <a:ext cx="10728655" cy="13716"/>
           </a:xfrm>
           <a:prstGeom prst="rect">
             <a:avLst/>
           </a:prstGeom>
           <a:solidFill>
-            <a:srgbClr val="FFFFFF"/>
-          </a:solidFill>
-          <a:ln w="19050">
-            <a:solidFill>
-              <a:srgbClr val="6B0F1A"/>
-            </a:solidFill>
-          </a:ln>
-        </p:spPr>
-        <p:style>
-          <a:lnRef idx="1">
-            <a:schemeClr val="accent1"/>
-          </a:lnRef>
-          <a:fillRef idx="3">
-            <a:schemeClr val="accent1"/>
-          </a:fillRef>
-          <a:effectRef idx="2">
-            <a:schemeClr val="accent1"/>
-          </a:effectRef>
-          <a:fontRef idx="minor">
-            <a:schemeClr val="lt1"/>
-          </a:fontRef>
-        </p:style>
-        <p:txBody>
-          <a:bodyPr rtlCol="0" anchor="ctr"/>
-          <a:lstStyle/>
-          <a:p>
-            <a:pPr algn="ctr"/>
-          </a:p>
-        </p:txBody>
-      </p:sp>
-      <p:sp>
-        <p:nvSpPr>
-          <p:cNvPr id="9" name="Rectangle 8"/>
-          <p:cNvSpPr/>
-          <p:nvPr/>
-        </p:nvSpPr>
-        <p:spPr>
-          <a:xfrm>
-            <a:off x="4343400" y="1554480"/>
-            <a:ext cx="3474720" cy="347472"/>
-          </a:xfrm>
-          <a:prstGeom prst="rect">
-            <a:avLst/>
-          </a:prstGeom>
-          <a:solidFill>
-            <a:srgbClr val="580B13"/>
+            <a:srgbClr val="E2E8F0"/>
           </a:solidFill>
           <a:ln>
             <a:noFill/>
@@ -8971,86 +9070,30 @@
           <a:bodyPr rtlCol="0" anchor="ctr"/>
           <a:lstStyle/>
           <a:p>
-            <a:pPr algn="ctr">
-              <a:defRPr sz="950" b="1">
-                <a:solidFill>
-                  <a:srgbClr val="FFD166"/>
-                </a:solidFill>
-              </a:defRPr>
-            </a:pPr>
-            <a:r>
-              <a:t>PRIORITAS 2 • INTEGRASI PORTAL</a:t>
-            </a:r>
-          </a:p>
-        </p:txBody>
-      </p:sp>
-      <p:sp>
-        <p:nvSpPr>
-          <p:cNvPr id="10" name="TextBox 9"/>
-          <p:cNvSpPr txBox="1"/>
+            <a:pPr algn="ctr"/>
+          </a:p>
+        </p:txBody>
+      </p:sp>
+      <p:sp>
+        <p:nvSpPr>
+          <p:cNvPr id="7" name="Rounded Rectangle 6"/>
+          <p:cNvSpPr/>
           <p:nvPr/>
         </p:nvSpPr>
         <p:spPr>
           <a:xfrm>
-            <a:off x="4453128" y="1938528"/>
-            <a:ext cx="3255263" cy="1417319"/>
+            <a:off x="731520" y="1417320"/>
+            <a:ext cx="3429000" cy="4297680"/>
           </a:xfrm>
-          <a:prstGeom prst="rect">
-            <a:avLst/>
-          </a:prstGeom>
-          <a:noFill/>
-        </p:spPr>
-        <p:txBody>
-          <a:bodyPr wrap="square">
-            <a:spAutoFit/>
-          </a:bodyPr>
-          <a:lstStyle/>
-          <a:p>
-            <a:pPr>
-              <a:defRPr sz="1250" b="1">
-                <a:solidFill>
-                  <a:srgbClr val="580B13"/>
-                </a:solidFill>
-              </a:defRPr>
-            </a:pPr>
-            <a:r>
-              <a:t>Sinkronisasi Keuangan</a:t>
-            </a:r>
-          </a:p>
-          <a:p>
-            <a:pPr>
-              <a:defRPr sz="1050">
-                <a:solidFill>
-                  <a:srgbClr val="1E293B"/>
-                </a:solidFill>
-              </a:defRPr>
-            </a:pPr>
-            <a:r>
-              <a:t>Integrasi status lunas Keuangan, pembukaan portal ukuran mandiri, dan penyiaran jadwal distribusi bertahap.</a:t>
-            </a:r>
-          </a:p>
-        </p:txBody>
-      </p:sp>
-      <p:sp>
-        <p:nvSpPr>
-          <p:cNvPr id="11" name="Rectangle 10"/>
-          <p:cNvSpPr/>
-          <p:nvPr/>
-        </p:nvSpPr>
-        <p:spPr>
-          <a:xfrm>
-            <a:off x="8138160" y="1554480"/>
-            <a:ext cx="3474720" cy="1874519"/>
-          </a:xfrm>
-          <a:prstGeom prst="rect">
+          <a:prstGeom prst="roundRect">
             <a:avLst/>
           </a:prstGeom>
           <a:solidFill>
-            <a:srgbClr val="FFFFFF"/>
+            <a:srgbClr val="F8FAFC"/>
           </a:solidFill>
-          <a:ln w="19050">
+          <a:ln w="12700">
             <a:solidFill>
-              <a:srgbClr val="6B0F1A"/>
+              <a:srgbClr val="E2E8F0"/>
             </a:solidFill>
           </a:ln>
         </p:spPr>
@@ -9069,32 +9112,124 @@
           </a:fontRef>
         </p:style>
         <p:txBody>
-          <a:bodyPr rtlCol="0" anchor="ctr"/>
-          <a:lstStyle/>
-          <a:p>
-            <a:pPr algn="ctr"/>
-          </a:p>
-        </p:txBody>
-      </p:sp>
-      <p:sp>
-        <p:nvSpPr>
-          <p:cNvPr id="12" name="Rectangle 11"/>
+          <a:bodyPr rtlCol="0" anchor="t" wrap="square" lIns="182880" rIns="182880" tIns="164592" bIns="137160"/>
+          <a:lstStyle/>
+          <a:p>
+            <a:pPr algn="ctr">
+              <a:defRPr sz="950" b="1">
+                <a:solidFill>
+                  <a:srgbClr val="980517"/>
+                </a:solidFill>
+                <a:latin typeface="Arial"/>
+              </a:defRPr>
+            </a:pPr>
+            <a:r>
+              <a:t>3 PRIORITAS IMPLEMENTASI</a:t>
+            </a:r>
+          </a:p>
+          <a:p>
+            <a:pPr>
+              <a:spcAft>
+                <a:spcPts val="600"/>
+              </a:spcAft>
+              <a:defRPr sz="1300" b="1">
+                <a:solidFill>
+                  <a:srgbClr val="0F172A"/>
+                </a:solidFill>
+                <a:latin typeface="Arial"/>
+              </a:defRPr>
+            </a:pPr>
+            <a:r>
+              <a:t>Tahapan Kesiapan Sistem</a:t>
+            </a:r>
+          </a:p>
+          <a:p>
+            <a:pPr>
+              <a:spcAft>
+                <a:spcPts val="400"/>
+              </a:spcAft>
+              <a:defRPr sz="1050">
+                <a:solidFill>
+                  <a:srgbClr val="0F172A"/>
+                </a:solidFill>
+                <a:latin typeface="Calibri"/>
+              </a:defRPr>
+            </a:pPr>
+            <a:r>
+              <a:t>•  Prioritas 1 (Master Data): Pembersihan data lama, pembuatan skema SKU 5-segmen, impor data mahasiswa, dan konfigurasi hak seragam prodi.</a:t>
+            </a:r>
+          </a:p>
+          <a:p>
+            <a:pPr>
+              <a:spcAft>
+                <a:spcPts val="400"/>
+              </a:spcAft>
+              <a:defRPr sz="1050">
+                <a:solidFill>
+                  <a:srgbClr val="0F172A"/>
+                </a:solidFill>
+                <a:latin typeface="Calibri"/>
+              </a:defRPr>
+            </a:pPr>
+            <a:r>
+              <a:t>•  Prioritas 2 (Integrasi Portal): Integrasi status lunas Keuangan (Eligibility), pembukaan jendela waktu pengisian profil ukuran maba, dan rilis jadwal.</a:t>
+            </a:r>
+          </a:p>
+          <a:p>
+            <a:pPr>
+              <a:spcAft>
+                <a:spcPts val="400"/>
+              </a:spcAft>
+              <a:defRPr sz="1050">
+                <a:solidFill>
+                  <a:srgbClr val="0F172A"/>
+                </a:solidFill>
+                <a:latin typeface="Calibri"/>
+              </a:defRPr>
+            </a:pPr>
+            <a:r>
+              <a:t>•  Prioritas 3 (Kesiapan SDM): Pelatihan teknis staf posko memakai scanner webcam, prosedur fitting ukuran, dan drill skenario darurat.</a:t>
+            </a:r>
+          </a:p>
+          <a:p>
+            <a:pPr>
+              <a:spcBef>
+                <a:spcPts val="400"/>
+              </a:spcBef>
+              <a:defRPr sz="1000" b="1">
+                <a:solidFill>
+                  <a:srgbClr val="980517"/>
+                </a:solidFill>
+                <a:latin typeface="Calibri"/>
+              </a:defRPr>
+            </a:pPr>
+            <a:r>
+              <a:t>➔  Roadmap: 6 Minggu Implementasi Penuh</a:t>
+            </a:r>
+          </a:p>
+        </p:txBody>
+      </p:sp>
+      <p:sp>
+        <p:nvSpPr>
+          <p:cNvPr id="8" name="Rounded Rectangle 7"/>
           <p:cNvSpPr/>
           <p:nvPr/>
         </p:nvSpPr>
         <p:spPr>
           <a:xfrm>
-            <a:off x="8138160" y="1554480"/>
-            <a:ext cx="3474720" cy="347472"/>
+            <a:off x="4370832" y="1417320"/>
+            <a:ext cx="7086600" cy="4297680"/>
           </a:xfrm>
-          <a:prstGeom prst="rect">
+          <a:prstGeom prst="roundRect">
             <a:avLst/>
           </a:prstGeom>
           <a:solidFill>
-            <a:srgbClr val="580B13"/>
+            <a:srgbClr val="FEF2F2"/>
           </a:solidFill>
-          <a:ln>
-            <a:noFill/>
+          <a:ln w="19050">
+            <a:solidFill>
+              <a:srgbClr val="980517"/>
+            </a:solidFill>
           </a:ln>
         </p:spPr>
         <p:style>
@@ -9112,89 +9247,147 @@
           </a:fontRef>
         </p:style>
         <p:txBody>
-          <a:bodyPr rtlCol="0" anchor="ctr"/>
+          <a:bodyPr rtlCol="0" anchor="t" wrap="square" lIns="182880" rIns="182880" tIns="164592" bIns="137160"/>
           <a:lstStyle/>
           <a:p>
             <a:pPr algn="ctr">
               <a:defRPr sz="950" b="1">
                 <a:solidFill>
-                  <a:srgbClr val="FFD166"/>
-                </a:solidFill>
-              </a:defRPr>
-            </a:pPr>
-            <a:r>
-              <a:t>PRIORITAS 3 • PELATIHAN SDM</a:t>
-            </a:r>
-          </a:p>
-        </p:txBody>
-      </p:sp>
-      <p:sp>
-        <p:nvSpPr>
-          <p:cNvPr id="13" name="TextBox 12"/>
-          <p:cNvSpPr txBox="1"/>
+                  <a:srgbClr val="980517"/>
+                </a:solidFill>
+                <a:latin typeface="Arial"/>
+              </a:defRPr>
+            </a:pPr>
+            <a:r>
+              <a:t>3 RISIKO DARURAT LAPANGAN &amp; CARA MITIGASI</a:t>
+            </a:r>
+          </a:p>
+          <a:p>
+            <a:pPr>
+              <a:spcAft>
+                <a:spcPts val="600"/>
+              </a:spcAft>
+              <a:defRPr sz="1300" b="1">
+                <a:solidFill>
+                  <a:srgbClr val="0F172A"/>
+                </a:solidFill>
+                <a:latin typeface="Arial"/>
+              </a:defRPr>
+            </a:pPr>
+            <a:r>
+              <a:t>SOP Kontingensi Hari-H Posko</a:t>
+            </a:r>
+          </a:p>
+          <a:p>
+            <a:pPr>
+              <a:spcAft>
+                <a:spcPts val="400"/>
+              </a:spcAft>
+              <a:defRPr sz="1050">
+                <a:solidFill>
+                  <a:srgbClr val="0F172A"/>
+                </a:solidFill>
+                <a:latin typeface="Calibri"/>
+              </a:defRPr>
+            </a:pPr>
+            <a:r>
+              <a:t>•  RISIKO 1: Baterai HP Mahasiswa Mati / QR Rusak</a:t>
+            </a:r>
+            <a:br/>
+            <a:r>
+              <a:t>• Kendala: Mahasiswa tidak bisa menampilkan QR Code di layar ponsel.</a:t>
+            </a:r>
+            <a:br/>
+            <a:r>
+              <a:t>• Mitigasi UniStock: Bilah scanner staf posko dilengkapi fitur Fallback Search manual via NIM atau Nama yang langsung memanggil profil hak seketika.</a:t>
+            </a:r>
+          </a:p>
+          <a:p>
+            <a:pPr>
+              <a:spcAft>
+                <a:spcPts val="400"/>
+              </a:spcAft>
+              <a:defRPr sz="1050">
+                <a:solidFill>
+                  <a:srgbClr val="0F172A"/>
+                </a:solidFill>
+                <a:latin typeface="Calibri"/>
+              </a:defRPr>
+            </a:pPr>
+            <a:r>
+              <a:t>•  RISIKO 2: Ukuran Rak Habis / Fitting Beda</a:t>
+            </a:r>
+            <a:br/>
+            <a:r>
+              <a:t>• Kendala: Ukuran fisik seragam di rak posko habis saat dicoba langsung.</a:t>
+            </a:r>
+            <a:br/>
+            <a:r>
+              <a:t>• Mitigasi UniStock: Fitur Partial Pickup memungkinkan staf menyerahkan barang yang tersedia (sisa hak tidak hangus &amp; dijadwal ulang) dan mencatat tukar ukuran di student_size_histories.</a:t>
+            </a:r>
+          </a:p>
+          <a:p>
+            <a:pPr>
+              <a:spcAft>
+                <a:spcPts val="400"/>
+              </a:spcAft>
+              <a:defRPr sz="1050">
+                <a:solidFill>
+                  <a:srgbClr val="0F172A"/>
+                </a:solidFill>
+                <a:latin typeface="Calibri"/>
+              </a:defRPr>
+            </a:pPr>
+            <a:r>
+              <a:t>•  RISIKO 3: Jaringan Internet Kampus Lambat / Dobel Klik</a:t>
+            </a:r>
+            <a:br/>
+            <a:r>
+              <a:t>• Kendala: Sinyal wifi fluktuatif menyebabkan staf mengklik tombol konfirmasi berulang kali.</a:t>
+            </a:r>
+            <a:br/>
+            <a:r>
+              <a:t>• Mitigasi UniStock: Transaksi dilindungi Pessimistic Row Locking (lockForUpdate) dan proteksi idempotensi, menjamin nol pemotongan stok ganda.</a:t>
+            </a:r>
+          </a:p>
+          <a:p>
+            <a:pPr>
+              <a:spcBef>
+                <a:spcPts val="400"/>
+              </a:spcBef>
+              <a:defRPr sz="1000" b="1">
+                <a:solidFill>
+                  <a:srgbClr val="980517"/>
+                </a:solidFill>
+                <a:latin typeface="Calibri"/>
+              </a:defRPr>
+            </a:pPr>
+            <a:r>
+              <a:t>➔  Toleransi Kesalahan: Resiliensi Operasional Tinggi</a:t>
+            </a:r>
+          </a:p>
+        </p:txBody>
+      </p:sp>
+      <p:sp>
+        <p:nvSpPr>
+          <p:cNvPr id="9" name="Rounded Rectangle 8"/>
+          <p:cNvSpPr/>
           <p:nvPr/>
         </p:nvSpPr>
         <p:spPr>
           <a:xfrm>
-            <a:off x="8247888" y="1938528"/>
-            <a:ext cx="3255263" cy="1417319"/>
+            <a:off x="731520" y="5870448"/>
+            <a:ext cx="10728655" cy="658368"/>
           </a:xfrm>
-          <a:prstGeom prst="rect">
-            <a:avLst/>
-          </a:prstGeom>
-          <a:noFill/>
-        </p:spPr>
-        <p:txBody>
-          <a:bodyPr wrap="square">
-            <a:spAutoFit/>
-          </a:bodyPr>
-          <a:lstStyle/>
-          <a:p>
-            <a:pPr>
-              <a:defRPr sz="1250" b="1">
-                <a:solidFill>
-                  <a:srgbClr val="580B13"/>
-                </a:solidFill>
-              </a:defRPr>
-            </a:pPr>
-            <a:r>
-              <a:t>Pelatihan Staf Posko &amp; SOP</a:t>
-            </a:r>
-          </a:p>
-          <a:p>
-            <a:pPr>
-              <a:defRPr sz="1050">
-                <a:solidFill>
-                  <a:srgbClr val="1E293B"/>
-                </a:solidFill>
-              </a:defRPr>
-            </a:pPr>
-            <a:r>
-              <a:t>Pelatihan staf loket memakai scanner webcam, prosedur fitting ukuran aktual, simulasi antrean, dan drill darurat.</a:t>
-            </a:r>
-          </a:p>
-        </p:txBody>
-      </p:sp>
-      <p:sp>
-        <p:nvSpPr>
-          <p:cNvPr id="14" name="Rectangle 13"/>
-          <p:cNvSpPr/>
-          <p:nvPr/>
-        </p:nvSpPr>
-        <p:spPr>
-          <a:xfrm>
-            <a:off x="548640" y="3611880"/>
-            <a:ext cx="3474720" cy="1965960"/>
-          </a:xfrm>
-          <a:prstGeom prst="rect">
+          <a:prstGeom prst="roundRect">
             <a:avLst/>
           </a:prstGeom>
           <a:solidFill>
-            <a:srgbClr val="FFFFFF"/>
+            <a:srgbClr val="FEF2F2"/>
           </a:solidFill>
           <a:ln w="19050">
             <a:solidFill>
-              <a:srgbClr val="6B0F1A"/>
+              <a:srgbClr val="980517"/>
             </a:solidFill>
           </a:ln>
         </p:spPr>
@@ -9213,450 +9406,28 @@
           </a:fontRef>
         </p:style>
         <p:txBody>
-          <a:bodyPr rtlCol="0" anchor="ctr"/>
-          <a:lstStyle/>
-          <a:p>
-            <a:pPr algn="ctr"/>
-          </a:p>
-        </p:txBody>
-      </p:sp>
-      <p:sp>
-        <p:nvSpPr>
-          <p:cNvPr id="15" name="Rectangle 14"/>
-          <p:cNvSpPr/>
-          <p:nvPr/>
-        </p:nvSpPr>
-        <p:spPr>
-          <a:xfrm>
-            <a:off x="548640" y="3611880"/>
-            <a:ext cx="3474720" cy="347472"/>
-          </a:xfrm>
-          <a:prstGeom prst="rect">
-            <a:avLst/>
-          </a:prstGeom>
-          <a:solidFill>
-            <a:srgbClr val="580B13"/>
-          </a:solidFill>
-          <a:ln>
-            <a:noFill/>
-          </a:ln>
-        </p:spPr>
-        <p:style>
-          <a:lnRef idx="1">
-            <a:schemeClr val="accent1"/>
-          </a:lnRef>
-          <a:fillRef idx="3">
-            <a:schemeClr val="accent1"/>
-          </a:fillRef>
-          <a:effectRef idx="2">
-            <a:schemeClr val="accent1"/>
-          </a:effectRef>
-          <a:fontRef idx="minor">
-            <a:schemeClr val="lt1"/>
-          </a:fontRef>
-        </p:style>
-        <p:txBody>
-          <a:bodyPr rtlCol="0" anchor="ctr"/>
+          <a:bodyPr rtlCol="0" anchor="ctr" wrap="square" lIns="228600" rIns="228600"/>
           <a:lstStyle/>
           <a:p>
             <a:pPr algn="ctr">
-              <a:defRPr sz="950" b="1">
-                <a:solidFill>
-                  <a:srgbClr val="FFD166"/>
-                </a:solidFill>
-              </a:defRPr>
-            </a:pPr>
-            <a:r>
-              <a:t>RISIKO 1: HP MATI / NO QR</a:t>
-            </a:r>
-          </a:p>
-        </p:txBody>
-      </p:sp>
-      <p:sp>
-        <p:nvSpPr>
-          <p:cNvPr id="16" name="TextBox 15"/>
-          <p:cNvSpPr txBox="1"/>
-          <p:nvPr/>
-        </p:nvSpPr>
-        <p:spPr>
-          <a:xfrm>
-            <a:off x="658368" y="3995928"/>
-            <a:ext cx="3255263" cy="1508760"/>
-          </a:xfrm>
-          <a:prstGeom prst="rect">
-            <a:avLst/>
-          </a:prstGeom>
-          <a:noFill/>
-        </p:spPr>
-        <p:txBody>
-          <a:bodyPr wrap="square">
-            <a:spAutoFit/>
-          </a:bodyPr>
-          <a:lstStyle/>
-          <a:p>
-            <a:pPr>
-              <a:defRPr sz="1250" b="1">
-                <a:solidFill>
-                  <a:srgbClr val="580B13"/>
-                </a:solidFill>
-              </a:defRPr>
-            </a:pPr>
-            <a:r>
-              <a:t>Mitigasi Fallback Search</a:t>
-            </a:r>
-          </a:p>
-          <a:p>
-            <a:pPr>
-              <a:defRPr sz="1050">
-                <a:solidFill>
-                  <a:srgbClr val="1E293B"/>
-                </a:solidFill>
-              </a:defRPr>
-            </a:pPr>
-            <a:r>
-              <a:t>Staf posko dapat mencari data mahasiswa secara manual melalui input NIM atau Nama pada bilah scanner.</a:t>
-            </a:r>
-          </a:p>
-        </p:txBody>
-      </p:sp>
-      <p:sp>
-        <p:nvSpPr>
-          <p:cNvPr id="17" name="Rectangle 16"/>
-          <p:cNvSpPr/>
-          <p:nvPr/>
-        </p:nvSpPr>
-        <p:spPr>
-          <a:xfrm>
-            <a:off x="4343400" y="3611880"/>
-            <a:ext cx="3474720" cy="1965960"/>
-          </a:xfrm>
-          <a:prstGeom prst="rect">
-            <a:avLst/>
-          </a:prstGeom>
-          <a:solidFill>
-            <a:srgbClr val="FFFFFF"/>
-          </a:solidFill>
-          <a:ln w="19050">
-            <a:solidFill>
-              <a:srgbClr val="6B0F1A"/>
-            </a:solidFill>
-          </a:ln>
-        </p:spPr>
-        <p:style>
-          <a:lnRef idx="1">
-            <a:schemeClr val="accent1"/>
-          </a:lnRef>
-          <a:fillRef idx="3">
-            <a:schemeClr val="accent1"/>
-          </a:fillRef>
-          <a:effectRef idx="2">
-            <a:schemeClr val="accent1"/>
-          </a:effectRef>
-          <a:fontRef idx="minor">
-            <a:schemeClr val="lt1"/>
-          </a:fontRef>
-        </p:style>
-        <p:txBody>
-          <a:bodyPr rtlCol="0" anchor="ctr"/>
-          <a:lstStyle/>
-          <a:p>
-            <a:pPr algn="ctr"/>
-          </a:p>
-        </p:txBody>
-      </p:sp>
-      <p:sp>
-        <p:nvSpPr>
-          <p:cNvPr id="18" name="Rectangle 17"/>
-          <p:cNvSpPr/>
-          <p:nvPr/>
-        </p:nvSpPr>
-        <p:spPr>
-          <a:xfrm>
-            <a:off x="4343400" y="3611880"/>
-            <a:ext cx="3474720" cy="347472"/>
-          </a:xfrm>
-          <a:prstGeom prst="rect">
-            <a:avLst/>
-          </a:prstGeom>
-          <a:solidFill>
-            <a:srgbClr val="580B13"/>
-          </a:solidFill>
-          <a:ln>
-            <a:noFill/>
-          </a:ln>
-        </p:spPr>
-        <p:style>
-          <a:lnRef idx="1">
-            <a:schemeClr val="accent1"/>
-          </a:lnRef>
-          <a:fillRef idx="3">
-            <a:schemeClr val="accent1"/>
-          </a:fillRef>
-          <a:effectRef idx="2">
-            <a:schemeClr val="accent1"/>
-          </a:effectRef>
-          <a:fontRef idx="minor">
-            <a:schemeClr val="lt1"/>
-          </a:fontRef>
-        </p:style>
-        <p:txBody>
-          <a:bodyPr rtlCol="0" anchor="ctr"/>
-          <a:lstStyle/>
-          <a:p>
-            <a:pPr algn="ctr">
-              <a:defRPr sz="950" b="1">
-                <a:solidFill>
-                  <a:srgbClr val="FFD166"/>
-                </a:solidFill>
-              </a:defRPr>
-            </a:pPr>
-            <a:r>
-              <a:t>RISIKO 2: UKURAN HABIS / FITTING</a:t>
-            </a:r>
-          </a:p>
-        </p:txBody>
-      </p:sp>
-      <p:sp>
-        <p:nvSpPr>
-          <p:cNvPr id="19" name="TextBox 18"/>
-          <p:cNvSpPr txBox="1"/>
-          <p:nvPr/>
-        </p:nvSpPr>
-        <p:spPr>
-          <a:xfrm>
-            <a:off x="4453128" y="3995928"/>
-            <a:ext cx="3255263" cy="1508760"/>
-          </a:xfrm>
-          <a:prstGeom prst="rect">
-            <a:avLst/>
-          </a:prstGeom>
-          <a:noFill/>
-        </p:spPr>
-        <p:txBody>
-          <a:bodyPr wrap="square">
-            <a:spAutoFit/>
-          </a:bodyPr>
-          <a:lstStyle/>
-          <a:p>
-            <a:pPr>
-              <a:defRPr sz="1250" b="1">
-                <a:solidFill>
-                  <a:srgbClr val="580B13"/>
-                </a:solidFill>
-              </a:defRPr>
-            </a:pPr>
-            <a:r>
-              <a:t>Mitigasi Partial Pickup</a:t>
-            </a:r>
-          </a:p>
-          <a:p>
-            <a:pPr>
-              <a:defRPr sz="1050">
-                <a:solidFill>
-                  <a:srgbClr val="1E293B"/>
-                </a:solidFill>
-              </a:defRPr>
-            </a:pPr>
-            <a:r>
-              <a:t>Serahkan seragam yang tersedia (Partial Pickup, sisa hak tidak hangus) dan catat tukar ukuran di student_size_histories.</a:t>
-            </a:r>
-          </a:p>
-        </p:txBody>
-      </p:sp>
-      <p:sp>
-        <p:nvSpPr>
-          <p:cNvPr id="20" name="Rectangle 19"/>
-          <p:cNvSpPr/>
-          <p:nvPr/>
-        </p:nvSpPr>
-        <p:spPr>
-          <a:xfrm>
-            <a:off x="8138160" y="3611880"/>
-            <a:ext cx="3474720" cy="1965960"/>
-          </a:xfrm>
-          <a:prstGeom prst="rect">
-            <a:avLst/>
-          </a:prstGeom>
-          <a:solidFill>
-            <a:srgbClr val="FFFFFF"/>
-          </a:solidFill>
-          <a:ln w="19050">
-            <a:solidFill>
-              <a:srgbClr val="6B0F1A"/>
-            </a:solidFill>
-          </a:ln>
-        </p:spPr>
-        <p:style>
-          <a:lnRef idx="1">
-            <a:schemeClr val="accent1"/>
-          </a:lnRef>
-          <a:fillRef idx="3">
-            <a:schemeClr val="accent1"/>
-          </a:fillRef>
-          <a:effectRef idx="2">
-            <a:schemeClr val="accent1"/>
-          </a:effectRef>
-          <a:fontRef idx="minor">
-            <a:schemeClr val="lt1"/>
-          </a:fontRef>
-        </p:style>
-        <p:txBody>
-          <a:bodyPr rtlCol="0" anchor="ctr"/>
-          <a:lstStyle/>
-          <a:p>
-            <a:pPr algn="ctr"/>
-          </a:p>
-        </p:txBody>
-      </p:sp>
-      <p:sp>
-        <p:nvSpPr>
-          <p:cNvPr id="21" name="Rectangle 20"/>
-          <p:cNvSpPr/>
-          <p:nvPr/>
-        </p:nvSpPr>
-        <p:spPr>
-          <a:xfrm>
-            <a:off x="8138160" y="3611880"/>
-            <a:ext cx="3474720" cy="347472"/>
-          </a:xfrm>
-          <a:prstGeom prst="rect">
-            <a:avLst/>
-          </a:prstGeom>
-          <a:solidFill>
-            <a:srgbClr val="580B13"/>
-          </a:solidFill>
-          <a:ln>
-            <a:noFill/>
-          </a:ln>
-        </p:spPr>
-        <p:style>
-          <a:lnRef idx="1">
-            <a:schemeClr val="accent1"/>
-          </a:lnRef>
-          <a:fillRef idx="3">
-            <a:schemeClr val="accent1"/>
-          </a:fillRef>
-          <a:effectRef idx="2">
-            <a:schemeClr val="accent1"/>
-          </a:effectRef>
-          <a:fontRef idx="minor">
-            <a:schemeClr val="lt1"/>
-          </a:fontRef>
-        </p:style>
-        <p:txBody>
-          <a:bodyPr rtlCol="0" anchor="ctr"/>
-          <a:lstStyle/>
-          <a:p>
-            <a:pPr algn="ctr">
-              <a:defRPr sz="950" b="1">
-                <a:solidFill>
-                  <a:srgbClr val="FFD166"/>
-                </a:solidFill>
-              </a:defRPr>
-            </a:pPr>
-            <a:r>
-              <a:t>RISIKO 3: INTERNET DOWN</a:t>
-            </a:r>
-          </a:p>
-        </p:txBody>
-      </p:sp>
-      <p:sp>
-        <p:nvSpPr>
-          <p:cNvPr id="22" name="TextBox 21"/>
-          <p:cNvSpPr txBox="1"/>
-          <p:nvPr/>
-        </p:nvSpPr>
-        <p:spPr>
-          <a:xfrm>
-            <a:off x="8247888" y="3995928"/>
-            <a:ext cx="3255263" cy="1508760"/>
-          </a:xfrm>
-          <a:prstGeom prst="rect">
-            <a:avLst/>
-          </a:prstGeom>
-          <a:noFill/>
-        </p:spPr>
-        <p:txBody>
-          <a:bodyPr wrap="square">
-            <a:spAutoFit/>
-          </a:bodyPr>
-          <a:lstStyle/>
-          <a:p>
-            <a:pPr>
-              <a:defRPr sz="1250" b="1">
-                <a:solidFill>
-                  <a:srgbClr val="580B13"/>
-                </a:solidFill>
-              </a:defRPr>
-            </a:pPr>
-            <a:r>
-              <a:t>Mitigasi Pessimistic Lock</a:t>
-            </a:r>
-          </a:p>
-          <a:p>
-            <a:pPr>
-              <a:defRPr sz="1050">
-                <a:solidFill>
-                  <a:srgbClr val="1E293B"/>
-                </a:solidFill>
-              </a:defRPr>
-            </a:pPr>
-            <a:r>
-              <a:t>Database InnoDB dilindungi pessimistic lock (lockForUpdate) dan proteksi idempotensi mencegah pemotongan stok dobel.</a:t>
-            </a:r>
-          </a:p>
-        </p:txBody>
-      </p:sp>
-      <p:sp>
-        <p:nvSpPr>
-          <p:cNvPr id="23" name="Rectangle 22"/>
-          <p:cNvSpPr/>
-          <p:nvPr/>
-        </p:nvSpPr>
-        <p:spPr>
-          <a:xfrm>
-            <a:off x="548640" y="5806440"/>
-            <a:ext cx="11064240" cy="685800"/>
-          </a:xfrm>
-          <a:prstGeom prst="rect">
-            <a:avLst/>
-          </a:prstGeom>
-          <a:solidFill>
-            <a:srgbClr val="580B13"/>
-          </a:solidFill>
-          <a:ln w="19050">
-            <a:solidFill>
-              <a:srgbClr val="FFD166"/>
-            </a:solidFill>
-          </a:ln>
-        </p:spPr>
-        <p:style>
-          <a:lnRef idx="1">
-            <a:schemeClr val="accent1"/>
-          </a:lnRef>
-          <a:fillRef idx="3">
-            <a:schemeClr val="accent1"/>
-          </a:fillRef>
-          <a:effectRef idx="2">
-            <a:schemeClr val="accent1"/>
-          </a:effectRef>
-          <a:fontRef idx="minor">
-            <a:schemeClr val="lt1"/>
-          </a:fontRef>
-        </p:style>
-        <p:txBody>
-          <a:bodyPr rtlCol="0" anchor="ctr" wrap="square"/>
-          <a:lstStyle/>
-          <a:p>
-            <a:pPr algn="ctr">
-              <a:defRPr sz="1100" b="1">
-                <a:solidFill>
-                  <a:srgbClr val="FFFFFF"/>
-                </a:solidFill>
-              </a:defRPr>
-            </a:pPr>
-            <a:r>
-              <a:t>Resiliensi Operasional Tinggi: UniStock dirancang fault-tolerant menjamin posko tetap beroperasi dalam kondisi darurat.</a:t>
+              <a:defRPr sz="1050" b="1">
+                <a:solidFill>
+                  <a:srgbClr val="980517"/>
+                </a:solidFill>
+                <a:latin typeface="Arial"/>
+              </a:defRPr>
+            </a:pPr>
+            <a:r>
+              <a:t>RESILIENSI OPERASIONAL TINGGI: </a:t>
+            </a:r>
+            <a:r>
+              <a:rPr sz="1050">
+                <a:solidFill>
+                  <a:srgbClr val="0F172A"/>
+                </a:solidFill>
+                <a:latin typeface="Calibri"/>
+              </a:rPr>
+              <a:t>UniStock dirancang dengan pertimbangan toleransi kesalahan nyata (fault-tolerant), menjamin pembagian di posko kampus tetap berjalan lancar dalam kondisi darurat apa pun.</a:t>
             </a:r>
           </a:p>
         </p:txBody>
@@ -9675,7 +9446,7 @@
     <p:bg>
       <p:bgPr>
         <a:solidFill>
-          <a:srgbClr val="580B13"/>
+          <a:srgbClr val="FFFFFF"/>
         </a:solidFill>
         <a:effectLst/>
       </p:bgPr>
@@ -9689,189 +9460,20 @@
       <p:grpSpPr/>
       <p:sp>
         <p:nvSpPr>
-          <p:cNvPr id="2" name="Rounded Rectangle 1"/>
+          <p:cNvPr id="2" name="Rectangle 1"/>
           <p:cNvSpPr/>
           <p:nvPr/>
         </p:nvSpPr>
         <p:spPr>
           <a:xfrm>
-            <a:off x="548640" y="320040"/>
-            <a:ext cx="3291840" cy="320040"/>
-          </a:xfrm>
-          <a:prstGeom prst="roundRect">
-            <a:avLst/>
-          </a:prstGeom>
-          <a:solidFill>
-            <a:srgbClr val="FFD166"/>
-          </a:solidFill>
-          <a:ln>
-            <a:solidFill>
-              <a:srgbClr val="FFD166"/>
-            </a:solidFill>
-          </a:ln>
-        </p:spPr>
-        <p:style>
-          <a:lnRef idx="1">
-            <a:schemeClr val="accent1"/>
-          </a:lnRef>
-          <a:fillRef idx="3">
-            <a:schemeClr val="accent1"/>
-          </a:fillRef>
-          <a:effectRef idx="2">
-            <a:schemeClr val="accent1"/>
-          </a:effectRef>
-          <a:fontRef idx="minor">
-            <a:schemeClr val="lt1"/>
-          </a:fontRef>
-        </p:style>
-        <p:txBody>
-          <a:bodyPr rtlCol="0" anchor="ctr" wrap="square"/>
-          <a:lstStyle/>
-          <a:p>
-            <a:pPr algn="ctr">
-              <a:defRPr sz="1000" b="1">
-                <a:solidFill>
-                  <a:srgbClr val="580B13"/>
-                </a:solidFill>
-              </a:defRPr>
-            </a:pPr>
-            <a:r>
-              <a:t>SLIDE 8 • CONCLUSION &amp; BENEFITS</a:t>
-            </a:r>
-          </a:p>
-        </p:txBody>
-      </p:sp>
-      <p:sp>
-        <p:nvSpPr>
-          <p:cNvPr id="3" name="TextBox 2"/>
-          <p:cNvSpPr txBox="1"/>
-          <p:nvPr/>
-        </p:nvSpPr>
-        <p:spPr>
-          <a:xfrm>
-            <a:off x="548640" y="685800"/>
-            <a:ext cx="11064240" cy="438912"/>
-          </a:xfrm>
-          <a:prstGeom prst="rect">
-            <a:avLst/>
-          </a:prstGeom>
-          <a:noFill/>
-        </p:spPr>
-        <p:txBody>
-          <a:bodyPr wrap="square">
-            <a:spAutoFit/>
-          </a:bodyPr>
-          <a:lstStyle/>
-          <a:p>
-            <a:pPr>
-              <a:defRPr sz="1900" b="1">
-                <a:solidFill>
-                  <a:srgbClr val="FFFFFF"/>
-                </a:solidFill>
-              </a:defRPr>
-            </a:pPr>
-            <a:r>
-              <a:t>KESIMPULAN &amp; TIGA MANFAAT TERUKUR YANG DIHASILKAN</a:t>
-            </a:r>
-          </a:p>
-        </p:txBody>
-      </p:sp>
-      <p:sp>
-        <p:nvSpPr>
-          <p:cNvPr id="4" name="TextBox 3"/>
-          <p:cNvSpPr txBox="1"/>
-          <p:nvPr/>
-        </p:nvSpPr>
-        <p:spPr>
-          <a:xfrm>
-            <a:off x="548640" y="1115568"/>
-            <a:ext cx="11064240" cy="347472"/>
-          </a:xfrm>
-          <a:prstGeom prst="rect">
-            <a:avLst/>
-          </a:prstGeom>
-          <a:noFill/>
-        </p:spPr>
-        <p:txBody>
-          <a:bodyPr wrap="square">
-            <a:spAutoFit/>
-          </a:bodyPr>
-          <a:lstStyle/>
-          <a:p>
-            <a:pPr>
-              <a:defRPr sz="1150">
-                <a:solidFill>
-                  <a:srgbClr val="FFD166"/>
-                </a:solidFill>
-              </a:defRPr>
-            </a:pPr>
-            <a:r>
-              <a:t>Rangkuman dampak nyata sistem informasi HorizonU Uniform (UniStock SCM) bagi operasional kampus.</a:t>
-            </a:r>
-          </a:p>
-        </p:txBody>
-      </p:sp>
-      <p:sp>
-        <p:nvSpPr>
-          <p:cNvPr id="5" name="Rectangle 4"/>
-          <p:cNvSpPr/>
-          <p:nvPr/>
-        </p:nvSpPr>
-        <p:spPr>
-          <a:xfrm>
-            <a:off x="548640" y="1554480"/>
-            <a:ext cx="3474720" cy="4023360"/>
+            <a:off x="731520" y="365760"/>
+            <a:ext cx="73152" cy="777240"/>
           </a:xfrm>
           <a:prstGeom prst="rect">
             <a:avLst/>
           </a:prstGeom>
           <a:solidFill>
-            <a:srgbClr val="FFFFFF"/>
-          </a:solidFill>
-          <a:ln w="19050">
-            <a:solidFill>
-              <a:srgbClr val="6B0F1A"/>
-            </a:solidFill>
-          </a:ln>
-        </p:spPr>
-        <p:style>
-          <a:lnRef idx="1">
-            <a:schemeClr val="accent1"/>
-          </a:lnRef>
-          <a:fillRef idx="3">
-            <a:schemeClr val="accent1"/>
-          </a:fillRef>
-          <a:effectRef idx="2">
-            <a:schemeClr val="accent1"/>
-          </a:effectRef>
-          <a:fontRef idx="minor">
-            <a:schemeClr val="lt1"/>
-          </a:fontRef>
-        </p:style>
-        <p:txBody>
-          <a:bodyPr rtlCol="0" anchor="ctr"/>
-          <a:lstStyle/>
-          <a:p>
-            <a:pPr algn="ctr"/>
-          </a:p>
-        </p:txBody>
-      </p:sp>
-      <p:sp>
-        <p:nvSpPr>
-          <p:cNvPr id="6" name="Rectangle 5"/>
-          <p:cNvSpPr/>
-          <p:nvPr/>
-        </p:nvSpPr>
-        <p:spPr>
-          <a:xfrm>
-            <a:off x="548640" y="1554480"/>
-            <a:ext cx="3474720" cy="347472"/>
-          </a:xfrm>
-          <a:prstGeom prst="rect">
-            <a:avLst/>
-          </a:prstGeom>
-          <a:solidFill>
-            <a:srgbClr val="580B13"/>
+            <a:srgbClr val="980517"/>
           </a:solidFill>
           <a:ln>
             <a:noFill/>
@@ -9895,29 +9497,20 @@
           <a:bodyPr rtlCol="0" anchor="ctr"/>
           <a:lstStyle/>
           <a:p>
-            <a:pPr algn="ctr">
-              <a:defRPr sz="950" b="1">
-                <a:solidFill>
-                  <a:srgbClr val="FFD166"/>
-                </a:solidFill>
-              </a:defRPr>
-            </a:pPr>
-            <a:r>
-              <a:t>MANFAAT 01 • EFISIENSI WAKTU</a:t>
-            </a:r>
-          </a:p>
-        </p:txBody>
-      </p:sp>
-      <p:sp>
-        <p:nvSpPr>
-          <p:cNvPr id="7" name="TextBox 6"/>
+            <a:pPr algn="ctr"/>
+          </a:p>
+        </p:txBody>
+      </p:sp>
+      <p:sp>
+        <p:nvSpPr>
+          <p:cNvPr id="3" name="TextBox 2"/>
           <p:cNvSpPr txBox="1"/>
           <p:nvPr/>
         </p:nvSpPr>
         <p:spPr>
           <a:xfrm>
-            <a:off x="658368" y="1938528"/>
-            <a:ext cx="3255263" cy="3566160"/>
+            <a:off x="914400" y="320040"/>
+            <a:ext cx="10515600" cy="256032"/>
           </a:xfrm>
           <a:prstGeom prst="rect">
             <a:avLst/>
@@ -9931,91 +9524,107 @@
           <a:lstStyle/>
           <a:p>
             <a:pPr>
-              <a:defRPr sz="1250" b="1">
-                <a:solidFill>
-                  <a:srgbClr val="580B13"/>
-                </a:solidFill>
-              </a:defRPr>
-            </a:pPr>
-            <a:r>
-              <a:t>&lt; 30 Detik per Mahasiswa</a:t>
-            </a:r>
-          </a:p>
-          <a:p>
-            <a:pPr>
-              <a:defRPr sz="1050">
-                <a:solidFill>
-                  <a:srgbClr val="1E293B"/>
-                </a:solidFill>
-              </a:defRPr>
-            </a:pPr>
-            <a:r>
-              <a:t>Memangkas waktu layanan posko dari 15-20 menit menjadi di bawah 30 detik melalui pemindaian QR Code dan validasi 6-lapis otomatis.</a:t>
-            </a:r>
-          </a:p>
-        </p:txBody>
-      </p:sp>
-      <p:sp>
-        <p:nvSpPr>
-          <p:cNvPr id="8" name="Rectangle 7"/>
+              <a:defRPr sz="1000" b="1">
+                <a:solidFill>
+                  <a:srgbClr val="980517"/>
+                </a:solidFill>
+                <a:latin typeface="Arial"/>
+              </a:defRPr>
+            </a:pPr>
+            <a:r>
+              <a:t>SLIDE 8 • CONCLUSION &amp; BENEFITS   |   RUBRIK: PRESENTATION &amp; IMPACT (15%)</a:t>
+            </a:r>
+          </a:p>
+        </p:txBody>
+      </p:sp>
+      <p:sp>
+        <p:nvSpPr>
+          <p:cNvPr id="4" name="TextBox 3"/>
+          <p:cNvSpPr txBox="1"/>
+          <p:nvPr/>
+        </p:nvSpPr>
+        <p:spPr>
+          <a:xfrm>
+            <a:off x="914400" y="548640"/>
+            <a:ext cx="10515600" cy="411480"/>
+          </a:xfrm>
+          <a:prstGeom prst="rect">
+            <a:avLst/>
+          </a:prstGeom>
+          <a:noFill/>
+        </p:spPr>
+        <p:txBody>
+          <a:bodyPr wrap="square">
+            <a:spAutoFit/>
+          </a:bodyPr>
+          <a:lstStyle/>
+          <a:p>
+            <a:pPr>
+              <a:defRPr sz="2000" b="1">
+                <a:solidFill>
+                  <a:srgbClr val="0F172A"/>
+                </a:solidFill>
+                <a:latin typeface="Arial"/>
+              </a:defRPr>
+            </a:pPr>
+            <a:r>
+              <a:t>KESIMPULAN &amp; TIGA MANFAAT TERUKUR YANG DIHASILKAN</a:t>
+            </a:r>
+          </a:p>
+        </p:txBody>
+      </p:sp>
+      <p:sp>
+        <p:nvSpPr>
+          <p:cNvPr id="5" name="TextBox 4"/>
+          <p:cNvSpPr txBox="1"/>
+          <p:nvPr/>
+        </p:nvSpPr>
+        <p:spPr>
+          <a:xfrm>
+            <a:off x="914400" y="960120"/>
+            <a:ext cx="10515600" cy="274320"/>
+          </a:xfrm>
+          <a:prstGeom prst="rect">
+            <a:avLst/>
+          </a:prstGeom>
+          <a:noFill/>
+        </p:spPr>
+        <p:txBody>
+          <a:bodyPr wrap="square">
+            <a:spAutoFit/>
+          </a:bodyPr>
+          <a:lstStyle/>
+          <a:p>
+            <a:pPr>
+              <a:defRPr sz="1150">
+                <a:solidFill>
+                  <a:srgbClr val="475569"/>
+                </a:solidFill>
+                <a:latin typeface="Calibri"/>
+              </a:defRPr>
+            </a:pPr>
+            <a:r>
+              <a:t>Rangkuman dampak nyata sistem informasi HorizonU Uniform (UniStock SCM) bagi efisiensi operasional dan akuntabilitas keuangan.</a:t>
+            </a:r>
+          </a:p>
+        </p:txBody>
+      </p:sp>
+      <p:sp>
+        <p:nvSpPr>
+          <p:cNvPr id="6" name="Rectangle 5"/>
           <p:cNvSpPr/>
           <p:nvPr/>
         </p:nvSpPr>
         <p:spPr>
           <a:xfrm>
-            <a:off x="4343400" y="1554480"/>
-            <a:ext cx="3474720" cy="4023360"/>
+            <a:off x="731520" y="1261872"/>
+            <a:ext cx="10728655" cy="13716"/>
           </a:xfrm>
           <a:prstGeom prst="rect">
             <a:avLst/>
           </a:prstGeom>
           <a:solidFill>
-            <a:srgbClr val="FFFFFF"/>
-          </a:solidFill>
-          <a:ln w="19050">
-            <a:solidFill>
-              <a:srgbClr val="6B0F1A"/>
-            </a:solidFill>
-          </a:ln>
-        </p:spPr>
-        <p:style>
-          <a:lnRef idx="1">
-            <a:schemeClr val="accent1"/>
-          </a:lnRef>
-          <a:fillRef idx="3">
-            <a:schemeClr val="accent1"/>
-          </a:fillRef>
-          <a:effectRef idx="2">
-            <a:schemeClr val="accent1"/>
-          </a:effectRef>
-          <a:fontRef idx="minor">
-            <a:schemeClr val="lt1"/>
-          </a:fontRef>
-        </p:style>
-        <p:txBody>
-          <a:bodyPr rtlCol="0" anchor="ctr"/>
-          <a:lstStyle/>
-          <a:p>
-            <a:pPr algn="ctr"/>
-          </a:p>
-        </p:txBody>
-      </p:sp>
-      <p:sp>
-        <p:nvSpPr>
-          <p:cNvPr id="9" name="Rectangle 8"/>
-          <p:cNvSpPr/>
-          <p:nvPr/>
-        </p:nvSpPr>
-        <p:spPr>
-          <a:xfrm>
-            <a:off x="4343400" y="1554480"/>
-            <a:ext cx="3474720" cy="347472"/>
-          </a:xfrm>
-          <a:prstGeom prst="rect">
-            <a:avLst/>
-          </a:prstGeom>
-          <a:solidFill>
-            <a:srgbClr val="580B13"/>
+            <a:srgbClr val="E2E8F0"/>
           </a:solidFill>
           <a:ln>
             <a:noFill/>
@@ -10039,86 +9648,30 @@
           <a:bodyPr rtlCol="0" anchor="ctr"/>
           <a:lstStyle/>
           <a:p>
-            <a:pPr algn="ctr">
-              <a:defRPr sz="950" b="1">
-                <a:solidFill>
-                  <a:srgbClr val="FFD166"/>
-                </a:solidFill>
-              </a:defRPr>
-            </a:pPr>
-            <a:r>
-              <a:t>MANFAAT 02 • AKURASI INVENTARIS</a:t>
-            </a:r>
-          </a:p>
-        </p:txBody>
-      </p:sp>
-      <p:sp>
-        <p:nvSpPr>
-          <p:cNvPr id="10" name="TextBox 9"/>
-          <p:cNvSpPr txBox="1"/>
+            <a:pPr algn="ctr"/>
+          </a:p>
+        </p:txBody>
+      </p:sp>
+      <p:sp>
+        <p:nvSpPr>
+          <p:cNvPr id="7" name="Rounded Rectangle 6"/>
+          <p:cNvSpPr/>
           <p:nvPr/>
         </p:nvSpPr>
         <p:spPr>
           <a:xfrm>
-            <a:off x="4453128" y="1938528"/>
-            <a:ext cx="3255263" cy="3566160"/>
+            <a:off x="731520" y="1417320"/>
+            <a:ext cx="3429000" cy="4297680"/>
           </a:xfrm>
-          <a:prstGeom prst="rect">
-            <a:avLst/>
-          </a:prstGeom>
-          <a:noFill/>
-        </p:spPr>
-        <p:txBody>
-          <a:bodyPr wrap="square">
-            <a:spAutoFit/>
-          </a:bodyPr>
-          <a:lstStyle/>
-          <a:p>
-            <a:pPr>
-              <a:defRPr sz="1250" b="1">
-                <a:solidFill>
-                  <a:srgbClr val="580B13"/>
-                </a:solidFill>
-              </a:defRPr>
-            </a:pPr>
-            <a:r>
-              <a:t>Zero (0) Dead-Stock</a:t>
-            </a:r>
-          </a:p>
-          <a:p>
-            <a:pPr>
-              <a:defRPr sz="1050">
-                <a:solidFill>
-                  <a:srgbClr val="1E293B"/>
-                </a:solidFill>
-              </a:defRPr>
-            </a:pPr>
-            <a:r>
-              <a:t>Profiling ukuran mandiri memastikan pengadaan barang pabrik selaras 100% dengan ukuran tubuh riil mahasiswa aktif.</a:t>
-            </a:r>
-          </a:p>
-        </p:txBody>
-      </p:sp>
-      <p:sp>
-        <p:nvSpPr>
-          <p:cNvPr id="11" name="Rectangle 10"/>
-          <p:cNvSpPr/>
-          <p:nvPr/>
-        </p:nvSpPr>
-        <p:spPr>
-          <a:xfrm>
-            <a:off x="8138160" y="1554480"/>
-            <a:ext cx="3474720" cy="4023360"/>
-          </a:xfrm>
-          <a:prstGeom prst="rect">
+          <a:prstGeom prst="roundRect">
             <a:avLst/>
           </a:prstGeom>
           <a:solidFill>
-            <a:srgbClr val="FFFFFF"/>
+            <a:srgbClr val="FEF2F2"/>
           </a:solidFill>
           <a:ln w="19050">
             <a:solidFill>
-              <a:srgbClr val="6B0F1A"/>
+              <a:srgbClr val="980517"/>
             </a:solidFill>
           </a:ln>
         </p:spPr>
@@ -10137,32 +9690,124 @@
           </a:fontRef>
         </p:style>
         <p:txBody>
-          <a:bodyPr rtlCol="0" anchor="ctr"/>
-          <a:lstStyle/>
-          <a:p>
-            <a:pPr algn="ctr"/>
-          </a:p>
-        </p:txBody>
-      </p:sp>
-      <p:sp>
-        <p:nvSpPr>
-          <p:cNvPr id="12" name="Rectangle 11"/>
+          <a:bodyPr rtlCol="0" anchor="t" wrap="square" lIns="182880" rIns="182880" tIns="164592" bIns="137160"/>
+          <a:lstStyle/>
+          <a:p>
+            <a:pPr algn="ctr">
+              <a:defRPr sz="950" b="1">
+                <a:solidFill>
+                  <a:srgbClr val="980517"/>
+                </a:solidFill>
+                <a:latin typeface="Arial"/>
+              </a:defRPr>
+            </a:pPr>
+            <a:r>
+              <a:t>MANFAAT 01 • EFISIENSI WAKTU</a:t>
+            </a:r>
+          </a:p>
+          <a:p>
+            <a:pPr>
+              <a:spcAft>
+                <a:spcPts val="600"/>
+              </a:spcAft>
+              <a:defRPr sz="1300" b="1">
+                <a:solidFill>
+                  <a:srgbClr val="0F172A"/>
+                </a:solidFill>
+                <a:latin typeface="Arial"/>
+              </a:defRPr>
+            </a:pPr>
+            <a:r>
+              <a:t>&lt; 30 Detik per Mahasiswa</a:t>
+            </a:r>
+          </a:p>
+          <a:p>
+            <a:pPr>
+              <a:spcAft>
+                <a:spcPts val="400"/>
+              </a:spcAft>
+              <a:defRPr sz="1050">
+                <a:solidFill>
+                  <a:srgbClr val="0F172A"/>
+                </a:solidFill>
+                <a:latin typeface="Calibri"/>
+              </a:defRPr>
+            </a:pPr>
+            <a:r>
+              <a:t>•  Memangkas waktu layanan loket dari yang sebelumnya 15–20 menit per mahasiswa menjadi di bawah 30 detik.</a:t>
+            </a:r>
+          </a:p>
+          <a:p>
+            <a:pPr>
+              <a:spcAft>
+                <a:spcPts val="400"/>
+              </a:spcAft>
+              <a:defRPr sz="1050">
+                <a:solidFill>
+                  <a:srgbClr val="0F172A"/>
+                </a:solidFill>
+                <a:latin typeface="Calibri"/>
+              </a:defRPr>
+            </a:pPr>
+            <a:r>
+              <a:t>•  Pemindaian QR Code instan berbasis NIM dan eksekusi 6-lapis validasi otomatis.</a:t>
+            </a:r>
+          </a:p>
+          <a:p>
+            <a:pPr>
+              <a:spcAft>
+                <a:spcPts val="400"/>
+              </a:spcAft>
+              <a:defRPr sz="1050">
+                <a:solidFill>
+                  <a:srgbClr val="0F172A"/>
+                </a:solidFill>
+                <a:latin typeface="Calibri"/>
+              </a:defRPr>
+            </a:pPr>
+            <a:r>
+              <a:t>•  Mengeliminasi antrean panjang yang berdesakan di posko kampus setiap awal tahun ajaran baru.</a:t>
+            </a:r>
+          </a:p>
+          <a:p>
+            <a:pPr>
+              <a:spcBef>
+                <a:spcPts val="400"/>
+              </a:spcBef>
+              <a:defRPr sz="1000" b="1">
+                <a:solidFill>
+                  <a:srgbClr val="980517"/>
+                </a:solidFill>
+                <a:latin typeface="Calibri"/>
+              </a:defRPr>
+            </a:pPr>
+            <a:r>
+              <a:t>➔  Dampak: Pelayanan Mahasiswa Cepat &amp; Nyaman</a:t>
+            </a:r>
+          </a:p>
+        </p:txBody>
+      </p:sp>
+      <p:sp>
+        <p:nvSpPr>
+          <p:cNvPr id="8" name="Rounded Rectangle 7"/>
           <p:cNvSpPr/>
           <p:nvPr/>
         </p:nvSpPr>
         <p:spPr>
           <a:xfrm>
-            <a:off x="8138160" y="1554480"/>
-            <a:ext cx="3474720" cy="347472"/>
+            <a:off x="4370832" y="1417320"/>
+            <a:ext cx="3429000" cy="4297680"/>
           </a:xfrm>
-          <a:prstGeom prst="rect">
+          <a:prstGeom prst="roundRect">
             <a:avLst/>
           </a:prstGeom>
           <a:solidFill>
-            <a:srgbClr val="580B13"/>
+            <a:srgbClr val="F8FAFC"/>
           </a:solidFill>
-          <a:ln>
-            <a:noFill/>
+          <a:ln w="12700">
+            <a:solidFill>
+              <a:srgbClr val="E2E8F0"/>
+            </a:solidFill>
           </a:ln>
         </p:spPr>
         <p:style>
@@ -10180,89 +9825,123 @@
           </a:fontRef>
         </p:style>
         <p:txBody>
-          <a:bodyPr rtlCol="0" anchor="ctr"/>
+          <a:bodyPr rtlCol="0" anchor="t" wrap="square" lIns="182880" rIns="182880" tIns="164592" bIns="137160"/>
           <a:lstStyle/>
           <a:p>
             <a:pPr algn="ctr">
               <a:defRPr sz="950" b="1">
                 <a:solidFill>
-                  <a:srgbClr val="FFD166"/>
-                </a:solidFill>
-              </a:defRPr>
-            </a:pPr>
-            <a:r>
-              <a:t>MANFAAT 03 • AKUNTABILITAS BIAYA</a:t>
-            </a:r>
-          </a:p>
-        </p:txBody>
-      </p:sp>
-      <p:sp>
-        <p:nvSpPr>
-          <p:cNvPr id="13" name="TextBox 12"/>
-          <p:cNvSpPr txBox="1"/>
+                  <a:srgbClr val="980517"/>
+                </a:solidFill>
+                <a:latin typeface="Arial"/>
+              </a:defRPr>
+            </a:pPr>
+            <a:r>
+              <a:t>MANFAAT 02 • AKURASI INVENTARIS</a:t>
+            </a:r>
+          </a:p>
+          <a:p>
+            <a:pPr>
+              <a:spcAft>
+                <a:spcPts val="600"/>
+              </a:spcAft>
+              <a:defRPr sz="1300" b="1">
+                <a:solidFill>
+                  <a:srgbClr val="0F172A"/>
+                </a:solidFill>
+                <a:latin typeface="Arial"/>
+              </a:defRPr>
+            </a:pPr>
+            <a:r>
+              <a:t>Zero (0) Dead-Stock</a:t>
+            </a:r>
+          </a:p>
+          <a:p>
+            <a:pPr>
+              <a:spcAft>
+                <a:spcPts val="400"/>
+              </a:spcAft>
+              <a:defRPr sz="1050">
+                <a:solidFill>
+                  <a:srgbClr val="0F172A"/>
+                </a:solidFill>
+                <a:latin typeface="Calibri"/>
+              </a:defRPr>
+            </a:pPr>
+            <a:r>
+              <a:t>•  Profiling ukuran mandiri oleh mahasiswa sebelum tender vendor garmen dibuka.</a:t>
+            </a:r>
+          </a:p>
+          <a:p>
+            <a:pPr>
+              <a:spcAft>
+                <a:spcPts val="400"/>
+              </a:spcAft>
+              <a:defRPr sz="1050">
+                <a:solidFill>
+                  <a:srgbClr val="0F172A"/>
+                </a:solidFill>
+                <a:latin typeface="Calibri"/>
+              </a:defRPr>
+            </a:pPr>
+            <a:r>
+              <a:t>•  Kalkulasi Demand vs Shortage otomatis memastikan pesanan pabrik selaras 100% dengan kebutuhan tubuh riil mahasiswa.</a:t>
+            </a:r>
+          </a:p>
+          <a:p>
+            <a:pPr>
+              <a:spcAft>
+                <a:spcPts val="400"/>
+              </a:spcAft>
+              <a:defRPr sz="1050">
+                <a:solidFill>
+                  <a:srgbClr val="0F172A"/>
+                </a:solidFill>
+                <a:latin typeface="Calibri"/>
+              </a:defRPr>
+            </a:pPr>
+            <a:r>
+              <a:t>•  Tidak ada lagi seragam berukuran ekstrem yang mengendap bertahun-tahun di gudang.</a:t>
+            </a:r>
+          </a:p>
+          <a:p>
+            <a:pPr>
+              <a:spcBef>
+                <a:spcPts val="400"/>
+              </a:spcBef>
+              <a:defRPr sz="1000" b="1">
+                <a:solidFill>
+                  <a:srgbClr val="980517"/>
+                </a:solidFill>
+                <a:latin typeface="Calibri"/>
+              </a:defRPr>
+            </a:pPr>
+            <a:r>
+              <a:t>➔  Dampak: Optimalisasi Modal Kerja Kampus</a:t>
+            </a:r>
+          </a:p>
+        </p:txBody>
+      </p:sp>
+      <p:sp>
+        <p:nvSpPr>
+          <p:cNvPr id="9" name="Rounded Rectangle 8"/>
+          <p:cNvSpPr/>
           <p:nvPr/>
         </p:nvSpPr>
         <p:spPr>
           <a:xfrm>
-            <a:off x="8247888" y="1938528"/>
-            <a:ext cx="3255263" cy="3566160"/>
+            <a:off x="8010144" y="1417320"/>
+            <a:ext cx="3429000" cy="4297680"/>
           </a:xfrm>
-          <a:prstGeom prst="rect">
-            <a:avLst/>
-          </a:prstGeom>
-          <a:noFill/>
-        </p:spPr>
-        <p:txBody>
-          <a:bodyPr wrap="square">
-            <a:spAutoFit/>
-          </a:bodyPr>
-          <a:lstStyle/>
-          <a:p>
-            <a:pPr>
-              <a:defRPr sz="1250" b="1">
-                <a:solidFill>
-                  <a:srgbClr val="580B13"/>
-                </a:solidFill>
-              </a:defRPr>
-            </a:pPr>
-            <a:r>
-              <a:t>100% Valuasi FIFO Real-Time</a:t>
-            </a:r>
-          </a:p>
-          <a:p>
-            <a:pPr>
-              <a:defRPr sz="1050">
-                <a:solidFill>
-                  <a:srgbClr val="1E293B"/>
-                </a:solidFill>
-              </a:defRPr>
-            </a:pPr>
-            <a:r>
-              <a:t>Mengeliminasi ketergantungan pada Excel yang rentan rusak. Semua mutasi terikat batch FIFO dan perhitungan Gross Profit Margin.</a:t>
-            </a:r>
-          </a:p>
-        </p:txBody>
-      </p:sp>
-      <p:sp>
-        <p:nvSpPr>
-          <p:cNvPr id="14" name="Rectangle 13"/>
-          <p:cNvSpPr/>
-          <p:nvPr/>
-        </p:nvSpPr>
-        <p:spPr>
-          <a:xfrm>
-            <a:off x="548640" y="5806440"/>
-            <a:ext cx="11064240" cy="685800"/>
-          </a:xfrm>
-          <a:prstGeom prst="rect">
+          <a:prstGeom prst="roundRect">
             <a:avLst/>
           </a:prstGeom>
           <a:solidFill>
-            <a:srgbClr val="580B13"/>
+            <a:srgbClr val="F8FAFC"/>
           </a:solidFill>
-          <a:ln w="19050">
+          <a:ln w="12700">
             <a:solidFill>
-              <a:srgbClr val="FFD166"/>
+              <a:srgbClr val="E2E8F0"/>
             </a:solidFill>
           </a:ln>
         </p:spPr>
@@ -10281,18 +9960,163 @@
           </a:fontRef>
         </p:style>
         <p:txBody>
-          <a:bodyPr rtlCol="0" anchor="ctr" wrap="square"/>
+          <a:bodyPr rtlCol="0" anchor="t" wrap="square" lIns="182880" rIns="182880" tIns="164592" bIns="137160"/>
           <a:lstStyle/>
           <a:p>
             <a:pPr algn="ctr">
-              <a:defRPr sz="1100" b="1">
-                <a:solidFill>
-                  <a:srgbClr val="FFFFFF"/>
-                </a:solidFill>
-              </a:defRPr>
-            </a:pPr>
-            <a:r>
-              <a:t>Kesimpulan: Sistem Informasi bukan sekadar alat administratif, melainkan saraf pusat rantai pasok yang mengunci fisik barang dengan kepatuhan finansial secara closed-loop.</a:t>
+              <a:defRPr sz="950" b="1">
+                <a:solidFill>
+                  <a:srgbClr val="980517"/>
+                </a:solidFill>
+                <a:latin typeface="Arial"/>
+              </a:defRPr>
+            </a:pPr>
+            <a:r>
+              <a:t>MANFAAT 03 • AKUNTABILITAS BIAYA</a:t>
+            </a:r>
+          </a:p>
+          <a:p>
+            <a:pPr>
+              <a:spcAft>
+                <a:spcPts val="600"/>
+              </a:spcAft>
+              <a:defRPr sz="1300" b="1">
+                <a:solidFill>
+                  <a:srgbClr val="0F172A"/>
+                </a:solidFill>
+                <a:latin typeface="Arial"/>
+              </a:defRPr>
+            </a:pPr>
+            <a:r>
+              <a:t>100% Valuasi FIFO Real-Time</a:t>
+            </a:r>
+          </a:p>
+          <a:p>
+            <a:pPr>
+              <a:spcAft>
+                <a:spcPts val="400"/>
+              </a:spcAft>
+              <a:defRPr sz="1050">
+                <a:solidFill>
+                  <a:srgbClr val="0F172A"/>
+                </a:solidFill>
+                <a:latin typeface="Calibri"/>
+              </a:defRPr>
+            </a:pPr>
+            <a:r>
+              <a:t>•  Mengeliminasi ketergantungan pada spreadsheet Excel raksasa yang rawan rusak atau korup.</a:t>
+            </a:r>
+          </a:p>
+          <a:p>
+            <a:pPr>
+              <a:spcAft>
+                <a:spcPts val="400"/>
+              </a:spcAft>
+              <a:defRPr sz="1050">
+                <a:solidFill>
+                  <a:srgbClr val="0F172A"/>
+                </a:solidFill>
+                <a:latin typeface="Calibri"/>
+              </a:defRPr>
+            </a:pPr>
+            <a:r>
+              <a:t>•  Seluruh pergerakan stok dicatat otomatis ke kartu mutasi persediaan berbasis urutan batch FIFO.</a:t>
+            </a:r>
+          </a:p>
+          <a:p>
+            <a:pPr>
+              <a:spcAft>
+                <a:spcPts val="400"/>
+              </a:spcAft>
+              <a:defRPr sz="1050">
+                <a:solidFill>
+                  <a:srgbClr val="0F172A"/>
+                </a:solidFill>
+                <a:latin typeface="Calibri"/>
+              </a:defRPr>
+            </a:pPr>
+            <a:r>
+              <a:t>•  Laporan Harga Pokok Penjualan (HPP) dan Gross Profit Margin (GPM) tersedia secara transparan bagi pimpinan.</a:t>
+            </a:r>
+          </a:p>
+          <a:p>
+            <a:pPr>
+              <a:spcBef>
+                <a:spcPts val="400"/>
+              </a:spcBef>
+              <a:defRPr sz="1000" b="1">
+                <a:solidFill>
+                  <a:srgbClr val="980517"/>
+                </a:solidFill>
+                <a:latin typeface="Calibri"/>
+              </a:defRPr>
+            </a:pPr>
+            <a:r>
+              <a:t>➔  Dampak: Audit Trail Keuangan Bebas Selisih</a:t>
+            </a:r>
+          </a:p>
+        </p:txBody>
+      </p:sp>
+      <p:sp>
+        <p:nvSpPr>
+          <p:cNvPr id="10" name="Rounded Rectangle 9"/>
+          <p:cNvSpPr/>
+          <p:nvPr/>
+        </p:nvSpPr>
+        <p:spPr>
+          <a:xfrm>
+            <a:off x="731520" y="5870448"/>
+            <a:ext cx="10728655" cy="658368"/>
+          </a:xfrm>
+          <a:prstGeom prst="roundRect">
+            <a:avLst/>
+          </a:prstGeom>
+          <a:solidFill>
+            <a:srgbClr val="FEF2F2"/>
+          </a:solidFill>
+          <a:ln w="19050">
+            <a:solidFill>
+              <a:srgbClr val="980517"/>
+            </a:solidFill>
+          </a:ln>
+        </p:spPr>
+        <p:style>
+          <a:lnRef idx="1">
+            <a:schemeClr val="accent1"/>
+          </a:lnRef>
+          <a:fillRef idx="3">
+            <a:schemeClr val="accent1"/>
+          </a:fillRef>
+          <a:effectRef idx="2">
+            <a:schemeClr val="accent1"/>
+          </a:effectRef>
+          <a:fontRef idx="minor">
+            <a:schemeClr val="lt1"/>
+          </a:fontRef>
+        </p:style>
+        <p:txBody>
+          <a:bodyPr rtlCol="0" anchor="ctr" wrap="square" lIns="228600" rIns="228600"/>
+          <a:lstStyle/>
+          <a:p>
+            <a:pPr algn="ctr">
+              <a:defRPr sz="1050" b="1">
+                <a:solidFill>
+                  <a:srgbClr val="980517"/>
+                </a:solidFill>
+                <a:latin typeface="Arial"/>
+              </a:defRPr>
+            </a:pPr>
+            <a:r>
+              <a:t>KESIMPULAN STRATEGIS SISTEM INFORMASI: </a:t>
+            </a:r>
+            <a:r>
+              <a:rPr sz="1050">
+                <a:solidFill>
+                  <a:srgbClr val="0F172A"/>
+                </a:solidFill>
+                <a:latin typeface="Calibri"/>
+              </a:rPr>
+              <a:t>Sistem Informasi bukan sekadar alat pencatat administrasi, melainkan saraf penggerak rantai pasok yang mengunci fisik barang dengan kepatuhan finansial, serta mentransformasi tebakan manual menjadi keputusan bisnis berakurasi tinggi.</a:t>
             </a:r>
           </a:p>
         </p:txBody>

--- a/HorizonU_Uniform_UniStock_SCM_Presentasi_Technospark.pptx
+++ b/HorizonU_Uniform_UniStock_SCM_Presentasi_Technospark.pptx
@@ -509,7 +509,7 @@
           <a:lstStyle/>
           <a:p>
             <a:r>
-              <a:t>NASKAH BACA PRESENTER SLIDE 1 (Target Waktu: 01:10 Menit):</a:t>
+              <a:t>NASKAH BACA PRESENTER SLIDE 1 (Target: 01:10 Menit):</a:t>
             </a:r>
           </a:p>
           <a:p>
@@ -596,7 +596,7 @@
           <a:lstStyle/>
           <a:p>
             <a:r>
-              <a:t>NASKAH BACA PRESENTER SLIDE 2 (Target Waktu: 01:15 Menit):</a:t>
+              <a:t>NASKAH BACA PRESENTER SLIDE 2 (Target: 01:15 Menit):</a:t>
             </a:r>
           </a:p>
           <a:p>
@@ -698,7 +698,7 @@
           <a:lstStyle/>
           <a:p>
             <a:r>
-              <a:t>NASKAH BACA PRESENTER SLIDE 3 (Target Waktu: 01:30 Menit):</a:t>
+              <a:t>NASKAH BACA PRESENTER SLIDE 3 (Target: 01:30 Menit):</a:t>
             </a:r>
           </a:p>
           <a:p>
@@ -797,7 +797,7 @@
           <a:lstStyle/>
           <a:p>
             <a:r>
-              <a:t>NASKAH BACA PRESENTER SLIDE 4 (Target Waktu: 01:15 Menit):</a:t>
+              <a:t>NASKAH BACA PRESENTER SLIDE 4 (Target: 01:15 Menit):</a:t>
             </a:r>
           </a:p>
           <a:p>
@@ -899,7 +899,7 @@
           <a:lstStyle/>
           <a:p>
             <a:r>
-              <a:t>NASKAH BACA PRESENTER SLIDE 5 (Target Waktu: 01:30 Menit):</a:t>
+              <a:t>NASKAH BACA PRESENTER SLIDE 5 (Target: 01:30 Menit):</a:t>
             </a:r>
           </a:p>
           <a:p>
@@ -998,7 +998,7 @@
           <a:lstStyle/>
           <a:p>
             <a:r>
-              <a:t>NASKAH BACA PRESENTER SLIDE 6 (Target Waktu: 01:25 Menit):</a:t>
+              <a:t>NASKAH BACA PRESENTER SLIDE 6 (Target: 01:25 Menit):</a:t>
             </a:r>
           </a:p>
           <a:p>
@@ -1103,7 +1103,7 @@
           <a:lstStyle/>
           <a:p>
             <a:r>
-              <a:t>NASKAH BACA PRESENTER SLIDE 7 (Target Waktu: 01:15 Menit):</a:t>
+              <a:t>NASKAH BACA PRESENTER SLIDE 7 (Target: 01:15 Menit):</a:t>
             </a:r>
           </a:p>
           <a:p>
@@ -1205,7 +1205,7 @@
           <a:lstStyle/>
           <a:p>
             <a:r>
-              <a:t>NASKAH BACA PRESENTER SLIDE 8 (Target Waktu: 00:55 Menit):</a:t>
+              <a:t>NASKAH BACA PRESENTER SLIDE 8 (Target: 00:55 Menit):</a:t>
             </a:r>
           </a:p>
           <a:p>
@@ -4260,8 +4260,8 @@
         </p:nvSpPr>
         <p:spPr>
           <a:xfrm>
-            <a:off x="731520" y="365760"/>
-            <a:ext cx="73152" cy="777240"/>
+            <a:off x="731520" y="384048"/>
+            <a:ext cx="54864" cy="713232"/>
           </a:xfrm>
           <a:prstGeom prst="rect">
             <a:avLst/>
@@ -4303,7 +4303,79 @@
         </p:nvSpPr>
         <p:spPr>
           <a:xfrm>
-            <a:off x="914400" y="320040"/>
+            <a:off x="868680" y="347472"/>
+            <a:ext cx="10515600" cy="219456"/>
+          </a:xfrm>
+          <a:prstGeom prst="rect">
+            <a:avLst/>
+          </a:prstGeom>
+          <a:noFill/>
+        </p:spPr>
+        <p:txBody>
+          <a:bodyPr wrap="square">
+            <a:spAutoFit/>
+          </a:bodyPr>
+          <a:lstStyle/>
+          <a:p>
+            <a:pPr>
+              <a:defRPr sz="950" b="1">
+                <a:solidFill>
+                  <a:srgbClr val="980517"/>
+                </a:solidFill>
+                <a:latin typeface="Arial"/>
+              </a:defRPr>
+            </a:pPr>
+            <a:r>
+              <a:t>UNIVERSITAS HORIZON INDONESIA • DEPARTEMEN KEUANGAN</a:t>
+            </a:r>
+          </a:p>
+        </p:txBody>
+      </p:sp>
+      <p:sp>
+        <p:nvSpPr>
+          <p:cNvPr id="4" name="TextBox 3"/>
+          <p:cNvSpPr txBox="1"/>
+          <p:nvPr/>
+        </p:nvSpPr>
+        <p:spPr>
+          <a:xfrm>
+            <a:off x="868680" y="548640"/>
+            <a:ext cx="10515600" cy="384048"/>
+          </a:xfrm>
+          <a:prstGeom prst="rect">
+            <a:avLst/>
+          </a:prstGeom>
+          <a:noFill/>
+        </p:spPr>
+        <p:txBody>
+          <a:bodyPr wrap="square">
+            <a:spAutoFit/>
+          </a:bodyPr>
+          <a:lstStyle/>
+          <a:p>
+            <a:pPr>
+              <a:defRPr sz="1900" b="1">
+                <a:solidFill>
+                  <a:srgbClr val="0F172A"/>
+                </a:solidFill>
+                <a:latin typeface="Arial"/>
+              </a:defRPr>
+            </a:pPr>
+            <a:r>
+              <a:t>HorizonU Uniform: Transformasi Rantai Pasok Seragam Mahasiswa</a:t>
+            </a:r>
+          </a:p>
+        </p:txBody>
+      </p:sp>
+      <p:sp>
+        <p:nvSpPr>
+          <p:cNvPr id="5" name="TextBox 4"/>
+          <p:cNvSpPr txBox="1"/>
+          <p:nvPr/>
+        </p:nvSpPr>
+        <p:spPr>
+          <a:xfrm>
+            <a:off x="868680" y="932688"/>
             <a:ext cx="10515600" cy="256032"/>
           </a:xfrm>
           <a:prstGeom prst="rect">
@@ -4318,79 +4390,7 @@
           <a:lstStyle/>
           <a:p>
             <a:pPr>
-              <a:defRPr sz="1000" b="1">
-                <a:solidFill>
-                  <a:srgbClr val="980517"/>
-                </a:solidFill>
-                <a:latin typeface="Arial"/>
-              </a:defRPr>
-            </a:pPr>
-            <a:r>
-              <a:t>SLIDE 1 • CASE INTRODUCTION   |   RUBRIK: SUPPLY CHAIN UNDERSTANDING (15%)</a:t>
-            </a:r>
-          </a:p>
-        </p:txBody>
-      </p:sp>
-      <p:sp>
-        <p:nvSpPr>
-          <p:cNvPr id="4" name="TextBox 3"/>
-          <p:cNvSpPr txBox="1"/>
-          <p:nvPr/>
-        </p:nvSpPr>
-        <p:spPr>
-          <a:xfrm>
-            <a:off x="914400" y="548640"/>
-            <a:ext cx="10515600" cy="411480"/>
-          </a:xfrm>
-          <a:prstGeom prst="rect">
-            <a:avLst/>
-          </a:prstGeom>
-          <a:noFill/>
-        </p:spPr>
-        <p:txBody>
-          <a:bodyPr wrap="square">
-            <a:spAutoFit/>
-          </a:bodyPr>
-          <a:lstStyle/>
-          <a:p>
-            <a:pPr>
-              <a:defRPr sz="2000" b="1">
-                <a:solidFill>
-                  <a:srgbClr val="0F172A"/>
-                </a:solidFill>
-                <a:latin typeface="Arial"/>
-              </a:defRPr>
-            </a:pPr>
-            <a:r>
-              <a:t>HORIZONU UNIFORM (UNISTOCK SCM) — TRANSFORMASI LOGISTIK KAMPUS</a:t>
-            </a:r>
-          </a:p>
-        </p:txBody>
-      </p:sp>
-      <p:sp>
-        <p:nvSpPr>
-          <p:cNvPr id="5" name="TextBox 4"/>
-          <p:cNvSpPr txBox="1"/>
-          <p:nvPr/>
-        </p:nvSpPr>
-        <p:spPr>
-          <a:xfrm>
-            <a:off x="914400" y="960120"/>
-            <a:ext cx="10515600" cy="274320"/>
-          </a:xfrm>
-          <a:prstGeom prst="rect">
-            <a:avLst/>
-          </a:prstGeom>
-          <a:noFill/>
-        </p:spPr>
-        <p:txBody>
-          <a:bodyPr wrap="square">
-            <a:spAutoFit/>
-          </a:bodyPr>
-          <a:lstStyle/>
-          <a:p>
-            <a:pPr>
-              <a:defRPr sz="1150">
+              <a:defRPr sz="1100">
                 <a:solidFill>
                   <a:srgbClr val="475569"/>
                 </a:solidFill>
@@ -4398,7 +4398,7 @@
               </a:defRPr>
             </a:pPr>
             <a:r>
-              <a:t>Sistem Persediaan &amp; Distribusi Seragam Terpadu Berbasis Closed-Loop SCM pada Departemen Keuangan Universitas Horizon Indonesia</a:t>
+              <a:t>Modernisasi Pengadaan, Tata Kelola Stok FIFO, dan Distribusi Berbasis Web Terintegrasi</a:t>
             </a:r>
           </a:p>
         </p:txBody>
@@ -4411,8 +4411,8 @@
         </p:nvSpPr>
         <p:spPr>
           <a:xfrm>
-            <a:off x="731520" y="1261872"/>
-            <a:ext cx="10728655" cy="13716"/>
+            <a:off x="731520" y="1243584"/>
+            <a:ext cx="10728655" cy="10972"/>
           </a:xfrm>
           <a:prstGeom prst="rect">
             <a:avLst/>
@@ -4496,15 +4496,15 @@
               </a:defRPr>
             </a:pPr>
             <a:r>
-              <a:t>01 • PROFIL BISNIS &amp; INDUSTRI</a:t>
+              <a:t>PROFIL INSTITUSI &amp; OBJEK</a:t>
             </a:r>
           </a:p>
           <a:p>
             <a:pPr>
               <a:spcAft>
-                <a:spcPts val="600"/>
+                <a:spcPts val="500"/>
               </a:spcAft>
-              <a:defRPr sz="1300" b="1">
+              <a:defRPr sz="1250" b="1">
                 <a:solidFill>
                   <a:srgbClr val="0F172A"/>
                 </a:solidFill>
@@ -4518,7 +4518,7 @@
           <a:p>
             <a:pPr>
               <a:spcAft>
-                <a:spcPts val="400"/>
+                <a:spcPts val="300"/>
               </a:spcAft>
               <a:defRPr sz="1050">
                 <a:solidFill>
@@ -4528,13 +4528,13 @@
               </a:defRPr>
             </a:pPr>
             <a:r>
-              <a:t>•  Departemen Keuangan Universitas Horizon Indonesia mengelola pengadaan, akuntansi, dan pembagian paket seragam bagi ribuan mahasiswa baru.</a:t>
+              <a:t>•  Departemen Keuangan mengelola siklus pengadaan, pencatatan keuangan, dan distribusi perlengkapan maba.</a:t>
             </a:r>
           </a:p>
           <a:p>
             <a:pPr>
               <a:spcAft>
-                <a:spcPts val="400"/>
+                <a:spcPts val="300"/>
               </a:spcAft>
               <a:defRPr sz="1050">
                 <a:solidFill>
@@ -4544,13 +4544,13 @@
               </a:defRPr>
             </a:pPr>
             <a:r>
-              <a:t>•  Komoditas: Jas Almamater, Kemeja Putih, Celana/Rok Bahan, Sepatu Lab &amp; Dinas, serta Medical Kit keperawatan/kebidanan.</a:t>
+              <a:t>•  Komoditas: Jas Almamater, Kemeja Putih, Celana/Rok Bahan, Sepatu Lab &amp; Dinas, serta Medical Kit.</a:t>
             </a:r>
           </a:p>
           <a:p>
             <a:pPr>
               <a:spcAft>
-                <a:spcPts val="400"/>
+                <a:spcPts val="300"/>
               </a:spcAft>
               <a:defRPr sz="1050">
                 <a:solidFill>
@@ -4560,7 +4560,7 @@
               </a:defRPr>
             </a:pPr>
             <a:r>
-              <a:t>•  Karakteristik Operasional: Lonjakan penerimaan barang dari vendor garmen di awal tahun akademik.</a:t>
+              <a:t>•  Karakteristik: Penyaluran langsung ke ribuan mahasiswa baru tanpa perantara ritel komersial.</a:t>
             </a:r>
           </a:p>
           <a:p>
@@ -4576,7 +4576,7 @@
               </a:defRPr>
             </a:pPr>
             <a:r>
-              <a:t>➔  Model Bisnis: Direct Closed-Loop Campus SCM</a:t>
+              <a:t>➔  Model: Direct Closed-Loop Campus SCM</a:t>
             </a:r>
           </a:p>
         </p:txBody>
@@ -4631,15 +4631,15 @@
               </a:defRPr>
             </a:pPr>
             <a:r>
-              <a:t>02 • MASALAH UTAMA AS-IS</a:t>
+              <a:t>KENDALA OPERASIONAL UTAMA</a:t>
             </a:r>
           </a:p>
           <a:p>
             <a:pPr>
               <a:spcAft>
-                <a:spcPts val="600"/>
+                <a:spcPts val="500"/>
               </a:spcAft>
-              <a:defRPr sz="1300" b="1">
+              <a:defRPr sz="1250" b="1">
                 <a:solidFill>
                   <a:srgbClr val="0F172A"/>
                 </a:solidFill>
@@ -4647,13 +4647,13 @@
               </a:defRPr>
             </a:pPr>
             <a:r>
-              <a:t>Kendala Spreadsheet &amp; Loket</a:t>
+              <a:t>Hambatan Spreadsheet &amp; Posko</a:t>
             </a:r>
           </a:p>
           <a:p>
             <a:pPr>
               <a:spcAft>
-                <a:spcPts val="400"/>
+                <a:spcPts val="300"/>
               </a:spcAft>
               <a:defRPr sz="1050">
                 <a:solidFill>
@@ -4663,13 +4663,13 @@
               </a:defRPr>
             </a:pPr>
             <a:r>
-              <a:t>•  Spreadsheet Excel Induk raksasa (~4.5 MB, 19 lembar kerja) sering mengalami lag, tidak merespons, atau crash saat data membesar.</a:t>
+              <a:t>•  Spreadsheet Excel Induk (~4.5 MB, 19 sheet) sering mengalami lag atau crash saat data membesar.</a:t>
             </a:r>
           </a:p>
           <a:p>
             <a:pPr>
               <a:spcAft>
-                <a:spcPts val="400"/>
+                <a:spcPts val="300"/>
               </a:spcAft>
               <a:defRPr sz="1050">
                 <a:solidFill>
@@ -4679,13 +4679,13 @@
               </a:defRPr>
             </a:pPr>
             <a:r>
-              <a:t>•  Antrean pembagian di posko kampus sangat panjang (mencapai 15–20 menit per mahasiswa) akibat verifikasi berkas manual.</a:t>
+              <a:t>•  Antrean di posko kampus sangat lambat (15–20 menit per mahasiswa) akibat verifikasi berkas manual.</a:t>
             </a:r>
           </a:p>
           <a:p>
             <a:pPr>
               <a:spcAft>
-                <a:spcPts val="400"/>
+                <a:spcPts val="300"/>
               </a:spcAft>
               <a:defRPr sz="1050">
                 <a:solidFill>
@@ -4695,7 +4695,7 @@
               </a:defRPr>
             </a:pPr>
             <a:r>
-              <a:t>•  Pemesanan seragam ke pabrik hanya berdasar tebakan historis tanpa profiling ukuran awal, memicu penumpukan dead-stock di gudang.</a:t>
+              <a:t>•  Pemesanan seragam ke pabrik hanya estimasi historis tanpa survey ukuran mandiri, memicu dead-stock.</a:t>
             </a:r>
           </a:p>
           <a:p>
@@ -4711,7 +4711,7 @@
               </a:defRPr>
             </a:pPr>
             <a:r>
-              <a:t>➔  Dampak Finansial: Modal Mengendap &amp; Risiko Klaim Ganda</a:t>
+              <a:t>➔  Dampak: Modal Mengendap &amp; Risiko Klaim Ganda</a:t>
             </a:r>
           </a:p>
         </p:txBody>
@@ -4766,15 +4766,15 @@
               </a:defRPr>
             </a:pPr>
             <a:r>
-              <a:t>03 • PRESENTER &amp; ANALIS</a:t>
+              <a:t>TIM PENGEMBANG</a:t>
             </a:r>
           </a:p>
           <a:p>
             <a:pPr>
               <a:spcAft>
-                <a:spcPts val="600"/>
+                <a:spcPts val="500"/>
               </a:spcAft>
-              <a:defRPr sz="1300" b="1">
+              <a:defRPr sz="1250" b="1">
                 <a:solidFill>
                   <a:srgbClr val="0F172A"/>
                 </a:solidFill>
@@ -4782,13 +4782,13 @@
               </a:defRPr>
             </a:pPr>
             <a:r>
-              <a:t>Tim Pengembang Nirwana</a:t>
+              <a:t>Nirwana Development Team</a:t>
             </a:r>
           </a:p>
           <a:p>
             <a:pPr>
               <a:spcAft>
-                <a:spcPts val="400"/>
+                <a:spcPts val="300"/>
               </a:spcAft>
               <a:defRPr sz="1050">
                 <a:solidFill>
@@ -4804,7 +4804,7 @@
           <a:p>
             <a:pPr>
               <a:spcAft>
-                <a:spcPts val="400"/>
+                <a:spcPts val="300"/>
               </a:spcAft>
               <a:defRPr sz="1050">
                 <a:solidFill>
@@ -4820,7 +4820,7 @@
           <a:p>
             <a:pPr>
               <a:spcAft>
-                <a:spcPts val="400"/>
+                <a:spcPts val="300"/>
               </a:spcAft>
               <a:defRPr sz="1050">
                 <a:solidFill>
@@ -4836,7 +4836,7 @@
           <a:p>
             <a:pPr>
               <a:spcAft>
-                <a:spcPts val="400"/>
+                <a:spcPts val="300"/>
               </a:spcAft>
               <a:defRPr sz="1050">
                 <a:solidFill>
@@ -4852,7 +4852,7 @@
           <a:p>
             <a:pPr>
               <a:spcAft>
-                <a:spcPts val="400"/>
+                <a:spcPts val="300"/>
               </a:spcAft>
               <a:defRPr sz="1050">
                 <a:solidFill>
@@ -4868,7 +4868,7 @@
           <a:p>
             <a:pPr>
               <a:spcAft>
-                <a:spcPts val="400"/>
+                <a:spcPts val="300"/>
               </a:spcAft>
               <a:defRPr sz="1050">
                 <a:solidFill>
@@ -4894,7 +4894,7 @@
               </a:defRPr>
             </a:pPr>
             <a:r>
-              <a:t>➔  URL Sistem Live: unistok.nirwana.biz.id</a:t>
+              <a:t>➔  URL Sistem: unistok.nirwana.biz.id</a:t>
             </a:r>
           </a:p>
         </p:txBody>
@@ -4949,7 +4949,7 @@
               </a:defRPr>
             </a:pPr>
             <a:r>
-              <a:t>FOKUS SOLUSI UNISTOCK: </a:t>
+              <a:t>Misi Solusi HorizonU Uniform: </a:t>
             </a:r>
             <a:r>
               <a:rPr sz="1050">
@@ -4997,8 +4997,8 @@
         </p:nvSpPr>
         <p:spPr>
           <a:xfrm>
-            <a:off x="731520" y="365760"/>
-            <a:ext cx="73152" cy="777240"/>
+            <a:off x="731520" y="384048"/>
+            <a:ext cx="54864" cy="713232"/>
           </a:xfrm>
           <a:prstGeom prst="rect">
             <a:avLst/>
@@ -5040,7 +5040,79 @@
         </p:nvSpPr>
         <p:spPr>
           <a:xfrm>
-            <a:off x="914400" y="320040"/>
+            <a:off x="868680" y="347472"/>
+            <a:ext cx="10515600" cy="219456"/>
+          </a:xfrm>
+          <a:prstGeom prst="rect">
+            <a:avLst/>
+          </a:prstGeom>
+          <a:noFill/>
+        </p:spPr>
+        <p:txBody>
+          <a:bodyPr wrap="square">
+            <a:spAutoFit/>
+          </a:bodyPr>
+          <a:lstStyle/>
+          <a:p>
+            <a:pPr>
+              <a:defRPr sz="950" b="1">
+                <a:solidFill>
+                  <a:srgbClr val="980517"/>
+                </a:solidFill>
+                <a:latin typeface="Arial"/>
+              </a:defRPr>
+            </a:pPr>
+            <a:r>
+              <a:t>STRUKTUR RANTAI PASOK</a:t>
+            </a:r>
+          </a:p>
+        </p:txBody>
+      </p:sp>
+      <p:sp>
+        <p:nvSpPr>
+          <p:cNvPr id="4" name="TextBox 3"/>
+          <p:cNvSpPr txBox="1"/>
+          <p:nvPr/>
+        </p:nvSpPr>
+        <p:spPr>
+          <a:xfrm>
+            <a:off x="868680" y="548640"/>
+            <a:ext cx="10515600" cy="384048"/>
+          </a:xfrm>
+          <a:prstGeom prst="rect">
+            <a:avLst/>
+          </a:prstGeom>
+          <a:noFill/>
+        </p:spPr>
+        <p:txBody>
+          <a:bodyPr wrap="square">
+            <a:spAutoFit/>
+          </a:bodyPr>
+          <a:lstStyle/>
+          <a:p>
+            <a:pPr>
+              <a:defRPr sz="1900" b="1">
+                <a:solidFill>
+                  <a:srgbClr val="0F172A"/>
+                </a:solidFill>
+                <a:latin typeface="Arial"/>
+              </a:defRPr>
+            </a:pPr>
+            <a:r>
+              <a:t>Pemetaan Stakeholder &amp; Aliran Fisik Barang</a:t>
+            </a:r>
+          </a:p>
+        </p:txBody>
+      </p:sp>
+      <p:sp>
+        <p:nvSpPr>
+          <p:cNvPr id="5" name="TextBox 4"/>
+          <p:cNvSpPr txBox="1"/>
+          <p:nvPr/>
+        </p:nvSpPr>
+        <p:spPr>
+          <a:xfrm>
+            <a:off x="868680" y="932688"/>
             <a:ext cx="10515600" cy="256032"/>
           </a:xfrm>
           <a:prstGeom prst="rect">
@@ -5055,79 +5127,7 @@
           <a:lstStyle/>
           <a:p>
             <a:pPr>
-              <a:defRPr sz="1000" b="1">
-                <a:solidFill>
-                  <a:srgbClr val="980517"/>
-                </a:solidFill>
-                <a:latin typeface="Arial"/>
-              </a:defRPr>
-            </a:pPr>
-            <a:r>
-              <a:t>SLIDE 2 • SUPPLY CHAIN STRUCTURE   |   RUBRIK: SUPPLY CHAIN UNDERSTANDING (15%)</a:t>
-            </a:r>
-          </a:p>
-        </p:txBody>
-      </p:sp>
-      <p:sp>
-        <p:nvSpPr>
-          <p:cNvPr id="4" name="TextBox 3"/>
-          <p:cNvSpPr txBox="1"/>
-          <p:nvPr/>
-        </p:nvSpPr>
-        <p:spPr>
-          <a:xfrm>
-            <a:off x="914400" y="548640"/>
-            <a:ext cx="10515600" cy="411480"/>
-          </a:xfrm>
-          <a:prstGeom prst="rect">
-            <a:avLst/>
-          </a:prstGeom>
-          <a:noFill/>
-        </p:spPr>
-        <p:txBody>
-          <a:bodyPr wrap="square">
-            <a:spAutoFit/>
-          </a:bodyPr>
-          <a:lstStyle/>
-          <a:p>
-            <a:pPr>
-              <a:defRPr sz="2000" b="1">
-                <a:solidFill>
-                  <a:srgbClr val="0F172A"/>
-                </a:solidFill>
-                <a:latin typeface="Arial"/>
-              </a:defRPr>
-            </a:pPr>
-            <a:r>
-              <a:t>STRUKTUR RANTAI PASOK: STAKEHOLDER, ALIRAN FISIK &amp; INFORMASI</a:t>
-            </a:r>
-          </a:p>
-        </p:txBody>
-      </p:sp>
-      <p:sp>
-        <p:nvSpPr>
-          <p:cNvPr id="5" name="TextBox 4"/>
-          <p:cNvSpPr txBox="1"/>
-          <p:nvPr/>
-        </p:nvSpPr>
-        <p:spPr>
-          <a:xfrm>
-            <a:off x="914400" y="960120"/>
-            <a:ext cx="10515600" cy="274320"/>
-          </a:xfrm>
-          <a:prstGeom prst="rect">
-            <a:avLst/>
-          </a:prstGeom>
-          <a:noFill/>
-        </p:spPr>
-        <p:txBody>
-          <a:bodyPr wrap="square">
-            <a:spAutoFit/>
-          </a:bodyPr>
-          <a:lstStyle/>
-          <a:p>
-            <a:pPr>
-              <a:defRPr sz="1150">
+              <a:defRPr sz="1100">
                 <a:solidFill>
                   <a:srgbClr val="475569"/>
                 </a:solidFill>
@@ -5135,7 +5135,7 @@
               </a:defRPr>
             </a:pPr>
             <a:r>
-              <a:t>Pemetaan peran stakeholder end-to-end dari hulu ke hilir serta titik kritis perpindahan barang dan otorisasi digital.</a:t>
+              <a:t>Aliran terpadu dari pabrik vendor hingga serah terima mahasiswa dengan prinsip 'Data Mengunci Fisik'</a:t>
             </a:r>
           </a:p>
         </p:txBody>
@@ -5148,8 +5148,8 @@
         </p:nvSpPr>
         <p:spPr>
           <a:xfrm>
-            <a:off x="731520" y="1261872"/>
-            <a:ext cx="10728655" cy="13716"/>
+            <a:off x="731520" y="1243584"/>
+            <a:ext cx="10728655" cy="10972"/>
           </a:xfrm>
           <a:prstGeom prst="rect">
             <a:avLst/>
@@ -5239,9 +5239,9 @@
           <a:p>
             <a:pPr>
               <a:spcAft>
-                <a:spcPts val="600"/>
+                <a:spcPts val="500"/>
               </a:spcAft>
-              <a:defRPr sz="1300" b="1">
+              <a:defRPr sz="1250" b="1">
                 <a:solidFill>
                   <a:srgbClr val="0F172A"/>
                 </a:solidFill>
@@ -5255,7 +5255,7 @@
           <a:p>
             <a:pPr>
               <a:spcAft>
-                <a:spcPts val="400"/>
+                <a:spcPts val="300"/>
               </a:spcAft>
               <a:defRPr sz="1050">
                 <a:solidFill>
@@ -5271,7 +5271,7 @@
           <a:p>
             <a:pPr>
               <a:spcAft>
-                <a:spcPts val="400"/>
+                <a:spcPts val="300"/>
               </a:spcAft>
               <a:defRPr sz="1050">
                 <a:solidFill>
@@ -5281,13 +5281,13 @@
               </a:defRPr>
             </a:pPr>
             <a:r>
-              <a:t>•  Menerapkan standarisasi kode varian SKU seragam.</a:t>
+              <a:t>•  Menerapkan standarisasi kode SKU per kategori dan ukuran.</a:t>
             </a:r>
           </a:p>
           <a:p>
             <a:pPr>
               <a:spcAft>
-                <a:spcPts val="400"/>
+                <a:spcPts val="300"/>
               </a:spcAft>
               <a:defRPr sz="1050">
                 <a:solidFill>
@@ -5297,7 +5297,7 @@
               </a:defRPr>
             </a:pPr>
             <a:r>
-              <a:t>•  Titik Barang: Pengiriman kardus seragam ke gudang kampus (Inbound Logistics).</a:t>
+              <a:t>•  Titik Barang: Pengiriman kontainer stok ke gudang kampus (Inbound Logistics).</a:t>
             </a:r>
           </a:p>
           <a:p>
@@ -5374,9 +5374,9 @@
           <a:p>
             <a:pPr>
               <a:spcAft>
-                <a:spcPts val="600"/>
+                <a:spcPts val="500"/>
               </a:spcAft>
-              <a:defRPr sz="1300" b="1">
+              <a:defRPr sz="1250" b="1">
                 <a:solidFill>
                   <a:srgbClr val="0F172A"/>
                 </a:solidFill>
@@ -5390,7 +5390,7 @@
           <a:p>
             <a:pPr>
               <a:spcAft>
-                <a:spcPts val="400"/>
+                <a:spcPts val="300"/>
               </a:spcAft>
               <a:defRPr sz="1050">
                 <a:solidFill>
@@ -5400,13 +5400,13 @@
               </a:defRPr>
             </a:pPr>
             <a:r>
-              <a:t>•  Penerimaan fisik barang (StockReceive) dan quality checking kualitas seragam.</a:t>
+              <a:t>•  Penerimaan fisik barang (StockReceive) dan pemeriksaan mutu (QC).</a:t>
             </a:r>
           </a:p>
           <a:p>
             <a:pPr>
               <a:spcAft>
-                <a:spcPts val="400"/>
+                <a:spcPts val="300"/>
               </a:spcAft>
               <a:defRPr sz="1050">
                 <a:solidFill>
@@ -5416,13 +5416,13 @@
               </a:defRPr>
             </a:pPr>
             <a:r>
-              <a:t>•  Pencatatan batch urutan FIFO (First-In, First-Out) dan nilai HPP per unit.</a:t>
+              <a:t>•  Pencatatan batch urutan FIFO (First-In, First-Out) dan penetapan harga beli unit.</a:t>
             </a:r>
           </a:p>
           <a:p>
             <a:pPr>
               <a:spcAft>
-                <a:spcPts val="400"/>
+                <a:spcPts val="300"/>
               </a:spcAft>
               <a:defRPr sz="1050">
                 <a:solidFill>
@@ -5432,7 +5432,7 @@
               </a:defRPr>
             </a:pPr>
             <a:r>
-              <a:t>•  Titik Barang &amp; Info: Transfer stok batch tertua menuju posko distribusi loket.</a:t>
+              <a:t>•  Titik Barang: Transfer stok batch tertua menuju posko distribusi loket.</a:t>
             </a:r>
           </a:p>
           <a:p>
@@ -5503,15 +5503,15 @@
               </a:defRPr>
             </a:pPr>
             <a:r>
-              <a:t>03 • KEUANGAN &amp; POSKO</a:t>
+              <a:t>03 • VERIFIKATOR &amp; LOKET</a:t>
             </a:r>
           </a:p>
           <a:p>
             <a:pPr>
               <a:spcAft>
-                <a:spcPts val="600"/>
+                <a:spcPts val="500"/>
               </a:spcAft>
-              <a:defRPr sz="1300" b="1">
+              <a:defRPr sz="1250" b="1">
                 <a:solidFill>
                   <a:srgbClr val="0F172A"/>
                 </a:solidFill>
@@ -5525,7 +5525,7 @@
           <a:p>
             <a:pPr>
               <a:spcAft>
-                <a:spcPts val="400"/>
+                <a:spcPts val="300"/>
               </a:spcAft>
               <a:defRPr sz="1050">
                 <a:solidFill>
@@ -5535,13 +5535,13 @@
               </a:defRPr>
             </a:pPr>
             <a:r>
-              <a:t>•  Keuangan: Otorisasi status pelunasan biaya kuliah (Eligibility Record).</a:t>
+              <a:t>•  Keuangan: Otorisasi status pelunasan biaya kuliah mahasiswa (Eligibility).</a:t>
             </a:r>
           </a:p>
           <a:p>
             <a:pPr>
               <a:spcAft>
-                <a:spcPts val="400"/>
+                <a:spcPts val="300"/>
               </a:spcAft>
               <a:defRPr sz="1050">
                 <a:solidFill>
@@ -5557,7 +5557,7 @@
           <a:p>
             <a:pPr>
               <a:spcAft>
-                <a:spcPts val="400"/>
+                <a:spcPts val="300"/>
               </a:spcAft>
               <a:defRPr sz="1050">
                 <a:solidFill>
@@ -5567,7 +5567,7 @@
               </a:defRPr>
             </a:pPr>
             <a:r>
-              <a:t>•  Titik Kritis: Validasi QR Code dan pencocokan ukuran saat proses fitting.</a:t>
+              <a:t>•  Titik Kritis: Validasi identitas QR Code dan pencocokan ukuran saat proses fitting.</a:t>
             </a:r>
           </a:p>
           <a:p>
@@ -5644,9 +5644,9 @@
           <a:p>
             <a:pPr>
               <a:spcAft>
-                <a:spcPts val="600"/>
+                <a:spcPts val="500"/>
               </a:spcAft>
-              <a:defRPr sz="1300" b="1">
+              <a:defRPr sz="1250" b="1">
                 <a:solidFill>
                   <a:srgbClr val="0F172A"/>
                 </a:solidFill>
@@ -5660,7 +5660,7 @@
           <a:p>
             <a:pPr>
               <a:spcAft>
-                <a:spcPts val="400"/>
+                <a:spcPts val="300"/>
               </a:spcAft>
               <a:defRPr sz="1050">
                 <a:solidFill>
@@ -5676,7 +5676,7 @@
           <a:p>
             <a:pPr>
               <a:spcAft>
-                <a:spcPts val="400"/>
+                <a:spcPts val="300"/>
               </a:spcAft>
               <a:defRPr sz="1050">
                 <a:solidFill>
@@ -5692,7 +5692,7 @@
           <a:p>
             <a:pPr>
               <a:spcAft>
-                <a:spcPts val="400"/>
+                <a:spcPts val="300"/>
               </a:spcAft>
               <a:defRPr sz="1050">
                 <a:solidFill>
@@ -5702,7 +5702,7 @@
               </a:defRPr>
             </a:pPr>
             <a:r>
-              <a:t>•  Titik Info: Menunjukkan QR Code beresolusi tinggi (NIM murni) di meja posko.</a:t>
+              <a:t>•  Titik Info: Menunjukkan tiket QR Code beresolusi tinggi (NIM murni) di loket.</a:t>
             </a:r>
           </a:p>
           <a:p>
@@ -5773,7 +5773,7 @@
               </a:defRPr>
             </a:pPr>
             <a:r>
-              <a:t>PRINSIP INTI 'DATA MENGUNCI FISIK': </a:t>
+              <a:t>Prinsip Inti 'Data Mengunci Fisik': </a:t>
             </a:r>
             <a:r>
               <a:rPr sz="1050">
@@ -5821,8 +5821,8 @@
         </p:nvSpPr>
         <p:spPr>
           <a:xfrm>
-            <a:off x="731520" y="365760"/>
-            <a:ext cx="73152" cy="777240"/>
+            <a:off x="731520" y="384048"/>
+            <a:ext cx="54864" cy="713232"/>
           </a:xfrm>
           <a:prstGeom prst="rect">
             <a:avLst/>
@@ -5864,7 +5864,79 @@
         </p:nvSpPr>
         <p:spPr>
           <a:xfrm>
-            <a:off x="914400" y="320040"/>
+            <a:off x="868680" y="347472"/>
+            <a:ext cx="10515600" cy="219456"/>
+          </a:xfrm>
+          <a:prstGeom prst="rect">
+            <a:avLst/>
+          </a:prstGeom>
+          <a:noFill/>
+        </p:spPr>
+        <p:txBody>
+          <a:bodyPr wrap="square">
+            <a:spAutoFit/>
+          </a:bodyPr>
+          <a:lstStyle/>
+          <a:p>
+            <a:pPr>
+              <a:defRPr sz="950" b="1">
+                <a:solidFill>
+                  <a:srgbClr val="980517"/>
+                </a:solidFill>
+                <a:latin typeface="Arial"/>
+              </a:defRPr>
+            </a:pPr>
+            <a:r>
+              <a:t>ANALISIS MASALAH SISTEM LAMA</a:t>
+            </a:r>
+          </a:p>
+        </p:txBody>
+      </p:sp>
+      <p:sp>
+        <p:nvSpPr>
+          <p:cNvPr id="4" name="TextBox 3"/>
+          <p:cNvSpPr txBox="1"/>
+          <p:nvPr/>
+        </p:nvSpPr>
+        <p:spPr>
+          <a:xfrm>
+            <a:off x="868680" y="548640"/>
+            <a:ext cx="10515600" cy="384048"/>
+          </a:xfrm>
+          <a:prstGeom prst="rect">
+            <a:avLst/>
+          </a:prstGeom>
+          <a:noFill/>
+        </p:spPr>
+        <p:txBody>
+          <a:bodyPr wrap="square">
+            <a:spAutoFit/>
+          </a:bodyPr>
+          <a:lstStyle/>
+          <a:p>
+            <a:pPr>
+              <a:defRPr sz="1900" b="1">
+                <a:solidFill>
+                  <a:srgbClr val="0F172A"/>
+                </a:solidFill>
+                <a:latin typeface="Arial"/>
+              </a:defRPr>
+            </a:pPr>
+            <a:r>
+              <a:t>Evaluasi Kendala Operasional &amp; Dampak Sistemik</a:t>
+            </a:r>
+          </a:p>
+        </p:txBody>
+      </p:sp>
+      <p:sp>
+        <p:nvSpPr>
+          <p:cNvPr id="5" name="TextBox 4"/>
+          <p:cNvSpPr txBox="1"/>
+          <p:nvPr/>
+        </p:nvSpPr>
+        <p:spPr>
+          <a:xfrm>
+            <a:off x="868680" y="932688"/>
             <a:ext cx="10515600" cy="256032"/>
           </a:xfrm>
           <a:prstGeom prst="rect">
@@ -5879,79 +5951,7 @@
           <a:lstStyle/>
           <a:p>
             <a:pPr>
-              <a:defRPr sz="1000" b="1">
-                <a:solidFill>
-                  <a:srgbClr val="980517"/>
-                </a:solidFill>
-                <a:latin typeface="Arial"/>
-              </a:defRPr>
-            </a:pPr>
-            <a:r>
-              <a:t>SLIDE 3 • PROBLEM ANALYSIS   |   RUBRIK: PROBLEM ANALYSIS (20%)</a:t>
-            </a:r>
-          </a:p>
-        </p:txBody>
-      </p:sp>
-      <p:sp>
-        <p:nvSpPr>
-          <p:cNvPr id="4" name="TextBox 3"/>
-          <p:cNvSpPr txBox="1"/>
-          <p:nvPr/>
-        </p:nvSpPr>
-        <p:spPr>
-          <a:xfrm>
-            <a:off x="914400" y="548640"/>
-            <a:ext cx="10515600" cy="411480"/>
-          </a:xfrm>
-          <a:prstGeom prst="rect">
-            <a:avLst/>
-          </a:prstGeom>
-          <a:noFill/>
-        </p:spPr>
-        <p:txBody>
-          <a:bodyPr wrap="square">
-            <a:spAutoFit/>
-          </a:bodyPr>
-          <a:lstStyle/>
-          <a:p>
-            <a:pPr>
-              <a:defRPr sz="2000" b="1">
-                <a:solidFill>
-                  <a:srgbClr val="0F172A"/>
-                </a:solidFill>
-                <a:latin typeface="Arial"/>
-              </a:defRPr>
-            </a:pPr>
-            <a:r>
-              <a:t>ANALISIS AKAR MASALAH: MENGAPA SISTEM MANUAL GAGAL?</a:t>
-            </a:r>
-          </a:p>
-        </p:txBody>
-      </p:sp>
-      <p:sp>
-        <p:nvSpPr>
-          <p:cNvPr id="5" name="TextBox 4"/>
-          <p:cNvSpPr txBox="1"/>
-          <p:nvPr/>
-        </p:nvSpPr>
-        <p:spPr>
-          <a:xfrm>
-            <a:off x="914400" y="960120"/>
-            <a:ext cx="10515600" cy="274320"/>
-          </a:xfrm>
-          <a:prstGeom prst="rect">
-            <a:avLst/>
-          </a:prstGeom>
-          <a:noFill/>
-        </p:spPr>
-        <p:txBody>
-          <a:bodyPr wrap="square">
-            <a:spAutoFit/>
-          </a:bodyPr>
-          <a:lstStyle/>
-          <a:p>
-            <a:pPr>
-              <a:defRPr sz="1150">
+              <a:defRPr sz="1100">
                 <a:solidFill>
                   <a:srgbClr val="475569"/>
                 </a:solidFill>
@@ -5959,7 +5959,7 @@
               </a:defRPr>
             </a:pPr>
             <a:r>
-              <a:t>Matriks analisis empat masalah utama beserta penyebab sistemik dan dampaknya terhadap biaya, waktu, stok, dan pelayanan.</a:t>
+              <a:t>Analisis akar masalah pengelolaan manual terhadap pembengkakan biaya, waktu kerja, dan penurunan mutu layanan</a:t>
             </a:r>
           </a:p>
         </p:txBody>
@@ -5972,8 +5972,8 @@
         </p:nvSpPr>
         <p:spPr>
           <a:xfrm>
-            <a:off x="731520" y="1261872"/>
-            <a:ext cx="10728655" cy="13716"/>
+            <a:off x="731520" y="1243584"/>
+            <a:ext cx="10728655" cy="10972"/>
           </a:xfrm>
           <a:prstGeom prst="rect">
             <a:avLst/>
@@ -6454,7 +6454,7 @@
               </a:defRPr>
             </a:pPr>
             <a:r>
-              <a:t>AKAR KEGAGALAN SISTEMIK: </a:t>
+              <a:t>Akar Kegagalan Sistemik: </a:t>
             </a:r>
             <a:r>
               <a:rPr sz="1050">
@@ -6502,8 +6502,8 @@
         </p:nvSpPr>
         <p:spPr>
           <a:xfrm>
-            <a:off x="731520" y="365760"/>
-            <a:ext cx="73152" cy="777240"/>
+            <a:off x="731520" y="384048"/>
+            <a:ext cx="54864" cy="713232"/>
           </a:xfrm>
           <a:prstGeom prst="rect">
             <a:avLst/>
@@ -6545,7 +6545,79 @@
         </p:nvSpPr>
         <p:spPr>
           <a:xfrm>
-            <a:off x="914400" y="320040"/>
+            <a:off x="868680" y="347472"/>
+            <a:ext cx="10515600" cy="219456"/>
+          </a:xfrm>
+          <a:prstGeom prst="rect">
+            <a:avLst/>
+          </a:prstGeom>
+          <a:noFill/>
+        </p:spPr>
+        <p:txBody>
+          <a:bodyPr wrap="square">
+            <a:spAutoFit/>
+          </a:bodyPr>
+          <a:lstStyle/>
+          <a:p>
+            <a:pPr>
+              <a:defRPr sz="950" b="1">
+                <a:solidFill>
+                  <a:srgbClr val="980517"/>
+                </a:solidFill>
+                <a:latin typeface="Arial"/>
+              </a:defRPr>
+            </a:pPr>
+            <a:r>
+              <a:t>ANALISIS ALIRAN INFORMASI</a:t>
+            </a:r>
+          </a:p>
+        </p:txBody>
+      </p:sp>
+      <p:sp>
+        <p:nvSpPr>
+          <p:cNvPr id="4" name="TextBox 3"/>
+          <p:cNvSpPr txBox="1"/>
+          <p:nvPr/>
+        </p:nvSpPr>
+        <p:spPr>
+          <a:xfrm>
+            <a:off x="868680" y="548640"/>
+            <a:ext cx="10515600" cy="384048"/>
+          </a:xfrm>
+          <a:prstGeom prst="rect">
+            <a:avLst/>
+          </a:prstGeom>
+          <a:noFill/>
+        </p:spPr>
+        <p:txBody>
+          <a:bodyPr wrap="square">
+            <a:spAutoFit/>
+          </a:bodyPr>
+          <a:lstStyle/>
+          <a:p>
+            <a:pPr>
+              <a:defRPr sz="1900" b="1">
+                <a:solidFill>
+                  <a:srgbClr val="0F172A"/>
+                </a:solidFill>
+                <a:latin typeface="Arial"/>
+              </a:defRPr>
+            </a:pPr>
+            <a:r>
+              <a:t>Titik Kemacetan &amp; Isolasi Data (As-Is State)</a:t>
+            </a:r>
+          </a:p>
+        </p:txBody>
+      </p:sp>
+      <p:sp>
+        <p:nvSpPr>
+          <p:cNvPr id="5" name="TextBox 4"/>
+          <p:cNvSpPr txBox="1"/>
+          <p:nvPr/>
+        </p:nvSpPr>
+        <p:spPr>
+          <a:xfrm>
+            <a:off x="868680" y="932688"/>
             <a:ext cx="10515600" cy="256032"/>
           </a:xfrm>
           <a:prstGeom prst="rect">
@@ -6560,79 +6632,7 @@
           <a:lstStyle/>
           <a:p>
             <a:pPr>
-              <a:defRPr sz="1000" b="1">
-                <a:solidFill>
-                  <a:srgbClr val="980517"/>
-                </a:solidFill>
-                <a:latin typeface="Arial"/>
-              </a:defRPr>
-            </a:pPr>
-            <a:r>
-              <a:t>SLIDE 4 • INFORMATION FLOW ANALYSIS   |   RUBRIK: INFORMATION FLOW ANALYSIS (15%)</a:t>
-            </a:r>
-          </a:p>
-        </p:txBody>
-      </p:sp>
-      <p:sp>
-        <p:nvSpPr>
-          <p:cNvPr id="4" name="TextBox 3"/>
-          <p:cNvSpPr txBox="1"/>
-          <p:nvPr/>
-        </p:nvSpPr>
-        <p:spPr>
-          <a:xfrm>
-            <a:off x="914400" y="548640"/>
-            <a:ext cx="10515600" cy="411480"/>
-          </a:xfrm>
-          <a:prstGeom prst="rect">
-            <a:avLst/>
-          </a:prstGeom>
-          <a:noFill/>
-        </p:spPr>
-        <p:txBody>
-          <a:bodyPr wrap="square">
-            <a:spAutoFit/>
-          </a:bodyPr>
-          <a:lstStyle/>
-          <a:p>
-            <a:pPr>
-              <a:defRPr sz="2000" b="1">
-                <a:solidFill>
-                  <a:srgbClr val="0F172A"/>
-                </a:solidFill>
-                <a:latin typeface="Arial"/>
-              </a:defRPr>
-            </a:pPr>
-            <a:r>
-              <a:t>DIAGRAM ALIRAN INFORMASI &amp; TITIK KEMACETAN (AS-IS STATE)</a:t>
-            </a:r>
-          </a:p>
-        </p:txBody>
-      </p:sp>
-      <p:sp>
-        <p:nvSpPr>
-          <p:cNvPr id="5" name="TextBox 4"/>
-          <p:cNvSpPr txBox="1"/>
-          <p:nvPr/>
-        </p:nvSpPr>
-        <p:spPr>
-          <a:xfrm>
-            <a:off x="914400" y="960120"/>
-            <a:ext cx="10515600" cy="274320"/>
-          </a:xfrm>
-          <a:prstGeom prst="rect">
-            <a:avLst/>
-          </a:prstGeom>
-          <a:noFill/>
-        </p:spPr>
-        <p:txBody>
-          <a:bodyPr wrap="square">
-            <a:spAutoFit/>
-          </a:bodyPr>
-          <a:lstStyle/>
-          <a:p>
-            <a:pPr>
-              <a:defRPr sz="1150">
+              <a:defRPr sz="1100">
                 <a:solidFill>
                   <a:srgbClr val="475569"/>
                 </a:solidFill>
@@ -6640,7 +6640,7 @@
               </a:defRPr>
             </a:pPr>
             <a:r>
-              <a:t>Identifikasi kebutuhan informasi stakeholder, asal-tujuan data, serta titik kritis informasi terlambat, tidak akurat, atau terputus.</a:t>
+              <a:t>Hambatan komunikasi antarbagian yang memicu keterlambatan, inkonsistensi data, dan pembatalan layanan</a:t>
             </a:r>
           </a:p>
         </p:txBody>
@@ -6653,8 +6653,8 @@
         </p:nvSpPr>
         <p:spPr>
           <a:xfrm>
-            <a:off x="731520" y="1261872"/>
-            <a:ext cx="10728655" cy="13716"/>
+            <a:off x="731520" y="1243584"/>
+            <a:ext cx="10728655" cy="10972"/>
           </a:xfrm>
           <a:prstGeom prst="rect">
             <a:avLst/>
@@ -6744,9 +6744,9 @@
           <a:p>
             <a:pPr>
               <a:spcAft>
-                <a:spcPts val="600"/>
+                <a:spcPts val="500"/>
               </a:spcAft>
-              <a:defRPr sz="1300" b="1">
+              <a:defRPr sz="1250" b="1">
                 <a:solidFill>
                   <a:srgbClr val="0F172A"/>
                 </a:solidFill>
@@ -6760,7 +6760,7 @@
           <a:p>
             <a:pPr>
               <a:spcAft>
-                <a:spcPts val="400"/>
+                <a:spcPts val="300"/>
               </a:spcAft>
               <a:defRPr sz="1050">
                 <a:solidFill>
@@ -6776,7 +6776,7 @@
           <a:p>
             <a:pPr>
               <a:spcAft>
-                <a:spcPts val="400"/>
+                <a:spcPts val="300"/>
               </a:spcAft>
               <a:defRPr sz="1050">
                 <a:solidFill>
@@ -6786,7 +6786,7 @@
               </a:defRPr>
             </a:pPr>
             <a:r>
-              <a:t>•  Titik Masalah: Google Form terpisah tanpa validasi SKU baku, memicu input ganda dan rekap manual staf terlambat berminggu-minggu.</a:t>
+              <a:t>•  Titik Masalah: Google Form terpisah tanpa validasi SKU baku, memicu input ganda dan rekapitulasi data staf terlambat berminggu-minggu.</a:t>
             </a:r>
           </a:p>
           <a:p>
@@ -6863,9 +6863,9 @@
           <a:p>
             <a:pPr>
               <a:spcAft>
-                <a:spcPts val="600"/>
+                <a:spcPts val="500"/>
               </a:spcAft>
-              <a:defRPr sz="1300" b="1">
+              <a:defRPr sz="1250" b="1">
                 <a:solidFill>
                   <a:srgbClr val="0F172A"/>
                 </a:solidFill>
@@ -6879,7 +6879,7 @@
           <a:p>
             <a:pPr>
               <a:spcAft>
-                <a:spcPts val="400"/>
+                <a:spcPts val="300"/>
               </a:spcAft>
               <a:defRPr sz="1050">
                 <a:solidFill>
@@ -6895,7 +6895,7 @@
           <a:p>
             <a:pPr>
               <a:spcAft>
-                <a:spcPts val="400"/>
+                <a:spcPts val="300"/>
               </a:spcAft>
               <a:defRPr sz="1050">
                 <a:solidFill>
@@ -6982,9 +6982,9 @@
           <a:p>
             <a:pPr>
               <a:spcAft>
-                <a:spcPts val="600"/>
+                <a:spcPts val="500"/>
               </a:spcAft>
-              <a:defRPr sz="1300" b="1">
+              <a:defRPr sz="1250" b="1">
                 <a:solidFill>
                   <a:srgbClr val="0F172A"/>
                 </a:solidFill>
@@ -6998,7 +6998,7 @@
           <a:p>
             <a:pPr>
               <a:spcAft>
-                <a:spcPts val="400"/>
+                <a:spcPts val="300"/>
               </a:spcAft>
               <a:defRPr sz="1050">
                 <a:solidFill>
@@ -7014,7 +7014,7 @@
           <a:p>
             <a:pPr>
               <a:spcAft>
-                <a:spcPts val="400"/>
+                <a:spcPts val="300"/>
               </a:spcAft>
               <a:defRPr sz="1050">
                 <a:solidFill>
@@ -7101,9 +7101,9 @@
           <a:p>
             <a:pPr>
               <a:spcAft>
-                <a:spcPts val="600"/>
+                <a:spcPts val="500"/>
               </a:spcAft>
-              <a:defRPr sz="1300" b="1">
+              <a:defRPr sz="1250" b="1">
                 <a:solidFill>
                   <a:srgbClr val="0F172A"/>
                 </a:solidFill>
@@ -7117,7 +7117,7 @@
           <a:p>
             <a:pPr>
               <a:spcAft>
-                <a:spcPts val="400"/>
+                <a:spcPts val="300"/>
               </a:spcAft>
               <a:defRPr sz="1050">
                 <a:solidFill>
@@ -7133,7 +7133,7 @@
           <a:p>
             <a:pPr>
               <a:spcAft>
-                <a:spcPts val="400"/>
+                <a:spcPts val="300"/>
               </a:spcAft>
               <a:defRPr sz="1050">
                 <a:solidFill>
@@ -7214,7 +7214,7 @@
               </a:defRPr>
             </a:pPr>
             <a:r>
-              <a:t>DIAGNOSA KUNCI: </a:t>
+              <a:t>Diagnosa Kunci: </a:t>
             </a:r>
             <a:r>
               <a:rPr sz="1050">
@@ -7262,8 +7262,8 @@
         </p:nvSpPr>
         <p:spPr>
           <a:xfrm>
-            <a:off x="731520" y="365760"/>
-            <a:ext cx="73152" cy="777240"/>
+            <a:off x="731520" y="384048"/>
+            <a:ext cx="54864" cy="713232"/>
           </a:xfrm>
           <a:prstGeom prst="rect">
             <a:avLst/>
@@ -7305,7 +7305,79 @@
         </p:nvSpPr>
         <p:spPr>
           <a:xfrm>
-            <a:off x="914400" y="320040"/>
+            <a:off x="868680" y="347472"/>
+            <a:ext cx="10515600" cy="219456"/>
+          </a:xfrm>
+          <a:prstGeom prst="rect">
+            <a:avLst/>
+          </a:prstGeom>
+          <a:noFill/>
+        </p:spPr>
+        <p:txBody>
+          <a:bodyPr wrap="square">
+            <a:spAutoFit/>
+          </a:bodyPr>
+          <a:lstStyle/>
+          <a:p>
+            <a:pPr>
+              <a:defRPr sz="950" b="1">
+                <a:solidFill>
+                  <a:srgbClr val="980517"/>
+                </a:solidFill>
+                <a:latin typeface="Arial"/>
+              </a:defRPr>
+            </a:pPr>
+            <a:r>
+              <a:t>REKOMENDASI SISTEM TERPADU</a:t>
+            </a:r>
+          </a:p>
+        </p:txBody>
+      </p:sp>
+      <p:sp>
+        <p:nvSpPr>
+          <p:cNvPr id="4" name="TextBox 3"/>
+          <p:cNvSpPr txBox="1"/>
+          <p:nvPr/>
+        </p:nvSpPr>
+        <p:spPr>
+          <a:xfrm>
+            <a:off x="868680" y="548640"/>
+            <a:ext cx="10515600" cy="384048"/>
+          </a:xfrm>
+          <a:prstGeom prst="rect">
+            <a:avLst/>
+          </a:prstGeom>
+          <a:noFill/>
+        </p:spPr>
+        <p:txBody>
+          <a:bodyPr wrap="square">
+            <a:spAutoFit/>
+          </a:bodyPr>
+          <a:lstStyle/>
+          <a:p>
+            <a:pPr>
+              <a:defRPr sz="1900" b="1">
+                <a:solidFill>
+                  <a:srgbClr val="0F172A"/>
+                </a:solidFill>
+                <a:latin typeface="Arial"/>
+              </a:defRPr>
+            </a:pPr>
+            <a:r>
+              <a:t>Pemilihan Arsitektur Sistem Informasi (UniStock Engine)</a:t>
+            </a:r>
+          </a:p>
+        </p:txBody>
+      </p:sp>
+      <p:sp>
+        <p:nvSpPr>
+          <p:cNvPr id="5" name="TextBox 4"/>
+          <p:cNvSpPr txBox="1"/>
+          <p:nvPr/>
+        </p:nvSpPr>
+        <p:spPr>
+          <a:xfrm>
+            <a:off x="868680" y="932688"/>
             <a:ext cx="10515600" cy="256032"/>
           </a:xfrm>
           <a:prstGeom prst="rect">
@@ -7320,79 +7392,7 @@
           <a:lstStyle/>
           <a:p>
             <a:pPr>
-              <a:defRPr sz="1000" b="1">
-                <a:solidFill>
-                  <a:srgbClr val="980517"/>
-                </a:solidFill>
-                <a:latin typeface="Arial"/>
-              </a:defRPr>
-            </a:pPr>
-            <a:r>
-              <a:t>SLIDE 5 • RECOMMENDED INFORMATION SYSTEMS   |   RUBRIK: IS JUSTIFICATION (20%)</a:t>
-            </a:r>
-          </a:p>
-        </p:txBody>
-      </p:sp>
-      <p:sp>
-        <p:nvSpPr>
-          <p:cNvPr id="4" name="TextBox 3"/>
-          <p:cNvSpPr txBox="1"/>
-          <p:nvPr/>
-        </p:nvSpPr>
-        <p:spPr>
-          <a:xfrm>
-            <a:off x="914400" y="548640"/>
-            <a:ext cx="10515600" cy="411480"/>
-          </a:xfrm>
-          <a:prstGeom prst="rect">
-            <a:avLst/>
-          </a:prstGeom>
-          <a:noFill/>
-        </p:spPr>
-        <p:txBody>
-          <a:bodyPr wrap="square">
-            <a:spAutoFit/>
-          </a:bodyPr>
-          <a:lstStyle/>
-          <a:p>
-            <a:pPr>
-              <a:defRPr sz="2000" b="1">
-                <a:solidFill>
-                  <a:srgbClr val="0F172A"/>
-                </a:solidFill>
-                <a:latin typeface="Arial"/>
-              </a:defRPr>
-            </a:pPr>
-            <a:r>
-              <a:t>REKOMENDASI SISTEM INFORMASI: EKOSISTEM HORIZONU UNIFORM</a:t>
-            </a:r>
-          </a:p>
-        </p:txBody>
-      </p:sp>
-      <p:sp>
-        <p:nvSpPr>
-          <p:cNvPr id="5" name="TextBox 4"/>
-          <p:cNvSpPr txBox="1"/>
-          <p:nvPr/>
-        </p:nvSpPr>
-        <p:spPr>
-          <a:xfrm>
-            <a:off x="914400" y="960120"/>
-            <a:ext cx="10515600" cy="274320"/>
-          </a:xfrm>
-          <a:prstGeom prst="rect">
-            <a:avLst/>
-          </a:prstGeom>
-          <a:noFill/>
-        </p:spPr>
-        <p:txBody>
-          <a:bodyPr wrap="square">
-            <a:spAutoFit/>
-          </a:bodyPr>
-          <a:lstStyle/>
-          <a:p>
-            <a:pPr>
-              <a:defRPr sz="1150">
+              <a:defRPr sz="1100">
                 <a:solidFill>
                   <a:srgbClr val="475569"/>
                 </a:solidFill>
@@ -7400,7 +7400,7 @@
               </a:defRPr>
             </a:pPr>
             <a:r>
-              <a:t>Pemilihan sistem terpadu (ERP, SCM, POS, WMS), justifikasi integrasi, fungsi operasional, dan manfaat nyata terukur.</a:t>
+              <a:t>Integrasi empat pilar sistem: ERP, SCM, POS, dan WMS dalam satu platform web modern</a:t>
             </a:r>
           </a:p>
         </p:txBody>
@@ -7413,8 +7413,8 @@
         </p:nvSpPr>
         <p:spPr>
           <a:xfrm>
-            <a:off x="731520" y="1261872"/>
-            <a:ext cx="10728655" cy="13716"/>
+            <a:off x="731520" y="1243584"/>
+            <a:ext cx="10728655" cy="10972"/>
           </a:xfrm>
           <a:prstGeom prst="rect">
             <a:avLst/>
@@ -8016,7 +8016,7 @@
               </a:defRPr>
             </a:pPr>
             <a:r>
-              <a:t>KEUNGGULAN INTEGRASI UNISTOCK: </a:t>
+              <a:t>Keunggulan Integrasi UniStock: </a:t>
             </a:r>
             <a:r>
               <a:rPr sz="1050">
@@ -8064,8 +8064,8 @@
         </p:nvSpPr>
         <p:spPr>
           <a:xfrm>
-            <a:off x="731520" y="365760"/>
-            <a:ext cx="73152" cy="777240"/>
+            <a:off x="731520" y="384048"/>
+            <a:ext cx="54864" cy="713232"/>
           </a:xfrm>
           <a:prstGeom prst="rect">
             <a:avLst/>
@@ -8107,7 +8107,79 @@
         </p:nvSpPr>
         <p:spPr>
           <a:xfrm>
-            <a:off x="914400" y="320040"/>
+            <a:off x="868680" y="347472"/>
+            <a:ext cx="10515600" cy="219456"/>
+          </a:xfrm>
+          <a:prstGeom prst="rect">
+            <a:avLst/>
+          </a:prstGeom>
+          <a:noFill/>
+        </p:spPr>
+        <p:txBody>
+          <a:bodyPr wrap="square">
+            <a:spAutoFit/>
+          </a:bodyPr>
+          <a:lstStyle/>
+          <a:p>
+            <a:pPr>
+              <a:defRPr sz="950" b="1">
+                <a:solidFill>
+                  <a:srgbClr val="980517"/>
+                </a:solidFill>
+                <a:latin typeface="Arial"/>
+              </a:defRPr>
+            </a:pPr>
+            <a:r>
+              <a:t>DESAIN ARSITEKTUR SOLUSI</a:t>
+            </a:r>
+          </a:p>
+        </p:txBody>
+      </p:sp>
+      <p:sp>
+        <p:nvSpPr>
+          <p:cNvPr id="4" name="TextBox 3"/>
+          <p:cNvSpPr txBox="1"/>
+          <p:nvPr/>
+        </p:nvSpPr>
+        <p:spPr>
+          <a:xfrm>
+            <a:off x="868680" y="548640"/>
+            <a:ext cx="10515600" cy="384048"/>
+          </a:xfrm>
+          <a:prstGeom prst="rect">
+            <a:avLst/>
+          </a:prstGeom>
+          <a:noFill/>
+        </p:spPr>
+        <p:txBody>
+          <a:bodyPr wrap="square">
+            <a:spAutoFit/>
+          </a:bodyPr>
+          <a:lstStyle/>
+          <a:p>
+            <a:pPr>
+              <a:defRPr sz="1900" b="1">
+                <a:solidFill>
+                  <a:srgbClr val="0F172A"/>
+                </a:solidFill>
+                <a:latin typeface="Arial"/>
+              </a:defRPr>
+            </a:pPr>
+            <a:r>
+              <a:t>Aliran 4-Fase Closed-Loop Supply Chain Engine</a:t>
+            </a:r>
+          </a:p>
+        </p:txBody>
+      </p:sp>
+      <p:sp>
+        <p:nvSpPr>
+          <p:cNvPr id="5" name="TextBox 4"/>
+          <p:cNvSpPr txBox="1"/>
+          <p:nvPr/>
+        </p:nvSpPr>
+        <p:spPr>
+          <a:xfrm>
+            <a:off x="868680" y="932688"/>
             <a:ext cx="10515600" cy="256032"/>
           </a:xfrm>
           <a:prstGeom prst="rect">
@@ -8122,79 +8194,7 @@
           <a:lstStyle/>
           <a:p>
             <a:pPr>
-              <a:defRPr sz="1000" b="1">
-                <a:solidFill>
-                  <a:srgbClr val="980517"/>
-                </a:solidFill>
-                <a:latin typeface="Arial"/>
-              </a:defRPr>
-            </a:pPr>
-            <a:r>
-              <a:t>SLIDE 6 • PROPOSED SOLUTION DESIGN   |   RUBRIK: PROPOSED SOLUTION (15%)</a:t>
-            </a:r>
-          </a:p>
-        </p:txBody>
-      </p:sp>
-      <p:sp>
-        <p:nvSpPr>
-          <p:cNvPr id="4" name="TextBox 3"/>
-          <p:cNvSpPr txBox="1"/>
-          <p:nvPr/>
-        </p:nvSpPr>
-        <p:spPr>
-          <a:xfrm>
-            <a:off x="914400" y="548640"/>
-            <a:ext cx="10515600" cy="411480"/>
-          </a:xfrm>
-          <a:prstGeom prst="rect">
-            <a:avLst/>
-          </a:prstGeom>
-          <a:noFill/>
-        </p:spPr>
-        <p:txBody>
-          <a:bodyPr wrap="square">
-            <a:spAutoFit/>
-          </a:bodyPr>
-          <a:lstStyle/>
-          <a:p>
-            <a:pPr>
-              <a:defRPr sz="2000" b="1">
-                <a:solidFill>
-                  <a:srgbClr val="0F172A"/>
-                </a:solidFill>
-                <a:latin typeface="Arial"/>
-              </a:defRPr>
-            </a:pPr>
-            <a:r>
-              <a:t>DIAGRAM ARSITEKTUR SOLUSI: 4 FASE CLOSED-LOOP SCM ENGINE</a:t>
-            </a:r>
-          </a:p>
-        </p:txBody>
-      </p:sp>
-      <p:sp>
-        <p:nvSpPr>
-          <p:cNvPr id="5" name="TextBox 4"/>
-          <p:cNvSpPr txBox="1"/>
-          <p:nvPr/>
-        </p:nvSpPr>
-        <p:spPr>
-          <a:xfrm>
-            <a:off x="914400" y="960120"/>
-            <a:ext cx="10515600" cy="274320"/>
-          </a:xfrm>
-          <a:prstGeom prst="rect">
-            <a:avLst/>
-          </a:prstGeom>
-          <a:noFill/>
-        </p:spPr>
-        <p:txBody>
-          <a:bodyPr wrap="square">
-            <a:spAutoFit/>
-          </a:bodyPr>
-          <a:lstStyle/>
-          <a:p>
-            <a:pPr>
-              <a:defRPr sz="1150">
+              <a:defRPr sz="1100">
                 <a:solidFill>
                   <a:srgbClr val="475569"/>
                 </a:solidFill>
@@ -8202,7 +8202,7 @@
               </a:defRPr>
             </a:pPr>
             <a:r>
-              <a:t>Bagaimana subsistem terhubung erat, aliran data setelah perbaikan, dan pemanfaatan data untuk pengambilan keputusan.</a:t>
+              <a:t>Konektivitas sistem end-to-end, pemrosesan transaksi atomik, dan closed-loop data feedback</a:t>
             </a:r>
           </a:p>
         </p:txBody>
@@ -8215,8 +8215,8 @@
         </p:nvSpPr>
         <p:spPr>
           <a:xfrm>
-            <a:off x="731520" y="1261872"/>
-            <a:ext cx="10728655" cy="13716"/>
+            <a:off x="731520" y="1243584"/>
+            <a:ext cx="10728655" cy="10972"/>
           </a:xfrm>
           <a:prstGeom prst="rect">
             <a:avLst/>
@@ -8306,9 +8306,9 @@
           <a:p>
             <a:pPr>
               <a:spcAft>
-                <a:spcPts val="600"/>
+                <a:spcPts val="500"/>
               </a:spcAft>
-              <a:defRPr sz="1300" b="1">
+              <a:defRPr sz="1250" b="1">
                 <a:solidFill>
                   <a:srgbClr val="0F172A"/>
                 </a:solidFill>
@@ -8322,7 +8322,7 @@
           <a:p>
             <a:pPr>
               <a:spcAft>
-                <a:spcPts val="400"/>
+                <a:spcPts val="300"/>
               </a:spcAft>
               <a:defRPr sz="1050">
                 <a:solidFill>
@@ -8338,7 +8338,7 @@
           <a:p>
             <a:pPr>
               <a:spcAft>
-                <a:spcPts val="400"/>
+                <a:spcPts val="300"/>
               </a:spcAft>
               <a:defRPr sz="1050">
                 <a:solidFill>
@@ -8354,7 +8354,7 @@
           <a:p>
             <a:pPr>
               <a:spcAft>
-                <a:spcPts val="400"/>
+                <a:spcPts val="300"/>
               </a:spcAft>
               <a:defRPr sz="1050">
                 <a:solidFill>
@@ -8441,9 +8441,9 @@
           <a:p>
             <a:pPr>
               <a:spcAft>
-                <a:spcPts val="600"/>
+                <a:spcPts val="500"/>
               </a:spcAft>
-              <a:defRPr sz="1300" b="1">
+              <a:defRPr sz="1250" b="1">
                 <a:solidFill>
                   <a:srgbClr val="0F172A"/>
                 </a:solidFill>
@@ -8457,7 +8457,7 @@
           <a:p>
             <a:pPr>
               <a:spcAft>
-                <a:spcPts val="400"/>
+                <a:spcPts val="300"/>
               </a:spcAft>
               <a:defRPr sz="1050">
                 <a:solidFill>
@@ -8473,7 +8473,7 @@
           <a:p>
             <a:pPr>
               <a:spcAft>
-                <a:spcPts val="400"/>
+                <a:spcPts val="300"/>
               </a:spcAft>
               <a:defRPr sz="1050">
                 <a:solidFill>
@@ -8489,7 +8489,7 @@
           <a:p>
             <a:pPr>
               <a:spcAft>
-                <a:spcPts val="400"/>
+                <a:spcPts val="300"/>
               </a:spcAft>
               <a:defRPr sz="1050">
                 <a:solidFill>
@@ -8576,9 +8576,9 @@
           <a:p>
             <a:pPr>
               <a:spcAft>
-                <a:spcPts val="600"/>
+                <a:spcPts val="500"/>
               </a:spcAft>
-              <a:defRPr sz="1300" b="1">
+              <a:defRPr sz="1250" b="1">
                 <a:solidFill>
                   <a:srgbClr val="0F172A"/>
                 </a:solidFill>
@@ -8592,7 +8592,7 @@
           <a:p>
             <a:pPr>
               <a:spcAft>
-                <a:spcPts val="400"/>
+                <a:spcPts val="300"/>
               </a:spcAft>
               <a:defRPr sz="1050">
                 <a:solidFill>
@@ -8608,7 +8608,7 @@
           <a:p>
             <a:pPr>
               <a:spcAft>
-                <a:spcPts val="400"/>
+                <a:spcPts val="300"/>
               </a:spcAft>
               <a:defRPr sz="1050">
                 <a:solidFill>
@@ -8624,7 +8624,7 @@
           <a:p>
             <a:pPr>
               <a:spcAft>
-                <a:spcPts val="400"/>
+                <a:spcPts val="300"/>
               </a:spcAft>
               <a:defRPr sz="1050">
                 <a:solidFill>
@@ -8711,9 +8711,9 @@
           <a:p>
             <a:pPr>
               <a:spcAft>
-                <a:spcPts val="600"/>
+                <a:spcPts val="500"/>
               </a:spcAft>
-              <a:defRPr sz="1300" b="1">
+              <a:defRPr sz="1250" b="1">
                 <a:solidFill>
                   <a:srgbClr val="0F172A"/>
                 </a:solidFill>
@@ -8727,7 +8727,7 @@
           <a:p>
             <a:pPr>
               <a:spcAft>
-                <a:spcPts val="400"/>
+                <a:spcPts val="300"/>
               </a:spcAft>
               <a:defRPr sz="1050">
                 <a:solidFill>
@@ -8743,7 +8743,7 @@
           <a:p>
             <a:pPr>
               <a:spcAft>
-                <a:spcPts val="400"/>
+                <a:spcPts val="300"/>
               </a:spcAft>
               <a:defRPr sz="1050">
                 <a:solidFill>
@@ -8759,7 +8759,7 @@
           <a:p>
             <a:pPr>
               <a:spcAft>
-                <a:spcPts val="400"/>
+                <a:spcPts val="300"/>
               </a:spcAft>
               <a:defRPr sz="1050">
                 <a:solidFill>
@@ -8840,7 +8840,7 @@
               </a:defRPr>
             </a:pPr>
             <a:r>
-              <a:t>PENGAMBILAN KEPUTUSAN CLOSED-LOOP: </a:t>
+              <a:t>Pengambilan Keputusan Closed-Loop: </a:t>
             </a:r>
             <a:r>
               <a:rPr sz="1050">
@@ -8888,8 +8888,8 @@
         </p:nvSpPr>
         <p:spPr>
           <a:xfrm>
-            <a:off x="731520" y="365760"/>
-            <a:ext cx="73152" cy="777240"/>
+            <a:off x="731520" y="384048"/>
+            <a:ext cx="54864" cy="713232"/>
           </a:xfrm>
           <a:prstGeom prst="rect">
             <a:avLst/>
@@ -8931,7 +8931,79 @@
         </p:nvSpPr>
         <p:spPr>
           <a:xfrm>
-            <a:off x="914400" y="320040"/>
+            <a:off x="868680" y="347472"/>
+            <a:ext cx="10515600" cy="219456"/>
+          </a:xfrm>
+          <a:prstGeom prst="rect">
+            <a:avLst/>
+          </a:prstGeom>
+          <a:noFill/>
+        </p:spPr>
+        <p:txBody>
+          <a:bodyPr wrap="square">
+            <a:spAutoFit/>
+          </a:bodyPr>
+          <a:lstStyle/>
+          <a:p>
+            <a:pPr>
+              <a:defRPr sz="950" b="1">
+                <a:solidFill>
+                  <a:srgbClr val="980517"/>
+                </a:solidFill>
+                <a:latin typeface="Arial"/>
+              </a:defRPr>
+            </a:pPr>
+            <a:r>
+              <a:t>RENCANA PENERAPAN &amp; MITIGASI</a:t>
+            </a:r>
+          </a:p>
+        </p:txBody>
+      </p:sp>
+      <p:sp>
+        <p:nvSpPr>
+          <p:cNvPr id="4" name="TextBox 3"/>
+          <p:cNvSpPr txBox="1"/>
+          <p:nvPr/>
+        </p:nvSpPr>
+        <p:spPr>
+          <a:xfrm>
+            <a:off x="868680" y="548640"/>
+            <a:ext cx="10515600" cy="384048"/>
+          </a:xfrm>
+          <a:prstGeom prst="rect">
+            <a:avLst/>
+          </a:prstGeom>
+          <a:noFill/>
+        </p:spPr>
+        <p:txBody>
+          <a:bodyPr wrap="square">
+            <a:spAutoFit/>
+          </a:bodyPr>
+          <a:lstStyle/>
+          <a:p>
+            <a:pPr>
+              <a:defRPr sz="1900" b="1">
+                <a:solidFill>
+                  <a:srgbClr val="0F172A"/>
+                </a:solidFill>
+                <a:latin typeface="Arial"/>
+              </a:defRPr>
+            </a:pPr>
+            <a:r>
+              <a:t>Prioritas Implementasi &amp; Manajemen Risiko Lapangan</a:t>
+            </a:r>
+          </a:p>
+        </p:txBody>
+      </p:sp>
+      <p:sp>
+        <p:nvSpPr>
+          <p:cNvPr id="5" name="TextBox 4"/>
+          <p:cNvSpPr txBox="1"/>
+          <p:nvPr/>
+        </p:nvSpPr>
+        <p:spPr>
+          <a:xfrm>
+            <a:off x="868680" y="932688"/>
             <a:ext cx="10515600" cy="256032"/>
           </a:xfrm>
           <a:prstGeom prst="rect">
@@ -8946,79 +9018,7 @@
           <a:lstStyle/>
           <a:p>
             <a:pPr>
-              <a:defRPr sz="1000" b="1">
-                <a:solidFill>
-                  <a:srgbClr val="980517"/>
-                </a:solidFill>
-                <a:latin typeface="Arial"/>
-              </a:defRPr>
-            </a:pPr>
-            <a:r>
-              <a:t>SLIDE 7 • IMPLEMENTATION AND RISKS   |   RUBRIK: FEASIBILITY &amp; RISK MITIGATION (15%)</a:t>
-            </a:r>
-          </a:p>
-        </p:txBody>
-      </p:sp>
-      <p:sp>
-        <p:nvSpPr>
-          <p:cNvPr id="4" name="TextBox 3"/>
-          <p:cNvSpPr txBox="1"/>
-          <p:nvPr/>
-        </p:nvSpPr>
-        <p:spPr>
-          <a:xfrm>
-            <a:off x="914400" y="548640"/>
-            <a:ext cx="10515600" cy="411480"/>
-          </a:xfrm>
-          <a:prstGeom prst="rect">
-            <a:avLst/>
-          </a:prstGeom>
-          <a:noFill/>
-        </p:spPr>
-        <p:txBody>
-          <a:bodyPr wrap="square">
-            <a:spAutoFit/>
-          </a:bodyPr>
-          <a:lstStyle/>
-          <a:p>
-            <a:pPr>
-              <a:defRPr sz="2000" b="1">
-                <a:solidFill>
-                  <a:srgbClr val="0F172A"/>
-                </a:solidFill>
-                <a:latin typeface="Arial"/>
-              </a:defRPr>
-            </a:pPr>
-            <a:r>
-              <a:t>PRIORITAS IMPLEMENTASI &amp; MITIGASI RISIKO LAPANGAN</a:t>
-            </a:r>
-          </a:p>
-        </p:txBody>
-      </p:sp>
-      <p:sp>
-        <p:nvSpPr>
-          <p:cNvPr id="5" name="TextBox 4"/>
-          <p:cNvSpPr txBox="1"/>
-          <p:nvPr/>
-        </p:nvSpPr>
-        <p:spPr>
-          <a:xfrm>
-            <a:off x="914400" y="960120"/>
-            <a:ext cx="10515600" cy="274320"/>
-          </a:xfrm>
-          <a:prstGeom prst="rect">
-            <a:avLst/>
-          </a:prstGeom>
-          <a:noFill/>
-        </p:spPr>
-        <p:txBody>
-          <a:bodyPr wrap="square">
-            <a:spAutoFit/>
-          </a:bodyPr>
-          <a:lstStyle/>
-          <a:p>
-            <a:pPr>
-              <a:defRPr sz="1150">
+              <a:defRPr sz="1100">
                 <a:solidFill>
                   <a:srgbClr val="475569"/>
                 </a:solidFill>
@@ -9026,7 +9026,7 @@
               </a:defRPr>
             </a:pPr>
             <a:r>
-              <a:t>Tiga langkah penerapan terencana, kesiapan SDM, serta mitigasi risiko kontingensi darurat hari-H pembagian.</a:t>
+              <a:t>Tahapan kesiapan operasional serta prosedur kontingensi darurat saat hari-H distribusi</a:t>
             </a:r>
           </a:p>
         </p:txBody>
@@ -9039,8 +9039,8 @@
         </p:nvSpPr>
         <p:spPr>
           <a:xfrm>
-            <a:off x="731520" y="1261872"/>
-            <a:ext cx="10728655" cy="13716"/>
+            <a:off x="731520" y="1243584"/>
+            <a:ext cx="10728655" cy="10972"/>
           </a:xfrm>
           <a:prstGeom prst="rect">
             <a:avLst/>
@@ -9130,9 +9130,9 @@
           <a:p>
             <a:pPr>
               <a:spcAft>
-                <a:spcPts val="600"/>
+                <a:spcPts val="500"/>
               </a:spcAft>
-              <a:defRPr sz="1300" b="1">
+              <a:defRPr sz="1250" b="1">
                 <a:solidFill>
                   <a:srgbClr val="0F172A"/>
                 </a:solidFill>
@@ -9146,7 +9146,7 @@
           <a:p>
             <a:pPr>
               <a:spcAft>
-                <a:spcPts val="400"/>
+                <a:spcPts val="300"/>
               </a:spcAft>
               <a:defRPr sz="1050">
                 <a:solidFill>
@@ -9162,7 +9162,7 @@
           <a:p>
             <a:pPr>
               <a:spcAft>
-                <a:spcPts val="400"/>
+                <a:spcPts val="300"/>
               </a:spcAft>
               <a:defRPr sz="1050">
                 <a:solidFill>
@@ -9178,7 +9178,7 @@
           <a:p>
             <a:pPr>
               <a:spcAft>
-                <a:spcPts val="400"/>
+                <a:spcPts val="300"/>
               </a:spcAft>
               <a:defRPr sz="1050">
                 <a:solidFill>
@@ -9259,15 +9259,15 @@
               </a:defRPr>
             </a:pPr>
             <a:r>
-              <a:t>3 RISIKO DARURAT LAPANGAN &amp; CARA MITIGASI</a:t>
+              <a:t>3 RISIKO LAPANGAN &amp; CARA MITIGASI</a:t>
             </a:r>
           </a:p>
           <a:p>
             <a:pPr>
               <a:spcAft>
-                <a:spcPts val="600"/>
+                <a:spcPts val="500"/>
               </a:spcAft>
-              <a:defRPr sz="1300" b="1">
+              <a:defRPr sz="1250" b="1">
                 <a:solidFill>
                   <a:srgbClr val="0F172A"/>
                 </a:solidFill>
@@ -9281,7 +9281,7 @@
           <a:p>
             <a:pPr>
               <a:spcAft>
-                <a:spcPts val="400"/>
+                <a:spcPts val="300"/>
               </a:spcAft>
               <a:defRPr sz="1050">
                 <a:solidFill>
@@ -9305,7 +9305,7 @@
           <a:p>
             <a:pPr>
               <a:spcAft>
-                <a:spcPts val="400"/>
+                <a:spcPts val="300"/>
               </a:spcAft>
               <a:defRPr sz="1050">
                 <a:solidFill>
@@ -9329,7 +9329,7 @@
           <a:p>
             <a:pPr>
               <a:spcAft>
-                <a:spcPts val="400"/>
+                <a:spcPts val="300"/>
               </a:spcAft>
               <a:defRPr sz="1050">
                 <a:solidFill>
@@ -9418,7 +9418,7 @@
               </a:defRPr>
             </a:pPr>
             <a:r>
-              <a:t>RESILIENSI OPERASIONAL TINGGI: </a:t>
+              <a:t>Resiliensi Operasional Tinggi: </a:t>
             </a:r>
             <a:r>
               <a:rPr sz="1050">
@@ -9466,8 +9466,8 @@
         </p:nvSpPr>
         <p:spPr>
           <a:xfrm>
-            <a:off x="731520" y="365760"/>
-            <a:ext cx="73152" cy="777240"/>
+            <a:off x="731520" y="384048"/>
+            <a:ext cx="54864" cy="713232"/>
           </a:xfrm>
           <a:prstGeom prst="rect">
             <a:avLst/>
@@ -9509,7 +9509,79 @@
         </p:nvSpPr>
         <p:spPr>
           <a:xfrm>
-            <a:off x="914400" y="320040"/>
+            <a:off x="868680" y="347472"/>
+            <a:ext cx="10515600" cy="219456"/>
+          </a:xfrm>
+          <a:prstGeom prst="rect">
+            <a:avLst/>
+          </a:prstGeom>
+          <a:noFill/>
+        </p:spPr>
+        <p:txBody>
+          <a:bodyPr wrap="square">
+            <a:spAutoFit/>
+          </a:bodyPr>
+          <a:lstStyle/>
+          <a:p>
+            <a:pPr>
+              <a:defRPr sz="950" b="1">
+                <a:solidFill>
+                  <a:srgbClr val="980517"/>
+                </a:solidFill>
+                <a:latin typeface="Arial"/>
+              </a:defRPr>
+            </a:pPr>
+            <a:r>
+              <a:t>KESIMPULAN &amp; HASIL TERUKUR</a:t>
+            </a:r>
+          </a:p>
+        </p:txBody>
+      </p:sp>
+      <p:sp>
+        <p:nvSpPr>
+          <p:cNvPr id="4" name="TextBox 3"/>
+          <p:cNvSpPr txBox="1"/>
+          <p:nvPr/>
+        </p:nvSpPr>
+        <p:spPr>
+          <a:xfrm>
+            <a:off x="868680" y="548640"/>
+            <a:ext cx="10515600" cy="384048"/>
+          </a:xfrm>
+          <a:prstGeom prst="rect">
+            <a:avLst/>
+          </a:prstGeom>
+          <a:noFill/>
+        </p:spPr>
+        <p:txBody>
+          <a:bodyPr wrap="square">
+            <a:spAutoFit/>
+          </a:bodyPr>
+          <a:lstStyle/>
+          <a:p>
+            <a:pPr>
+              <a:defRPr sz="1900" b="1">
+                <a:solidFill>
+                  <a:srgbClr val="0F172A"/>
+                </a:solidFill>
+                <a:latin typeface="Arial"/>
+              </a:defRPr>
+            </a:pPr>
+            <a:r>
+              <a:t>Dampak Strategis &amp; Manfaat Nyata Implementasi</a:t>
+            </a:r>
+          </a:p>
+        </p:txBody>
+      </p:sp>
+      <p:sp>
+        <p:nvSpPr>
+          <p:cNvPr id="5" name="TextBox 4"/>
+          <p:cNvSpPr txBox="1"/>
+          <p:nvPr/>
+        </p:nvSpPr>
+        <p:spPr>
+          <a:xfrm>
+            <a:off x="868680" y="932688"/>
             <a:ext cx="10515600" cy="256032"/>
           </a:xfrm>
           <a:prstGeom prst="rect">
@@ -9524,79 +9596,7 @@
           <a:lstStyle/>
           <a:p>
             <a:pPr>
-              <a:defRPr sz="1000" b="1">
-                <a:solidFill>
-                  <a:srgbClr val="980517"/>
-                </a:solidFill>
-                <a:latin typeface="Arial"/>
-              </a:defRPr>
-            </a:pPr>
-            <a:r>
-              <a:t>SLIDE 8 • CONCLUSION &amp; BENEFITS   |   RUBRIK: PRESENTATION &amp; IMPACT (15%)</a:t>
-            </a:r>
-          </a:p>
-        </p:txBody>
-      </p:sp>
-      <p:sp>
-        <p:nvSpPr>
-          <p:cNvPr id="4" name="TextBox 3"/>
-          <p:cNvSpPr txBox="1"/>
-          <p:nvPr/>
-        </p:nvSpPr>
-        <p:spPr>
-          <a:xfrm>
-            <a:off x="914400" y="548640"/>
-            <a:ext cx="10515600" cy="411480"/>
-          </a:xfrm>
-          <a:prstGeom prst="rect">
-            <a:avLst/>
-          </a:prstGeom>
-          <a:noFill/>
-        </p:spPr>
-        <p:txBody>
-          <a:bodyPr wrap="square">
-            <a:spAutoFit/>
-          </a:bodyPr>
-          <a:lstStyle/>
-          <a:p>
-            <a:pPr>
-              <a:defRPr sz="2000" b="1">
-                <a:solidFill>
-                  <a:srgbClr val="0F172A"/>
-                </a:solidFill>
-                <a:latin typeface="Arial"/>
-              </a:defRPr>
-            </a:pPr>
-            <a:r>
-              <a:t>KESIMPULAN &amp; TIGA MANFAAT TERUKUR YANG DIHASILKAN</a:t>
-            </a:r>
-          </a:p>
-        </p:txBody>
-      </p:sp>
-      <p:sp>
-        <p:nvSpPr>
-          <p:cNvPr id="5" name="TextBox 4"/>
-          <p:cNvSpPr txBox="1"/>
-          <p:nvPr/>
-        </p:nvSpPr>
-        <p:spPr>
-          <a:xfrm>
-            <a:off x="914400" y="960120"/>
-            <a:ext cx="10515600" cy="274320"/>
-          </a:xfrm>
-          <a:prstGeom prst="rect">
-            <a:avLst/>
-          </a:prstGeom>
-          <a:noFill/>
-        </p:spPr>
-        <p:txBody>
-          <a:bodyPr wrap="square">
-            <a:spAutoFit/>
-          </a:bodyPr>
-          <a:lstStyle/>
-          <a:p>
-            <a:pPr>
-              <a:defRPr sz="1150">
+              <a:defRPr sz="1100">
                 <a:solidFill>
                   <a:srgbClr val="475569"/>
                 </a:solidFill>
@@ -9604,7 +9604,7 @@
               </a:defRPr>
             </a:pPr>
             <a:r>
-              <a:t>Rangkuman dampak nyata sistem informasi HorizonU Uniform (UniStock SCM) bagi efisiensi operasional dan akuntabilitas keuangan.</a:t>
+              <a:t>Transformasi operasional Departemen Keuangan Universitas Horizon Indonesia pasca-digitalisasi</a:t>
             </a:r>
           </a:p>
         </p:txBody>
@@ -9617,8 +9617,8 @@
         </p:nvSpPr>
         <p:spPr>
           <a:xfrm>
-            <a:off x="731520" y="1261872"/>
-            <a:ext cx="10728655" cy="13716"/>
+            <a:off x="731520" y="1243584"/>
+            <a:ext cx="10728655" cy="10972"/>
           </a:xfrm>
           <a:prstGeom prst="rect">
             <a:avLst/>
@@ -9708,9 +9708,9 @@
           <a:p>
             <a:pPr>
               <a:spcAft>
-                <a:spcPts val="600"/>
+                <a:spcPts val="500"/>
               </a:spcAft>
-              <a:defRPr sz="1300" b="1">
+              <a:defRPr sz="1250" b="1">
                 <a:solidFill>
                   <a:srgbClr val="0F172A"/>
                 </a:solidFill>
@@ -9724,7 +9724,7 @@
           <a:p>
             <a:pPr>
               <a:spcAft>
-                <a:spcPts val="400"/>
+                <a:spcPts val="300"/>
               </a:spcAft>
               <a:defRPr sz="1050">
                 <a:solidFill>
@@ -9740,7 +9740,7 @@
           <a:p>
             <a:pPr>
               <a:spcAft>
-                <a:spcPts val="400"/>
+                <a:spcPts val="300"/>
               </a:spcAft>
               <a:defRPr sz="1050">
                 <a:solidFill>
@@ -9756,7 +9756,7 @@
           <a:p>
             <a:pPr>
               <a:spcAft>
-                <a:spcPts val="400"/>
+                <a:spcPts val="300"/>
               </a:spcAft>
               <a:defRPr sz="1050">
                 <a:solidFill>
@@ -9843,9 +9843,9 @@
           <a:p>
             <a:pPr>
               <a:spcAft>
-                <a:spcPts val="600"/>
+                <a:spcPts val="500"/>
               </a:spcAft>
-              <a:defRPr sz="1300" b="1">
+              <a:defRPr sz="1250" b="1">
                 <a:solidFill>
                   <a:srgbClr val="0F172A"/>
                 </a:solidFill>
@@ -9859,7 +9859,7 @@
           <a:p>
             <a:pPr>
               <a:spcAft>
-                <a:spcPts val="400"/>
+                <a:spcPts val="300"/>
               </a:spcAft>
               <a:defRPr sz="1050">
                 <a:solidFill>
@@ -9875,7 +9875,7 @@
           <a:p>
             <a:pPr>
               <a:spcAft>
-                <a:spcPts val="400"/>
+                <a:spcPts val="300"/>
               </a:spcAft>
               <a:defRPr sz="1050">
                 <a:solidFill>
@@ -9891,7 +9891,7 @@
           <a:p>
             <a:pPr>
               <a:spcAft>
-                <a:spcPts val="400"/>
+                <a:spcPts val="300"/>
               </a:spcAft>
               <a:defRPr sz="1050">
                 <a:solidFill>
@@ -9978,9 +9978,9 @@
           <a:p>
             <a:pPr>
               <a:spcAft>
-                <a:spcPts val="600"/>
+                <a:spcPts val="500"/>
               </a:spcAft>
-              <a:defRPr sz="1300" b="1">
+              <a:defRPr sz="1250" b="1">
                 <a:solidFill>
                   <a:srgbClr val="0F172A"/>
                 </a:solidFill>
@@ -9994,7 +9994,7 @@
           <a:p>
             <a:pPr>
               <a:spcAft>
-                <a:spcPts val="400"/>
+                <a:spcPts val="300"/>
               </a:spcAft>
               <a:defRPr sz="1050">
                 <a:solidFill>
@@ -10010,7 +10010,7 @@
           <a:p>
             <a:pPr>
               <a:spcAft>
-                <a:spcPts val="400"/>
+                <a:spcPts val="300"/>
               </a:spcAft>
               <a:defRPr sz="1050">
                 <a:solidFill>
@@ -10026,7 +10026,7 @@
           <a:p>
             <a:pPr>
               <a:spcAft>
-                <a:spcPts val="400"/>
+                <a:spcPts val="300"/>
               </a:spcAft>
               <a:defRPr sz="1050">
                 <a:solidFill>
@@ -10107,7 +10107,7 @@
               </a:defRPr>
             </a:pPr>
             <a:r>
-              <a:t>KESIMPULAN STRATEGIS SISTEM INFORMASI: </a:t>
+              <a:t>Kesimpulan Strategis Sistem Informasi: </a:t>
             </a:r>
             <a:r>
               <a:rPr sz="1050">

--- a/HorizonU_Uniform_UniStock_SCM_Presentasi_Technospark.pptx
+++ b/HorizonU_Uniform_UniStock_SCM_Presentasi_Technospark.pptx
@@ -4455,7 +4455,7 @@
         <p:spPr>
           <a:xfrm>
             <a:off x="731520" y="1417320"/>
-            <a:ext cx="3429000" cy="4297680"/>
+            <a:ext cx="3429000" cy="4800600"/>
           </a:xfrm>
           <a:prstGeom prst="roundRect">
             <a:avLst/>
@@ -4590,7 +4590,7 @@
         <p:spPr>
           <a:xfrm>
             <a:off x="4370832" y="1417320"/>
-            <a:ext cx="3429000" cy="4297680"/>
+            <a:ext cx="3429000" cy="4800600"/>
           </a:xfrm>
           <a:prstGeom prst="roundRect">
             <a:avLst/>
@@ -4725,7 +4725,7 @@
         <p:spPr>
           <a:xfrm>
             <a:off x="8010144" y="1417320"/>
-            <a:ext cx="3429000" cy="4297680"/>
+            <a:ext cx="3429000" cy="4800600"/>
           </a:xfrm>
           <a:prstGeom prst="roundRect">
             <a:avLst/>
@@ -4895,70 +4895,6 @@
             </a:pPr>
             <a:r>
               <a:t>➔  URL Sistem: unistok.nirwana.biz.id</a:t>
-            </a:r>
-          </a:p>
-        </p:txBody>
-      </p:sp>
-      <p:sp>
-        <p:nvSpPr>
-          <p:cNvPr id="10" name="Rounded Rectangle 9"/>
-          <p:cNvSpPr/>
-          <p:nvPr/>
-        </p:nvSpPr>
-        <p:spPr>
-          <a:xfrm>
-            <a:off x="731520" y="5870448"/>
-            <a:ext cx="10728655" cy="658368"/>
-          </a:xfrm>
-          <a:prstGeom prst="roundRect">
-            <a:avLst/>
-          </a:prstGeom>
-          <a:solidFill>
-            <a:srgbClr val="FEF2F2"/>
-          </a:solidFill>
-          <a:ln w="19050">
-            <a:solidFill>
-              <a:srgbClr val="980517"/>
-            </a:solidFill>
-          </a:ln>
-        </p:spPr>
-        <p:style>
-          <a:lnRef idx="1">
-            <a:schemeClr val="accent1"/>
-          </a:lnRef>
-          <a:fillRef idx="3">
-            <a:schemeClr val="accent1"/>
-          </a:fillRef>
-          <a:effectRef idx="2">
-            <a:schemeClr val="accent1"/>
-          </a:effectRef>
-          <a:fontRef idx="minor">
-            <a:schemeClr val="lt1"/>
-          </a:fontRef>
-        </p:style>
-        <p:txBody>
-          <a:bodyPr rtlCol="0" anchor="ctr" wrap="square" lIns="228600" rIns="228600"/>
-          <a:lstStyle/>
-          <a:p>
-            <a:pPr algn="ctr">
-              <a:defRPr sz="1050" b="1">
-                <a:solidFill>
-                  <a:srgbClr val="980517"/>
-                </a:solidFill>
-                <a:latin typeface="Arial"/>
-              </a:defRPr>
-            </a:pPr>
-            <a:r>
-              <a:t>Misi Solusi HorizonU Uniform: </a:t>
-            </a:r>
-            <a:r>
-              <a:rPr sz="1050">
-                <a:solidFill>
-                  <a:srgbClr val="0F172A"/>
-                </a:solidFill>
-                <a:latin typeface="Calibri"/>
-              </a:rPr>
-              <a:t>Menghubungkan Hulu (Vendor Pabrik), Gudang Kampus, Bagian Keuangan, hingga Hilir (Mahasiswa) dalam satu arsitektur terintegrasi bertenaga Laravel 12 dan aturan FIFO.</a:t>
             </a:r>
           </a:p>
         </p:txBody>
@@ -5192,7 +5128,7 @@
         <p:spPr>
           <a:xfrm>
             <a:off x="731520" y="1417320"/>
-            <a:ext cx="2542032" cy="4297680"/>
+            <a:ext cx="2542032" cy="4800600"/>
           </a:xfrm>
           <a:prstGeom prst="roundRect">
             <a:avLst/>
@@ -5327,7 +5263,7 @@
         <p:spPr>
           <a:xfrm>
             <a:off x="3456432" y="1417320"/>
-            <a:ext cx="2542032" cy="4297680"/>
+            <a:ext cx="2542032" cy="4800600"/>
           </a:xfrm>
           <a:prstGeom prst="roundRect">
             <a:avLst/>
@@ -5462,7 +5398,7 @@
         <p:spPr>
           <a:xfrm>
             <a:off x="6181344" y="1417320"/>
-            <a:ext cx="2542032" cy="4297680"/>
+            <a:ext cx="2542032" cy="4800600"/>
           </a:xfrm>
           <a:prstGeom prst="roundRect">
             <a:avLst/>
@@ -5597,7 +5533,7 @@
         <p:spPr>
           <a:xfrm>
             <a:off x="8906256" y="1417320"/>
-            <a:ext cx="2542032" cy="4297680"/>
+            <a:ext cx="2542032" cy="4800600"/>
           </a:xfrm>
           <a:prstGeom prst="roundRect">
             <a:avLst/>
@@ -5719,70 +5655,6 @@
             </a:pPr>
             <a:r>
               <a:t>➔  Aliran: Profil ➔ Seragam Pas</a:t>
-            </a:r>
-          </a:p>
-        </p:txBody>
-      </p:sp>
-      <p:sp>
-        <p:nvSpPr>
-          <p:cNvPr id="11" name="Rounded Rectangle 10"/>
-          <p:cNvSpPr/>
-          <p:nvPr/>
-        </p:nvSpPr>
-        <p:spPr>
-          <a:xfrm>
-            <a:off x="731520" y="5870448"/>
-            <a:ext cx="10728655" cy="658368"/>
-          </a:xfrm>
-          <a:prstGeom prst="roundRect">
-            <a:avLst/>
-          </a:prstGeom>
-          <a:solidFill>
-            <a:srgbClr val="FEF2F2"/>
-          </a:solidFill>
-          <a:ln w="19050">
-            <a:solidFill>
-              <a:srgbClr val="980517"/>
-            </a:solidFill>
-          </a:ln>
-        </p:spPr>
-        <p:style>
-          <a:lnRef idx="1">
-            <a:schemeClr val="accent1"/>
-          </a:lnRef>
-          <a:fillRef idx="3">
-            <a:schemeClr val="accent1"/>
-          </a:fillRef>
-          <a:effectRef idx="2">
-            <a:schemeClr val="accent1"/>
-          </a:effectRef>
-          <a:fontRef idx="minor">
-            <a:schemeClr val="lt1"/>
-          </a:fontRef>
-        </p:style>
-        <p:txBody>
-          <a:bodyPr rtlCol="0" anchor="ctr" wrap="square" lIns="228600" rIns="228600"/>
-          <a:lstStyle/>
-          <a:p>
-            <a:pPr algn="ctr">
-              <a:defRPr sz="1050" b="1">
-                <a:solidFill>
-                  <a:srgbClr val="980517"/>
-                </a:solidFill>
-                <a:latin typeface="Arial"/>
-              </a:defRPr>
-            </a:pPr>
-            <a:r>
-              <a:t>Prinsip Inti 'Data Mengunci Fisik': </a:t>
-            </a:r>
-            <a:r>
-              <a:rPr sz="1050">
-                <a:solidFill>
-                  <a:srgbClr val="0F172A"/>
-                </a:solidFill>
-                <a:latin typeface="Calibri"/>
-              </a:rPr>
-              <a:t>Barang fisik di loket gudang pantang diserahkan tanpa otorisasi digital. Pemindaian QR Code mengeksekusi validasi atomik di database: jika belum lunas atau kuota habis, fisik seragam tidak dapat keluar.</a:t>
             </a:r>
           </a:p>
         </p:txBody>
@@ -6017,7 +5889,7 @@
         </p:nvGraphicFramePr>
         <p:xfrm>
           <a:off x="731520" y="1417320"/>
-          <a:ext cx="10728655" cy="4297680"/>
+          <a:ext cx="10728655" cy="4800600"/>
         </p:xfrm>
         <a:graphic>
           <a:graphicData uri="http://schemas.openxmlformats.org/drawingml/2006/table">
@@ -6030,7 +5902,7 @@
                 <a:gridCol w="3840480"/>
                 <a:gridCol w="3962095"/>
               </a:tblGrid>
-              <a:tr h="859536">
+              <a:tr h="960120">
                 <a:tc>
                   <a:txBody>
                     <a:bodyPr/>
@@ -6104,7 +5976,7 @@
                   </a:tcPr>
                 </a:tc>
               </a:tr>
-              <a:tr h="859536">
+              <a:tr h="960120">
                 <a:tc>
                   <a:txBody>
                     <a:bodyPr/>
@@ -6178,7 +6050,7 @@
                   </a:tcPr>
                 </a:tc>
               </a:tr>
-              <a:tr h="859536">
+              <a:tr h="960120">
                 <a:tc>
                   <a:txBody>
                     <a:bodyPr/>
@@ -6252,7 +6124,7 @@
                   </a:tcPr>
                 </a:tc>
               </a:tr>
-              <a:tr h="859536">
+              <a:tr h="960120">
                 <a:tc>
                   <a:txBody>
                     <a:bodyPr/>
@@ -6326,7 +6198,7 @@
                   </a:tcPr>
                 </a:tc>
               </a:tr>
-              <a:tr h="859536">
+              <a:tr h="960120">
                 <a:tc>
                   <a:txBody>
                     <a:bodyPr/>
@@ -6404,70 +6276,6 @@
           </a:graphicData>
         </a:graphic>
       </p:graphicFrame>
-      <p:sp>
-        <p:nvSpPr>
-          <p:cNvPr id="8" name="Rounded Rectangle 7"/>
-          <p:cNvSpPr/>
-          <p:nvPr/>
-        </p:nvSpPr>
-        <p:spPr>
-          <a:xfrm>
-            <a:off x="731520" y="5870448"/>
-            <a:ext cx="10728655" cy="658368"/>
-          </a:xfrm>
-          <a:prstGeom prst="roundRect">
-            <a:avLst/>
-          </a:prstGeom>
-          <a:solidFill>
-            <a:srgbClr val="FEF2F2"/>
-          </a:solidFill>
-          <a:ln w="19050">
-            <a:solidFill>
-              <a:srgbClr val="980517"/>
-            </a:solidFill>
-          </a:ln>
-        </p:spPr>
-        <p:style>
-          <a:lnRef idx="1">
-            <a:schemeClr val="accent1"/>
-          </a:lnRef>
-          <a:fillRef idx="3">
-            <a:schemeClr val="accent1"/>
-          </a:fillRef>
-          <a:effectRef idx="2">
-            <a:schemeClr val="accent1"/>
-          </a:effectRef>
-          <a:fontRef idx="minor">
-            <a:schemeClr val="lt1"/>
-          </a:fontRef>
-        </p:style>
-        <p:txBody>
-          <a:bodyPr rtlCol="0" anchor="ctr" wrap="square" lIns="228600" rIns="228600"/>
-          <a:lstStyle/>
-          <a:p>
-            <a:pPr algn="ctr">
-              <a:defRPr sz="1050" b="1">
-                <a:solidFill>
-                  <a:srgbClr val="980517"/>
-                </a:solidFill>
-                <a:latin typeface="Arial"/>
-              </a:defRPr>
-            </a:pPr>
-            <a:r>
-              <a:t>Akar Kegagalan Sistemik: </a:t>
-            </a:r>
-            <a:r>
-              <a:rPr sz="1050">
-                <a:solidFill>
-                  <a:srgbClr val="0F172A"/>
-                </a:solidFill>
-                <a:latin typeface="Calibri"/>
-              </a:rPr>
-              <a:t>Ketiadaan Single Source of Truth berbasis database relasional menyebabkan silo data antar-staf, memicu kebocoran persediaan, dan membahayakan akuntabilitas keuangan.</a:t>
-            </a:r>
-          </a:p>
-        </p:txBody>
-      </p:sp>
     </p:spTree>
   </p:cSld>
   <p:clrMapOvr>
@@ -6697,7 +6505,7 @@
         <p:spPr>
           <a:xfrm>
             <a:off x="731520" y="1417320"/>
-            <a:ext cx="5257800" cy="2057400"/>
+            <a:ext cx="5257800" cy="2331720"/>
           </a:xfrm>
           <a:prstGeom prst="roundRect">
             <a:avLst/>
@@ -6816,7 +6624,7 @@
         <p:spPr>
           <a:xfrm>
             <a:off x="6199632" y="1417320"/>
-            <a:ext cx="5257800" cy="2057400"/>
+            <a:ext cx="5257800" cy="2331720"/>
           </a:xfrm>
           <a:prstGeom prst="roundRect">
             <a:avLst/>
@@ -6934,8 +6742,8 @@
         </p:nvSpPr>
         <p:spPr>
           <a:xfrm>
-            <a:off x="731520" y="3657600"/>
-            <a:ext cx="5257800" cy="2057400"/>
+            <a:off x="731520" y="3886200"/>
+            <a:ext cx="5257800" cy="2331720"/>
           </a:xfrm>
           <a:prstGeom prst="roundRect">
             <a:avLst/>
@@ -7053,8 +6861,8 @@
         </p:nvSpPr>
         <p:spPr>
           <a:xfrm>
-            <a:off x="6199632" y="3657600"/>
-            <a:ext cx="5257800" cy="2057400"/>
+            <a:off x="6199632" y="3886200"/>
+            <a:ext cx="5257800" cy="2331720"/>
           </a:xfrm>
           <a:prstGeom prst="roundRect">
             <a:avLst/>
@@ -7160,70 +6968,6 @@
             </a:pPr>
             <a:r>
               <a:t>➔  Kondisi: Informasi Tidak Akurat (Blind Ordering)</a:t>
-            </a:r>
-          </a:p>
-        </p:txBody>
-      </p:sp>
-      <p:sp>
-        <p:nvSpPr>
-          <p:cNvPr id="11" name="Rounded Rectangle 10"/>
-          <p:cNvSpPr/>
-          <p:nvPr/>
-        </p:nvSpPr>
-        <p:spPr>
-          <a:xfrm>
-            <a:off x="731520" y="5870448"/>
-            <a:ext cx="10728655" cy="658368"/>
-          </a:xfrm>
-          <a:prstGeom prst="roundRect">
-            <a:avLst/>
-          </a:prstGeom>
-          <a:solidFill>
-            <a:srgbClr val="FEF2F2"/>
-          </a:solidFill>
-          <a:ln w="19050">
-            <a:solidFill>
-              <a:srgbClr val="980517"/>
-            </a:solidFill>
-          </a:ln>
-        </p:spPr>
-        <p:style>
-          <a:lnRef idx="1">
-            <a:schemeClr val="accent1"/>
-          </a:lnRef>
-          <a:fillRef idx="3">
-            <a:schemeClr val="accent1"/>
-          </a:fillRef>
-          <a:effectRef idx="2">
-            <a:schemeClr val="accent1"/>
-          </a:effectRef>
-          <a:fontRef idx="minor">
-            <a:schemeClr val="lt1"/>
-          </a:fontRef>
-        </p:style>
-        <p:txBody>
-          <a:bodyPr rtlCol="0" anchor="ctr" wrap="square" lIns="228600" rIns="228600"/>
-          <a:lstStyle/>
-          <a:p>
-            <a:pPr algn="ctr">
-              <a:defRPr sz="1050" b="1">
-                <a:solidFill>
-                  <a:srgbClr val="980517"/>
-                </a:solidFill>
-                <a:latin typeface="Arial"/>
-              </a:defRPr>
-            </a:pPr>
-            <a:r>
-              <a:t>Diagnosa Kunci: </a:t>
-            </a:r>
-            <a:r>
-              <a:rPr sz="1050">
-                <a:solidFill>
-                  <a:srgbClr val="0F172A"/>
-                </a:solidFill>
-                <a:latin typeface="Calibri"/>
-              </a:rPr>
-              <a:t>Terjadi Information Latency dan Data Asymmetry akut yang melumpuhkan koordinasi antar-bagian. Solusi mutlak membutuhkan platform web tunggal terpusat.</a:t>
             </a:r>
           </a:p>
         </p:txBody>
@@ -7458,7 +7202,7 @@
         </p:nvGraphicFramePr>
         <p:xfrm>
           <a:off x="731520" y="1417320"/>
-          <a:ext cx="10728654" cy="4297680"/>
+          <a:ext cx="10728654" cy="4800600"/>
         </p:xfrm>
         <a:graphic>
           <a:graphicData uri="http://schemas.openxmlformats.org/drawingml/2006/table">
@@ -7472,7 +7216,7 @@
                 <a:gridCol w="3749039"/>
                 <a:gridCol w="2041855"/>
               </a:tblGrid>
-              <a:tr h="859536">
+              <a:tr h="960120">
                 <a:tc>
                   <a:txBody>
                     <a:bodyPr/>
@@ -7570,7 +7314,7 @@
                   </a:tcPr>
                 </a:tc>
               </a:tr>
-              <a:tr h="859536">
+              <a:tr h="960120">
                 <a:tc>
                   <a:txBody>
                     <a:bodyPr/>
@@ -7668,7 +7412,7 @@
                   </a:tcPr>
                 </a:tc>
               </a:tr>
-              <a:tr h="859536">
+              <a:tr h="960120">
                 <a:tc>
                   <a:txBody>
                     <a:bodyPr/>
@@ -7766,7 +7510,7 @@
                   </a:tcPr>
                 </a:tc>
               </a:tr>
-              <a:tr h="859536">
+              <a:tr h="960120">
                 <a:tc>
                   <a:txBody>
                     <a:bodyPr/>
@@ -7864,7 +7608,7 @@
                   </a:tcPr>
                 </a:tc>
               </a:tr>
-              <a:tr h="859536">
+              <a:tr h="960120">
                 <a:tc>
                   <a:txBody>
                     <a:bodyPr/>
@@ -7966,70 +7710,6 @@
           </a:graphicData>
         </a:graphic>
       </p:graphicFrame>
-      <p:sp>
-        <p:nvSpPr>
-          <p:cNvPr id="8" name="Rounded Rectangle 7"/>
-          <p:cNvSpPr/>
-          <p:nvPr/>
-        </p:nvSpPr>
-        <p:spPr>
-          <a:xfrm>
-            <a:off x="731520" y="5870448"/>
-            <a:ext cx="10728655" cy="658368"/>
-          </a:xfrm>
-          <a:prstGeom prst="roundRect">
-            <a:avLst/>
-          </a:prstGeom>
-          <a:solidFill>
-            <a:srgbClr val="FEF2F2"/>
-          </a:solidFill>
-          <a:ln w="19050">
-            <a:solidFill>
-              <a:srgbClr val="980517"/>
-            </a:solidFill>
-          </a:ln>
-        </p:spPr>
-        <p:style>
-          <a:lnRef idx="1">
-            <a:schemeClr val="accent1"/>
-          </a:lnRef>
-          <a:fillRef idx="3">
-            <a:schemeClr val="accent1"/>
-          </a:fillRef>
-          <a:effectRef idx="2">
-            <a:schemeClr val="accent1"/>
-          </a:effectRef>
-          <a:fontRef idx="minor">
-            <a:schemeClr val="lt1"/>
-          </a:fontRef>
-        </p:style>
-        <p:txBody>
-          <a:bodyPr rtlCol="0" anchor="ctr" wrap="square" lIns="228600" rIns="228600"/>
-          <a:lstStyle/>
-          <a:p>
-            <a:pPr algn="ctr">
-              <a:defRPr sz="1050" b="1">
-                <a:solidFill>
-                  <a:srgbClr val="980517"/>
-                </a:solidFill>
-                <a:latin typeface="Arial"/>
-              </a:defRPr>
-            </a:pPr>
-            <a:r>
-              <a:t>Keunggulan Integrasi UniStock: </a:t>
-            </a:r>
-            <a:r>
-              <a:rPr sz="1050">
-                <a:solidFill>
-                  <a:srgbClr val="0F172A"/>
-                </a:solidFill>
-                <a:latin typeface="Calibri"/>
-              </a:rPr>
-              <a:t>Menyatukan keandalan ERP, perencanaan SCM, kecepatan POS loket, dan ketatnya WMS dalam satu portal monolitik Laravel 12 modern yang tangguh.</a:t>
-            </a:r>
-          </a:p>
-        </p:txBody>
-      </p:sp>
     </p:spTree>
   </p:cSld>
   <p:clrMapOvr>
@@ -8259,7 +7939,7 @@
         <p:spPr>
           <a:xfrm>
             <a:off x="731520" y="1417320"/>
-            <a:ext cx="2542032" cy="4297680"/>
+            <a:ext cx="2542032" cy="4800600"/>
           </a:xfrm>
           <a:prstGeom prst="roundRect">
             <a:avLst/>
@@ -8394,7 +8074,7 @@
         <p:spPr>
           <a:xfrm>
             <a:off x="3456432" y="1417320"/>
-            <a:ext cx="2542032" cy="4297680"/>
+            <a:ext cx="2542032" cy="4800600"/>
           </a:xfrm>
           <a:prstGeom prst="roundRect">
             <a:avLst/>
@@ -8529,7 +8209,7 @@
         <p:spPr>
           <a:xfrm>
             <a:off x="6181344" y="1417320"/>
-            <a:ext cx="2542032" cy="4297680"/>
+            <a:ext cx="2542032" cy="4800600"/>
           </a:xfrm>
           <a:prstGeom prst="roundRect">
             <a:avLst/>
@@ -8664,7 +8344,7 @@
         <p:spPr>
           <a:xfrm>
             <a:off x="8906256" y="1417320"/>
-            <a:ext cx="2542032" cy="4297680"/>
+            <a:ext cx="2542032" cy="4800600"/>
           </a:xfrm>
           <a:prstGeom prst="roundRect">
             <a:avLst/>
@@ -8786,70 +8466,6 @@
             </a:pPr>
             <a:r>
               <a:t>➔  Output: Feedback Siklus Baru</a:t>
-            </a:r>
-          </a:p>
-        </p:txBody>
-      </p:sp>
-      <p:sp>
-        <p:nvSpPr>
-          <p:cNvPr id="11" name="Rounded Rectangle 10"/>
-          <p:cNvSpPr/>
-          <p:nvPr/>
-        </p:nvSpPr>
-        <p:spPr>
-          <a:xfrm>
-            <a:off x="731520" y="5870448"/>
-            <a:ext cx="10728655" cy="658368"/>
-          </a:xfrm>
-          <a:prstGeom prst="roundRect">
-            <a:avLst/>
-          </a:prstGeom>
-          <a:solidFill>
-            <a:srgbClr val="FEF2F2"/>
-          </a:solidFill>
-          <a:ln w="19050">
-            <a:solidFill>
-              <a:srgbClr val="980517"/>
-            </a:solidFill>
-          </a:ln>
-        </p:spPr>
-        <p:style>
-          <a:lnRef idx="1">
-            <a:schemeClr val="accent1"/>
-          </a:lnRef>
-          <a:fillRef idx="3">
-            <a:schemeClr val="accent1"/>
-          </a:fillRef>
-          <a:effectRef idx="2">
-            <a:schemeClr val="accent1"/>
-          </a:effectRef>
-          <a:fontRef idx="minor">
-            <a:schemeClr val="lt1"/>
-          </a:fontRef>
-        </p:style>
-        <p:txBody>
-          <a:bodyPr rtlCol="0" anchor="ctr" wrap="square" lIns="228600" rIns="228600"/>
-          <a:lstStyle/>
-          <a:p>
-            <a:pPr algn="ctr">
-              <a:defRPr sz="1050" b="1">
-                <a:solidFill>
-                  <a:srgbClr val="980517"/>
-                </a:solidFill>
-                <a:latin typeface="Arial"/>
-              </a:defRPr>
-            </a:pPr>
-            <a:r>
-              <a:t>Pengambilan Keputusan Closed-Loop: </a:t>
-            </a:r>
-            <a:r>
-              <a:rPr sz="1050">
-                <a:solidFill>
-                  <a:srgbClr val="0F172A"/>
-                </a:solidFill>
-                <a:latin typeface="Calibri"/>
-              </a:rPr>
-              <a:t>Data analitik stok sisa dan tren ukuran dari Fase 4 secara otomatis menjadi input penetapan kuota anggaran dan purchase order ke pabrik pada Fase 1 semester berikutnya.</a:t>
             </a:r>
           </a:p>
         </p:txBody>
@@ -9083,7 +8699,7 @@
         <p:spPr>
           <a:xfrm>
             <a:off x="731520" y="1417320"/>
-            <a:ext cx="3429000" cy="4297680"/>
+            <a:ext cx="3429000" cy="4800600"/>
           </a:xfrm>
           <a:prstGeom prst="roundRect">
             <a:avLst/>
@@ -9218,7 +8834,7 @@
         <p:spPr>
           <a:xfrm>
             <a:off x="4370832" y="1417320"/>
-            <a:ext cx="7086600" cy="4297680"/>
+            <a:ext cx="7086600" cy="4800600"/>
           </a:xfrm>
           <a:prstGeom prst="roundRect">
             <a:avLst/>
@@ -9364,70 +8980,6 @@
             </a:pPr>
             <a:r>
               <a:t>➔  Toleransi Kesalahan: Resiliensi Operasional Tinggi</a:t>
-            </a:r>
-          </a:p>
-        </p:txBody>
-      </p:sp>
-      <p:sp>
-        <p:nvSpPr>
-          <p:cNvPr id="9" name="Rounded Rectangle 8"/>
-          <p:cNvSpPr/>
-          <p:nvPr/>
-        </p:nvSpPr>
-        <p:spPr>
-          <a:xfrm>
-            <a:off x="731520" y="5870448"/>
-            <a:ext cx="10728655" cy="658368"/>
-          </a:xfrm>
-          <a:prstGeom prst="roundRect">
-            <a:avLst/>
-          </a:prstGeom>
-          <a:solidFill>
-            <a:srgbClr val="FEF2F2"/>
-          </a:solidFill>
-          <a:ln w="19050">
-            <a:solidFill>
-              <a:srgbClr val="980517"/>
-            </a:solidFill>
-          </a:ln>
-        </p:spPr>
-        <p:style>
-          <a:lnRef idx="1">
-            <a:schemeClr val="accent1"/>
-          </a:lnRef>
-          <a:fillRef idx="3">
-            <a:schemeClr val="accent1"/>
-          </a:fillRef>
-          <a:effectRef idx="2">
-            <a:schemeClr val="accent1"/>
-          </a:effectRef>
-          <a:fontRef idx="minor">
-            <a:schemeClr val="lt1"/>
-          </a:fontRef>
-        </p:style>
-        <p:txBody>
-          <a:bodyPr rtlCol="0" anchor="ctr" wrap="square" lIns="228600" rIns="228600"/>
-          <a:lstStyle/>
-          <a:p>
-            <a:pPr algn="ctr">
-              <a:defRPr sz="1050" b="1">
-                <a:solidFill>
-                  <a:srgbClr val="980517"/>
-                </a:solidFill>
-                <a:latin typeface="Arial"/>
-              </a:defRPr>
-            </a:pPr>
-            <a:r>
-              <a:t>Resiliensi Operasional Tinggi: </a:t>
-            </a:r>
-            <a:r>
-              <a:rPr sz="1050">
-                <a:solidFill>
-                  <a:srgbClr val="0F172A"/>
-                </a:solidFill>
-                <a:latin typeface="Calibri"/>
-              </a:rPr>
-              <a:t>UniStock dirancang dengan pertimbangan toleransi kesalahan nyata (fault-tolerant), menjamin pembagian di posko kampus tetap berjalan lancar dalam kondisi darurat apa pun.</a:t>
             </a:r>
           </a:p>
         </p:txBody>
@@ -9661,7 +9213,7 @@
         <p:spPr>
           <a:xfrm>
             <a:off x="731520" y="1417320"/>
-            <a:ext cx="3429000" cy="4297680"/>
+            <a:ext cx="3429000" cy="4800600"/>
           </a:xfrm>
           <a:prstGeom prst="roundRect">
             <a:avLst/>
@@ -9796,7 +9348,7 @@
         <p:spPr>
           <a:xfrm>
             <a:off x="4370832" y="1417320"/>
-            <a:ext cx="3429000" cy="4297680"/>
+            <a:ext cx="3429000" cy="4800600"/>
           </a:xfrm>
           <a:prstGeom prst="roundRect">
             <a:avLst/>
@@ -9931,7 +9483,7 @@
         <p:spPr>
           <a:xfrm>
             <a:off x="8010144" y="1417320"/>
-            <a:ext cx="3429000" cy="4297680"/>
+            <a:ext cx="3429000" cy="4800600"/>
           </a:xfrm>
           <a:prstGeom prst="roundRect">
             <a:avLst/>
@@ -10053,70 +9605,6 @@
             </a:pPr>
             <a:r>
               <a:t>➔  Dampak: Audit Trail Keuangan Bebas Selisih</a:t>
-            </a:r>
-          </a:p>
-        </p:txBody>
-      </p:sp>
-      <p:sp>
-        <p:nvSpPr>
-          <p:cNvPr id="10" name="Rounded Rectangle 9"/>
-          <p:cNvSpPr/>
-          <p:nvPr/>
-        </p:nvSpPr>
-        <p:spPr>
-          <a:xfrm>
-            <a:off x="731520" y="5870448"/>
-            <a:ext cx="10728655" cy="658368"/>
-          </a:xfrm>
-          <a:prstGeom prst="roundRect">
-            <a:avLst/>
-          </a:prstGeom>
-          <a:solidFill>
-            <a:srgbClr val="FEF2F2"/>
-          </a:solidFill>
-          <a:ln w="19050">
-            <a:solidFill>
-              <a:srgbClr val="980517"/>
-            </a:solidFill>
-          </a:ln>
-        </p:spPr>
-        <p:style>
-          <a:lnRef idx="1">
-            <a:schemeClr val="accent1"/>
-          </a:lnRef>
-          <a:fillRef idx="3">
-            <a:schemeClr val="accent1"/>
-          </a:fillRef>
-          <a:effectRef idx="2">
-            <a:schemeClr val="accent1"/>
-          </a:effectRef>
-          <a:fontRef idx="minor">
-            <a:schemeClr val="lt1"/>
-          </a:fontRef>
-        </p:style>
-        <p:txBody>
-          <a:bodyPr rtlCol="0" anchor="ctr" wrap="square" lIns="228600" rIns="228600"/>
-          <a:lstStyle/>
-          <a:p>
-            <a:pPr algn="ctr">
-              <a:defRPr sz="1050" b="1">
-                <a:solidFill>
-                  <a:srgbClr val="980517"/>
-                </a:solidFill>
-                <a:latin typeface="Arial"/>
-              </a:defRPr>
-            </a:pPr>
-            <a:r>
-              <a:t>Kesimpulan Strategis Sistem Informasi: </a:t>
-            </a:r>
-            <a:r>
-              <a:rPr sz="1050">
-                <a:solidFill>
-                  <a:srgbClr val="0F172A"/>
-                </a:solidFill>
-                <a:latin typeface="Calibri"/>
-              </a:rPr>
-              <a:t>Sistem Informasi bukan sekadar alat pencatat administrasi, melainkan saraf penggerak rantai pasok yang mengunci fisik barang dengan kepatuhan finansial, serta mentransformasi tebakan manual menjadi keputusan bisnis berakurasi tinggi.</a:t>
             </a:r>
           </a:p>
         </p:txBody>

--- a/HorizonU_Uniform_UniStock_SCM_Presentasi_Technospark.pptx
+++ b/HorizonU_Uniform_UniStock_SCM_Presentasi_Technospark.pptx
@@ -4894,7 +4894,7 @@
               </a:defRPr>
             </a:pPr>
             <a:r>
-              <a:t>➔  URL Sistem: unistok.nirwana.biz.id</a:t>
+              <a:t>➔  Tim Nirwana • Horizon University</a:t>
             </a:r>
           </a:p>
         </p:txBody>

--- a/HorizonU_Uniform_UniStock_SCM_Presentasi_Technospark.pptx
+++ b/HorizonU_Uniform_UniStock_SCM_Presentasi_Technospark.pptx
@@ -4237,14 +4237,6 @@
 <file path=ppt/slides/slide1.xml><?xml version="1.0" encoding="utf-8"?>
 <p:sld xmlns:a="http://schemas.openxmlformats.org/drawingml/2006/main" xmlns:p="http://schemas.openxmlformats.org/presentationml/2006/main" xmlns:r="http://schemas.openxmlformats.org/officeDocument/2006/relationships">
   <p:cSld>
-    <p:bg>
-      <p:bgPr>
-        <a:solidFill>
-          <a:srgbClr val="FFFFFF"/>
-        </a:solidFill>
-        <a:effectLst/>
-      </p:bgPr>
-    </p:bg>
     <p:spTree>
       <p:nvGrpSpPr>
         <p:cNvPr id="1" name=""/>
@@ -4254,57 +4246,14 @@
       <p:grpSpPr/>
       <p:sp>
         <p:nvSpPr>
-          <p:cNvPr id="2" name="Rectangle 1"/>
-          <p:cNvSpPr/>
+          <p:cNvPr id="2" name="TextBox 1"/>
+          <p:cNvSpPr txBox="1"/>
           <p:nvPr/>
         </p:nvSpPr>
         <p:spPr>
           <a:xfrm>
-            <a:off x="731520" y="384048"/>
-            <a:ext cx="54864" cy="713232"/>
-          </a:xfrm>
-          <a:prstGeom prst="rect">
-            <a:avLst/>
-          </a:prstGeom>
-          <a:solidFill>
-            <a:srgbClr val="980517"/>
-          </a:solidFill>
-          <a:ln>
-            <a:noFill/>
-          </a:ln>
-        </p:spPr>
-        <p:style>
-          <a:lnRef idx="1">
-            <a:schemeClr val="accent1"/>
-          </a:lnRef>
-          <a:fillRef idx="3">
-            <a:schemeClr val="accent1"/>
-          </a:fillRef>
-          <a:effectRef idx="2">
-            <a:schemeClr val="accent1"/>
-          </a:effectRef>
-          <a:fontRef idx="minor">
-            <a:schemeClr val="lt1"/>
-          </a:fontRef>
-        </p:style>
-        <p:txBody>
-          <a:bodyPr rtlCol="0" anchor="ctr"/>
-          <a:lstStyle/>
-          <a:p>
-            <a:pPr algn="ctr"/>
-          </a:p>
-        </p:txBody>
-      </p:sp>
-      <p:sp>
-        <p:nvSpPr>
-          <p:cNvPr id="3" name="TextBox 2"/>
-          <p:cNvSpPr txBox="1"/>
-          <p:nvPr/>
-        </p:nvSpPr>
-        <p:spPr>
-          <a:xfrm>
-            <a:off x="868680" y="347472"/>
-            <a:ext cx="10515600" cy="219456"/>
+            <a:off x="731520" y="365760"/>
+            <a:ext cx="10728655" cy="411480"/>
           </a:xfrm>
           <a:prstGeom prst="rect">
             <a:avLst/>
@@ -4312,107 +4261,42 @@
           <a:noFill/>
         </p:spPr>
         <p:txBody>
-          <a:bodyPr wrap="square">
+          <a:bodyPr wrap="square" lIns="0" rIns="0" tIns="0" bIns="0">
             <a:spAutoFit/>
           </a:bodyPr>
           <a:lstStyle/>
           <a:p>
-            <a:pPr>
-              <a:defRPr sz="950" b="1">
+            <a:r>
+              <a:rPr sz="950" b="1">
+                <a:solidFill>
+                  <a:srgbClr val="64748B"/>
+                </a:solidFill>
+                <a:latin typeface="Calibri"/>
+              </a:rPr>
+              <a:t>DEPARTEMEN KEUANGAN • UNIVERSITAS HORIZON INDONESIA</a:t>
+            </a:r>
+            <a:r>
+              <a:rPr sz="950" b="1">
                 <a:solidFill>
                   <a:srgbClr val="980517"/>
                 </a:solidFill>
-                <a:latin typeface="Arial"/>
-              </a:defRPr>
-            </a:pPr>
-            <a:r>
-              <a:t>UNIVERSITAS HORIZON INDONESIA • DEPARTEMEN KEUANGAN</a:t>
-            </a:r>
-          </a:p>
-        </p:txBody>
-      </p:sp>
-      <p:sp>
-        <p:nvSpPr>
-          <p:cNvPr id="4" name="TextBox 3"/>
-          <p:cNvSpPr txBox="1"/>
+                <a:latin typeface="Calibri"/>
+              </a:rPr>
+              <a:t>                                                                                   TECHNOSPARK 2026 PITCH DECK</a:t>
+            </a:r>
+          </a:p>
+        </p:txBody>
+      </p:sp>
+      <p:sp>
+        <p:nvSpPr>
+          <p:cNvPr id="3" name="Rectangle 2"/>
+          <p:cNvSpPr/>
           <p:nvPr/>
         </p:nvSpPr>
         <p:spPr>
           <a:xfrm>
-            <a:off x="868680" y="548640"/>
-            <a:ext cx="10515600" cy="384048"/>
-          </a:xfrm>
-          <a:prstGeom prst="rect">
-            <a:avLst/>
-          </a:prstGeom>
-          <a:noFill/>
-        </p:spPr>
-        <p:txBody>
-          <a:bodyPr wrap="square">
-            <a:spAutoFit/>
-          </a:bodyPr>
-          <a:lstStyle/>
-          <a:p>
-            <a:pPr>
-              <a:defRPr sz="1900" b="1">
-                <a:solidFill>
-                  <a:srgbClr val="0F172A"/>
-                </a:solidFill>
-                <a:latin typeface="Arial"/>
-              </a:defRPr>
-            </a:pPr>
-            <a:r>
-              <a:t>HorizonU Uniform: Transformasi Rantai Pasok Seragam Mahasiswa</a:t>
-            </a:r>
-          </a:p>
-        </p:txBody>
-      </p:sp>
-      <p:sp>
-        <p:nvSpPr>
-          <p:cNvPr id="5" name="TextBox 4"/>
-          <p:cNvSpPr txBox="1"/>
-          <p:nvPr/>
-        </p:nvSpPr>
-        <p:spPr>
-          <a:xfrm>
-            <a:off x="868680" y="932688"/>
-            <a:ext cx="10515600" cy="256032"/>
-          </a:xfrm>
-          <a:prstGeom prst="rect">
-            <a:avLst/>
-          </a:prstGeom>
-          <a:noFill/>
-        </p:spPr>
-        <p:txBody>
-          <a:bodyPr wrap="square">
-            <a:spAutoFit/>
-          </a:bodyPr>
-          <a:lstStyle/>
-          <a:p>
-            <a:pPr>
-              <a:defRPr sz="1100">
-                <a:solidFill>
-                  <a:srgbClr val="475569"/>
-                </a:solidFill>
-                <a:latin typeface="Calibri"/>
-              </a:defRPr>
-            </a:pPr>
-            <a:r>
-              <a:t>Modernisasi Pengadaan, Tata Kelola Stok FIFO, dan Distribusi Berbasis Web Terintegrasi</a:t>
-            </a:r>
-          </a:p>
-        </p:txBody>
-      </p:sp>
-      <p:sp>
-        <p:nvSpPr>
-          <p:cNvPr id="6" name="Rectangle 5"/>
-          <p:cNvSpPr/>
-          <p:nvPr/>
-        </p:nvSpPr>
-        <p:spPr>
-          <a:xfrm>
-            <a:off x="731520" y="1243584"/>
-            <a:ext cx="10728655" cy="10972"/>
+            <a:off x="731520" y="804672"/>
+            <a:ext cx="10728655" cy="18288"/>
           </a:xfrm>
           <a:prstGeom prst="rect">
             <a:avLst/>
@@ -4421,7 +4305,9 @@
             <a:srgbClr val="E2E8F0"/>
           </a:solidFill>
           <a:ln>
-            <a:noFill/>
+            <a:solidFill>
+              <a:srgbClr val="E2E8F0"/>
+            </a:solidFill>
           </a:ln>
         </p:spPr>
         <p:style>
@@ -4448,14 +4334,94 @@
       </p:sp>
       <p:sp>
         <p:nvSpPr>
-          <p:cNvPr id="7" name="Rounded Rectangle 6"/>
+          <p:cNvPr id="4" name="TextBox 3"/>
+          <p:cNvSpPr txBox="1"/>
+          <p:nvPr/>
+        </p:nvSpPr>
+        <p:spPr>
+          <a:xfrm>
+            <a:off x="731520" y="1051560"/>
+            <a:ext cx="10728655" cy="2286000"/>
+          </a:xfrm>
+          <a:prstGeom prst="rect">
+            <a:avLst/>
+          </a:prstGeom>
+          <a:noFill/>
+        </p:spPr>
+        <p:txBody>
+          <a:bodyPr wrap="square" lIns="0" rIns="0" tIns="0" bIns="0">
+            <a:spAutoFit/>
+          </a:bodyPr>
+          <a:lstStyle/>
+          <a:p>
+            <a:pPr>
+              <a:spcAft>
+                <a:spcPts val="400"/>
+              </a:spcAft>
+              <a:defRPr sz="1100" b="1">
+                <a:solidFill>
+                  <a:srgbClr val="980517"/>
+                </a:solidFill>
+                <a:latin typeface="Arial"/>
+              </a:defRPr>
+            </a:pPr>
+            <a:r>
+              <a:t>SOLUSI RANTAI PASOK LOGISTIK KAMPUS TERINTEGRASI</a:t>
+            </a:r>
+          </a:p>
+          <a:p>
+            <a:pPr>
+              <a:spcAft>
+                <a:spcPts val="800"/>
+              </a:spcAft>
+            </a:pPr>
+            <a:r>
+              <a:rPr sz="3600" b="1">
+                <a:solidFill>
+                  <a:srgbClr val="0F172A"/>
+                </a:solidFill>
+                <a:latin typeface="Arial"/>
+              </a:rPr>
+              <a:t>HORIZONU </a:t>
+            </a:r>
+            <a:r>
+              <a:rPr sz="3600" b="1" u="sng">
+                <a:solidFill>
+                  <a:srgbClr val="980517"/>
+                </a:solidFill>
+                <a:latin typeface="Arial"/>
+              </a:rPr>
+              <a:t>UNIFORM</a:t>
+            </a:r>
+          </a:p>
+          <a:p>
+            <a:pPr>
+              <a:lnSpc>
+                <a:spcPct val="125000"/>
+              </a:lnSpc>
+              <a:defRPr sz="1200">
+                <a:solidFill>
+                  <a:srgbClr val="4B5563"/>
+                </a:solidFill>
+                <a:latin typeface="Calibri"/>
+              </a:defRPr>
+            </a:pPr>
+            <a:r>
+              <a:t>Transformasi digital operasional seragam mahasiswa: Menghubungkan Hulu (Vendor Pabrik), Gudang Kampus, dan Bagian Keuangan hingga Hilir (Mahasiswa) berbasis data presisi dan aturan inventaris FIFO.</a:t>
+            </a:r>
+          </a:p>
+        </p:txBody>
+      </p:sp>
+      <p:sp>
+        <p:nvSpPr>
+          <p:cNvPr id="5" name="Rounded Rectangle 4"/>
           <p:cNvSpPr/>
           <p:nvPr/>
         </p:nvSpPr>
         <p:spPr>
           <a:xfrm>
-            <a:off x="731520" y="1417320"/>
-            <a:ext cx="3429000" cy="4800600"/>
+            <a:off x="731520" y="3520440"/>
+            <a:ext cx="3429000" cy="2697480"/>
           </a:xfrm>
           <a:prstGeom prst="roundRect">
             <a:avLst/>
@@ -4496,7 +4462,7 @@
               </a:defRPr>
             </a:pPr>
             <a:r>
-              <a:t>PROFIL INSTITUSI &amp; OBJEK</a:t>
+              <a:t>OBJEK &amp; KOMODITAS</a:t>
             </a:r>
           </a:p>
           <a:p>
@@ -4512,7 +4478,7 @@
               </a:defRPr>
             </a:pPr>
             <a:r>
-              <a:t>Logistik Perlengkapan Kampus</a:t>
+              <a:t>Pengadaan Perlengkapan Kampus</a:t>
             </a:r>
           </a:p>
           <a:p>
@@ -4528,7 +4494,7 @@
               </a:defRPr>
             </a:pPr>
             <a:r>
-              <a:t>•  Departemen Keuangan mengelola siklus pengadaan, pencatatan keuangan, dan distribusi perlengkapan maba.</a:t>
+              <a:t>•  Pengadaan dan pembagian tahunan: Jas Almamater, Kemeja Putih, Celana/Rok, Sepatu Lab &amp; Dinas, serta Medical Kit.</a:t>
             </a:r>
           </a:p>
           <a:p>
@@ -4544,23 +4510,7 @@
               </a:defRPr>
             </a:pPr>
             <a:r>
-              <a:t>•  Komoditas: Jas Almamater, Kemeja Putih, Celana/Rok Bahan, Sepatu Lab &amp; Dinas, serta Medical Kit.</a:t>
-            </a:r>
-          </a:p>
-          <a:p>
-            <a:pPr>
-              <a:spcAft>
-                <a:spcPts val="300"/>
-              </a:spcAft>
-              <a:defRPr sz="1050">
-                <a:solidFill>
-                  <a:srgbClr val="0F172A"/>
-                </a:solidFill>
-                <a:latin typeface="Calibri"/>
-              </a:defRPr>
-            </a:pPr>
-            <a:r>
-              <a:t>•  Karakteristik: Penyaluran langsung ke ribuan mahasiswa baru tanpa perantara ritel komersial.</a:t>
+              <a:t>•  Penyaluran langsung ke ribuan mahasiswa baru tanpa perantara ritel komersial.</a:t>
             </a:r>
           </a:p>
           <a:p>
@@ -4576,21 +4526,21 @@
               </a:defRPr>
             </a:pPr>
             <a:r>
-              <a:t>➔  Model: Direct Closed-Loop Campus SCM</a:t>
-            </a:r>
-          </a:p>
-        </p:txBody>
-      </p:sp>
-      <p:sp>
-        <p:nvSpPr>
-          <p:cNvPr id="8" name="Rounded Rectangle 7"/>
+              <a:t>➔  Model: Closed-Loop Campus SCM</a:t>
+            </a:r>
+          </a:p>
+        </p:txBody>
+      </p:sp>
+      <p:sp>
+        <p:nvSpPr>
+          <p:cNvPr id="6" name="Rounded Rectangle 5"/>
           <p:cNvSpPr/>
           <p:nvPr/>
         </p:nvSpPr>
         <p:spPr>
           <a:xfrm>
-            <a:off x="4370832" y="1417320"/>
-            <a:ext cx="3429000" cy="4800600"/>
+            <a:off x="4370832" y="3520440"/>
+            <a:ext cx="3429000" cy="2697480"/>
           </a:xfrm>
           <a:prstGeom prst="roundRect">
             <a:avLst/>
@@ -4631,7 +4581,7 @@
               </a:defRPr>
             </a:pPr>
             <a:r>
-              <a:t>KENDALA OPERASIONAL UTAMA</a:t>
+              <a:t>TANTANGAN UTAMA</a:t>
             </a:r>
           </a:p>
           <a:p>
@@ -4663,7 +4613,7 @@
               </a:defRPr>
             </a:pPr>
             <a:r>
-              <a:t>•  Spreadsheet Excel Induk (~4.5 MB, 19 sheet) sering mengalami lag atau crash saat data membesar.</a:t>
+              <a:t>•  Spreadsheet Excel 4.5 MB crash saat ribuan maba mendaftar serentak.</a:t>
             </a:r>
           </a:p>
           <a:p>
@@ -4679,7 +4629,7 @@
               </a:defRPr>
             </a:pPr>
             <a:r>
-              <a:t>•  Antrean di posko kampus sangat lambat (15–20 menit per mahasiswa) akibat verifikasi berkas manual.</a:t>
+              <a:t>•  Antrean fisik posko 15–20 menit/orang akibat verifikasi berkas manual.</a:t>
             </a:r>
           </a:p>
           <a:p>
@@ -4695,7 +4645,7 @@
               </a:defRPr>
             </a:pPr>
             <a:r>
-              <a:t>•  Pemesanan seragam ke pabrik hanya estimasi historis tanpa survey ukuran mandiri, memicu dead-stock.</a:t>
+              <a:t>•  Tebakan order pabrik memicu penumpukan dead-stock ukuran ekstrem.</a:t>
             </a:r>
           </a:p>
           <a:p>
@@ -4711,21 +4661,21 @@
               </a:defRPr>
             </a:pPr>
             <a:r>
-              <a:t>➔  Dampak: Modal Mengendap &amp; Risiko Klaim Ganda</a:t>
-            </a:r>
-          </a:p>
-        </p:txBody>
-      </p:sp>
-      <p:sp>
-        <p:nvSpPr>
-          <p:cNvPr id="9" name="Rounded Rectangle 8"/>
+              <a:t>➔  Dampak: Modal Mengendap</a:t>
+            </a:r>
+          </a:p>
+        </p:txBody>
+      </p:sp>
+      <p:sp>
+        <p:nvSpPr>
+          <p:cNvPr id="7" name="Rounded Rectangle 6"/>
           <p:cNvSpPr/>
           <p:nvPr/>
         </p:nvSpPr>
         <p:spPr>
           <a:xfrm>
-            <a:off x="8010144" y="1417320"/>
-            <a:ext cx="3429000" cy="4800600"/>
+            <a:off x="8010144" y="3520440"/>
+            <a:ext cx="3429000" cy="2697480"/>
           </a:xfrm>
           <a:prstGeom prst="roundRect">
             <a:avLst/>
@@ -4766,7 +4716,7 @@
               </a:defRPr>
             </a:pPr>
             <a:r>
-              <a:t>TIM PENGEMBANG</a:t>
+              <a:t>NIRWANA TEAM</a:t>
             </a:r>
           </a:p>
           <a:p>
@@ -4782,7 +4732,7 @@
               </a:defRPr>
             </a:pPr>
             <a:r>
-              <a:t>Nirwana Development Team</a:t>
+              <a:t>Tim Pengembang Sistem</a:t>
             </a:r>
           </a:p>
           <a:p>
@@ -4798,7 +4748,7 @@
               </a:defRPr>
             </a:pPr>
             <a:r>
-              <a:t>•  Fhazar Raffiful Aqyla — Project Manager</a:t>
+              <a:t>•  Fhazar Raffiful Aqyla (Project Manager)</a:t>
             </a:r>
           </a:p>
           <a:p>
@@ -4814,7 +4764,7 @@
               </a:defRPr>
             </a:pPr>
             <a:r>
-              <a:t>•  Ferry Noer Hendriawan — Frontend Engineer</a:t>
+              <a:t>•  Ferry Noer Hendriawan (Frontend) • Hildan (Backend)</a:t>
             </a:r>
           </a:p>
           <a:p>
@@ -4830,55 +4780,7 @@
               </a:defRPr>
             </a:pPr>
             <a:r>
-              <a:t>•  Hildan Anugrah Tamadi Putra — Backend Engineer</a:t>
-            </a:r>
-          </a:p>
-          <a:p>
-            <a:pPr>
-              <a:spcAft>
-                <a:spcPts val="300"/>
-              </a:spcAft>
-              <a:defRPr sz="1050">
-                <a:solidFill>
-                  <a:srgbClr val="0F172A"/>
-                </a:solidFill>
-                <a:latin typeface="Calibri"/>
-              </a:defRPr>
-            </a:pPr>
-            <a:r>
-              <a:t>•  Fadel Rahmadhan — Quality Assurance</a:t>
-            </a:r>
-          </a:p>
-          <a:p>
-            <a:pPr>
-              <a:spcAft>
-                <a:spcPts val="300"/>
-              </a:spcAft>
-              <a:defRPr sz="1050">
-                <a:solidFill>
-                  <a:srgbClr val="0F172A"/>
-                </a:solidFill>
-                <a:latin typeface="Calibri"/>
-              </a:defRPr>
-            </a:pPr>
-            <a:r>
-              <a:t>•  Daffa Nazriel Zaidan — UI/UX Designer</a:t>
-            </a:r>
-          </a:p>
-          <a:p>
-            <a:pPr>
-              <a:spcAft>
-                <a:spcPts val="300"/>
-              </a:spcAft>
-              <a:defRPr sz="1050">
-                <a:solidFill>
-                  <a:srgbClr val="0F172A"/>
-                </a:solidFill>
-                <a:latin typeface="Calibri"/>
-              </a:defRPr>
-            </a:pPr>
-            <a:r>
-              <a:t>•  Acep Ugan Saputra — System Analyst</a:t>
+              <a:t>•  Fadel Rahmadhan (QA) • Daffa (UI/UX) • Acep (Analyst)</a:t>
             </a:r>
           </a:p>
           <a:p>
@@ -4894,7 +4796,7 @@
               </a:defRPr>
             </a:pPr>
             <a:r>
-              <a:t>➔  Tim Nirwana • Horizon University</a:t>
+              <a:t>➔  Horizon University</a:t>
             </a:r>
           </a:p>
         </p:txBody>
@@ -8907,15 +8809,7 @@
               </a:defRPr>
             </a:pPr>
             <a:r>
-              <a:t>•  RISIKO 1: Baterai HP Mahasiswa Mati / QR Rusak</a:t>
-            </a:r>
-            <a:br/>
-            <a:r>
-              <a:t>• Kendala: Mahasiswa tidak bisa menampilkan QR Code di layar ponsel.</a:t>
-            </a:r>
-            <a:br/>
-            <a:r>
-              <a:t>• Mitigasi UniStock: Bilah scanner staf posko dilengkapi fitur Fallback Search manual via NIM atau Nama yang langsung memanggil profil hak seketika.</a:t>
+              <a:t>•  RISIKO 1 (Baterai HP Mati / QR Rusak): Fallback Search manual via NIM atau Nama langsung memanggil profil hak seketika.</a:t>
             </a:r>
           </a:p>
           <a:p>
@@ -8931,15 +8825,7 @@
               </a:defRPr>
             </a:pPr>
             <a:r>
-              <a:t>•  RISIKO 2: Ukuran Rak Habis / Fitting Beda</a:t>
-            </a:r>
-            <a:br/>
-            <a:r>
-              <a:t>• Kendala: Ukuran fisik seragam di rak posko habis saat dicoba langsung.</a:t>
-            </a:r>
-            <a:br/>
-            <a:r>
-              <a:t>• Mitigasi UniStock: Fitur Partial Pickup memungkinkan staf menyerahkan barang yang tersedia (sisa hak tidak hangus &amp; dijadwal ulang) dan mencatat tukar ukuran di student_size_histories.</a:t>
+              <a:t>•  RISIKO 2 (Ukuran Rak Habis / Fitting Beda): Fitur Partial Pickup serahkan barang yang tersedia tanpa menghanguskan sisa hak.</a:t>
             </a:r>
           </a:p>
           <a:p>
@@ -8955,15 +8841,7 @@
               </a:defRPr>
             </a:pPr>
             <a:r>
-              <a:t>•  RISIKO 3: Jaringan Internet Kampus Lambat / Dobel Klik</a:t>
-            </a:r>
-            <a:br/>
-            <a:r>
-              <a:t>• Kendala: Sinyal wifi fluktuatif menyebabkan staf mengklik tombol konfirmasi berulang kali.</a:t>
-            </a:r>
-            <a:br/>
-            <a:r>
-              <a:t>• Mitigasi UniStock: Transaksi dilindungi Pessimistic Row Locking (lockForUpdate) dan proteksi idempotensi, menjamin nol pemotongan stok ganda.</a:t>
+              <a:t>•  RISIKO 3 (Jaringan Internet Kampus Lambat): Pessimistic Row Locking (lockForUpdate) dan idempotensi menjamin nol pemotongan ganda.</a:t>
             </a:r>
           </a:p>
           <a:p>

--- a/HorizonU_Uniform_UniStock_SCM_Presentasi_Technospark.pptx
+++ b/HorizonU_Uniform_UniStock_SCM_Presentasi_Technospark.pptx
@@ -13,6 +13,7 @@
     <p:sldId id="261" r:id="rId13"/>
     <p:sldId id="262" r:id="rId14"/>
     <p:sldId id="263" r:id="rId15"/>
+    <p:sldId id="264" r:id="rId16"/>
   </p:sldIdLst>
   <p:sldSz cx="12191695" cy="6858000" type="screen4x3"/>
   <p:notesSz cx="6858000" cy="9144000"/>
@@ -596,39 +597,49 @@
           <a:lstStyle/>
           <a:p>
             <a:r>
-              <a:t>NASKAH BACA PRESENTER SLIDE 2 (Target: 01:15 Menit):</a:t>
-            </a:r>
-          </a:p>
-          <a:p>
-            <a:r>
-              <a:t>"Masuk ke Slide 2 mengenai Struktur Rantai Pasok. Rantai pasok HorizonU Uniform menghubungkan empat entitas stakeholder secara closed-loop:</a:t>
+              <a:t>NASKAH BACA PRESENTER SLIDE 2 (Target: 00:45 Menit):</a:t>
+            </a:r>
+          </a:p>
+          <a:p>
+            <a:r>
+              <a:t>"Pada Slide 2, izinkan kami memperkenalkan 6 anggota Tim Nirwana yang memiliki spesialisasi peran masing-masing dalam membangun UniStock:</a:t>
             </a:r>
           </a:p>
           <a:p/>
           <a:p>
             <a:r>
-              <a:t>Pertama, di sisi Hulu (Supplier), terdapat Pabrik Garmen dan Sepatu yang memproduksi barang sesuai Purchase Order agregat kampus.</a:t>
-            </a:r>
-          </a:p>
-          <a:p>
-            <a:r>
-              <a:t>Kedua, Gudang Logistik Kampus, yang bertindak sebagai distributor internal untuk memeriksa fisik, mencatat penerimaan batch, dan memberi nomor urut FIFO.</a:t>
-            </a:r>
-          </a:p>
-          <a:p>
-            <a:r>
-              <a:t>Ketiga, Departemen Keuangan dan Staf Posko, yang bertugas memvalidasi status kelayakan pelunasan biaya serta melayani serah terima barang di loket.</a:t>
-            </a:r>
-          </a:p>
-          <a:p>
-            <a:r>
-              <a:t>Dan keempat, di sisi Hilir (Customer), adalah Mahasiswa yang memiliki kuota hak barang sesuai prodinya.</a:t>
+              <a:t>1. Fhazar Raffiful Aqyla sebagai Project Manager, memimpin perumusan roadmap produk dan keselarasan strategi rantai pasok.</a:t>
+            </a:r>
+          </a:p>
+          <a:p>
+            <a:r>
+              <a:t>2. Ferry Noer Hendriawan sebagai Frontend Developer, merancang tampilan antarmuka interaktif dan modul scanner posko.</a:t>
+            </a:r>
+          </a:p>
+          <a:p>
+            <a:r>
+              <a:t>3. Hildan Anugrah Tamadi Putra sebagai Backend Developer, membangun logic Laravel 12, algoritma FIFO, dan concurrency lock.</a:t>
+            </a:r>
+          </a:p>
+          <a:p>
+            <a:r>
+              <a:t>4. Fadel Rahmadhan sebagai Quality Assurance, menguji ketahanan sistem terhadap skenario double-claim dan stress test transaksi.</a:t>
+            </a:r>
+          </a:p>
+          <a:p>
+            <a:r>
+              <a:t>5. Daffa Nazriel Zaidan sebagai UI/UX Designer, menyusun prototipe sistem desain Neo-Brutalism yang ergonomis bagi mahasiswa.</a:t>
+            </a:r>
+          </a:p>
+          <a:p>
+            <a:r>
+              <a:t>6. Acep Ugan Saputra sebagai System Analyst, merancang pemodelan proses bisnis BPMN dan normalisasi basis data relasional.</a:t>
             </a:r>
           </a:p>
           <a:p/>
           <a:p>
             <a:r>
-              <a:t>Prinsip dasar yang kami tanamkan adalah: 'Data Mengunci Fisik'. Artinya, seragam fisik di meja loket pantang keluar sebelum sistem memindai QR Code mahasiswa dan memastikan hak kuota serta status pembayarannya sah." </a:t>
+              <a:t>Dengan sinergi lintas peran inilah kami mentransformasi sistem rantai pasok seragam kampus secara utuh." </a:t>
             </a:r>
           </a:p>
         </p:txBody>
@@ -698,36 +709,39 @@
           <a:lstStyle/>
           <a:p>
             <a:r>
-              <a:t>NASKAH BACA PRESENTER SLIDE 3 (Target: 01:30 Menit):</a:t>
-            </a:r>
-          </a:p>
-          <a:p>
-            <a:r>
-              <a:t>"Pada Slide 3, kami membedah empat akar masalah utama melalui tabel hubungan Masalah, Penyebab, dan Dampak sistemik:</a:t>
+              <a:t>NASKAH BACA PRESENTER SLIDE 3 (Target: 01:15 Menit):</a:t>
+            </a:r>
+          </a:p>
+          <a:p>
+            <a:r>
+              <a:t>"Masuk ke Slide 3 mengenai Struktur Rantai Pasok. Rantai pasok HorizonU Uniform menghubungkan empat entitas stakeholder secara closed-loop:</a:t>
             </a:r>
           </a:p>
           <a:p/>
           <a:p>
             <a:r>
-              <a:t>Masalah Pertama: Ketidakcocokan ukuran dan penumpukan dead-stock. Penyebabnya adalah pemesanan ke vendor hanya berbasis estimasi historis tanpa survey ukuran mandiri mahasiswa. Dampaknya, ukuran favorit habis seketika, ukuran ekstrem menumpuk bertahun-tahun, dan dana kampus tertahan.</a:t>
+              <a:t>Pertama, di sisi Hulu (Supplier), terdapat Pabrik Garmen dan Sepatu yang memproduksi barang sesuai Purchase Order agregat kampus.</a:t>
+            </a:r>
+          </a:p>
+          <a:p>
+            <a:r>
+              <a:t>Kedua, Gudang Logistik Kampus, yang bertindak sebagai distributor internal untuk memeriksa fisik, mencatat penerimaan batch, dan memberi nomor urut FIFO.</a:t>
+            </a:r>
+          </a:p>
+          <a:p>
+            <a:r>
+              <a:t>Ketiga, Departemen Keuangan dan Staf Posko, yang bertugas memvalidasi status kelayakan pelunasan biaya serta melayani serah terima barang di loket.</a:t>
+            </a:r>
+          </a:p>
+          <a:p>
+            <a:r>
+              <a:t>Dan keempat, di sisi Hilir (Customer), adalah Mahasiswa yang memiliki kuota hak barang sesuai prodinya.</a:t>
             </a:r>
           </a:p>
           <a:p/>
           <a:p>
             <a:r>
-              <a:t>Masalah Kedua: Ketergantungan pada lembar kerja Excel raksasa yang sering crash saat mengolah ribuan data maba, ditambah broadcast jadwal dikirim manual per surel. Dampaknya waktu kerja staf terbuang berminggu-minggu dan informasi jadwal terlambat diterima mahasiswa.</a:t>
-            </a:r>
-          </a:p>
-          <a:p/>
-          <a:p>
-            <a:r>
-              <a:t>Masalah Ketiga: Kemacetan parah di loket posko karena verifikasi lunas dan pencatatan dilakukan manual di atas kertas. Dampaknya antrean meliuk ratusan meter dengan waktu layan hingga 15-20 menit per orang, serta rawan klaim ganda.</a:t>
-            </a:r>
-          </a:p>
-          <a:p/>
-          <a:p>
-            <a:r>
-              <a:t>Masalah Keempat: Penyusutan stok tanpa jejak audit karena pencampuran barang antar-pembelian tanpa kaidah FIFO, sehingga nilai HPP dan laba kotor tidak dapat dihitung akurat." </a:t>
+              <a:t>Prinsip dasar yang kami tanamkan adalah: 'Data Mengunci Fisik'. Artinya, seragam fisik di meja loket pantang keluar sebelum sistem memindai QR Code mahasiswa dan memastikan hak kuota serta status pembayarannya sah." </a:t>
             </a:r>
           </a:p>
         </p:txBody>
@@ -797,39 +811,36 @@
           <a:lstStyle/>
           <a:p>
             <a:r>
-              <a:t>NASKAH BACA PRESENTER SLIDE 4 (Target: 01:15 Menit):</a:t>
-            </a:r>
-          </a:p>
-          <a:p>
-            <a:r>
-              <a:t>"Selanjutnya pada Slide 4, kami memetakan Analisis Aliran Informasi pada kondisi As-Is dan titik-titik kemacetannya:</a:t>
+              <a:t>NASKAH BACA PRESENTER SLIDE 4 (Target: 01:30 Menit):</a:t>
+            </a:r>
+          </a:p>
+          <a:p>
+            <a:r>
+              <a:t>"Pada Slide 4, kami membedah empat akar masalah utama melalui tabel hubungan Masalah, Penyebab, dan Dampak sistemik:</a:t>
             </a:r>
           </a:p>
           <a:p/>
           <a:p>
             <a:r>
-              <a:t>Pada Aliran 1 dari Mahasiswa ke Kampus, data ukuran diisi via formulir acak tanpa validasi SKU baku, sehingga rekapitulasi data terlambat dan penuh duplikasi.</a:t>
-            </a:r>
-          </a:p>
-          <a:p>
-            <a:r>
-              <a:t>Pada Aliran 2 dari Keuangan ke Posko, data pelunasan terisolasi di laptop staf finance. Saat mahasiswa baru saja melunasi di bank pada hari-H, staf posko tidak mengetahuinya karena data belum tersinkronisasi.</a:t>
-            </a:r>
-          </a:p>
-          <a:p>
-            <a:r>
-              <a:t>Pada Aliran 3 di meja posko, pencatatan serah terima memakai kertas checklist yang baru direkap malam hari, memicu celah barang hilang dan manipulasi.</a:t>
-            </a:r>
-          </a:p>
-          <a:p>
-            <a:r>
-              <a:t>Dan pada Aliran 4 ke pabrik vendor, order produksi dibuat berdasar tebakan kasar sehingga waktu tunggu revisi ukuran memakan waktu berbulan-bulan.</a:t>
+              <a:t>Masalah Pertama: Ketidakcocokan ukuran dan penumpukan dead-stock. Penyebabnya adalah pemesanan ke vendor hanya berbasis estimasi historis tanpa survey ukuran mandiri mahasiswa. Dampaknya, ukuran favorit habis seketika, ukuran ekstrem menumpuk bertahun-tahun, dan dana kampus tertahan.</a:t>
             </a:r>
           </a:p>
           <a:p/>
           <a:p>
             <a:r>
-              <a:t>Kesimpulannya, terjadi silo data dan keterlambatan informasi akut yang melumpuhkan efisiensi." </a:t>
+              <a:t>Masalah Kedua: Ketergantungan pada lembar kerja Excel raksasa yang sering crash saat mengolah ribuan data maba, ditambah broadcast jadwal dikirim manual per surel. Dampaknya waktu kerja staf terbuang berminggu-minggu dan informasi jadwal terlambat diterima mahasiswa.</a:t>
+            </a:r>
+          </a:p>
+          <a:p/>
+          <a:p>
+            <a:r>
+              <a:t>Masalah Ketiga: Kemacetan parah di loket posko karena verifikasi lunas dan pencatatan dilakukan manual di atas kertas. Dampaknya antrean meliuk ratusan meter dengan waktu layan hingga 15-20 menit per orang, serta rawan klaim ganda.</a:t>
+            </a:r>
+          </a:p>
+          <a:p/>
+          <a:p>
+            <a:r>
+              <a:t>Masalah Keempat: Penyusutan stok tanpa jejak audit karena pencampuran barang antar-pembelian tanpa kaidah FIFO, sehingga nilai HPP dan laba kotor tidak dapat dihitung akurat." </a:t>
             </a:r>
           </a:p>
         </p:txBody>
@@ -899,36 +910,39 @@
           <a:lstStyle/>
           <a:p>
             <a:r>
-              <a:t>NASKAH BACA PRESENTER SLIDE 5 (Target: 01:30 Menit):</a:t>
-            </a:r>
-          </a:p>
-          <a:p>
-            <a:r>
-              <a:t>"Untuk mengatasi persoalan tersebut, pada Slide 5 kami merekomendasikan empat subsistem terpadu di dalam arsitektur HorizonU Uniform (UniStock):</a:t>
+              <a:t>NASKAH BACA PRESENTER SLIDE 5 (Target: 01:15 Menit):</a:t>
+            </a:r>
+          </a:p>
+          <a:p>
+            <a:r>
+              <a:t>"Selanjutnya pada Slide 5, kami memetakan Analisis Aliran Informasi pada kondisi As-Is dan titik-titik kemacetannya:</a:t>
             </a:r>
           </a:p>
           <a:p/>
           <a:p>
             <a:r>
-              <a:t>1. ERP Master &amp; Entitlement Engine: Berfungsi menggantikan Excel dengan basis data relasional MySQL InnoDB terstruktur, mengelola kuota hak per program studi, dan mengunci integritas transaksi. Manfaatnya: 100% bebas kendala Excel rusak.</a:t>
+              <a:t>Pada Aliran 1 dari Mahasiswa ke Kampus, data ukuran diisi via formulir acak tanpa validasi SKU baku, sehingga rekapitulasi data terlambat dan penuh duplikasi.</a:t>
+            </a:r>
+          </a:p>
+          <a:p>
+            <a:r>
+              <a:t>Pada Aliran 2 dari Keuangan ke Posko, data pelunasan terisolasi di laptop staf finance. Saat mahasiswa baru saja melunasi di bank pada hari-H, staf posko tidak mengetahuinya karena data belum tersinkronisasi.</a:t>
+            </a:r>
+          </a:p>
+          <a:p>
+            <a:r>
+              <a:t>Pada Aliran 3 di meja posko, pencatatan serah terima memakai kertas checklist yang baru direkap malam hari, memicu celah barang hilang dan manipulasi.</a:t>
+            </a:r>
+          </a:p>
+          <a:p>
+            <a:r>
+              <a:t>Dan pada Aliran 4 ke pabrik vendor, order produksi dibuat berdasar tebakan kasar sehingga waktu tunggu revisi ukuran memakan waktu berbulan-bulan.</a:t>
             </a:r>
           </a:p>
           <a:p/>
           <a:p>
             <a:r>
-              <a:t>2. SCM Demand Planning Portal: Membuka portal mandiri bagi mahasiswa untuk mengisi ukuran baju dan sepatu sebelum produksi, serta menghitung kalkulasi demand vs shortage secara otomatis. Manfaatnya: Zero dead-stock dan pengadaan pabrik tepat sasaran.</a:t>
-            </a:r>
-          </a:p>
-          <a:p/>
-          <a:p>
-            <a:r>
-              <a:t>3. POS QR Verification Engine: Menghasilkan QR Code instan berbasis NIM dan mengeksekusi 6-Lapis Validasi otomatis melalui kamera webcam posko. Manfaatnya: Memangkas waktu layan menjadi di bawah 30 detik dan nol risiko klaim ganda.</a:t>
-            </a:r>
-          </a:p>
-          <a:p/>
-          <a:p>
-            <a:r>
-              <a:t>4. WMS &amp; FIFO Inventory Costing Engine: Mengatur pemotongan mutasi dari batch pembelian tertua secara FIFO, rekonsiliasi stock opname fisik, serta perhitungan valuasi HPP dan margin laba secara presisi." </a:t>
+              <a:t>Kesimpulannya, terjadi silo data dan keterlambatan informasi akut yang melumpuhkan efisiensi." </a:t>
             </a:r>
           </a:p>
         </p:txBody>
@@ -998,42 +1012,36 @@
           <a:lstStyle/>
           <a:p>
             <a:r>
-              <a:t>NASKAH BACA PRESENTER SLIDE 6 (Target: 01:25 Menit):</a:t>
-            </a:r>
-          </a:p>
-          <a:p>
-            <a:r>
-              <a:t>"Pada Slide 6, kami tampilkan Desain Arsitektur Solusi yang bekerja dalam 4 Fase Tertutup (Closed-Loop Engine):</a:t>
+              <a:t>NASKAH BACA PRESENTER SLIDE 6 (Target: 01:30 Menit):</a:t>
+            </a:r>
+          </a:p>
+          <a:p>
+            <a:r>
+              <a:t>"Untuk mengatasi persoalan tersebut, pada Slide 6 kami merekomendasikan empat subsistem terpadu di dalam arsitektur HorizonU Uniform (UniStock):</a:t>
             </a:r>
           </a:p>
           <a:p/>
           <a:p>
             <a:r>
-              <a:t>Fase 1 (Inbound): Saat barang dari pabrik tiba, staf gudang mencatatnya pada modul StockReceive, menetapkan batch FIFO, dan mencatat unit HPP pembelian.</a:t>
+              <a:t>1. ERP Master &amp; Entitlement Engine: Berfungsi menggantikan Excel dengan basis data relasional MySQL InnoDB terstruktur, mengelola kuota hak per program studi, dan mengunci integritas transaksi. Manfaatnya: 100% bebas kendala Excel rusak.</a:t>
             </a:r>
           </a:p>
           <a:p/>
           <a:p>
             <a:r>
-              <a:t>Fase 2 (Planning): Departemen Keuangan mengaktifkan status lunas di Eligibility Record, mahasiswa mengisi profil ukuran di portal, dan sistem mengalokasikan paket hak barang.</a:t>
+              <a:t>2. SCM Demand Planning Portal: Membuka portal mandiri bagi mahasiswa untuk mengisi ukuran baju dan sepatu sebelum produksi, serta menghitung kalkulasi demand vs shortage secara otomatis. Manfaatnya: Zero dead-stock dan pengadaan pabrik tepat sasaran.</a:t>
             </a:r>
           </a:p>
           <a:p/>
           <a:p>
             <a:r>
-              <a:t>Fase 3 (Outbound): Di posko hari-H, staf memindai QR Code mahasiswa. Sistem mengeksekusi 6-lapis validasi menggunakan teknik pessimistic locking, memotong stok batch tertua, dan menyerahkan seragam.</a:t>
+              <a:t>3. POS QR Verification Engine: Menghasilkan QR Code instan berbasis NIM dan mengeksekusi 6-Lapis Validasi otomatis melalui kamera webcam posko. Manfaatnya: Memangkas waktu layan menjadi di bawah 30 detik dan nol risiko klaim ganda.</a:t>
             </a:r>
           </a:p>
           <a:p/>
           <a:p>
             <a:r>
-              <a:t>Fase 4 (Audit &amp; Control): Stock opname fisik berkala menghitung selisih varians, dan sistem menerbitkan laporan Gross Profit Margin.</a:t>
-            </a:r>
-          </a:p>
-          <a:p/>
-          <a:p>
-            <a:r>
-              <a:t>Data sisa stok dan tren ukuran dari Fase 4 ini secara otomatis menjadi acuan belanja pengadaan Fase 1 pada semester berikutnya, menutup siklus rantai pasok secara sempurna." </a:t>
+              <a:t>4. WMS &amp; FIFO Inventory Costing Engine: Mengatur pemotongan mutasi dari batch pembelian tertua secara FIFO, rekonsiliasi stock opname fisik, serta perhitungan valuasi HPP dan margin laba secara presisi." </a:t>
             </a:r>
           </a:p>
         </p:txBody>
@@ -1103,39 +1111,42 @@
           <a:lstStyle/>
           <a:p>
             <a:r>
-              <a:t>NASKAH BACA PRESENTER SLIDE 7 (Target: 01:15 Menit):</a:t>
-            </a:r>
-          </a:p>
-          <a:p>
-            <a:r>
-              <a:t>"Masuk ke Slide 7 mengenai Prioritas Implementasi dan Mitigasi Risiko Lapangan.</a:t>
+              <a:t>NASKAH BACA PRESENTER SLIDE 7 (Target: 01:25 Menit):</a:t>
+            </a:r>
+          </a:p>
+          <a:p>
+            <a:r>
+              <a:t>"Pada Slide 7, kami tampilkan Desain Arsitektur Solusi yang bekerja dalam 4 Fase Tertutup (Closed-Loop Engine):</a:t>
             </a:r>
           </a:p>
           <a:p/>
           <a:p>
             <a:r>
-              <a:t>Kami membagi tahapan implementasi menjadi 3 prioritas: Prioritas 1 adalah standarisasi master data dan SKU; Prioritas 2 adalah sinkronisasi status keuangan dan pembukaan portal ukuran; dan Prioritas 3 adalah pelatihan staf loket serta simulasi antrean posko.</a:t>
+              <a:t>Fase 1 (Inbound): Saat barang dari pabrik tiba, staf gudang mencatatnya pada modul StockReceive, menetapkan batch FIFO, dan mencatat unit HPP pembelian.</a:t>
             </a:r>
           </a:p>
           <a:p/>
           <a:p>
             <a:r>
-              <a:t>Kami juga telah merancang solusi atas 3 risiko darurat nyata di lapangan:</a:t>
-            </a:r>
-          </a:p>
-          <a:p>
-            <a:r>
-              <a:t>Pertama, jika baterai HP mahasiswa mati atau tidak membawa QR, staf posko dapat menggunakan fitur fallback search manual via NIM.</a:t>
-            </a:r>
-          </a:p>
-          <a:p>
-            <a:r>
-              <a:t>Kedua, jika stok ukuran di rak habis saat fitting, sistem mendukung fitur Partial Pickup di mana barang yang ada diserahkan tanpa menghanguskan sisa hak mahasiswa.</a:t>
-            </a:r>
-          </a:p>
-          <a:p>
-            <a:r>
-              <a:t>Ketiga, jika koneksi internet kampus fluktuatif, database diproteksi oleh pessimistic row locking agar tidak terjadi pengurangan stok ganda." </a:t>
+              <a:t>Fase 2 (Planning): Departemen Keuangan mengaktifkan status lunas di Eligibility Record, mahasiswa mengisi profil ukuran di portal, dan sistem mengalokasikan paket hak barang.</a:t>
+            </a:r>
+          </a:p>
+          <a:p/>
+          <a:p>
+            <a:r>
+              <a:t>Fase 3 (Outbound): Di posko hari-H, staf memindai QR Code mahasiswa. Sistem mengeksekusi 6-lapis validasi menggunakan teknik pessimistic locking, memotong stok batch tertua, dan menyerahkan seragam.</a:t>
+            </a:r>
+          </a:p>
+          <a:p/>
+          <a:p>
+            <a:r>
+              <a:t>Fase 4 (Audit &amp; Control): Stock opname fisik berkala menghitung selisih varians, dan sistem menerbitkan laporan Gross Profit Margin.</a:t>
+            </a:r>
+          </a:p>
+          <a:p/>
+          <a:p>
+            <a:r>
+              <a:t>Data sisa stok dan tren ukuran dari Fase 4 ini secara otomatis menjadi acuan belanja pengadaan Fase 1 pada semester berikutnya, menutup siklus rantai pasok secara sempurna." </a:t>
             </a:r>
           </a:p>
         </p:txBody>
@@ -1205,12 +1216,114 @@
           <a:lstStyle/>
           <a:p>
             <a:r>
-              <a:t>NASKAH BACA PRESENTER SLIDE 8 (Target: 00:55 Menit):</a:t>
-            </a:r>
-          </a:p>
-          <a:p>
-            <a:r>
-              <a:t>"Sebagai penutup pada Slide 8, implementasi HorizonU Uniform menghadirkan 3 manfaat nyata dan terukur:</a:t>
+              <a:t>NASKAH BACA PRESENTER SLIDE 8 (Target: 01:15 Menit):</a:t>
+            </a:r>
+          </a:p>
+          <a:p>
+            <a:r>
+              <a:t>"Masuk ke Slide 8 mengenai Prioritas Implementasi dan Mitigasi Risiko Lapangan.</a:t>
+            </a:r>
+          </a:p>
+          <a:p/>
+          <a:p>
+            <a:r>
+              <a:t>Kami membagi tahapan implementasi menjadi 3 prioritas: Prioritas 1 adalah standarisasi master data dan SKU; Prioritas 2 adalah sinkronisasi status keuangan dan pembukaan portal ukuran; dan Prioritas 3 adalah pelatihan staf loket serta simulasi antrean posko.</a:t>
+            </a:r>
+          </a:p>
+          <a:p/>
+          <a:p>
+            <a:r>
+              <a:t>Kami juga telah merancang solusi atas 3 risiko darurat nyata di lapangan:</a:t>
+            </a:r>
+          </a:p>
+          <a:p>
+            <a:r>
+              <a:t>Pertama, jika baterai HP mahasiswa mati atau tidak membawa QR, staf posko dapat menggunakan fitur fallback search manual via NIM.</a:t>
+            </a:r>
+          </a:p>
+          <a:p>
+            <a:r>
+              <a:t>Kedua, jika stok ukuran di rak habis saat fitting, sistem mendukung fitur Partial Pickup di mana barang yang ada diserahkan tanpa menghanguskan sisa hak mahasiswa.</a:t>
+            </a:r>
+          </a:p>
+          <a:p>
+            <a:r>
+              <a:t>Ketiga, jika koneksi internet kampus fluktuatif, database diproteksi oleh pessimistic row locking agar tidak terjadi pengurangan stok ganda." </a:t>
+            </a:r>
+          </a:p>
+        </p:txBody>
+      </p:sp>
+      <p:sp>
+        <p:nvSpPr>
+          <p:cNvPr id="4" name="Slide Number Placeholder 3"/>
+          <p:cNvSpPr>
+            <a:spLocks noGrp="1"/>
+          </p:cNvSpPr>
+          <p:nvPr>
+            <p:ph type="sldNum" idx="5" sz="quarter"/>
+          </p:nvPr>
+        </p:nvSpPr>
+        <p:spPr/>
+      </p:sp>
+    </p:spTree>
+  </p:cSld>
+  <p:clrMapOvr>
+    <a:masterClrMapping/>
+  </p:clrMapOvr>
+</p:notes>
+</file>
+
+<file path=ppt/notesSlides/notesSlide9.xml><?xml version="1.0" encoding="utf-8"?>
+<p:notes xmlns:a="http://schemas.openxmlformats.org/drawingml/2006/main" xmlns:p="http://schemas.openxmlformats.org/presentationml/2006/main" xmlns:r="http://schemas.openxmlformats.org/officeDocument/2006/relationships">
+  <p:cSld>
+    <p:spTree>
+      <p:nvGrpSpPr>
+        <p:cNvPr id="1" name=""/>
+        <p:cNvGrpSpPr/>
+        <p:nvPr/>
+      </p:nvGrpSpPr>
+      <p:grpSpPr>
+        <a:xfrm>
+          <a:off x="0" y="0"/>
+          <a:ext cx="0" cy="0"/>
+          <a:chOff x="0" y="0"/>
+          <a:chExt cx="0" cy="0"/>
+        </a:xfrm>
+      </p:grpSpPr>
+      <p:sp>
+        <p:nvSpPr>
+          <p:cNvPr id="2" name="Slide Image Placeholder 1"/>
+          <p:cNvSpPr>
+            <a:spLocks noGrp="1"/>
+          </p:cNvSpPr>
+          <p:nvPr>
+            <p:ph type="sldImg" idx="2"/>
+          </p:nvPr>
+        </p:nvSpPr>
+        <p:spPr/>
+      </p:sp>
+      <p:sp>
+        <p:nvSpPr>
+          <p:cNvPr id="3" name="Notes Placeholder 2"/>
+          <p:cNvSpPr>
+            <a:spLocks noGrp="1"/>
+          </p:cNvSpPr>
+          <p:nvPr>
+            <p:ph type="body" idx="3" sz="quarter"/>
+          </p:nvPr>
+        </p:nvSpPr>
+        <p:spPr/>
+        <p:txBody>
+          <a:bodyPr/>
+          <a:lstStyle/>
+          <a:p>
+            <a:r>
+              <a:t>NASKAH BACA PRESENTER SLIDE 9 (Target: 00:55 Menit):</a:t>
+            </a:r>
+          </a:p>
+          <a:p>
+            <a:r>
+              <a:t>"Sebagai penutup pada Slide 9, implementasi HorizonU Uniform menghadirkan 3 manfaat nyata dan terukur:</a:t>
             </a:r>
           </a:p>
           <a:p/>
@@ -4901,6 +5014,1282 @@
               </a:defRPr>
             </a:pPr>
             <a:r>
+              <a:t>PROFIL TIM PENGEMBANG</a:t>
+            </a:r>
+          </a:p>
+        </p:txBody>
+      </p:sp>
+      <p:sp>
+        <p:nvSpPr>
+          <p:cNvPr id="4" name="TextBox 3"/>
+          <p:cNvSpPr txBox="1"/>
+          <p:nvPr/>
+        </p:nvSpPr>
+        <p:spPr>
+          <a:xfrm>
+            <a:off x="868680" y="548640"/>
+            <a:ext cx="10515600" cy="384048"/>
+          </a:xfrm>
+          <a:prstGeom prst="rect">
+            <a:avLst/>
+          </a:prstGeom>
+          <a:noFill/>
+        </p:spPr>
+        <p:txBody>
+          <a:bodyPr wrap="square">
+            <a:spAutoFit/>
+          </a:bodyPr>
+          <a:lstStyle/>
+          <a:p>
+            <a:pPr>
+              <a:defRPr sz="1900" b="1">
+                <a:solidFill>
+                  <a:srgbClr val="0F172A"/>
+                </a:solidFill>
+                <a:latin typeface="Arial"/>
+              </a:defRPr>
+            </a:pPr>
+            <a:r>
+              <a:t>Our Team • Nirwana Development Team</a:t>
+            </a:r>
+          </a:p>
+        </p:txBody>
+      </p:sp>
+      <p:sp>
+        <p:nvSpPr>
+          <p:cNvPr id="5" name="TextBox 4"/>
+          <p:cNvSpPr txBox="1"/>
+          <p:nvPr/>
+        </p:nvSpPr>
+        <p:spPr>
+          <a:xfrm>
+            <a:off x="868680" y="932688"/>
+            <a:ext cx="10515600" cy="256032"/>
+          </a:xfrm>
+          <a:prstGeom prst="rect">
+            <a:avLst/>
+          </a:prstGeom>
+          <a:noFill/>
+        </p:spPr>
+        <p:txBody>
+          <a:bodyPr wrap="square">
+            <a:spAutoFit/>
+          </a:bodyPr>
+          <a:lstStyle/>
+          <a:p>
+            <a:pPr>
+              <a:defRPr sz="1100">
+                <a:solidFill>
+                  <a:srgbClr val="475569"/>
+                </a:solidFill>
+                <a:latin typeface="Calibri"/>
+              </a:defRPr>
+            </a:pPr>
+            <a:r>
+              <a:t>Kolaborasi lintas disiplin dalam perancangan arsitektur, rekayasa kode, dan tata kelola platform UniStock</a:t>
+            </a:r>
+          </a:p>
+        </p:txBody>
+      </p:sp>
+      <p:sp>
+        <p:nvSpPr>
+          <p:cNvPr id="6" name="Rectangle 5"/>
+          <p:cNvSpPr/>
+          <p:nvPr/>
+        </p:nvSpPr>
+        <p:spPr>
+          <a:xfrm>
+            <a:off x="731520" y="1243584"/>
+            <a:ext cx="10728655" cy="10972"/>
+          </a:xfrm>
+          <a:prstGeom prst="rect">
+            <a:avLst/>
+          </a:prstGeom>
+          <a:solidFill>
+            <a:srgbClr val="E2E8F0"/>
+          </a:solidFill>
+          <a:ln>
+            <a:noFill/>
+          </a:ln>
+        </p:spPr>
+        <p:style>
+          <a:lnRef idx="1">
+            <a:schemeClr val="accent1"/>
+          </a:lnRef>
+          <a:fillRef idx="3">
+            <a:schemeClr val="accent1"/>
+          </a:fillRef>
+          <a:effectRef idx="2">
+            <a:schemeClr val="accent1"/>
+          </a:effectRef>
+          <a:fontRef idx="minor">
+            <a:schemeClr val="lt1"/>
+          </a:fontRef>
+        </p:style>
+        <p:txBody>
+          <a:bodyPr rtlCol="0" anchor="ctr"/>
+          <a:lstStyle/>
+          <a:p>
+            <a:pPr algn="ctr"/>
+          </a:p>
+        </p:txBody>
+      </p:sp>
+      <p:sp>
+        <p:nvSpPr>
+          <p:cNvPr id="7" name="Rounded Rectangle 6"/>
+          <p:cNvSpPr/>
+          <p:nvPr/>
+        </p:nvSpPr>
+        <p:spPr>
+          <a:xfrm>
+            <a:off x="731520" y="1417320"/>
+            <a:ext cx="3429000" cy="2286000"/>
+          </a:xfrm>
+          <a:prstGeom prst="roundRect">
+            <a:avLst/>
+          </a:prstGeom>
+          <a:solidFill>
+            <a:srgbClr val="F8FAFC"/>
+          </a:solidFill>
+          <a:ln w="19050">
+            <a:solidFill>
+              <a:srgbClr val="E2E8F0"/>
+            </a:solidFill>
+          </a:ln>
+        </p:spPr>
+        <p:style>
+          <a:lnRef idx="1">
+            <a:schemeClr val="accent1"/>
+          </a:lnRef>
+          <a:fillRef idx="3">
+            <a:schemeClr val="accent1"/>
+          </a:fillRef>
+          <a:effectRef idx="2">
+            <a:schemeClr val="accent1"/>
+          </a:effectRef>
+          <a:fontRef idx="minor">
+            <a:schemeClr val="lt1"/>
+          </a:fontRef>
+        </p:style>
+        <p:txBody>
+          <a:bodyPr rtlCol="0" anchor="ctr"/>
+          <a:lstStyle/>
+          <a:p>
+            <a:pPr algn="ctr"/>
+          </a:p>
+        </p:txBody>
+      </p:sp>
+      <p:pic>
+        <p:nvPicPr>
+          <p:cNvPr id="8" name="Picture 7" descr="ferry.jpg"/>
+          <p:cNvPicPr>
+            <a:picLocks noChangeAspect="1"/>
+          </p:cNvPicPr>
+          <p:nvPr/>
+        </p:nvPicPr>
+        <p:blipFill>
+          <a:blip r:embed="rId2"/>
+          <a:stretch>
+            <a:fillRect/>
+          </a:stretch>
+        </p:blipFill>
+        <p:spPr>
+          <a:xfrm>
+            <a:off x="1965960" y="1554480"/>
+            <a:ext cx="960120" cy="960120"/>
+          </a:xfrm>
+          <a:prstGeom prst="rect">
+            <a:avLst/>
+          </a:prstGeom>
+        </p:spPr>
+      </p:pic>
+      <p:sp>
+        <p:nvSpPr>
+          <p:cNvPr id="9" name="Rounded Rectangle 8"/>
+          <p:cNvSpPr/>
+          <p:nvPr/>
+        </p:nvSpPr>
+        <p:spPr>
+          <a:xfrm>
+            <a:off x="982980" y="2587752"/>
+            <a:ext cx="2926080" cy="292608"/>
+          </a:xfrm>
+          <a:prstGeom prst="roundRect">
+            <a:avLst/>
+          </a:prstGeom>
+          <a:solidFill>
+            <a:srgbClr val="980517"/>
+          </a:solidFill>
+          <a:ln w="12700">
+            <a:solidFill>
+              <a:srgbClr val="E2E8F0"/>
+            </a:solidFill>
+          </a:ln>
+        </p:spPr>
+        <p:style>
+          <a:lnRef idx="1">
+            <a:schemeClr val="accent1"/>
+          </a:lnRef>
+          <a:fillRef idx="3">
+            <a:schemeClr val="accent1"/>
+          </a:fillRef>
+          <a:effectRef idx="2">
+            <a:schemeClr val="accent1"/>
+          </a:effectRef>
+          <a:fontRef idx="minor">
+            <a:schemeClr val="lt1"/>
+          </a:fontRef>
+        </p:style>
+        <p:txBody>
+          <a:bodyPr rtlCol="0" anchor="ctr" wrap="none" lIns="0" rIns="0" tIns="0" bIns="0"/>
+          <a:lstStyle/>
+          <a:p>
+            <a:pPr algn="ctr">
+              <a:defRPr sz="850" b="1">
+                <a:solidFill>
+                  <a:srgbClr val="FFFFFF"/>
+                </a:solidFill>
+                <a:latin typeface="Arial"/>
+              </a:defRPr>
+            </a:pPr>
+            <a:r>
+              <a:t>FERRY NOER HENDRIAWAN</a:t>
+            </a:r>
+          </a:p>
+        </p:txBody>
+      </p:sp>
+      <p:sp>
+        <p:nvSpPr>
+          <p:cNvPr id="10" name="TextBox 9"/>
+          <p:cNvSpPr txBox="1"/>
+          <p:nvPr/>
+        </p:nvSpPr>
+        <p:spPr>
+          <a:xfrm>
+            <a:off x="822960" y="2907791"/>
+            <a:ext cx="3246120" cy="685800"/>
+          </a:xfrm>
+          <a:prstGeom prst="rect">
+            <a:avLst/>
+          </a:prstGeom>
+          <a:noFill/>
+        </p:spPr>
+        <p:txBody>
+          <a:bodyPr wrap="square" lIns="0" rIns="0" tIns="0" bIns="0">
+            <a:spAutoFit/>
+          </a:bodyPr>
+          <a:lstStyle/>
+          <a:p>
+            <a:pPr algn="ctr">
+              <a:spcAft>
+                <a:spcPts val="200"/>
+              </a:spcAft>
+              <a:defRPr sz="1000" b="1">
+                <a:solidFill>
+                  <a:srgbClr val="0F172A"/>
+                </a:solidFill>
+                <a:latin typeface="Arial"/>
+              </a:defRPr>
+            </a:pPr>
+            <a:r>
+              <a:t>Frontend Developer</a:t>
+            </a:r>
+          </a:p>
+          <a:p>
+            <a:pPr algn="ctr">
+              <a:defRPr sz="850">
+                <a:solidFill>
+                  <a:srgbClr val="64748B"/>
+                </a:solidFill>
+                <a:latin typeface="Calibri"/>
+              </a:defRPr>
+            </a:pPr>
+            <a:r>
+              <a:t>Blade + Tailwind • Responsive UI • Scanner Client</a:t>
+            </a:r>
+          </a:p>
+        </p:txBody>
+      </p:sp>
+      <p:sp>
+        <p:nvSpPr>
+          <p:cNvPr id="11" name="Rounded Rectangle 10"/>
+          <p:cNvSpPr/>
+          <p:nvPr/>
+        </p:nvSpPr>
+        <p:spPr>
+          <a:xfrm>
+            <a:off x="4370832" y="1417320"/>
+            <a:ext cx="3429000" cy="2286000"/>
+          </a:xfrm>
+          <a:prstGeom prst="roundRect">
+            <a:avLst/>
+          </a:prstGeom>
+          <a:solidFill>
+            <a:srgbClr val="FEF2F2"/>
+          </a:solidFill>
+          <a:ln w="19050">
+            <a:solidFill>
+              <a:srgbClr val="980517"/>
+            </a:solidFill>
+          </a:ln>
+        </p:spPr>
+        <p:style>
+          <a:lnRef idx="1">
+            <a:schemeClr val="accent1"/>
+          </a:lnRef>
+          <a:fillRef idx="3">
+            <a:schemeClr val="accent1"/>
+          </a:fillRef>
+          <a:effectRef idx="2">
+            <a:schemeClr val="accent1"/>
+          </a:effectRef>
+          <a:fontRef idx="minor">
+            <a:schemeClr val="lt1"/>
+          </a:fontRef>
+        </p:style>
+        <p:txBody>
+          <a:bodyPr rtlCol="0" anchor="ctr"/>
+          <a:lstStyle/>
+          <a:p>
+            <a:pPr algn="ctr"/>
+          </a:p>
+        </p:txBody>
+      </p:sp>
+      <p:pic>
+        <p:nvPicPr>
+          <p:cNvPr id="12" name="Picture 11" descr="fhazar.jpg"/>
+          <p:cNvPicPr>
+            <a:picLocks noChangeAspect="1"/>
+          </p:cNvPicPr>
+          <p:nvPr/>
+        </p:nvPicPr>
+        <p:blipFill>
+          <a:blip r:embed="rId3"/>
+          <a:stretch>
+            <a:fillRect/>
+          </a:stretch>
+        </p:blipFill>
+        <p:spPr>
+          <a:xfrm>
+            <a:off x="5605272" y="1554480"/>
+            <a:ext cx="960120" cy="960120"/>
+          </a:xfrm>
+          <a:prstGeom prst="rect">
+            <a:avLst/>
+          </a:prstGeom>
+        </p:spPr>
+      </p:pic>
+      <p:sp>
+        <p:nvSpPr>
+          <p:cNvPr id="13" name="Rounded Rectangle 12"/>
+          <p:cNvSpPr/>
+          <p:nvPr/>
+        </p:nvSpPr>
+        <p:spPr>
+          <a:xfrm>
+            <a:off x="4622292" y="2587752"/>
+            <a:ext cx="2926080" cy="292608"/>
+          </a:xfrm>
+          <a:prstGeom prst="roundRect">
+            <a:avLst/>
+          </a:prstGeom>
+          <a:solidFill>
+            <a:srgbClr val="980517"/>
+          </a:solidFill>
+          <a:ln w="12700">
+            <a:solidFill>
+              <a:srgbClr val="E2E8F0"/>
+            </a:solidFill>
+          </a:ln>
+        </p:spPr>
+        <p:style>
+          <a:lnRef idx="1">
+            <a:schemeClr val="accent1"/>
+          </a:lnRef>
+          <a:fillRef idx="3">
+            <a:schemeClr val="accent1"/>
+          </a:fillRef>
+          <a:effectRef idx="2">
+            <a:schemeClr val="accent1"/>
+          </a:effectRef>
+          <a:fontRef idx="minor">
+            <a:schemeClr val="lt1"/>
+          </a:fontRef>
+        </p:style>
+        <p:txBody>
+          <a:bodyPr rtlCol="0" anchor="ctr" wrap="none" lIns="0" rIns="0" tIns="0" bIns="0"/>
+          <a:lstStyle/>
+          <a:p>
+            <a:pPr algn="ctr">
+              <a:defRPr sz="850" b="1">
+                <a:solidFill>
+                  <a:srgbClr val="FFFFFF"/>
+                </a:solidFill>
+                <a:latin typeface="Arial"/>
+              </a:defRPr>
+            </a:pPr>
+            <a:r>
+              <a:t>FHAZAR RAFFIFUL AQYLA</a:t>
+            </a:r>
+          </a:p>
+        </p:txBody>
+      </p:sp>
+      <p:sp>
+        <p:nvSpPr>
+          <p:cNvPr id="14" name="TextBox 13"/>
+          <p:cNvSpPr txBox="1"/>
+          <p:nvPr/>
+        </p:nvSpPr>
+        <p:spPr>
+          <a:xfrm>
+            <a:off x="4462272" y="2907791"/>
+            <a:ext cx="3246120" cy="685800"/>
+          </a:xfrm>
+          <a:prstGeom prst="rect">
+            <a:avLst/>
+          </a:prstGeom>
+          <a:noFill/>
+        </p:spPr>
+        <p:txBody>
+          <a:bodyPr wrap="square" lIns="0" rIns="0" tIns="0" bIns="0">
+            <a:spAutoFit/>
+          </a:bodyPr>
+          <a:lstStyle/>
+          <a:p>
+            <a:pPr algn="ctr">
+              <a:spcAft>
+                <a:spcPts val="200"/>
+              </a:spcAft>
+              <a:defRPr sz="1000" b="1">
+                <a:solidFill>
+                  <a:srgbClr val="980517"/>
+                </a:solidFill>
+                <a:latin typeface="Arial"/>
+              </a:defRPr>
+            </a:pPr>
+            <a:r>
+              <a:t>Project Manager</a:t>
+            </a:r>
+          </a:p>
+          <a:p>
+            <a:pPr algn="ctr">
+              <a:defRPr sz="850">
+                <a:solidFill>
+                  <a:srgbClr val="64748B"/>
+                </a:solidFill>
+                <a:latin typeface="Calibri"/>
+              </a:defRPr>
+            </a:pPr>
+            <a:r>
+              <a:t>Scrum Master • Product Roadmap • SCM Strategy</a:t>
+            </a:r>
+          </a:p>
+        </p:txBody>
+      </p:sp>
+      <p:sp>
+        <p:nvSpPr>
+          <p:cNvPr id="15" name="Rounded Rectangle 14"/>
+          <p:cNvSpPr/>
+          <p:nvPr/>
+        </p:nvSpPr>
+        <p:spPr>
+          <a:xfrm>
+            <a:off x="8010144" y="1417320"/>
+            <a:ext cx="3429000" cy="2286000"/>
+          </a:xfrm>
+          <a:prstGeom prst="roundRect">
+            <a:avLst/>
+          </a:prstGeom>
+          <a:solidFill>
+            <a:srgbClr val="F8FAFC"/>
+          </a:solidFill>
+          <a:ln w="19050">
+            <a:solidFill>
+              <a:srgbClr val="E2E8F0"/>
+            </a:solidFill>
+          </a:ln>
+        </p:spPr>
+        <p:style>
+          <a:lnRef idx="1">
+            <a:schemeClr val="accent1"/>
+          </a:lnRef>
+          <a:fillRef idx="3">
+            <a:schemeClr val="accent1"/>
+          </a:fillRef>
+          <a:effectRef idx="2">
+            <a:schemeClr val="accent1"/>
+          </a:effectRef>
+          <a:fontRef idx="minor">
+            <a:schemeClr val="lt1"/>
+          </a:fontRef>
+        </p:style>
+        <p:txBody>
+          <a:bodyPr rtlCol="0" anchor="ctr"/>
+          <a:lstStyle/>
+          <a:p>
+            <a:pPr algn="ctr"/>
+          </a:p>
+        </p:txBody>
+      </p:sp>
+      <p:pic>
+        <p:nvPicPr>
+          <p:cNvPr id="16" name="Picture 15" descr="hildan.png"/>
+          <p:cNvPicPr>
+            <a:picLocks noChangeAspect="1"/>
+          </p:cNvPicPr>
+          <p:nvPr/>
+        </p:nvPicPr>
+        <p:blipFill>
+          <a:blip r:embed="rId4"/>
+          <a:stretch>
+            <a:fillRect/>
+          </a:stretch>
+        </p:blipFill>
+        <p:spPr>
+          <a:xfrm>
+            <a:off x="9244584" y="1554480"/>
+            <a:ext cx="960120" cy="960120"/>
+          </a:xfrm>
+          <a:prstGeom prst="rect">
+            <a:avLst/>
+          </a:prstGeom>
+        </p:spPr>
+      </p:pic>
+      <p:sp>
+        <p:nvSpPr>
+          <p:cNvPr id="17" name="Rounded Rectangle 16"/>
+          <p:cNvSpPr/>
+          <p:nvPr/>
+        </p:nvSpPr>
+        <p:spPr>
+          <a:xfrm>
+            <a:off x="8261604" y="2587752"/>
+            <a:ext cx="2926080" cy="292608"/>
+          </a:xfrm>
+          <a:prstGeom prst="roundRect">
+            <a:avLst/>
+          </a:prstGeom>
+          <a:solidFill>
+            <a:srgbClr val="980517"/>
+          </a:solidFill>
+          <a:ln w="12700">
+            <a:solidFill>
+              <a:srgbClr val="E2E8F0"/>
+            </a:solidFill>
+          </a:ln>
+        </p:spPr>
+        <p:style>
+          <a:lnRef idx="1">
+            <a:schemeClr val="accent1"/>
+          </a:lnRef>
+          <a:fillRef idx="3">
+            <a:schemeClr val="accent1"/>
+          </a:fillRef>
+          <a:effectRef idx="2">
+            <a:schemeClr val="accent1"/>
+          </a:effectRef>
+          <a:fontRef idx="minor">
+            <a:schemeClr val="lt1"/>
+          </a:fontRef>
+        </p:style>
+        <p:txBody>
+          <a:bodyPr rtlCol="0" anchor="ctr" wrap="none" lIns="0" rIns="0" tIns="0" bIns="0"/>
+          <a:lstStyle/>
+          <a:p>
+            <a:pPr algn="ctr">
+              <a:defRPr sz="850" b="1">
+                <a:solidFill>
+                  <a:srgbClr val="FFFFFF"/>
+                </a:solidFill>
+                <a:latin typeface="Arial"/>
+              </a:defRPr>
+            </a:pPr>
+            <a:r>
+              <a:t>HILDAN ANUGRAH TAMADI PUTRA</a:t>
+            </a:r>
+          </a:p>
+        </p:txBody>
+      </p:sp>
+      <p:sp>
+        <p:nvSpPr>
+          <p:cNvPr id="18" name="TextBox 17"/>
+          <p:cNvSpPr txBox="1"/>
+          <p:nvPr/>
+        </p:nvSpPr>
+        <p:spPr>
+          <a:xfrm>
+            <a:off x="8101583" y="2907791"/>
+            <a:ext cx="3246120" cy="685800"/>
+          </a:xfrm>
+          <a:prstGeom prst="rect">
+            <a:avLst/>
+          </a:prstGeom>
+          <a:noFill/>
+        </p:spPr>
+        <p:txBody>
+          <a:bodyPr wrap="square" lIns="0" rIns="0" tIns="0" bIns="0">
+            <a:spAutoFit/>
+          </a:bodyPr>
+          <a:lstStyle/>
+          <a:p>
+            <a:pPr algn="ctr">
+              <a:spcAft>
+                <a:spcPts val="200"/>
+              </a:spcAft>
+              <a:defRPr sz="1000" b="1">
+                <a:solidFill>
+                  <a:srgbClr val="0F172A"/>
+                </a:solidFill>
+                <a:latin typeface="Arial"/>
+              </a:defRPr>
+            </a:pPr>
+            <a:r>
+              <a:t>Backend Developer</a:t>
+            </a:r>
+          </a:p>
+          <a:p>
+            <a:pPr algn="ctr">
+              <a:defRPr sz="850">
+                <a:solidFill>
+                  <a:srgbClr val="64748B"/>
+                </a:solidFill>
+                <a:latin typeface="Calibri"/>
+              </a:defRPr>
+            </a:pPr>
+            <a:r>
+              <a:t>Laravel 12 • FIFO Engine • Pessimistic Lock</a:t>
+            </a:r>
+          </a:p>
+        </p:txBody>
+      </p:sp>
+      <p:sp>
+        <p:nvSpPr>
+          <p:cNvPr id="19" name="Rounded Rectangle 18"/>
+          <p:cNvSpPr/>
+          <p:nvPr/>
+        </p:nvSpPr>
+        <p:spPr>
+          <a:xfrm>
+            <a:off x="731520" y="3886200"/>
+            <a:ext cx="3429000" cy="2286000"/>
+          </a:xfrm>
+          <a:prstGeom prst="roundRect">
+            <a:avLst/>
+          </a:prstGeom>
+          <a:solidFill>
+            <a:srgbClr val="F8FAFC"/>
+          </a:solidFill>
+          <a:ln w="19050">
+            <a:solidFill>
+              <a:srgbClr val="E2E8F0"/>
+            </a:solidFill>
+          </a:ln>
+        </p:spPr>
+        <p:style>
+          <a:lnRef idx="1">
+            <a:schemeClr val="accent1"/>
+          </a:lnRef>
+          <a:fillRef idx="3">
+            <a:schemeClr val="accent1"/>
+          </a:fillRef>
+          <a:effectRef idx="2">
+            <a:schemeClr val="accent1"/>
+          </a:effectRef>
+          <a:fontRef idx="minor">
+            <a:schemeClr val="lt1"/>
+          </a:fontRef>
+        </p:style>
+        <p:txBody>
+          <a:bodyPr rtlCol="0" anchor="ctr"/>
+          <a:lstStyle/>
+          <a:p>
+            <a:pPr algn="ctr"/>
+          </a:p>
+        </p:txBody>
+      </p:sp>
+      <p:pic>
+        <p:nvPicPr>
+          <p:cNvPr id="20" name="Picture 19" descr="fadel.png"/>
+          <p:cNvPicPr>
+            <a:picLocks noChangeAspect="1"/>
+          </p:cNvPicPr>
+          <p:nvPr/>
+        </p:nvPicPr>
+        <p:blipFill>
+          <a:blip r:embed="rId5"/>
+          <a:stretch>
+            <a:fillRect/>
+          </a:stretch>
+        </p:blipFill>
+        <p:spPr>
+          <a:xfrm>
+            <a:off x="1965960" y="4023360"/>
+            <a:ext cx="960120" cy="960120"/>
+          </a:xfrm>
+          <a:prstGeom prst="rect">
+            <a:avLst/>
+          </a:prstGeom>
+        </p:spPr>
+      </p:pic>
+      <p:sp>
+        <p:nvSpPr>
+          <p:cNvPr id="21" name="Rounded Rectangle 20"/>
+          <p:cNvSpPr/>
+          <p:nvPr/>
+        </p:nvSpPr>
+        <p:spPr>
+          <a:xfrm>
+            <a:off x="982980" y="5056632"/>
+            <a:ext cx="2926080" cy="292608"/>
+          </a:xfrm>
+          <a:prstGeom prst="roundRect">
+            <a:avLst/>
+          </a:prstGeom>
+          <a:solidFill>
+            <a:srgbClr val="980517"/>
+          </a:solidFill>
+          <a:ln w="12700">
+            <a:solidFill>
+              <a:srgbClr val="E2E8F0"/>
+            </a:solidFill>
+          </a:ln>
+        </p:spPr>
+        <p:style>
+          <a:lnRef idx="1">
+            <a:schemeClr val="accent1"/>
+          </a:lnRef>
+          <a:fillRef idx="3">
+            <a:schemeClr val="accent1"/>
+          </a:fillRef>
+          <a:effectRef idx="2">
+            <a:schemeClr val="accent1"/>
+          </a:effectRef>
+          <a:fontRef idx="minor">
+            <a:schemeClr val="lt1"/>
+          </a:fontRef>
+        </p:style>
+        <p:txBody>
+          <a:bodyPr rtlCol="0" anchor="ctr" wrap="none" lIns="0" rIns="0" tIns="0" bIns="0"/>
+          <a:lstStyle/>
+          <a:p>
+            <a:pPr algn="ctr">
+              <a:defRPr sz="850" b="1">
+                <a:solidFill>
+                  <a:srgbClr val="FFFFFF"/>
+                </a:solidFill>
+                <a:latin typeface="Arial"/>
+              </a:defRPr>
+            </a:pPr>
+            <a:r>
+              <a:t>FADEL RAHMADHAN</a:t>
+            </a:r>
+          </a:p>
+        </p:txBody>
+      </p:sp>
+      <p:sp>
+        <p:nvSpPr>
+          <p:cNvPr id="22" name="TextBox 21"/>
+          <p:cNvSpPr txBox="1"/>
+          <p:nvPr/>
+        </p:nvSpPr>
+        <p:spPr>
+          <a:xfrm>
+            <a:off x="822960" y="5376672"/>
+            <a:ext cx="3246120" cy="685800"/>
+          </a:xfrm>
+          <a:prstGeom prst="rect">
+            <a:avLst/>
+          </a:prstGeom>
+          <a:noFill/>
+        </p:spPr>
+        <p:txBody>
+          <a:bodyPr wrap="square" lIns="0" rIns="0" tIns="0" bIns="0">
+            <a:spAutoFit/>
+          </a:bodyPr>
+          <a:lstStyle/>
+          <a:p>
+            <a:pPr algn="ctr">
+              <a:spcAft>
+                <a:spcPts val="200"/>
+              </a:spcAft>
+              <a:defRPr sz="1000" b="1">
+                <a:solidFill>
+                  <a:srgbClr val="0F172A"/>
+                </a:solidFill>
+                <a:latin typeface="Arial"/>
+              </a:defRPr>
+            </a:pPr>
+            <a:r>
+              <a:t>Quality Assurance</a:t>
+            </a:r>
+          </a:p>
+          <a:p>
+            <a:pPr algn="ctr">
+              <a:defRPr sz="850">
+                <a:solidFill>
+                  <a:srgbClr val="64748B"/>
+                </a:solidFill>
+                <a:latin typeface="Calibri"/>
+              </a:defRPr>
+            </a:pPr>
+            <a:r>
+              <a:t>Blackbox Testing • Stress Load • Anti-Double Claim</a:t>
+            </a:r>
+          </a:p>
+        </p:txBody>
+      </p:sp>
+      <p:sp>
+        <p:nvSpPr>
+          <p:cNvPr id="23" name="Rounded Rectangle 22"/>
+          <p:cNvSpPr/>
+          <p:nvPr/>
+        </p:nvSpPr>
+        <p:spPr>
+          <a:xfrm>
+            <a:off x="4370832" y="3886200"/>
+            <a:ext cx="3429000" cy="2286000"/>
+          </a:xfrm>
+          <a:prstGeom prst="roundRect">
+            <a:avLst/>
+          </a:prstGeom>
+          <a:solidFill>
+            <a:srgbClr val="F8FAFC"/>
+          </a:solidFill>
+          <a:ln w="19050">
+            <a:solidFill>
+              <a:srgbClr val="E2E8F0"/>
+            </a:solidFill>
+          </a:ln>
+        </p:spPr>
+        <p:style>
+          <a:lnRef idx="1">
+            <a:schemeClr val="accent1"/>
+          </a:lnRef>
+          <a:fillRef idx="3">
+            <a:schemeClr val="accent1"/>
+          </a:fillRef>
+          <a:effectRef idx="2">
+            <a:schemeClr val="accent1"/>
+          </a:effectRef>
+          <a:fontRef idx="minor">
+            <a:schemeClr val="lt1"/>
+          </a:fontRef>
+        </p:style>
+        <p:txBody>
+          <a:bodyPr rtlCol="0" anchor="ctr"/>
+          <a:lstStyle/>
+          <a:p>
+            <a:pPr algn="ctr"/>
+          </a:p>
+        </p:txBody>
+      </p:sp>
+      <p:pic>
+        <p:nvPicPr>
+          <p:cNvPr id="24" name="Picture 23" descr="daffa.jpg"/>
+          <p:cNvPicPr>
+            <a:picLocks noChangeAspect="1"/>
+          </p:cNvPicPr>
+          <p:nvPr/>
+        </p:nvPicPr>
+        <p:blipFill>
+          <a:blip r:embed="rId6"/>
+          <a:stretch>
+            <a:fillRect/>
+          </a:stretch>
+        </p:blipFill>
+        <p:spPr>
+          <a:xfrm>
+            <a:off x="5605272" y="4023360"/>
+            <a:ext cx="960120" cy="960120"/>
+          </a:xfrm>
+          <a:prstGeom prst="rect">
+            <a:avLst/>
+          </a:prstGeom>
+        </p:spPr>
+      </p:pic>
+      <p:sp>
+        <p:nvSpPr>
+          <p:cNvPr id="25" name="Rounded Rectangle 24"/>
+          <p:cNvSpPr/>
+          <p:nvPr/>
+        </p:nvSpPr>
+        <p:spPr>
+          <a:xfrm>
+            <a:off x="4622292" y="5056632"/>
+            <a:ext cx="2926080" cy="292608"/>
+          </a:xfrm>
+          <a:prstGeom prst="roundRect">
+            <a:avLst/>
+          </a:prstGeom>
+          <a:solidFill>
+            <a:srgbClr val="980517"/>
+          </a:solidFill>
+          <a:ln w="12700">
+            <a:solidFill>
+              <a:srgbClr val="E2E8F0"/>
+            </a:solidFill>
+          </a:ln>
+        </p:spPr>
+        <p:style>
+          <a:lnRef idx="1">
+            <a:schemeClr val="accent1"/>
+          </a:lnRef>
+          <a:fillRef idx="3">
+            <a:schemeClr val="accent1"/>
+          </a:fillRef>
+          <a:effectRef idx="2">
+            <a:schemeClr val="accent1"/>
+          </a:effectRef>
+          <a:fontRef idx="minor">
+            <a:schemeClr val="lt1"/>
+          </a:fontRef>
+        </p:style>
+        <p:txBody>
+          <a:bodyPr rtlCol="0" anchor="ctr" wrap="none" lIns="0" rIns="0" tIns="0" bIns="0"/>
+          <a:lstStyle/>
+          <a:p>
+            <a:pPr algn="ctr">
+              <a:defRPr sz="850" b="1">
+                <a:solidFill>
+                  <a:srgbClr val="FFFFFF"/>
+                </a:solidFill>
+                <a:latin typeface="Arial"/>
+              </a:defRPr>
+            </a:pPr>
+            <a:r>
+              <a:t>DAFFA NAZRIEL ZAIDAN</a:t>
+            </a:r>
+          </a:p>
+        </p:txBody>
+      </p:sp>
+      <p:sp>
+        <p:nvSpPr>
+          <p:cNvPr id="26" name="TextBox 25"/>
+          <p:cNvSpPr txBox="1"/>
+          <p:nvPr/>
+        </p:nvSpPr>
+        <p:spPr>
+          <a:xfrm>
+            <a:off x="4462272" y="5376672"/>
+            <a:ext cx="3246120" cy="685800"/>
+          </a:xfrm>
+          <a:prstGeom prst="rect">
+            <a:avLst/>
+          </a:prstGeom>
+          <a:noFill/>
+        </p:spPr>
+        <p:txBody>
+          <a:bodyPr wrap="square" lIns="0" rIns="0" tIns="0" bIns="0">
+            <a:spAutoFit/>
+          </a:bodyPr>
+          <a:lstStyle/>
+          <a:p>
+            <a:pPr algn="ctr">
+              <a:spcAft>
+                <a:spcPts val="200"/>
+              </a:spcAft>
+              <a:defRPr sz="1000" b="1">
+                <a:solidFill>
+                  <a:srgbClr val="0F172A"/>
+                </a:solidFill>
+                <a:latin typeface="Arial"/>
+              </a:defRPr>
+            </a:pPr>
+            <a:r>
+              <a:t>UI/UX Designer</a:t>
+            </a:r>
+          </a:p>
+          <a:p>
+            <a:pPr algn="ctr">
+              <a:defRPr sz="850">
+                <a:solidFill>
+                  <a:srgbClr val="64748B"/>
+                </a:solidFill>
+                <a:latin typeface="Calibri"/>
+              </a:defRPr>
+            </a:pPr>
+            <a:r>
+              <a:t>Neo-Brutalist Design • Student Flow • Usability Test</a:t>
+            </a:r>
+          </a:p>
+        </p:txBody>
+      </p:sp>
+      <p:sp>
+        <p:nvSpPr>
+          <p:cNvPr id="27" name="Rounded Rectangle 26"/>
+          <p:cNvSpPr/>
+          <p:nvPr/>
+        </p:nvSpPr>
+        <p:spPr>
+          <a:xfrm>
+            <a:off x="8010144" y="3886200"/>
+            <a:ext cx="3429000" cy="2286000"/>
+          </a:xfrm>
+          <a:prstGeom prst="roundRect">
+            <a:avLst/>
+          </a:prstGeom>
+          <a:solidFill>
+            <a:srgbClr val="F8FAFC"/>
+          </a:solidFill>
+          <a:ln w="19050">
+            <a:solidFill>
+              <a:srgbClr val="E2E8F0"/>
+            </a:solidFill>
+          </a:ln>
+        </p:spPr>
+        <p:style>
+          <a:lnRef idx="1">
+            <a:schemeClr val="accent1"/>
+          </a:lnRef>
+          <a:fillRef idx="3">
+            <a:schemeClr val="accent1"/>
+          </a:fillRef>
+          <a:effectRef idx="2">
+            <a:schemeClr val="accent1"/>
+          </a:effectRef>
+          <a:fontRef idx="minor">
+            <a:schemeClr val="lt1"/>
+          </a:fontRef>
+        </p:style>
+        <p:txBody>
+          <a:bodyPr rtlCol="0" anchor="ctr"/>
+          <a:lstStyle/>
+          <a:p>
+            <a:pPr algn="ctr"/>
+          </a:p>
+        </p:txBody>
+      </p:sp>
+      <p:pic>
+        <p:nvPicPr>
+          <p:cNvPr id="28" name="Picture 27" descr="acep.png"/>
+          <p:cNvPicPr>
+            <a:picLocks noChangeAspect="1"/>
+          </p:cNvPicPr>
+          <p:nvPr/>
+        </p:nvPicPr>
+        <p:blipFill>
+          <a:blip r:embed="rId7"/>
+          <a:stretch>
+            <a:fillRect/>
+          </a:stretch>
+        </p:blipFill>
+        <p:spPr>
+          <a:xfrm>
+            <a:off x="9244584" y="4023360"/>
+            <a:ext cx="960120" cy="960120"/>
+          </a:xfrm>
+          <a:prstGeom prst="rect">
+            <a:avLst/>
+          </a:prstGeom>
+        </p:spPr>
+      </p:pic>
+      <p:sp>
+        <p:nvSpPr>
+          <p:cNvPr id="29" name="Rounded Rectangle 28"/>
+          <p:cNvSpPr/>
+          <p:nvPr/>
+        </p:nvSpPr>
+        <p:spPr>
+          <a:xfrm>
+            <a:off x="8261604" y="5056632"/>
+            <a:ext cx="2926080" cy="292608"/>
+          </a:xfrm>
+          <a:prstGeom prst="roundRect">
+            <a:avLst/>
+          </a:prstGeom>
+          <a:solidFill>
+            <a:srgbClr val="980517"/>
+          </a:solidFill>
+          <a:ln w="12700">
+            <a:solidFill>
+              <a:srgbClr val="E2E8F0"/>
+            </a:solidFill>
+          </a:ln>
+        </p:spPr>
+        <p:style>
+          <a:lnRef idx="1">
+            <a:schemeClr val="accent1"/>
+          </a:lnRef>
+          <a:fillRef idx="3">
+            <a:schemeClr val="accent1"/>
+          </a:fillRef>
+          <a:effectRef idx="2">
+            <a:schemeClr val="accent1"/>
+          </a:effectRef>
+          <a:fontRef idx="minor">
+            <a:schemeClr val="lt1"/>
+          </a:fontRef>
+        </p:style>
+        <p:txBody>
+          <a:bodyPr rtlCol="0" anchor="ctr" wrap="none" lIns="0" rIns="0" tIns="0" bIns="0"/>
+          <a:lstStyle/>
+          <a:p>
+            <a:pPr algn="ctr">
+              <a:defRPr sz="850" b="1">
+                <a:solidFill>
+                  <a:srgbClr val="FFFFFF"/>
+                </a:solidFill>
+                <a:latin typeface="Arial"/>
+              </a:defRPr>
+            </a:pPr>
+            <a:r>
+              <a:t>ACEP UGAN SAPUTRA</a:t>
+            </a:r>
+          </a:p>
+        </p:txBody>
+      </p:sp>
+      <p:sp>
+        <p:nvSpPr>
+          <p:cNvPr id="30" name="TextBox 29"/>
+          <p:cNvSpPr txBox="1"/>
+          <p:nvPr/>
+        </p:nvSpPr>
+        <p:spPr>
+          <a:xfrm>
+            <a:off x="8101583" y="5376672"/>
+            <a:ext cx="3246120" cy="685800"/>
+          </a:xfrm>
+          <a:prstGeom prst="rect">
+            <a:avLst/>
+          </a:prstGeom>
+          <a:noFill/>
+        </p:spPr>
+        <p:txBody>
+          <a:bodyPr wrap="square" lIns="0" rIns="0" tIns="0" bIns="0">
+            <a:spAutoFit/>
+          </a:bodyPr>
+          <a:lstStyle/>
+          <a:p>
+            <a:pPr algn="ctr">
+              <a:spcAft>
+                <a:spcPts val="200"/>
+              </a:spcAft>
+              <a:defRPr sz="1000" b="1">
+                <a:solidFill>
+                  <a:srgbClr val="0F172A"/>
+                </a:solidFill>
+                <a:latin typeface="Arial"/>
+              </a:defRPr>
+            </a:pPr>
+            <a:r>
+              <a:t>System Analyst</a:t>
+            </a:r>
+          </a:p>
+          <a:p>
+            <a:pPr algn="ctr">
+              <a:defRPr sz="850">
+                <a:solidFill>
+                  <a:srgbClr val="64748B"/>
+                </a:solidFill>
+                <a:latin typeface="Calibri"/>
+              </a:defRPr>
+            </a:pPr>
+            <a:r>
+              <a:t>BPMN Process • Relational Database • SCM Audit Trail</a:t>
+            </a:r>
+          </a:p>
+        </p:txBody>
+      </p:sp>
+    </p:spTree>
+  </p:cSld>
+  <p:clrMapOvr>
+    <a:masterClrMapping/>
+  </p:clrMapOvr>
+</p:sld>
+</file>
+
+<file path=ppt/slides/slide3.xml><?xml version="1.0" encoding="utf-8"?>
+<p:sld xmlns:a="http://schemas.openxmlformats.org/drawingml/2006/main" xmlns:p="http://schemas.openxmlformats.org/presentationml/2006/main" xmlns:r="http://schemas.openxmlformats.org/officeDocument/2006/relationships">
+  <p:cSld>
+    <p:bg>
+      <p:bgPr>
+        <a:solidFill>
+          <a:srgbClr val="FFFFFF"/>
+        </a:solidFill>
+        <a:effectLst/>
+      </p:bgPr>
+    </p:bg>
+    <p:spTree>
+      <p:nvGrpSpPr>
+        <p:cNvPr id="1" name=""/>
+        <p:cNvGrpSpPr/>
+        <p:nvPr/>
+      </p:nvGrpSpPr>
+      <p:grpSpPr/>
+      <p:sp>
+        <p:nvSpPr>
+          <p:cNvPr id="2" name="Rectangle 1"/>
+          <p:cNvSpPr/>
+          <p:nvPr/>
+        </p:nvSpPr>
+        <p:spPr>
+          <a:xfrm>
+            <a:off x="731520" y="384048"/>
+            <a:ext cx="54864" cy="713232"/>
+          </a:xfrm>
+          <a:prstGeom prst="rect">
+            <a:avLst/>
+          </a:prstGeom>
+          <a:solidFill>
+            <a:srgbClr val="980517"/>
+          </a:solidFill>
+          <a:ln>
+            <a:noFill/>
+          </a:ln>
+        </p:spPr>
+        <p:style>
+          <a:lnRef idx="1">
+            <a:schemeClr val="accent1"/>
+          </a:lnRef>
+          <a:fillRef idx="3">
+            <a:schemeClr val="accent1"/>
+          </a:fillRef>
+          <a:effectRef idx="2">
+            <a:schemeClr val="accent1"/>
+          </a:effectRef>
+          <a:fontRef idx="minor">
+            <a:schemeClr val="lt1"/>
+          </a:fontRef>
+        </p:style>
+        <p:txBody>
+          <a:bodyPr rtlCol="0" anchor="ctr"/>
+          <a:lstStyle/>
+          <a:p>
+            <a:pPr algn="ctr"/>
+          </a:p>
+        </p:txBody>
+      </p:sp>
+      <p:sp>
+        <p:nvSpPr>
+          <p:cNvPr id="3" name="TextBox 2"/>
+          <p:cNvSpPr txBox="1"/>
+          <p:nvPr/>
+        </p:nvSpPr>
+        <p:spPr>
+          <a:xfrm>
+            <a:off x="868680" y="347472"/>
+            <a:ext cx="10515600" cy="219456"/>
+          </a:xfrm>
+          <a:prstGeom prst="rect">
+            <a:avLst/>
+          </a:prstGeom>
+          <a:noFill/>
+        </p:spPr>
+        <p:txBody>
+          <a:bodyPr wrap="square">
+            <a:spAutoFit/>
+          </a:bodyPr>
+          <a:lstStyle/>
+          <a:p>
+            <a:pPr>
+              <a:defRPr sz="950" b="1">
+                <a:solidFill>
+                  <a:srgbClr val="980517"/>
+                </a:solidFill>
+                <a:latin typeface="Arial"/>
+              </a:defRPr>
+            </a:pPr>
+            <a:r>
               <a:t>STRUKTUR RANTAI PASOK</a:t>
             </a:r>
           </a:p>
@@ -5569,7 +6958,7 @@
 </p:sld>
 </file>
 
-<file path=ppt/slides/slide3.xml><?xml version="1.0" encoding="utf-8"?>
+<file path=ppt/slides/slide4.xml><?xml version="1.0" encoding="utf-8"?>
 <p:sld xmlns:a="http://schemas.openxmlformats.org/drawingml/2006/main" xmlns:p="http://schemas.openxmlformats.org/presentationml/2006/main" xmlns:r="http://schemas.openxmlformats.org/officeDocument/2006/relationships">
   <p:cSld>
     <p:bg>
@@ -6186,7 +7575,7 @@
 </p:sld>
 </file>
 
-<file path=ppt/slides/slide4.xml><?xml version="1.0" encoding="utf-8"?>
+<file path=ppt/slides/slide5.xml><?xml version="1.0" encoding="utf-8"?>
 <p:sld xmlns:a="http://schemas.openxmlformats.org/drawingml/2006/main" xmlns:p="http://schemas.openxmlformats.org/presentationml/2006/main" xmlns:r="http://schemas.openxmlformats.org/officeDocument/2006/relationships">
   <p:cSld>
     <p:bg>
@@ -6882,7 +8271,7 @@
 </p:sld>
 </file>
 
-<file path=ppt/slides/slide5.xml><?xml version="1.0" encoding="utf-8"?>
+<file path=ppt/slides/slide6.xml><?xml version="1.0" encoding="utf-8"?>
 <p:sld xmlns:a="http://schemas.openxmlformats.org/drawingml/2006/main" xmlns:p="http://schemas.openxmlformats.org/presentationml/2006/main" xmlns:r="http://schemas.openxmlformats.org/officeDocument/2006/relationships">
   <p:cSld>
     <p:bg>
@@ -7620,7 +9009,7 @@
 </p:sld>
 </file>
 
-<file path=ppt/slides/slide6.xml><?xml version="1.0" encoding="utf-8"?>
+<file path=ppt/slides/slide7.xml><?xml version="1.0" encoding="utf-8"?>
 <p:sld xmlns:a="http://schemas.openxmlformats.org/drawingml/2006/main" xmlns:p="http://schemas.openxmlformats.org/presentationml/2006/main" xmlns:r="http://schemas.openxmlformats.org/officeDocument/2006/relationships">
   <p:cSld>
     <p:bg>
@@ -8380,7 +9769,7 @@
 </p:sld>
 </file>
 
-<file path=ppt/slides/slide7.xml><?xml version="1.0" encoding="utf-8"?>
+<file path=ppt/slides/slide8.xml><?xml version="1.0" encoding="utf-8"?>
 <p:sld xmlns:a="http://schemas.openxmlformats.org/drawingml/2006/main" xmlns:p="http://schemas.openxmlformats.org/presentationml/2006/main" xmlns:r="http://schemas.openxmlformats.org/officeDocument/2006/relationships">
   <p:cSld>
     <p:bg>
@@ -8870,7 +10259,7 @@
 </p:sld>
 </file>
 
-<file path=ppt/slides/slide8.xml><?xml version="1.0" encoding="utf-8"?>
+<file path=ppt/slides/slide9.xml><?xml version="1.0" encoding="utf-8"?>
 <p:sld xmlns:a="http://schemas.openxmlformats.org/drawingml/2006/main" xmlns:p="http://schemas.openxmlformats.org/presentationml/2006/main" xmlns:r="http://schemas.openxmlformats.org/officeDocument/2006/relationships">
   <p:cSld>
     <p:bg>
